--- a/schools-presentations/B Gymnasiou/B41M9 - Εισαγωγή στις Συναρτήσεις.pptx
+++ b/schools-presentations/B Gymnasiou/B41M9 - Εισαγωγή στις Συναρτήσεις.pptx
@@ -1,33 +1,162 @@
 
 <file path=ppt/presentation.xml><?xml version="1.0" encoding="utf-8"?>
-<p:presentation xmlns:p="http://schemas.openxmlformats.org/presentationml/2006/main">
+<p:presentation xmlns:a="http://schemas.openxmlformats.org/drawingml/2006/main" xmlns:r="http://schemas.openxmlformats.org/officeDocument/2006/relationships" xmlns:p="http://schemas.openxmlformats.org/presentationml/2006/main">
   <p:sldMasterIdLst>
-    <p:sldMasterId xmlns:r="http://schemas.openxmlformats.org/officeDocument/2006/relationships" id="2147483648" r:id="Ref52a8f28ea248f6"/>
+    <p:sldMasterId id="2147483648" r:id="rId1"/>
   </p:sldMasterIdLst>
   <p:notesMasterIdLst>
-    <p:notesMasterId xmlns:r="http://schemas.openxmlformats.org/officeDocument/2006/relationships" r:id="Ref6d8ef9bc4c4296"/>
+    <p:notesMasterId r:id="rId10"/>
   </p:notesMasterIdLst>
   <p:sldIdLst>
-    <p:sldId xmlns:r="http://schemas.openxmlformats.org/officeDocument/2006/relationships" id="256" r:id="Re2b5c71c5c1d485a"/>
-    <p:sldId xmlns:r="http://schemas.openxmlformats.org/officeDocument/2006/relationships" id="257" r:id="R6264944c077846e6"/>
-    <p:sldId xmlns:r="http://schemas.openxmlformats.org/officeDocument/2006/relationships" id="258" r:id="R12d7b13b6a9e4bc0"/>
-    <p:sldId xmlns:r="http://schemas.openxmlformats.org/officeDocument/2006/relationships" id="259" r:id="R2a040e9d0ed34da8"/>
-    <p:sldId xmlns:r="http://schemas.openxmlformats.org/officeDocument/2006/relationships" id="260" r:id="R95358f82a540415f"/>
-    <p:sldId xmlns:r="http://schemas.openxmlformats.org/officeDocument/2006/relationships" id="261" r:id="Rcefd7ad7dfa34b9e"/>
-    <p:sldId xmlns:r="http://schemas.openxmlformats.org/officeDocument/2006/relationships" id="262" r:id="Rccf6c99261bc4e4f"/>
-    <p:sldId xmlns:r="http://schemas.openxmlformats.org/officeDocument/2006/relationships" id="263" r:id="Rc2f6726c9ed144d4"/>
+    <p:sldId id="256" r:id="rId2"/>
+    <p:sldId id="257" r:id="rId3"/>
+    <p:sldId id="258" r:id="rId4"/>
+    <p:sldId id="259" r:id="rId5"/>
+    <p:sldId id="260" r:id="rId6"/>
+    <p:sldId id="261" r:id="rId7"/>
+    <p:sldId id="262" r:id="rId8"/>
+    <p:sldId id="263" r:id="rId9"/>
   </p:sldIdLst>
   <p:sldSz cx="12192000" cy="6858000"/>
   <p:notesSz cx="6858000" cy="9144000"/>
+  <p:defaultTextStyle>
+    <a:defPPr>
+      <a:defRPr lang="en-US"/>
+    </a:defPPr>
+    <a:lvl1pPr marL="0" algn="l" defTabSz="914400" rtl="0" eaLnBrk="1" latinLnBrk="0" hangingPunct="1">
+      <a:defRPr sz="1800" kern="1200">
+        <a:solidFill>
+          <a:schemeClr val="tx1"/>
+        </a:solidFill>
+        <a:latin typeface="+mn-lt"/>
+        <a:ea typeface="+mn-ea"/>
+        <a:cs typeface="+mn-cs"/>
+      </a:defRPr>
+    </a:lvl1pPr>
+    <a:lvl2pPr marL="457200" algn="l" defTabSz="914400" rtl="0" eaLnBrk="1" latinLnBrk="0" hangingPunct="1">
+      <a:defRPr sz="1800" kern="1200">
+        <a:solidFill>
+          <a:schemeClr val="tx1"/>
+        </a:solidFill>
+        <a:latin typeface="+mn-lt"/>
+        <a:ea typeface="+mn-ea"/>
+        <a:cs typeface="+mn-cs"/>
+      </a:defRPr>
+    </a:lvl2pPr>
+    <a:lvl3pPr marL="914400" algn="l" defTabSz="914400" rtl="0" eaLnBrk="1" latinLnBrk="0" hangingPunct="1">
+      <a:defRPr sz="1800" kern="1200">
+        <a:solidFill>
+          <a:schemeClr val="tx1"/>
+        </a:solidFill>
+        <a:latin typeface="+mn-lt"/>
+        <a:ea typeface="+mn-ea"/>
+        <a:cs typeface="+mn-cs"/>
+      </a:defRPr>
+    </a:lvl3pPr>
+    <a:lvl4pPr marL="1371600" algn="l" defTabSz="914400" rtl="0" eaLnBrk="1" latinLnBrk="0" hangingPunct="1">
+      <a:defRPr sz="1800" kern="1200">
+        <a:solidFill>
+          <a:schemeClr val="tx1"/>
+        </a:solidFill>
+        <a:latin typeface="+mn-lt"/>
+        <a:ea typeface="+mn-ea"/>
+        <a:cs typeface="+mn-cs"/>
+      </a:defRPr>
+    </a:lvl4pPr>
+    <a:lvl5pPr marL="1828800" algn="l" defTabSz="914400" rtl="0" eaLnBrk="1" latinLnBrk="0" hangingPunct="1">
+      <a:defRPr sz="1800" kern="1200">
+        <a:solidFill>
+          <a:schemeClr val="tx1"/>
+        </a:solidFill>
+        <a:latin typeface="+mn-lt"/>
+        <a:ea typeface="+mn-ea"/>
+        <a:cs typeface="+mn-cs"/>
+      </a:defRPr>
+    </a:lvl5pPr>
+    <a:lvl6pPr marL="2286000" algn="l" defTabSz="914400" rtl="0" eaLnBrk="1" latinLnBrk="0" hangingPunct="1">
+      <a:defRPr sz="1800" kern="1200">
+        <a:solidFill>
+          <a:schemeClr val="tx1"/>
+        </a:solidFill>
+        <a:latin typeface="+mn-lt"/>
+        <a:ea typeface="+mn-ea"/>
+        <a:cs typeface="+mn-cs"/>
+      </a:defRPr>
+    </a:lvl6pPr>
+    <a:lvl7pPr marL="2743200" algn="l" defTabSz="914400" rtl="0" eaLnBrk="1" latinLnBrk="0" hangingPunct="1">
+      <a:defRPr sz="1800" kern="1200">
+        <a:solidFill>
+          <a:schemeClr val="tx1"/>
+        </a:solidFill>
+        <a:latin typeface="+mn-lt"/>
+        <a:ea typeface="+mn-ea"/>
+        <a:cs typeface="+mn-cs"/>
+      </a:defRPr>
+    </a:lvl7pPr>
+    <a:lvl8pPr marL="3200400" algn="l" defTabSz="914400" rtl="0" eaLnBrk="1" latinLnBrk="0" hangingPunct="1">
+      <a:defRPr sz="1800" kern="1200">
+        <a:solidFill>
+          <a:schemeClr val="tx1"/>
+        </a:solidFill>
+        <a:latin typeface="+mn-lt"/>
+        <a:ea typeface="+mn-ea"/>
+        <a:cs typeface="+mn-cs"/>
+      </a:defRPr>
+    </a:lvl8pPr>
+    <a:lvl9pPr marL="3657600" algn="l" defTabSz="914400" rtl="0" eaLnBrk="1" latinLnBrk="0" hangingPunct="1">
+      <a:defRPr sz="1800" kern="1200">
+        <a:solidFill>
+          <a:schemeClr val="tx1"/>
+        </a:solidFill>
+        <a:latin typeface="+mn-lt"/>
+        <a:ea typeface="+mn-ea"/>
+        <a:cs typeface="+mn-cs"/>
+      </a:defRPr>
+    </a:lvl9pPr>
+  </p:defaultTextStyle>
+  <p:extLst>
+    <p:ext uri="{EFAFB233-063F-42B5-8137-9DF3F51BA10A}">
+      <p15:sldGuideLst xmlns:p15="http://schemas.microsoft.com/office/powerpoint/2012/main"/>
+    </p:ext>
+  </p:extLst>
 </p:presentation>
 </file>
 
+<file path=ppt/changesInfos/changesInfo1.xml><?xml version="1.0" encoding="utf-8"?>
+<pc:chgInfo xmlns:a="http://schemas.openxmlformats.org/drawingml/2006/main" xmlns:r="http://schemas.openxmlformats.org/officeDocument/2006/relationships" xmlns:ac="http://schemas.microsoft.com/office/drawing/2013/main/command" xmlns:pc="http://schemas.microsoft.com/office/powerpoint/2013/main/command">
+  <pc:docChgLst>
+    <pc:chgData name="Άριστος Αρέστη" userId="813aa191-2d4c-464f-9d05-0a7e494d859f" providerId="ADAL" clId="{49C7B61D-1ACF-4AFF-A04E-A3B433E32474}"/>
+    <pc:docChg chg="modSld">
+      <pc:chgData name="Άριστος Αρέστη" userId="813aa191-2d4c-464f-9d05-0a7e494d859f" providerId="ADAL" clId="{49C7B61D-1ACF-4AFF-A04E-A3B433E32474}" dt="2026-10-06T18:18:16.964" v="3" actId="6549"/>
+      <pc:docMkLst>
+        <pc:docMk/>
+      </pc:docMkLst>
+      <pc:sldChg chg="modSp mod">
+        <pc:chgData name="Άριστος Αρέστη" userId="813aa191-2d4c-464f-9d05-0a7e494d859f" providerId="ADAL" clId="{49C7B61D-1ACF-4AFF-A04E-A3B433E32474}" dt="2026-10-06T18:18:16.964" v="3" actId="6549"/>
+        <pc:sldMkLst>
+          <pc:docMk/>
+          <pc:sldMk cId="1720723223" sldId="260"/>
+        </pc:sldMkLst>
+        <pc:spChg chg="mod">
+          <ac:chgData name="Άριστος Αρέστη" userId="813aa191-2d4c-464f-9d05-0a7e494d859f" providerId="ADAL" clId="{49C7B61D-1ACF-4AFF-A04E-A3B433E32474}" dt="2026-10-06T18:18:16.964" v="3" actId="6549"/>
+          <ac:spMkLst>
+            <pc:docMk/>
+            <pc:sldMk cId="1720723223" sldId="260"/>
+            <ac:spMk id="3" creationId="{0FD8DC59-79A8-42F4-AA7E-860D887215F1}"/>
+          </ac:spMkLst>
+        </pc:spChg>
+      </pc:sldChg>
+    </pc:docChg>
+  </pc:docChgLst>
+</pc:chgInfo>
+</file>
+
 <file path=ppt/notesMasters/notesMaster1.xml><?xml version="1.0" encoding="utf-8"?>
-<p:notesMaster xmlns:p="http://schemas.openxmlformats.org/presentationml/2006/main">
+<p:notesMaster xmlns:a="http://schemas.openxmlformats.org/drawingml/2006/main" xmlns:r="http://schemas.openxmlformats.org/officeDocument/2006/relationships" xmlns:p="http://schemas.openxmlformats.org/presentationml/2006/main">
   <p:cSld>
     <p:bg>
       <p:bgRef idx="1001">
-        <a:schemeClr xmlns:a="http://schemas.openxmlformats.org/drawingml/2006/main" val="bg1"/>
+        <a:schemeClr val="bg1"/>
       </p:bgRef>
     </p:bg>
     <p:spTree>
@@ -37,420 +166,164 @@
         <p:nvPr/>
       </p:nvGrpSpPr>
       <p:grpSpPr>
-        <a:xfrm xmlns:a="http://schemas.openxmlformats.org/drawingml/2006/main"/>
+        <a:xfrm>
+          <a:off x="0" y="0"/>
+          <a:ext cx="0" cy="0"/>
+          <a:chOff x="0" y="0"/>
+          <a:chExt cx="0" cy="0"/>
+        </a:xfrm>
       </p:grpSpPr>
       <p:sp>
         <p:nvSpPr>
           <p:cNvPr id="2" name="Header Placeholder"/>
-          <p:cNvSpPr/>
+          <p:cNvSpPr>
+            <a:spLocks noGrp="1"/>
+          </p:cNvSpPr>
           <p:nvPr>
             <p:ph type="hdr" sz="quarter"/>
           </p:nvPr>
         </p:nvSpPr>
         <p:spPr>
-          <a:prstGeom xmlns:a="http://schemas.openxmlformats.org/drawingml/2006/main" prst="rect">
+          <a:prstGeom prst="rect">
             <a:avLst/>
           </a:prstGeom>
         </p:spPr>
         <p:txBody>
-          <a:bodyPr xmlns:a="http://schemas.openxmlformats.org/drawingml/2006/main"/>
-          <a:lstStyle xmlns:a="http://schemas.openxmlformats.org/drawingml/2006/main"/>
-          <a:p xmlns:a="http://schemas.openxmlformats.org/drawingml/2006/main"/>
+          <a:bodyPr/>
+          <a:lstStyle/>
+          <a:p>
+            <a:endParaRPr/>
+          </a:p>
         </p:txBody>
       </p:sp>
       <p:sp>
         <p:nvSpPr>
           <p:cNvPr id="3" name="Date Placeholder"/>
-          <p:cNvSpPr/>
+          <p:cNvSpPr>
+            <a:spLocks noGrp="1"/>
+          </p:cNvSpPr>
           <p:nvPr>
             <p:ph type="dt" sz="quarter" idx="1"/>
           </p:nvPr>
         </p:nvSpPr>
         <p:spPr>
-          <a:prstGeom xmlns:a="http://schemas.openxmlformats.org/drawingml/2006/main" prst="rect">
+          <a:prstGeom prst="rect">
             <a:avLst/>
           </a:prstGeom>
         </p:spPr>
         <p:txBody>
-          <a:bodyPr xmlns:a="http://schemas.openxmlformats.org/drawingml/2006/main"/>
-          <a:lstStyle xmlns:a="http://schemas.openxmlformats.org/drawingml/2006/main"/>
-          <a:p xmlns:a="http://schemas.openxmlformats.org/drawingml/2006/main"/>
+          <a:bodyPr/>
+          <a:lstStyle/>
+          <a:p>
+            <a:endParaRPr/>
+          </a:p>
         </p:txBody>
       </p:sp>
       <p:sp>
         <p:nvSpPr>
           <p:cNvPr id="4" name="Slide Image Placeholder"/>
-          <p:cNvSpPr/>
+          <p:cNvSpPr>
+            <a:spLocks noGrp="1" noRot="1" noChangeAspect="1"/>
+          </p:cNvSpPr>
           <p:nvPr>
             <p:ph type="sldImg" idx="2"/>
           </p:nvPr>
         </p:nvSpPr>
         <p:spPr>
-          <a:prstGeom xmlns:a="http://schemas.openxmlformats.org/drawingml/2006/main" prst="rect">
+          <a:prstGeom prst="rect">
             <a:avLst/>
           </a:prstGeom>
         </p:spPr>
         <p:txBody>
-          <a:bodyPr xmlns:a="http://schemas.openxmlformats.org/drawingml/2006/main"/>
-          <a:lstStyle xmlns:a="http://schemas.openxmlformats.org/drawingml/2006/main"/>
-          <a:p xmlns:a="http://schemas.openxmlformats.org/drawingml/2006/main"/>
+          <a:bodyPr/>
+          <a:lstStyle/>
+          <a:p>
+            <a:endParaRPr/>
+          </a:p>
         </p:txBody>
       </p:sp>
       <p:sp>
         <p:nvSpPr>
           <p:cNvPr id="5" name="Notes Placeholder"/>
-          <p:cNvSpPr/>
+          <p:cNvSpPr>
+            <a:spLocks noGrp="1"/>
+          </p:cNvSpPr>
           <p:nvPr>
             <p:ph type="body" sz="quarter" idx="3"/>
           </p:nvPr>
         </p:nvSpPr>
         <p:spPr>
-          <a:prstGeom xmlns:a="http://schemas.openxmlformats.org/drawingml/2006/main" prst="rect">
+          <a:prstGeom prst="rect">
             <a:avLst/>
           </a:prstGeom>
         </p:spPr>
         <p:txBody>
-          <a:bodyPr xmlns:a="http://schemas.openxmlformats.org/drawingml/2006/main"/>
-          <a:lstStyle xmlns:a="http://schemas.openxmlformats.org/drawingml/2006/main"/>
-          <a:p xmlns:a="http://schemas.openxmlformats.org/drawingml/2006/main"/>
+          <a:bodyPr/>
+          <a:lstStyle/>
+          <a:p>
+            <a:endParaRPr/>
+          </a:p>
         </p:txBody>
       </p:sp>
       <p:sp>
         <p:nvSpPr>
           <p:cNvPr id="6" name="Footer Placeholder"/>
-          <p:cNvSpPr/>
+          <p:cNvSpPr>
+            <a:spLocks noGrp="1"/>
+          </p:cNvSpPr>
           <p:nvPr>
             <p:ph type="ftr" sz="quarter" idx="4"/>
           </p:nvPr>
         </p:nvSpPr>
         <p:spPr>
-          <a:prstGeom xmlns:a="http://schemas.openxmlformats.org/drawingml/2006/main" prst="rect">
+          <a:prstGeom prst="rect">
             <a:avLst/>
           </a:prstGeom>
         </p:spPr>
         <p:txBody>
-          <a:bodyPr xmlns:a="http://schemas.openxmlformats.org/drawingml/2006/main"/>
-          <a:lstStyle xmlns:a="http://schemas.openxmlformats.org/drawingml/2006/main"/>
-          <a:p xmlns:a="http://schemas.openxmlformats.org/drawingml/2006/main"/>
+          <a:bodyPr/>
+          <a:lstStyle/>
+          <a:p>
+            <a:endParaRPr/>
+          </a:p>
         </p:txBody>
       </p:sp>
       <p:sp>
         <p:nvSpPr>
           <p:cNvPr id="7" name="Slide Number Placeholder"/>
-          <p:cNvSpPr/>
+          <p:cNvSpPr>
+            <a:spLocks noGrp="1"/>
+          </p:cNvSpPr>
           <p:nvPr>
             <p:ph type="sldNum" sz="quarter" idx="5"/>
           </p:nvPr>
         </p:nvSpPr>
         <p:spPr>
-          <a:prstGeom xmlns:a="http://schemas.openxmlformats.org/drawingml/2006/main" prst="rect">
+          <a:prstGeom prst="rect">
             <a:avLst/>
           </a:prstGeom>
         </p:spPr>
         <p:txBody>
-          <a:bodyPr xmlns:a="http://schemas.openxmlformats.org/drawingml/2006/main"/>
-          <a:lstStyle xmlns:a="http://schemas.openxmlformats.org/drawingml/2006/main"/>
-          <a:p xmlns:a="http://schemas.openxmlformats.org/drawingml/2006/main"/>
+          <a:bodyPr/>
+          <a:lstStyle/>
+          <a:p>
+            <a:endParaRPr/>
+          </a:p>
         </p:txBody>
       </p:sp>
     </p:spTree>
   </p:cSld>
   <p:clrMap bg1="lt1" tx1="dk1" bg2="lt2" tx2="dk2" accent1="accent1" accent2="accent2" accent3="accent3" accent4="accent4" accent5="accent5" accent6="accent6" hlink="hlink" folHlink="folHlink"/>
   <p:notesStyle>
-    <a:lvl1pPr xmlns:a="http://schemas.openxmlformats.org/drawingml/2006/main" marL="0" algn="l" defTabSz="914400" rtl="0" eaLnBrk="1" latinLnBrk="0" hangingPunct="1">
+    <a:lvl1pPr marL="0" algn="l" defTabSz="914400" rtl="0" eaLnBrk="1" latinLnBrk="0" hangingPunct="1">
       <a:defRPr sz="1200" kern="1200"/>
     </a:lvl1pPr>
   </p:notesStyle>
 </p:notesMaster>
 </file>
 
-<file path=ppt/notesMasters/theme/theme3.xml><?xml version="1.0" encoding="utf-8"?>
-<a:theme xmlns:a="http://schemas.openxmlformats.org/drawingml/2006/main" name="Office Theme">
-  <a:themeElements>
-    <a:clrScheme name="Red Violet">
-      <a:dk1>
-        <a:sysClr val="windowText" lastClr="000000"/>
-      </a:dk1>
-      <a:lt1>
-        <a:sysClr val="window" lastClr="FFFFFF"/>
-      </a:lt1>
-      <a:dk2>
-        <a:srgbClr val="454551"/>
-      </a:dk2>
-      <a:lt2>
-        <a:srgbClr val="D8D9DC"/>
-      </a:lt2>
-      <a:accent1>
-        <a:srgbClr val="E32D91"/>
-      </a:accent1>
-      <a:accent2>
-        <a:srgbClr val="C830CC"/>
-      </a:accent2>
-      <a:accent3>
-        <a:srgbClr val="4EA6DC"/>
-      </a:accent3>
-      <a:accent4>
-        <a:srgbClr val="4775E7"/>
-      </a:accent4>
-      <a:accent5>
-        <a:srgbClr val="8971E1"/>
-      </a:accent5>
-      <a:accent6>
-        <a:srgbClr val="D54773"/>
-      </a:accent6>
-      <a:hlink>
-        <a:srgbClr val="6B9F25"/>
-      </a:hlink>
-      <a:folHlink>
-        <a:srgbClr val="8C8C8C"/>
-      </a:folHlink>
-    </a:clrScheme>
-    <a:fontScheme name="Office">
-      <a:majorFont>
-        <a:latin typeface="Calibri Light"/>
-        <a:ea typeface=""/>
-        <a:cs typeface=""/>
-        <a:font script="Jpan" typeface="游ゴシック Light"/>
-        <a:font script="Hang" typeface="맑은 고딕"/>
-        <a:font script="Hans" typeface="等线 Light"/>
-        <a:font script="Hant" typeface="新細明體"/>
-        <a:font script="Arab" typeface="Times New Roman"/>
-        <a:font script="Hebr" typeface="Times New Roman"/>
-        <a:font script="Thai" typeface="Angsana New"/>
-        <a:font script="Ethi" typeface="Nyala"/>
-        <a:font script="Beng" typeface="Vrinda"/>
-        <a:font script="Gujr" typeface="Shruti"/>
-        <a:font script="Khmr" typeface="MoolBoran"/>
-        <a:font script="Knda" typeface="Tunga"/>
-        <a:font script="Guru" typeface="Raavi"/>
-        <a:font script="Cans" typeface="Euphemia"/>
-        <a:font script="Cher" typeface="Plantagenet Cherokee"/>
-        <a:font script="Yiii" typeface="Microsoft Yi Baiti"/>
-        <a:font script="Tibt" typeface="Microsoft Himalaya"/>
-        <a:font script="Thaa" typeface="MV Boli"/>
-        <a:font script="Deva" typeface="Mangal"/>
-        <a:font script="Telu" typeface="Gautami"/>
-        <a:font script="Taml" typeface="Latha"/>
-        <a:font script="Syrc" typeface="Estrangelo Edessa"/>
-        <a:font script="Orya" typeface="Kalinga"/>
-        <a:font script="Mlym" typeface="Kartika"/>
-        <a:font script="Laoo" typeface="DokChampa"/>
-        <a:font script="Sinh" typeface="Iskoola Pota"/>
-        <a:font script="Mong" typeface="Mongolian Baiti"/>
-        <a:font script="Viet" typeface="Times New Roman"/>
-        <a:font script="Uigh" typeface="Microsoft Uighur"/>
-        <a:font script="Geor" typeface="Sylfaen"/>
-        <a:font script="Armn" typeface="Arial"/>
-        <a:font script="Bugi" typeface="Leelawadee UI"/>
-        <a:font script="Bopo" typeface="Microsoft JhengHei"/>
-        <a:font script="Java" typeface="Javanese Text"/>
-        <a:font script="Lisu" typeface="Segoe UI"/>
-        <a:font script="Mymr" typeface="Myanmar Text"/>
-        <a:font script="Nkoo" typeface="Ebrima"/>
-        <a:font script="Olck" typeface="Nirmala UI"/>
-        <a:font script="Osma" typeface="Ebrima"/>
-        <a:font script="Phag" typeface="Phagspa"/>
-        <a:font script="Syrn" typeface="Estrangelo Edessa"/>
-        <a:font script="Syrj" typeface="Estrangelo Edessa"/>
-        <a:font script="Syre" typeface="Estrangelo Edessa"/>
-        <a:font script="Sora" typeface="Nirmala UI"/>
-        <a:font script="Tale" typeface="Microsoft Tai Le"/>
-        <a:font script="Talu" typeface="Microsoft New Tai Lue"/>
-        <a:font script="Tfng" typeface="Ebrima"/>
-      </a:majorFont>
-      <a:minorFont>
-        <a:latin typeface="Calibri"/>
-        <a:ea typeface=""/>
-        <a:cs typeface=""/>
-        <a:font script="Jpan" typeface="游ゴシック"/>
-        <a:font script="Hang" typeface="맑은 고딕"/>
-        <a:font script="Hans" typeface="等线"/>
-        <a:font script="Hant" typeface="新細明體"/>
-        <a:font script="Arab" typeface="Arial"/>
-        <a:font script="Hebr" typeface="Arial"/>
-        <a:font script="Thai" typeface="Cordia New"/>
-        <a:font script="Ethi" typeface="Nyala"/>
-        <a:font script="Beng" typeface="Vrinda"/>
-        <a:font script="Gujr" typeface="Shruti"/>
-        <a:font script="Khmr" typeface="DaunPenh"/>
-        <a:font script="Knda" typeface="Tunga"/>
-        <a:font script="Guru" typeface="Raavi"/>
-        <a:font script="Cans" typeface="Euphemia"/>
-        <a:font script="Cher" typeface="Plantagenet Cherokee"/>
-        <a:font script="Yiii" typeface="Microsoft Yi Baiti"/>
-        <a:font script="Tibt" typeface="Microsoft Himalaya"/>
-        <a:font script="Thaa" typeface="MV Boli"/>
-        <a:font script="Deva" typeface="Mangal"/>
-        <a:font script="Telu" typeface="Gautami"/>
-        <a:font script="Taml" typeface="Latha"/>
-        <a:font script="Syrc" typeface="Estrangelo Edessa"/>
-        <a:font script="Orya" typeface="Kalinga"/>
-        <a:font script="Mlym" typeface="Kartika"/>
-        <a:font script="Laoo" typeface="DokChampa"/>
-        <a:font script="Sinh" typeface="Iskoola Pota"/>
-        <a:font script="Mong" typeface="Mongolian Baiti"/>
-        <a:font script="Viet" typeface="Arial"/>
-        <a:font script="Uigh" typeface="Microsoft Uighur"/>
-        <a:font script="Geor" typeface="Sylfaen"/>
-        <a:font script="Armn" typeface="Arial"/>
-        <a:font script="Bugi" typeface="Leelawadee UI"/>
-        <a:font script="Bopo" typeface="Microsoft JhengHei"/>
-        <a:font script="Java" typeface="Javanese Text"/>
-        <a:font script="Lisu" typeface="Segoe UI"/>
-        <a:font script="Mymr" typeface="Myanmar Text"/>
-        <a:font script="Nkoo" typeface="Ebrima"/>
-        <a:font script="Olck" typeface="Nirmala UI"/>
-        <a:font script="Osma" typeface="Ebrima"/>
-        <a:font script="Phag" typeface="Phagspa"/>
-        <a:font script="Syrn" typeface="Estrangelo Edessa"/>
-        <a:font script="Syrj" typeface="Estrangelo Edessa"/>
-        <a:font script="Syre" typeface="Estrangelo Edessa"/>
-        <a:font script="Sora" typeface="Nirmala UI"/>
-        <a:font script="Tale" typeface="Microsoft Tai Le"/>
-        <a:font script="Talu" typeface="Microsoft New Tai Lue"/>
-        <a:font script="Tfng" typeface="Ebrima"/>
-      </a:minorFont>
-    </a:fontScheme>
-    <a:fmtScheme name="Red Violet">
-      <a:fillStyleLst>
-        <a:solidFill>
-          <a:schemeClr val="phClr"/>
-        </a:solidFill>
-        <a:gradFill rotWithShape="1">
-          <a:gsLst>
-            <a:gs pos="0">
-              <a:schemeClr val="phClr">
-                <a:tint val="67000"/>
-                <a:lumMod val="110000"/>
-                <a:satMod val="105000"/>
-              </a:schemeClr>
-            </a:gs>
-            <a:gs pos="50000">
-              <a:schemeClr val="phClr">
-                <a:tint val="73000"/>
-                <a:lumMod val="105000"/>
-                <a:satMod val="103000"/>
-              </a:schemeClr>
-            </a:gs>
-            <a:gs pos="100000">
-              <a:schemeClr val="phClr">
-                <a:tint val="81000"/>
-                <a:lumMod val="105000"/>
-                <a:satMod val="109000"/>
-              </a:schemeClr>
-            </a:gs>
-          </a:gsLst>
-          <a:lin ang="5400000" scaled="0"/>
-        </a:gradFill>
-        <a:gradFill rotWithShape="1">
-          <a:gsLst>
-            <a:gs pos="0">
-              <a:schemeClr val="phClr">
-                <a:tint val="94000"/>
-                <a:lumMod val="102000"/>
-                <a:satMod val="103000"/>
-              </a:schemeClr>
-            </a:gs>
-            <a:gs pos="50000">
-              <a:schemeClr val="phClr">
-                <a:shade val="100000"/>
-                <a:lumMod val="100000"/>
-                <a:satMod val="110000"/>
-              </a:schemeClr>
-            </a:gs>
-            <a:gs pos="100000">
-              <a:schemeClr val="phClr">
-                <a:shade val="78000"/>
-                <a:lumMod val="99000"/>
-                <a:satMod val="120000"/>
-              </a:schemeClr>
-            </a:gs>
-          </a:gsLst>
-          <a:lin ang="5400000" scaled="0"/>
-        </a:gradFill>
-      </a:fillStyleLst>
-      <a:lnStyleLst>
-        <a:ln w="6350">
-          <a:solidFill>
-            <a:schemeClr val="phClr"/>
-          </a:solidFill>
-          <a:prstDash val="solid"/>
-        </a:ln>
-        <a:ln w="12700">
-          <a:solidFill>
-            <a:schemeClr val="phClr"/>
-          </a:solidFill>
-          <a:prstDash val="solid"/>
-        </a:ln>
-        <a:ln w="19050">
-          <a:solidFill>
-            <a:schemeClr val="phClr"/>
-          </a:solidFill>
-          <a:prstDash val="solid"/>
-        </a:ln>
-      </a:lnStyleLst>
-      <a:effectStyleLst>
-        <a:effectStyle>
-          <a:effectLst/>
-        </a:effectStyle>
-        <a:effectStyle>
-          <a:effectLst/>
-        </a:effectStyle>
-        <a:effectStyle>
-          <a:effectLst>
-            <a:outerShdw blurRad="57150" dist="19050" dir="5400000" algn="ctr" rotWithShape="0">
-              <a:srgbClr val="000000">
-                <a:alpha val="63000"/>
-              </a:srgbClr>
-            </a:outerShdw>
-          </a:effectLst>
-        </a:effectStyle>
-      </a:effectStyleLst>
-      <a:bgFillStyleLst>
-        <a:solidFill>
-          <a:schemeClr val="phClr"/>
-        </a:solidFill>
-        <a:solidFill>
-          <a:schemeClr val="phClr">
-            <a:tint val="95000"/>
-            <a:satMod val="170000"/>
-          </a:schemeClr>
-        </a:solidFill>
-        <a:gradFill rotWithShape="1">
-          <a:gsLst>
-            <a:gs pos="0">
-              <a:schemeClr val="phClr">
-                <a:tint val="93000"/>
-                <a:shade val="98000"/>
-                <a:lumMod val="102000"/>
-                <a:satMod val="150000"/>
-              </a:schemeClr>
-            </a:gs>
-            <a:gs pos="50000">
-              <a:schemeClr val="phClr">
-                <a:tint val="98000"/>
-                <a:shade val="90000"/>
-                <a:lumMod val="103000"/>
-                <a:satMod val="130000"/>
-              </a:schemeClr>
-            </a:gs>
-            <a:gs pos="100000">
-              <a:schemeClr val="phClr">
-                <a:shade val="63000"/>
-                <a:satMod val="120000"/>
-              </a:schemeClr>
-            </a:gs>
-          </a:gsLst>
-          <a:lin ang="5400000" scaled="0"/>
-        </a:gradFill>
-      </a:bgFillStyleLst>
-    </a:fmtScheme>
-  </a:themeElements>
-</a:theme>
-</file>
-
 <file path=ppt/notesSlides/notesSlide1.xml><?xml version="1.0" encoding="utf-8"?>
-<p:notes xmlns:p="http://schemas.openxmlformats.org/presentationml/2006/main">
+<p:notes xmlns:a="http://schemas.openxmlformats.org/drawingml/2006/main" xmlns:r="http://schemas.openxmlformats.org/officeDocument/2006/relationships" xmlns:p="http://schemas.openxmlformats.org/presentationml/2006/main">
   <p:cSld>
     <p:spTree>
       <p:nvGrpSpPr>
@@ -459,16 +332,21 @@
         <p:nvPr/>
       </p:nvGrpSpPr>
       <p:grpSpPr>
-        <a:xfrm xmlns:a="http://schemas.openxmlformats.org/drawingml/2006/main"/>
+        <a:xfrm>
+          <a:off x="0" y="0"/>
+          <a:ext cx="0" cy="0"/>
+          <a:chOff x="0" y="0"/>
+          <a:chExt cx="0" cy="0"/>
+        </a:xfrm>
       </p:grpSpPr>
       <p:sp>
         <p:nvSpPr>
           <p:cNvPr id="2" name="Slide Image Placeholder 1"/>
           <p:cNvSpPr>
-            <a:spLocks xmlns:a="http://schemas.openxmlformats.org/drawingml/2006/main" noGrp="1"/>
-          </p:cNvSpPr>
-          <p:nvPr>
-            <p:ph type="sldImg" idx="0"/>
+            <a:spLocks noGrp="1" noRot="1" noChangeAspect="1"/>
+          </p:cNvSpPr>
+          <p:nvPr>
+            <p:ph type="sldImg"/>
           </p:nvPr>
         </p:nvSpPr>
         <p:spPr/>
@@ -477,7 +355,7 @@
         <p:nvSpPr>
           <p:cNvPr id="3" name="Notes Placeholder 2"/>
           <p:cNvSpPr>
-            <a:spLocks xmlns:a="http://schemas.openxmlformats.org/drawingml/2006/main" noGrp="1"/>
+            <a:spLocks noGrp="1"/>
           </p:cNvSpPr>
           <p:nvPr>
             <p:ph type="body" idx="1"/>
@@ -485,16 +363,18 @@
         </p:nvSpPr>
         <p:spPr/>
         <p:txBody>
-          <a:bodyPr xmlns:a="http://schemas.openxmlformats.org/drawingml/2006/main"/>
-          <a:lstStyle xmlns:a="http://schemas.openxmlformats.org/drawingml/2006/main"/>
-          <a:p xmlns:a="http://schemas.openxmlformats.org/drawingml/2006/main"/>
+          <a:bodyPr/>
+          <a:lstStyle/>
+          <a:p>
+            <a:endParaRPr/>
+          </a:p>
         </p:txBody>
       </p:sp>
       <p:sp>
         <p:nvSpPr>
           <p:cNvPr id="4" name="Slide Number Placeholder 3"/>
           <p:cNvSpPr>
-            <a:spLocks xmlns:a="http://schemas.openxmlformats.org/drawingml/2006/main" noGrp="1"/>
+            <a:spLocks noGrp="1"/>
           </p:cNvSpPr>
           <p:nvPr>
             <p:ph type="sldNum" idx="5"/>
@@ -502,21 +382,23 @@
         </p:nvSpPr>
         <p:spPr/>
         <p:txBody>
-          <a:bodyPr xmlns:a="http://schemas.openxmlformats.org/drawingml/2006/main"/>
-          <a:lstStyle xmlns:a="http://schemas.openxmlformats.org/drawingml/2006/main"/>
-          <a:p xmlns:a="http://schemas.openxmlformats.org/drawingml/2006/main"/>
+          <a:bodyPr/>
+          <a:lstStyle/>
+          <a:p>
+            <a:endParaRPr/>
+          </a:p>
         </p:txBody>
       </p:sp>
     </p:spTree>
   </p:cSld>
   <p:clrMapOvr>
-    <a:masterClrMapping xmlns:a="http://schemas.openxmlformats.org/drawingml/2006/main"/>
+    <a:masterClrMapping/>
   </p:clrMapOvr>
 </p:notes>
 </file>
 
 <file path=ppt/notesSlides/notesSlide2.xml><?xml version="1.0" encoding="utf-8"?>
-<p:notes xmlns:p="http://schemas.openxmlformats.org/presentationml/2006/main">
+<p:notes xmlns:a="http://schemas.openxmlformats.org/drawingml/2006/main" xmlns:r="http://schemas.openxmlformats.org/officeDocument/2006/relationships" xmlns:p="http://schemas.openxmlformats.org/presentationml/2006/main">
   <p:cSld>
     <p:spTree>
       <p:nvGrpSpPr>
@@ -525,16 +407,21 @@
         <p:nvPr/>
       </p:nvGrpSpPr>
       <p:grpSpPr>
-        <a:xfrm xmlns:a="http://schemas.openxmlformats.org/drawingml/2006/main"/>
+        <a:xfrm>
+          <a:off x="0" y="0"/>
+          <a:ext cx="0" cy="0"/>
+          <a:chOff x="0" y="0"/>
+          <a:chExt cx="0" cy="0"/>
+        </a:xfrm>
       </p:grpSpPr>
       <p:sp>
         <p:nvSpPr>
           <p:cNvPr id="2" name="Slide Image Placeholder 1"/>
           <p:cNvSpPr>
-            <a:spLocks xmlns:a="http://schemas.openxmlformats.org/drawingml/2006/main" noGrp="1"/>
-          </p:cNvSpPr>
-          <p:nvPr>
-            <p:ph type="sldImg" idx="0"/>
+            <a:spLocks noGrp="1" noRot="1" noChangeAspect="1"/>
+          </p:cNvSpPr>
+          <p:nvPr>
+            <p:ph type="sldImg"/>
           </p:nvPr>
         </p:nvSpPr>
         <p:spPr/>
@@ -543,7 +430,7 @@
         <p:nvSpPr>
           <p:cNvPr id="3" name="Notes Placeholder 2"/>
           <p:cNvSpPr>
-            <a:spLocks xmlns:a="http://schemas.openxmlformats.org/drawingml/2006/main" noGrp="1"/>
+            <a:spLocks noGrp="1"/>
           </p:cNvSpPr>
           <p:nvPr>
             <p:ph type="body" idx="1"/>
@@ -551,9 +438,9 @@
         </p:nvSpPr>
         <p:spPr/>
         <p:txBody>
-          <a:bodyPr xmlns:a="http://schemas.openxmlformats.org/drawingml/2006/main"/>
-          <a:lstStyle xmlns:a="http://schemas.openxmlformats.org/drawingml/2006/main"/>
-          <a:p xmlns:a="http://schemas.openxmlformats.org/drawingml/2006/main">
+          <a:bodyPr/>
+          <a:lstStyle/>
+          <a:p>
             <a:r>
               <a:t>Screenshot: https://www.howtoexcel.org/shift-cells-down/</a:t>
             </a:r>
@@ -564,7 +451,7 @@
         <p:nvSpPr>
           <p:cNvPr id="4" name="Slide Number Placeholder 3"/>
           <p:cNvSpPr>
-            <a:spLocks xmlns:a="http://schemas.openxmlformats.org/drawingml/2006/main" noGrp="1"/>
+            <a:spLocks noGrp="1"/>
           </p:cNvSpPr>
           <p:nvPr>
             <p:ph type="sldNum" idx="5"/>
@@ -572,21 +459,23 @@
         </p:nvSpPr>
         <p:spPr/>
         <p:txBody>
-          <a:bodyPr xmlns:a="http://schemas.openxmlformats.org/drawingml/2006/main"/>
-          <a:lstStyle xmlns:a="http://schemas.openxmlformats.org/drawingml/2006/main"/>
-          <a:p xmlns:a="http://schemas.openxmlformats.org/drawingml/2006/main"/>
+          <a:bodyPr/>
+          <a:lstStyle/>
+          <a:p>
+            <a:endParaRPr/>
+          </a:p>
         </p:txBody>
       </p:sp>
     </p:spTree>
   </p:cSld>
   <p:clrMapOvr>
-    <a:masterClrMapping xmlns:a="http://schemas.openxmlformats.org/drawingml/2006/main"/>
+    <a:masterClrMapping/>
   </p:clrMapOvr>
 </p:notes>
 </file>
 
 <file path=ppt/notesSlides/notesSlide3.xml><?xml version="1.0" encoding="utf-8"?>
-<p:notes xmlns:p="http://schemas.openxmlformats.org/presentationml/2006/main">
+<p:notes xmlns:a="http://schemas.openxmlformats.org/drawingml/2006/main" xmlns:r="http://schemas.openxmlformats.org/officeDocument/2006/relationships" xmlns:p="http://schemas.openxmlformats.org/presentationml/2006/main">
   <p:cSld>
     <p:spTree>
       <p:nvGrpSpPr>
@@ -595,16 +484,21 @@
         <p:nvPr/>
       </p:nvGrpSpPr>
       <p:grpSpPr>
-        <a:xfrm xmlns:a="http://schemas.openxmlformats.org/drawingml/2006/main"/>
+        <a:xfrm>
+          <a:off x="0" y="0"/>
+          <a:ext cx="0" cy="0"/>
+          <a:chOff x="0" y="0"/>
+          <a:chExt cx="0" cy="0"/>
+        </a:xfrm>
       </p:grpSpPr>
       <p:sp>
         <p:nvSpPr>
           <p:cNvPr id="2" name="Slide Image Placeholder 1"/>
           <p:cNvSpPr>
-            <a:spLocks xmlns:a="http://schemas.openxmlformats.org/drawingml/2006/main" noGrp="1"/>
-          </p:cNvSpPr>
-          <p:nvPr>
-            <p:ph type="sldImg" idx="0"/>
+            <a:spLocks noGrp="1" noRot="1" noChangeAspect="1"/>
+          </p:cNvSpPr>
+          <p:nvPr>
+            <p:ph type="sldImg"/>
           </p:nvPr>
         </p:nvSpPr>
         <p:spPr/>
@@ -613,7 +507,7 @@
         <p:nvSpPr>
           <p:cNvPr id="3" name="Notes Placeholder 2"/>
           <p:cNvSpPr>
-            <a:spLocks xmlns:a="http://schemas.openxmlformats.org/drawingml/2006/main" noGrp="1"/>
+            <a:spLocks noGrp="1"/>
           </p:cNvSpPr>
           <p:nvPr>
             <p:ph type="body" idx="1"/>
@@ -621,9 +515,9 @@
         </p:nvSpPr>
         <p:spPr/>
         <p:txBody>
-          <a:bodyPr xmlns:a="http://schemas.openxmlformats.org/drawingml/2006/main"/>
-          <a:lstStyle xmlns:a="http://schemas.openxmlformats.org/drawingml/2006/main"/>
-          <a:p xmlns:a="http://schemas.openxmlformats.org/drawingml/2006/main">
+          <a:bodyPr/>
+          <a:lstStyle/>
+          <a:p>
             <a:r>
               <a:t>Screenshot: https://500rockets.io/excel/the-excel-move-column-tutorial-59/</a:t>
             </a:r>
@@ -634,7 +528,7 @@
         <p:nvSpPr>
           <p:cNvPr id="4" name="Slide Number Placeholder 3"/>
           <p:cNvSpPr>
-            <a:spLocks xmlns:a="http://schemas.openxmlformats.org/drawingml/2006/main" noGrp="1"/>
+            <a:spLocks noGrp="1"/>
           </p:cNvSpPr>
           <p:nvPr>
             <p:ph type="sldNum" idx="5"/>
@@ -642,21 +536,23 @@
         </p:nvSpPr>
         <p:spPr/>
         <p:txBody>
-          <a:bodyPr xmlns:a="http://schemas.openxmlformats.org/drawingml/2006/main"/>
-          <a:lstStyle xmlns:a="http://schemas.openxmlformats.org/drawingml/2006/main"/>
-          <a:p xmlns:a="http://schemas.openxmlformats.org/drawingml/2006/main"/>
+          <a:bodyPr/>
+          <a:lstStyle/>
+          <a:p>
+            <a:endParaRPr/>
+          </a:p>
         </p:txBody>
       </p:sp>
     </p:spTree>
   </p:cSld>
   <p:clrMapOvr>
-    <a:masterClrMapping xmlns:a="http://schemas.openxmlformats.org/drawingml/2006/main"/>
+    <a:masterClrMapping/>
   </p:clrMapOvr>
 </p:notes>
 </file>
 
 <file path=ppt/notesSlides/notesSlide4.xml><?xml version="1.0" encoding="utf-8"?>
-<p:notes xmlns:p="http://schemas.openxmlformats.org/presentationml/2006/main">
+<p:notes xmlns:a="http://schemas.openxmlformats.org/drawingml/2006/main" xmlns:r="http://schemas.openxmlformats.org/officeDocument/2006/relationships" xmlns:p="http://schemas.openxmlformats.org/presentationml/2006/main">
   <p:cSld>
     <p:spTree>
       <p:nvGrpSpPr>
@@ -665,16 +561,21 @@
         <p:nvPr/>
       </p:nvGrpSpPr>
       <p:grpSpPr>
-        <a:xfrm xmlns:a="http://schemas.openxmlformats.org/drawingml/2006/main"/>
+        <a:xfrm>
+          <a:off x="0" y="0"/>
+          <a:ext cx="0" cy="0"/>
+          <a:chOff x="0" y="0"/>
+          <a:chExt cx="0" cy="0"/>
+        </a:xfrm>
       </p:grpSpPr>
       <p:sp>
         <p:nvSpPr>
           <p:cNvPr id="2" name="Slide Image Placeholder 1"/>
           <p:cNvSpPr>
-            <a:spLocks xmlns:a="http://schemas.openxmlformats.org/drawingml/2006/main" noGrp="1"/>
-          </p:cNvSpPr>
-          <p:nvPr>
-            <p:ph type="sldImg" idx="0"/>
+            <a:spLocks noGrp="1" noRot="1" noChangeAspect="1"/>
+          </p:cNvSpPr>
+          <p:nvPr>
+            <p:ph type="sldImg"/>
           </p:nvPr>
         </p:nvSpPr>
         <p:spPr/>
@@ -683,7 +584,7 @@
         <p:nvSpPr>
           <p:cNvPr id="3" name="Notes Placeholder 2"/>
           <p:cNvSpPr>
-            <a:spLocks xmlns:a="http://schemas.openxmlformats.org/drawingml/2006/main" noGrp="1"/>
+            <a:spLocks noGrp="1"/>
           </p:cNvSpPr>
           <p:nvPr>
             <p:ph type="body" idx="1"/>
@@ -691,9 +592,9 @@
         </p:nvSpPr>
         <p:spPr/>
         <p:txBody>
-          <a:bodyPr xmlns:a="http://schemas.openxmlformats.org/drawingml/2006/main"/>
-          <a:lstStyle xmlns:a="http://schemas.openxmlformats.org/drawingml/2006/main"/>
-          <a:p xmlns:a="http://schemas.openxmlformats.org/drawingml/2006/main">
+          <a:bodyPr/>
+          <a:lstStyle/>
+          <a:p>
             <a:r>
               <a:t>Screenshot: https://smallbiztrends.com/how-to-delete-your-twitter-account/</a:t>
             </a:r>
@@ -704,7 +605,7 @@
         <p:nvSpPr>
           <p:cNvPr id="4" name="Slide Number Placeholder 3"/>
           <p:cNvSpPr>
-            <a:spLocks xmlns:a="http://schemas.openxmlformats.org/drawingml/2006/main" noGrp="1"/>
+            <a:spLocks noGrp="1"/>
           </p:cNvSpPr>
           <p:nvPr>
             <p:ph type="sldNum" idx="5"/>
@@ -712,21 +613,23 @@
         </p:nvSpPr>
         <p:spPr/>
         <p:txBody>
-          <a:bodyPr xmlns:a="http://schemas.openxmlformats.org/drawingml/2006/main"/>
-          <a:lstStyle xmlns:a="http://schemas.openxmlformats.org/drawingml/2006/main"/>
-          <a:p xmlns:a="http://schemas.openxmlformats.org/drawingml/2006/main"/>
+          <a:bodyPr/>
+          <a:lstStyle/>
+          <a:p>
+            <a:endParaRPr/>
+          </a:p>
         </p:txBody>
       </p:sp>
     </p:spTree>
   </p:cSld>
   <p:clrMapOvr>
-    <a:masterClrMapping xmlns:a="http://schemas.openxmlformats.org/drawingml/2006/main"/>
+    <a:masterClrMapping/>
   </p:clrMapOvr>
 </p:notes>
 </file>
 
 <file path=ppt/notesSlides/notesSlide5.xml><?xml version="1.0" encoding="utf-8"?>
-<p:notes xmlns:p="http://schemas.openxmlformats.org/presentationml/2006/main">
+<p:notes xmlns:a="http://schemas.openxmlformats.org/drawingml/2006/main" xmlns:r="http://schemas.openxmlformats.org/officeDocument/2006/relationships" xmlns:p="http://schemas.openxmlformats.org/presentationml/2006/main">
   <p:cSld>
     <p:spTree>
       <p:nvGrpSpPr>
@@ -735,16 +638,21 @@
         <p:nvPr/>
       </p:nvGrpSpPr>
       <p:grpSpPr>
-        <a:xfrm xmlns:a="http://schemas.openxmlformats.org/drawingml/2006/main"/>
+        <a:xfrm>
+          <a:off x="0" y="0"/>
+          <a:ext cx="0" cy="0"/>
+          <a:chOff x="0" y="0"/>
+          <a:chExt cx="0" cy="0"/>
+        </a:xfrm>
       </p:grpSpPr>
       <p:sp>
         <p:nvSpPr>
           <p:cNvPr id="2" name="Slide Image Placeholder 1"/>
           <p:cNvSpPr>
-            <a:spLocks xmlns:a="http://schemas.openxmlformats.org/drawingml/2006/main" noGrp="1"/>
-          </p:cNvSpPr>
-          <p:nvPr>
-            <p:ph type="sldImg" idx="0"/>
+            <a:spLocks noGrp="1" noRot="1" noChangeAspect="1"/>
+          </p:cNvSpPr>
+          <p:nvPr>
+            <p:ph type="sldImg"/>
           </p:nvPr>
         </p:nvSpPr>
         <p:spPr/>
@@ -753,7 +661,7 @@
         <p:nvSpPr>
           <p:cNvPr id="3" name="Notes Placeholder 2"/>
           <p:cNvSpPr>
-            <a:spLocks xmlns:a="http://schemas.openxmlformats.org/drawingml/2006/main" noGrp="1"/>
+            <a:spLocks noGrp="1"/>
           </p:cNvSpPr>
           <p:nvPr>
             <p:ph type="body" idx="1"/>
@@ -761,9 +669,9 @@
         </p:nvSpPr>
         <p:spPr/>
         <p:txBody>
-          <a:bodyPr xmlns:a="http://schemas.openxmlformats.org/drawingml/2006/main"/>
-          <a:lstStyle xmlns:a="http://schemas.openxmlformats.org/drawingml/2006/main"/>
-          <a:p xmlns:a="http://schemas.openxmlformats.org/drawingml/2006/main">
+          <a:bodyPr/>
+          <a:lstStyle/>
+          <a:p>
             <a:r>
               <a:t>Screenshot: https://excelinsights.net/web/find-replace-data/</a:t>
             </a:r>
@@ -774,7 +682,7 @@
         <p:nvSpPr>
           <p:cNvPr id="4" name="Slide Number Placeholder 3"/>
           <p:cNvSpPr>
-            <a:spLocks xmlns:a="http://schemas.openxmlformats.org/drawingml/2006/main" noGrp="1"/>
+            <a:spLocks noGrp="1"/>
           </p:cNvSpPr>
           <p:nvPr>
             <p:ph type="sldNum" idx="5"/>
@@ -782,21 +690,23 @@
         </p:nvSpPr>
         <p:spPr/>
         <p:txBody>
-          <a:bodyPr xmlns:a="http://schemas.openxmlformats.org/drawingml/2006/main"/>
-          <a:lstStyle xmlns:a="http://schemas.openxmlformats.org/drawingml/2006/main"/>
-          <a:p xmlns:a="http://schemas.openxmlformats.org/drawingml/2006/main"/>
+          <a:bodyPr/>
+          <a:lstStyle/>
+          <a:p>
+            <a:endParaRPr/>
+          </a:p>
         </p:txBody>
       </p:sp>
     </p:spTree>
   </p:cSld>
   <p:clrMapOvr>
-    <a:masterClrMapping xmlns:a="http://schemas.openxmlformats.org/drawingml/2006/main"/>
+    <a:masterClrMapping/>
   </p:clrMapOvr>
 </p:notes>
 </file>
 
 <file path=ppt/notesSlides/notesSlide6.xml><?xml version="1.0" encoding="utf-8"?>
-<p:notes xmlns:p="http://schemas.openxmlformats.org/presentationml/2006/main">
+<p:notes xmlns:a="http://schemas.openxmlformats.org/drawingml/2006/main" xmlns:r="http://schemas.openxmlformats.org/officeDocument/2006/relationships" xmlns:p="http://schemas.openxmlformats.org/presentationml/2006/main">
   <p:cSld>
     <p:spTree>
       <p:nvGrpSpPr>
@@ -805,16 +715,21 @@
         <p:nvPr/>
       </p:nvGrpSpPr>
       <p:grpSpPr>
-        <a:xfrm xmlns:a="http://schemas.openxmlformats.org/drawingml/2006/main"/>
+        <a:xfrm>
+          <a:off x="0" y="0"/>
+          <a:ext cx="0" cy="0"/>
+          <a:chOff x="0" y="0"/>
+          <a:chExt cx="0" cy="0"/>
+        </a:xfrm>
       </p:grpSpPr>
       <p:sp>
         <p:nvSpPr>
           <p:cNvPr id="2" name="Slide Image Placeholder 1"/>
           <p:cNvSpPr>
-            <a:spLocks xmlns:a="http://schemas.openxmlformats.org/drawingml/2006/main" noGrp="1"/>
-          </p:cNvSpPr>
-          <p:nvPr>
-            <p:ph type="sldImg" idx="0"/>
+            <a:spLocks noGrp="1" noRot="1" noChangeAspect="1"/>
+          </p:cNvSpPr>
+          <p:nvPr>
+            <p:ph type="sldImg"/>
           </p:nvPr>
         </p:nvSpPr>
         <p:spPr/>
@@ -823,7 +738,7 @@
         <p:nvSpPr>
           <p:cNvPr id="3" name="Notes Placeholder 2"/>
           <p:cNvSpPr>
-            <a:spLocks xmlns:a="http://schemas.openxmlformats.org/drawingml/2006/main" noGrp="1"/>
+            <a:spLocks noGrp="1"/>
           </p:cNvSpPr>
           <p:nvPr>
             <p:ph type="body" idx="1"/>
@@ -831,16 +746,18 @@
         </p:nvSpPr>
         <p:spPr/>
         <p:txBody>
-          <a:bodyPr xmlns:a="http://schemas.openxmlformats.org/drawingml/2006/main"/>
-          <a:lstStyle xmlns:a="http://schemas.openxmlformats.org/drawingml/2006/main"/>
-          <a:p xmlns:a="http://schemas.openxmlformats.org/drawingml/2006/main"/>
+          <a:bodyPr/>
+          <a:lstStyle/>
+          <a:p>
+            <a:endParaRPr/>
+          </a:p>
         </p:txBody>
       </p:sp>
       <p:sp>
         <p:nvSpPr>
           <p:cNvPr id="4" name="Slide Number Placeholder 3"/>
           <p:cNvSpPr>
-            <a:spLocks xmlns:a="http://schemas.openxmlformats.org/drawingml/2006/main" noGrp="1"/>
+            <a:spLocks noGrp="1"/>
           </p:cNvSpPr>
           <p:nvPr>
             <p:ph type="sldNum" idx="5"/>
@@ -848,21 +765,23 @@
         </p:nvSpPr>
         <p:spPr/>
         <p:txBody>
-          <a:bodyPr xmlns:a="http://schemas.openxmlformats.org/drawingml/2006/main"/>
-          <a:lstStyle xmlns:a="http://schemas.openxmlformats.org/drawingml/2006/main"/>
-          <a:p xmlns:a="http://schemas.openxmlformats.org/drawingml/2006/main"/>
+          <a:bodyPr/>
+          <a:lstStyle/>
+          <a:p>
+            <a:endParaRPr/>
+          </a:p>
         </p:txBody>
       </p:sp>
     </p:spTree>
   </p:cSld>
   <p:clrMapOvr>
-    <a:masterClrMapping xmlns:a="http://schemas.openxmlformats.org/drawingml/2006/main"/>
+    <a:masterClrMapping/>
   </p:clrMapOvr>
 </p:notes>
 </file>
 
 <file path=ppt/notesSlides/notesSlide7.xml><?xml version="1.0" encoding="utf-8"?>
-<p:notes xmlns:p="http://schemas.openxmlformats.org/presentationml/2006/main">
+<p:notes xmlns:a="http://schemas.openxmlformats.org/drawingml/2006/main" xmlns:r="http://schemas.openxmlformats.org/officeDocument/2006/relationships" xmlns:p="http://schemas.openxmlformats.org/presentationml/2006/main">
   <p:cSld>
     <p:spTree>
       <p:nvGrpSpPr>
@@ -871,16 +790,21 @@
         <p:nvPr/>
       </p:nvGrpSpPr>
       <p:grpSpPr>
-        <a:xfrm xmlns:a="http://schemas.openxmlformats.org/drawingml/2006/main"/>
+        <a:xfrm>
+          <a:off x="0" y="0"/>
+          <a:ext cx="0" cy="0"/>
+          <a:chOff x="0" y="0"/>
+          <a:chExt cx="0" cy="0"/>
+        </a:xfrm>
       </p:grpSpPr>
       <p:sp>
         <p:nvSpPr>
           <p:cNvPr id="2" name="Slide Image Placeholder 1"/>
           <p:cNvSpPr>
-            <a:spLocks xmlns:a="http://schemas.openxmlformats.org/drawingml/2006/main" noGrp="1"/>
-          </p:cNvSpPr>
-          <p:nvPr>
-            <p:ph type="sldImg" idx="0"/>
+            <a:spLocks noGrp="1" noRot="1" noChangeAspect="1"/>
+          </p:cNvSpPr>
+          <p:nvPr>
+            <p:ph type="sldImg"/>
           </p:nvPr>
         </p:nvSpPr>
         <p:spPr/>
@@ -889,7 +813,7 @@
         <p:nvSpPr>
           <p:cNvPr id="3" name="Notes Placeholder 2"/>
           <p:cNvSpPr>
-            <a:spLocks xmlns:a="http://schemas.openxmlformats.org/drawingml/2006/main" noGrp="1"/>
+            <a:spLocks noGrp="1"/>
           </p:cNvSpPr>
           <p:nvPr>
             <p:ph type="body" idx="1"/>
@@ -897,16 +821,18 @@
         </p:nvSpPr>
         <p:spPr/>
         <p:txBody>
-          <a:bodyPr xmlns:a="http://schemas.openxmlformats.org/drawingml/2006/main"/>
-          <a:lstStyle xmlns:a="http://schemas.openxmlformats.org/drawingml/2006/main"/>
-          <a:p xmlns:a="http://schemas.openxmlformats.org/drawingml/2006/main"/>
+          <a:bodyPr/>
+          <a:lstStyle/>
+          <a:p>
+            <a:endParaRPr/>
+          </a:p>
         </p:txBody>
       </p:sp>
       <p:sp>
         <p:nvSpPr>
           <p:cNvPr id="4" name="Slide Number Placeholder 3"/>
           <p:cNvSpPr>
-            <a:spLocks xmlns:a="http://schemas.openxmlformats.org/drawingml/2006/main" noGrp="1"/>
+            <a:spLocks noGrp="1"/>
           </p:cNvSpPr>
           <p:nvPr>
             <p:ph type="sldNum" idx="5"/>
@@ -914,21 +840,23 @@
         </p:nvSpPr>
         <p:spPr/>
         <p:txBody>
-          <a:bodyPr xmlns:a="http://schemas.openxmlformats.org/drawingml/2006/main"/>
-          <a:lstStyle xmlns:a="http://schemas.openxmlformats.org/drawingml/2006/main"/>
-          <a:p xmlns:a="http://schemas.openxmlformats.org/drawingml/2006/main"/>
+          <a:bodyPr/>
+          <a:lstStyle/>
+          <a:p>
+            <a:endParaRPr/>
+          </a:p>
         </p:txBody>
       </p:sp>
     </p:spTree>
   </p:cSld>
   <p:clrMapOvr>
-    <a:masterClrMapping xmlns:a="http://schemas.openxmlformats.org/drawingml/2006/main"/>
+    <a:masterClrMapping/>
   </p:clrMapOvr>
 </p:notes>
 </file>
 
 <file path=ppt/notesSlides/notesSlide8.xml><?xml version="1.0" encoding="utf-8"?>
-<p:notes xmlns:p="http://schemas.openxmlformats.org/presentationml/2006/main">
+<p:notes xmlns:a="http://schemas.openxmlformats.org/drawingml/2006/main" xmlns:r="http://schemas.openxmlformats.org/officeDocument/2006/relationships" xmlns:p="http://schemas.openxmlformats.org/presentationml/2006/main">
   <p:cSld>
     <p:spTree>
       <p:nvGrpSpPr>
@@ -937,16 +865,21 @@
         <p:nvPr/>
       </p:nvGrpSpPr>
       <p:grpSpPr>
-        <a:xfrm xmlns:a="http://schemas.openxmlformats.org/drawingml/2006/main"/>
+        <a:xfrm>
+          <a:off x="0" y="0"/>
+          <a:ext cx="0" cy="0"/>
+          <a:chOff x="0" y="0"/>
+          <a:chExt cx="0" cy="0"/>
+        </a:xfrm>
       </p:grpSpPr>
       <p:sp>
         <p:nvSpPr>
           <p:cNvPr id="2" name="Slide Image Placeholder 1"/>
           <p:cNvSpPr>
-            <a:spLocks xmlns:a="http://schemas.openxmlformats.org/drawingml/2006/main" noGrp="1"/>
-          </p:cNvSpPr>
-          <p:nvPr>
-            <p:ph type="sldImg" idx="0"/>
+            <a:spLocks noGrp="1" noRot="1" noChangeAspect="1"/>
+          </p:cNvSpPr>
+          <p:nvPr>
+            <p:ph type="sldImg"/>
           </p:nvPr>
         </p:nvSpPr>
         <p:spPr/>
@@ -955,7 +888,7 @@
         <p:nvSpPr>
           <p:cNvPr id="3" name="Notes Placeholder 2"/>
           <p:cNvSpPr>
-            <a:spLocks xmlns:a="http://schemas.openxmlformats.org/drawingml/2006/main" noGrp="1"/>
+            <a:spLocks noGrp="1"/>
           </p:cNvSpPr>
           <p:nvPr>
             <p:ph type="body" idx="1"/>
@@ -963,16 +896,18 @@
         </p:nvSpPr>
         <p:spPr/>
         <p:txBody>
-          <a:bodyPr xmlns:a="http://schemas.openxmlformats.org/drawingml/2006/main"/>
-          <a:lstStyle xmlns:a="http://schemas.openxmlformats.org/drawingml/2006/main"/>
-          <a:p xmlns:a="http://schemas.openxmlformats.org/drawingml/2006/main"/>
+          <a:bodyPr/>
+          <a:lstStyle/>
+          <a:p>
+            <a:endParaRPr/>
+          </a:p>
         </p:txBody>
       </p:sp>
       <p:sp>
         <p:nvSpPr>
           <p:cNvPr id="4" name="Slide Number Placeholder 3"/>
           <p:cNvSpPr>
-            <a:spLocks xmlns:a="http://schemas.openxmlformats.org/drawingml/2006/main" noGrp="1"/>
+            <a:spLocks noGrp="1"/>
           </p:cNvSpPr>
           <p:nvPr>
             <p:ph type="sldNum" idx="5"/>
@@ -980,21 +915,23 @@
         </p:nvSpPr>
         <p:spPr/>
         <p:txBody>
-          <a:bodyPr xmlns:a="http://schemas.openxmlformats.org/drawingml/2006/main"/>
-          <a:lstStyle xmlns:a="http://schemas.openxmlformats.org/drawingml/2006/main"/>
-          <a:p xmlns:a="http://schemas.openxmlformats.org/drawingml/2006/main"/>
+          <a:bodyPr/>
+          <a:lstStyle/>
+          <a:p>
+            <a:endParaRPr/>
+          </a:p>
         </p:txBody>
       </p:sp>
     </p:spTree>
   </p:cSld>
   <p:clrMapOvr>
-    <a:masterClrMapping xmlns:a="http://schemas.openxmlformats.org/drawingml/2006/main"/>
+    <a:masterClrMapping/>
   </p:clrMapOvr>
 </p:notes>
 </file>
 
 <file path=ppt/slideLayouts/slideLayout1.xml><?xml version="1.0" encoding="utf-8"?>
-<p:sldLayout xmlns:p="http://schemas.openxmlformats.org/presentationml/2006/main" type="title" preserve="1">
+<p:sldLayout xmlns:a="http://schemas.openxmlformats.org/drawingml/2006/main" xmlns:r="http://schemas.openxmlformats.org/officeDocument/2006/relationships" xmlns:p="http://schemas.openxmlformats.org/presentationml/2006/main" type="title" preserve="1">
   <p:cSld name="Title Slide">
     <p:spTree>
       <p:nvGrpSpPr>
@@ -1003,71 +940,75 @@
         <p:nvPr/>
       </p:nvGrpSpPr>
       <p:grpSpPr>
-        <a:xfrm xmlns:a="http://schemas.openxmlformats.org/drawingml/2006/main"/>
+        <a:xfrm>
+          <a:off x="0" y="0"/>
+          <a:ext cx="0" cy="0"/>
+          <a:chOff x="0" y="0"/>
+          <a:chExt cx="0" cy="0"/>
+        </a:xfrm>
       </p:grpSpPr>
       <p:sp>
         <p:nvSpPr>
           <p:cNvPr id="2" name="Title 1">
-            <a:extLst xmlns:a="http://schemas.openxmlformats.org/drawingml/2006/main">
+            <a:extLst>
               <a:ext uri="{FF2B5EF4-FFF2-40B4-BE49-F238E27FC236}">
                 <a16:creationId xmlns:a16="http://schemas.microsoft.com/office/drawing/2014/main" id="{7F9585AB-590D-2940-F9D8-91A2DEA70AEC}"/>
               </a:ext>
             </a:extLst>
           </p:cNvPr>
           <p:cNvSpPr>
-            <a:spLocks xmlns:a="http://schemas.openxmlformats.org/drawingml/2006/main" noGrp="1"/>
-          </p:cNvSpPr>
-          <p:nvPr>
-            <p:ph type="ctrTitle" idx="0"/>
+            <a:spLocks noGrp="1"/>
+          </p:cNvSpPr>
+          <p:nvPr>
+            <p:ph type="ctrTitle"/>
           </p:nvPr>
         </p:nvSpPr>
         <p:spPr>
-          <a:xfrm xmlns:a="http://schemas.openxmlformats.org/drawingml/2006/main">
+          <a:xfrm>
             <a:off x="1524000" y="1122363"/>
             <a:ext cx="9144000" cy="2387600"/>
           </a:xfrm>
         </p:spPr>
         <p:txBody>
-          <a:bodyPr xmlns:a="http://schemas.openxmlformats.org/drawingml/2006/main" anchor="b"/>
-          <a:lstStyle xmlns:a="http://schemas.openxmlformats.org/drawingml/2006/main">
+          <a:bodyPr anchor="b"/>
+          <a:lstStyle>
             <a:lvl1pPr algn="ctr">
               <a:buNone/>
               <a:defRPr sz="6000"/>
             </a:lvl1pPr>
           </a:lstStyle>
-          <a:p xmlns:a="http://schemas.openxmlformats.org/drawingml/2006/main">
+          <a:p>
             <a:r>
               <a:t>Click to edit Master title style</a:t>
             </a:r>
-            <a:endParaRPr/>
           </a:p>
         </p:txBody>
       </p:sp>
       <p:sp>
         <p:nvSpPr>
           <p:cNvPr id="3" name="Subtitle 2">
-            <a:extLst xmlns:a="http://schemas.openxmlformats.org/drawingml/2006/main">
+            <a:extLst>
               <a:ext uri="{FF2B5EF4-FFF2-40B4-BE49-F238E27FC236}">
                 <a16:creationId xmlns:a16="http://schemas.microsoft.com/office/drawing/2014/main" id="{8B41E1D7-50E5-605C-ACD7-89AFACCFD5E6}"/>
               </a:ext>
             </a:extLst>
           </p:cNvPr>
           <p:cNvSpPr>
-            <a:spLocks xmlns:a="http://schemas.openxmlformats.org/drawingml/2006/main" noGrp="1"/>
+            <a:spLocks noGrp="1"/>
           </p:cNvSpPr>
           <p:nvPr>
             <p:ph type="subTitle" idx="1"/>
           </p:nvPr>
         </p:nvSpPr>
         <p:spPr>
-          <a:xfrm xmlns:a="http://schemas.openxmlformats.org/drawingml/2006/main">
+          <a:xfrm>
             <a:off x="1524000" y="3602038"/>
             <a:ext cx="9144000" cy="1655762"/>
           </a:xfrm>
         </p:spPr>
         <p:txBody>
-          <a:bodyPr xmlns:a="http://schemas.openxmlformats.org/drawingml/2006/main"/>
-          <a:lstStyle xmlns:a="http://schemas.openxmlformats.org/drawingml/2006/main">
+          <a:bodyPr/>
+          <a:lstStyle>
             <a:lvl1pPr marL="0" indent="0" algn="ctr">
               <a:buNone/>
               <a:defRPr sz="2400"/>
@@ -1105,25 +1046,24 @@
               <a:defRPr sz="1600"/>
             </a:lvl9pPr>
           </a:lstStyle>
-          <a:p xmlns:a="http://schemas.openxmlformats.org/drawingml/2006/main">
+          <a:p>
             <a:r>
               <a:t>Click to edit Master subtitle style</a:t>
             </a:r>
-            <a:endParaRPr/>
           </a:p>
         </p:txBody>
       </p:sp>
       <p:sp>
         <p:nvSpPr>
           <p:cNvPr id="4" name="Date Placeholder 3">
-            <a:extLst xmlns:a="http://schemas.openxmlformats.org/drawingml/2006/main">
+            <a:extLst>
               <a:ext uri="{FF2B5EF4-FFF2-40B4-BE49-F238E27FC236}">
                 <a16:creationId xmlns:a16="http://schemas.microsoft.com/office/drawing/2014/main" id="{1DEE8DB3-D225-FB0F-4A95-87FE121ACE41}"/>
               </a:ext>
             </a:extLst>
           </p:cNvPr>
           <p:cNvSpPr>
-            <a:spLocks xmlns:a="http://schemas.openxmlformats.org/drawingml/2006/main" noGrp="1"/>
+            <a:spLocks noGrp="1"/>
           </p:cNvSpPr>
           <p:nvPr>
             <p:ph type="dt" idx="10"/>
@@ -1131,11 +1071,11 @@
         </p:nvSpPr>
         <p:spPr/>
         <p:txBody>
-          <a:bodyPr xmlns:a="http://schemas.openxmlformats.org/drawingml/2006/main"/>
-          <a:lstStyle xmlns:a="http://schemas.openxmlformats.org/drawingml/2006/main"/>
-          <a:p xmlns:a="http://schemas.openxmlformats.org/drawingml/2006/main">
+          <a:bodyPr/>
+          <a:lstStyle/>
+          <a:p>
             <a:fld id="{EDB99004-FBBF-4BCC-9BC3-88F554ADE514}" type="datetimeFigureOut">
-              <a:t>09/10/2026</a:t>
+              <a:t>06-Oct-26</a:t>
             </a:fld>
             <a:endParaRPr/>
           </a:p>
@@ -1144,14 +1084,14 @@
       <p:sp>
         <p:nvSpPr>
           <p:cNvPr id="5" name="Footer Placeholder 4">
-            <a:extLst xmlns:a="http://schemas.openxmlformats.org/drawingml/2006/main">
+            <a:extLst>
               <a:ext uri="{FF2B5EF4-FFF2-40B4-BE49-F238E27FC236}">
                 <a16:creationId xmlns:a16="http://schemas.microsoft.com/office/drawing/2014/main" id="{47F4E33A-D01E-EAC3-6198-75DCE67E4BA9}"/>
               </a:ext>
             </a:extLst>
           </p:cNvPr>
           <p:cNvSpPr>
-            <a:spLocks xmlns:a="http://schemas.openxmlformats.org/drawingml/2006/main" noGrp="1"/>
+            <a:spLocks noGrp="1"/>
           </p:cNvSpPr>
           <p:nvPr>
             <p:ph type="ftr" idx="11"/>
@@ -1159,9 +1099,9 @@
         </p:nvSpPr>
         <p:spPr/>
         <p:txBody>
-          <a:bodyPr xmlns:a="http://schemas.openxmlformats.org/drawingml/2006/main"/>
-          <a:lstStyle xmlns:a="http://schemas.openxmlformats.org/drawingml/2006/main"/>
-          <a:p xmlns:a="http://schemas.openxmlformats.org/drawingml/2006/main">
+          <a:bodyPr/>
+          <a:lstStyle/>
+          <a:p>
             <a:endParaRPr/>
           </a:p>
         </p:txBody>
@@ -1169,14 +1109,14 @@
       <p:sp>
         <p:nvSpPr>
           <p:cNvPr id="6" name="Slide Number Placeholder 5">
-            <a:extLst xmlns:a="http://schemas.openxmlformats.org/drawingml/2006/main">
+            <a:extLst>
               <a:ext uri="{FF2B5EF4-FFF2-40B4-BE49-F238E27FC236}">
                 <a16:creationId xmlns:a16="http://schemas.microsoft.com/office/drawing/2014/main" id="{0A783C2F-F6A4-CF68-E054-91D3A8A6FC35}"/>
               </a:ext>
             </a:extLst>
           </p:cNvPr>
           <p:cNvSpPr>
-            <a:spLocks xmlns:a="http://schemas.openxmlformats.org/drawingml/2006/main" noGrp="1"/>
+            <a:spLocks noGrp="1"/>
           </p:cNvSpPr>
           <p:nvPr>
             <p:ph type="sldNum" idx="12"/>
@@ -1184,9 +1124,9 @@
         </p:nvSpPr>
         <p:spPr/>
         <p:txBody>
-          <a:bodyPr xmlns:a="http://schemas.openxmlformats.org/drawingml/2006/main"/>
-          <a:lstStyle xmlns:a="http://schemas.openxmlformats.org/drawingml/2006/main"/>
-          <a:p xmlns:a="http://schemas.openxmlformats.org/drawingml/2006/main">
+          <a:bodyPr/>
+          <a:lstStyle/>
+          <a:p>
             <a:fld id="{3721C89F-AE7A-4C3B-889F-FA429D0A7F97}" type="slidenum">
               <a:t>‹#›</a:t>
             </a:fld>
@@ -1196,11 +1136,14 @@
       </p:sp>
     </p:spTree>
   </p:cSld>
+  <p:clrMapOvr>
+    <a:masterClrMapping/>
+  </p:clrMapOvr>
 </p:sldLayout>
 </file>
 
 <file path=ppt/slideLayouts/slideLayout10.xml><?xml version="1.0" encoding="utf-8"?>
-<p:sldLayout xmlns:p="http://schemas.openxmlformats.org/presentationml/2006/main" type="vertTx" preserve="1">
+<p:sldLayout xmlns:a="http://schemas.openxmlformats.org/drawingml/2006/main" xmlns:r="http://schemas.openxmlformats.org/officeDocument/2006/relationships" xmlns:p="http://schemas.openxmlformats.org/presentationml/2006/main" type="vertTx" preserve="1">
   <p:cSld name="Title and Vertical Text">
     <p:spTree>
       <p:nvGrpSpPr>
@@ -1209,47 +1152,51 @@
         <p:nvPr/>
       </p:nvGrpSpPr>
       <p:grpSpPr>
-        <a:xfrm xmlns:a="http://schemas.openxmlformats.org/drawingml/2006/main"/>
+        <a:xfrm>
+          <a:off x="0" y="0"/>
+          <a:ext cx="0" cy="0"/>
+          <a:chOff x="0" y="0"/>
+          <a:chExt cx="0" cy="0"/>
+        </a:xfrm>
       </p:grpSpPr>
       <p:sp>
         <p:nvSpPr>
           <p:cNvPr id="2" name="Title 1">
-            <a:extLst xmlns:a="http://schemas.openxmlformats.org/drawingml/2006/main">
+            <a:extLst>
               <a:ext uri="{FF2B5EF4-FFF2-40B4-BE49-F238E27FC236}">
                 <a16:creationId xmlns:a16="http://schemas.microsoft.com/office/drawing/2014/main" id="{D44DC5F4-D20C-2DB3-8411-B320533BB9DA}"/>
               </a:ext>
             </a:extLst>
           </p:cNvPr>
           <p:cNvSpPr>
-            <a:spLocks xmlns:a="http://schemas.openxmlformats.org/drawingml/2006/main" noGrp="1"/>
-          </p:cNvSpPr>
-          <p:nvPr>
-            <p:ph type="title" idx="0"/>
+            <a:spLocks noGrp="1"/>
+          </p:cNvSpPr>
+          <p:nvPr>
+            <p:ph type="title"/>
           </p:nvPr>
         </p:nvSpPr>
         <p:spPr/>
         <p:txBody>
-          <a:bodyPr xmlns:a="http://schemas.openxmlformats.org/drawingml/2006/main"/>
-          <a:lstStyle xmlns:a="http://schemas.openxmlformats.org/drawingml/2006/main"/>
-          <a:p xmlns:a="http://schemas.openxmlformats.org/drawingml/2006/main">
+          <a:bodyPr/>
+          <a:lstStyle/>
+          <a:p>
             <a:r>
               <a:t>Click to edit Master title style</a:t>
             </a:r>
-            <a:endParaRPr/>
           </a:p>
         </p:txBody>
       </p:sp>
       <p:sp>
         <p:nvSpPr>
           <p:cNvPr id="3" name="Vertical Text Placeholder 2">
-            <a:extLst xmlns:a="http://schemas.openxmlformats.org/drawingml/2006/main">
+            <a:extLst>
               <a:ext uri="{FF2B5EF4-FFF2-40B4-BE49-F238E27FC236}">
                 <a16:creationId xmlns:a16="http://schemas.microsoft.com/office/drawing/2014/main" id="{030EA972-BBB4-2124-F72C-ECCD0063490E}"/>
               </a:ext>
             </a:extLst>
           </p:cNvPr>
           <p:cNvSpPr>
-            <a:spLocks xmlns:a="http://schemas.openxmlformats.org/drawingml/2006/main" noGrp="1"/>
+            <a:spLocks noGrp="1"/>
           </p:cNvSpPr>
           <p:nvPr>
             <p:ph type="body" idx="1"/>
@@ -1257,9 +1204,9 @@
         </p:nvSpPr>
         <p:spPr/>
         <p:txBody>
-          <a:bodyPr xmlns:a="http://schemas.openxmlformats.org/drawingml/2006/main" vert="eaVert"/>
-          <a:lstStyle xmlns:a="http://schemas.openxmlformats.org/drawingml/2006/main"/>
-          <a:p xmlns:a="http://schemas.openxmlformats.org/drawingml/2006/main">
+          <a:bodyPr vert="eaVert"/>
+          <a:lstStyle/>
+          <a:p>
             <a:pPr lvl="0">
               <a:buNone/>
             </a:pPr>
@@ -1267,7 +1214,7 @@
               <a:t>Click to edit Master text styles</a:t>
             </a:r>
           </a:p>
-          <a:p xmlns:a="http://schemas.openxmlformats.org/drawingml/2006/main">
+          <a:p>
             <a:pPr lvl="1">
               <a:buNone/>
             </a:pPr>
@@ -1275,7 +1222,7 @@
               <a:t>Second level</a:t>
             </a:r>
           </a:p>
-          <a:p xmlns:a="http://schemas.openxmlformats.org/drawingml/2006/main">
+          <a:p>
             <a:pPr lvl="2">
               <a:buNone/>
             </a:pPr>
@@ -1283,7 +1230,7 @@
               <a:t>Third level</a:t>
             </a:r>
           </a:p>
-          <a:p xmlns:a="http://schemas.openxmlformats.org/drawingml/2006/main">
+          <a:p>
             <a:pPr lvl="3">
               <a:buNone/>
             </a:pPr>
@@ -1291,28 +1238,27 @@
               <a:t>Fourth level</a:t>
             </a:r>
           </a:p>
-          <a:p xmlns:a="http://schemas.openxmlformats.org/drawingml/2006/main">
+          <a:p>
             <a:pPr lvl="4">
               <a:buNone/>
             </a:pPr>
             <a:r>
               <a:t>Fifth level</a:t>
             </a:r>
-            <a:endParaRPr/>
           </a:p>
         </p:txBody>
       </p:sp>
       <p:sp>
         <p:nvSpPr>
           <p:cNvPr id="4" name="Date Placeholder 3">
-            <a:extLst xmlns:a="http://schemas.openxmlformats.org/drawingml/2006/main">
+            <a:extLst>
               <a:ext uri="{FF2B5EF4-FFF2-40B4-BE49-F238E27FC236}">
                 <a16:creationId xmlns:a16="http://schemas.microsoft.com/office/drawing/2014/main" id="{3644EE25-5808-5EF9-D529-A97D9A5F4E7F}"/>
               </a:ext>
             </a:extLst>
           </p:cNvPr>
           <p:cNvSpPr>
-            <a:spLocks xmlns:a="http://schemas.openxmlformats.org/drawingml/2006/main" noGrp="1"/>
+            <a:spLocks noGrp="1"/>
           </p:cNvSpPr>
           <p:nvPr>
             <p:ph type="dt" idx="10"/>
@@ -1320,11 +1266,11 @@
         </p:nvSpPr>
         <p:spPr/>
         <p:txBody>
-          <a:bodyPr xmlns:a="http://schemas.openxmlformats.org/drawingml/2006/main"/>
-          <a:lstStyle xmlns:a="http://schemas.openxmlformats.org/drawingml/2006/main"/>
-          <a:p xmlns:a="http://schemas.openxmlformats.org/drawingml/2006/main">
+          <a:bodyPr/>
+          <a:lstStyle/>
+          <a:p>
             <a:fld id="{EDB99004-FBBF-4BCC-9BC3-88F554ADE514}" type="datetimeFigureOut">
-              <a:t>09/10/2026</a:t>
+              <a:t>06-Oct-26</a:t>
             </a:fld>
             <a:endParaRPr/>
           </a:p>
@@ -1333,14 +1279,14 @@
       <p:sp>
         <p:nvSpPr>
           <p:cNvPr id="5" name="Footer Placeholder 4">
-            <a:extLst xmlns:a="http://schemas.openxmlformats.org/drawingml/2006/main">
+            <a:extLst>
               <a:ext uri="{FF2B5EF4-FFF2-40B4-BE49-F238E27FC236}">
                 <a16:creationId xmlns:a16="http://schemas.microsoft.com/office/drawing/2014/main" id="{9662F814-6E03-DA7E-994E-BD8357BF20F4}"/>
               </a:ext>
             </a:extLst>
           </p:cNvPr>
           <p:cNvSpPr>
-            <a:spLocks xmlns:a="http://schemas.openxmlformats.org/drawingml/2006/main" noGrp="1"/>
+            <a:spLocks noGrp="1"/>
           </p:cNvSpPr>
           <p:nvPr>
             <p:ph type="ftr" idx="11"/>
@@ -1348,9 +1294,9 @@
         </p:nvSpPr>
         <p:spPr/>
         <p:txBody>
-          <a:bodyPr xmlns:a="http://schemas.openxmlformats.org/drawingml/2006/main"/>
-          <a:lstStyle xmlns:a="http://schemas.openxmlformats.org/drawingml/2006/main"/>
-          <a:p xmlns:a="http://schemas.openxmlformats.org/drawingml/2006/main">
+          <a:bodyPr/>
+          <a:lstStyle/>
+          <a:p>
             <a:endParaRPr/>
           </a:p>
         </p:txBody>
@@ -1358,14 +1304,14 @@
       <p:sp>
         <p:nvSpPr>
           <p:cNvPr id="6" name="Slide Number Placeholder 5">
-            <a:extLst xmlns:a="http://schemas.openxmlformats.org/drawingml/2006/main">
+            <a:extLst>
               <a:ext uri="{FF2B5EF4-FFF2-40B4-BE49-F238E27FC236}">
                 <a16:creationId xmlns:a16="http://schemas.microsoft.com/office/drawing/2014/main" id="{7B08E29C-8AD9-8F1D-C539-6DC238A4F76A}"/>
               </a:ext>
             </a:extLst>
           </p:cNvPr>
           <p:cNvSpPr>
-            <a:spLocks xmlns:a="http://schemas.openxmlformats.org/drawingml/2006/main" noGrp="1"/>
+            <a:spLocks noGrp="1"/>
           </p:cNvSpPr>
           <p:nvPr>
             <p:ph type="sldNum" idx="12"/>
@@ -1373,9 +1319,9 @@
         </p:nvSpPr>
         <p:spPr/>
         <p:txBody>
-          <a:bodyPr xmlns:a="http://schemas.openxmlformats.org/drawingml/2006/main"/>
-          <a:lstStyle xmlns:a="http://schemas.openxmlformats.org/drawingml/2006/main"/>
-          <a:p xmlns:a="http://schemas.openxmlformats.org/drawingml/2006/main">
+          <a:bodyPr/>
+          <a:lstStyle/>
+          <a:p>
             <a:fld id="{3721C89F-AE7A-4C3B-889F-FA429D0A7F97}" type="slidenum">
               <a:t>‹#›</a:t>
             </a:fld>
@@ -1385,11 +1331,14 @@
       </p:sp>
     </p:spTree>
   </p:cSld>
+  <p:clrMapOvr>
+    <a:masterClrMapping/>
+  </p:clrMapOvr>
 </p:sldLayout>
 </file>
 
 <file path=ppt/slideLayouts/slideLayout11.xml><?xml version="1.0" encoding="utf-8"?>
-<p:sldLayout xmlns:p="http://schemas.openxmlformats.org/presentationml/2006/main" type="vertTitleAndTx" preserve="1">
+<p:sldLayout xmlns:a="http://schemas.openxmlformats.org/drawingml/2006/main" xmlns:r="http://schemas.openxmlformats.org/officeDocument/2006/relationships" xmlns:p="http://schemas.openxmlformats.org/presentationml/2006/main" type="vertTitleAndTx" preserve="1">
   <p:cSld name="Vertical Title and Text">
     <p:spTree>
       <p:nvGrpSpPr>
@@ -1398,67 +1347,71 @@
         <p:nvPr/>
       </p:nvGrpSpPr>
       <p:grpSpPr>
-        <a:xfrm xmlns:a="http://schemas.openxmlformats.org/drawingml/2006/main"/>
+        <a:xfrm>
+          <a:off x="0" y="0"/>
+          <a:ext cx="0" cy="0"/>
+          <a:chOff x="0" y="0"/>
+          <a:chExt cx="0" cy="0"/>
+        </a:xfrm>
       </p:grpSpPr>
       <p:sp>
         <p:nvSpPr>
           <p:cNvPr id="2" name="Vertical Title 1">
-            <a:extLst xmlns:a="http://schemas.openxmlformats.org/drawingml/2006/main">
+            <a:extLst>
               <a:ext uri="{FF2B5EF4-FFF2-40B4-BE49-F238E27FC236}">
                 <a16:creationId xmlns:a16="http://schemas.microsoft.com/office/drawing/2014/main" id="{7E9B99B6-549F-E1E7-9083-8BA3B57D86FB}"/>
               </a:ext>
             </a:extLst>
           </p:cNvPr>
           <p:cNvSpPr>
-            <a:spLocks xmlns:a="http://schemas.openxmlformats.org/drawingml/2006/main" noGrp="1"/>
-          </p:cNvSpPr>
-          <p:nvPr>
-            <p:ph type="title" idx="0"/>
+            <a:spLocks noGrp="1"/>
+          </p:cNvSpPr>
+          <p:nvPr>
+            <p:ph type="title"/>
           </p:nvPr>
         </p:nvSpPr>
         <p:spPr>
-          <a:xfrm xmlns:a="http://schemas.openxmlformats.org/drawingml/2006/main">
+          <a:xfrm>
             <a:off x="8724900" y="365125"/>
             <a:ext cx="2628900" cy="5811838"/>
           </a:xfrm>
         </p:spPr>
         <p:txBody>
-          <a:bodyPr xmlns:a="http://schemas.openxmlformats.org/drawingml/2006/main" vert="eaVert"/>
-          <a:lstStyle xmlns:a="http://schemas.openxmlformats.org/drawingml/2006/main"/>
-          <a:p xmlns:a="http://schemas.openxmlformats.org/drawingml/2006/main">
+          <a:bodyPr vert="eaVert"/>
+          <a:lstStyle/>
+          <a:p>
             <a:r>
               <a:t>Click to edit Master title style</a:t>
             </a:r>
-            <a:endParaRPr/>
           </a:p>
         </p:txBody>
       </p:sp>
       <p:sp>
         <p:nvSpPr>
           <p:cNvPr id="3" name="Vertical Text Placeholder 2">
-            <a:extLst xmlns:a="http://schemas.openxmlformats.org/drawingml/2006/main">
+            <a:extLst>
               <a:ext uri="{FF2B5EF4-FFF2-40B4-BE49-F238E27FC236}">
                 <a16:creationId xmlns:a16="http://schemas.microsoft.com/office/drawing/2014/main" id="{DE6435A8-2F0B-810A-E41D-C6ABD4CC491A}"/>
               </a:ext>
             </a:extLst>
           </p:cNvPr>
           <p:cNvSpPr>
-            <a:spLocks xmlns:a="http://schemas.openxmlformats.org/drawingml/2006/main" noGrp="1"/>
+            <a:spLocks noGrp="1"/>
           </p:cNvSpPr>
           <p:nvPr>
             <p:ph type="body" idx="1"/>
           </p:nvPr>
         </p:nvSpPr>
         <p:spPr>
-          <a:xfrm xmlns:a="http://schemas.openxmlformats.org/drawingml/2006/main">
+          <a:xfrm>
             <a:off x="838200" y="365125"/>
             <a:ext cx="7734300" cy="5811838"/>
           </a:xfrm>
         </p:spPr>
         <p:txBody>
-          <a:bodyPr xmlns:a="http://schemas.openxmlformats.org/drawingml/2006/main" vert="eaVert"/>
-          <a:lstStyle xmlns:a="http://schemas.openxmlformats.org/drawingml/2006/main"/>
-          <a:p xmlns:a="http://schemas.openxmlformats.org/drawingml/2006/main">
+          <a:bodyPr vert="eaVert"/>
+          <a:lstStyle/>
+          <a:p>
             <a:pPr lvl="0">
               <a:buNone/>
             </a:pPr>
@@ -1466,7 +1419,7 @@
               <a:t>Click to edit Master text styles</a:t>
             </a:r>
           </a:p>
-          <a:p xmlns:a="http://schemas.openxmlformats.org/drawingml/2006/main">
+          <a:p>
             <a:pPr lvl="1">
               <a:buNone/>
             </a:pPr>
@@ -1474,7 +1427,7 @@
               <a:t>Second level</a:t>
             </a:r>
           </a:p>
-          <a:p xmlns:a="http://schemas.openxmlformats.org/drawingml/2006/main">
+          <a:p>
             <a:pPr lvl="2">
               <a:buNone/>
             </a:pPr>
@@ -1482,7 +1435,7 @@
               <a:t>Third level</a:t>
             </a:r>
           </a:p>
-          <a:p xmlns:a="http://schemas.openxmlformats.org/drawingml/2006/main">
+          <a:p>
             <a:pPr lvl="3">
               <a:buNone/>
             </a:pPr>
@@ -1490,28 +1443,27 @@
               <a:t>Fourth level</a:t>
             </a:r>
           </a:p>
-          <a:p xmlns:a="http://schemas.openxmlformats.org/drawingml/2006/main">
+          <a:p>
             <a:pPr lvl="4">
               <a:buNone/>
             </a:pPr>
             <a:r>
               <a:t>Fifth level</a:t>
             </a:r>
-            <a:endParaRPr/>
           </a:p>
         </p:txBody>
       </p:sp>
       <p:sp>
         <p:nvSpPr>
           <p:cNvPr id="4" name="Date Placeholder 3">
-            <a:extLst xmlns:a="http://schemas.openxmlformats.org/drawingml/2006/main">
+            <a:extLst>
               <a:ext uri="{FF2B5EF4-FFF2-40B4-BE49-F238E27FC236}">
                 <a16:creationId xmlns:a16="http://schemas.microsoft.com/office/drawing/2014/main" id="{62877F48-282A-7BEC-513D-DD66A962A5D6}"/>
               </a:ext>
             </a:extLst>
           </p:cNvPr>
           <p:cNvSpPr>
-            <a:spLocks xmlns:a="http://schemas.openxmlformats.org/drawingml/2006/main" noGrp="1"/>
+            <a:spLocks noGrp="1"/>
           </p:cNvSpPr>
           <p:nvPr>
             <p:ph type="dt" idx="10"/>
@@ -1519,11 +1471,11 @@
         </p:nvSpPr>
         <p:spPr/>
         <p:txBody>
-          <a:bodyPr xmlns:a="http://schemas.openxmlformats.org/drawingml/2006/main"/>
-          <a:lstStyle xmlns:a="http://schemas.openxmlformats.org/drawingml/2006/main"/>
-          <a:p xmlns:a="http://schemas.openxmlformats.org/drawingml/2006/main">
+          <a:bodyPr/>
+          <a:lstStyle/>
+          <a:p>
             <a:fld id="{EDB99004-FBBF-4BCC-9BC3-88F554ADE514}" type="datetimeFigureOut">
-              <a:t>09/10/2026</a:t>
+              <a:t>06-Oct-26</a:t>
             </a:fld>
             <a:endParaRPr/>
           </a:p>
@@ -1532,14 +1484,14 @@
       <p:sp>
         <p:nvSpPr>
           <p:cNvPr id="5" name="Footer Placeholder 4">
-            <a:extLst xmlns:a="http://schemas.openxmlformats.org/drawingml/2006/main">
+            <a:extLst>
               <a:ext uri="{FF2B5EF4-FFF2-40B4-BE49-F238E27FC236}">
                 <a16:creationId xmlns:a16="http://schemas.microsoft.com/office/drawing/2014/main" id="{F9E748BA-3A52-EFDE-3B83-2A4BC456874D}"/>
               </a:ext>
             </a:extLst>
           </p:cNvPr>
           <p:cNvSpPr>
-            <a:spLocks xmlns:a="http://schemas.openxmlformats.org/drawingml/2006/main" noGrp="1"/>
+            <a:spLocks noGrp="1"/>
           </p:cNvSpPr>
           <p:nvPr>
             <p:ph type="ftr" idx="11"/>
@@ -1547,9 +1499,9 @@
         </p:nvSpPr>
         <p:spPr/>
         <p:txBody>
-          <a:bodyPr xmlns:a="http://schemas.openxmlformats.org/drawingml/2006/main"/>
-          <a:lstStyle xmlns:a="http://schemas.openxmlformats.org/drawingml/2006/main"/>
-          <a:p xmlns:a="http://schemas.openxmlformats.org/drawingml/2006/main">
+          <a:bodyPr/>
+          <a:lstStyle/>
+          <a:p>
             <a:endParaRPr/>
           </a:p>
         </p:txBody>
@@ -1557,14 +1509,14 @@
       <p:sp>
         <p:nvSpPr>
           <p:cNvPr id="6" name="Slide Number Placeholder 5">
-            <a:extLst xmlns:a="http://schemas.openxmlformats.org/drawingml/2006/main">
+            <a:extLst>
               <a:ext uri="{FF2B5EF4-FFF2-40B4-BE49-F238E27FC236}">
                 <a16:creationId xmlns:a16="http://schemas.microsoft.com/office/drawing/2014/main" id="{11D26422-6EB7-6DF1-340C-059F62421668}"/>
               </a:ext>
             </a:extLst>
           </p:cNvPr>
           <p:cNvSpPr>
-            <a:spLocks xmlns:a="http://schemas.openxmlformats.org/drawingml/2006/main" noGrp="1"/>
+            <a:spLocks noGrp="1"/>
           </p:cNvSpPr>
           <p:nvPr>
             <p:ph type="sldNum" idx="12"/>
@@ -1572,9 +1524,9 @@
         </p:nvSpPr>
         <p:spPr/>
         <p:txBody>
-          <a:bodyPr xmlns:a="http://schemas.openxmlformats.org/drawingml/2006/main"/>
-          <a:lstStyle xmlns:a="http://schemas.openxmlformats.org/drawingml/2006/main"/>
-          <a:p xmlns:a="http://schemas.openxmlformats.org/drawingml/2006/main">
+          <a:bodyPr/>
+          <a:lstStyle/>
+          <a:p>
             <a:fld id="{3721C89F-AE7A-4C3B-889F-FA429D0A7F97}" type="slidenum">
               <a:t>‹#›</a:t>
             </a:fld>
@@ -1584,11 +1536,14 @@
       </p:sp>
     </p:spTree>
   </p:cSld>
+  <p:clrMapOvr>
+    <a:masterClrMapping/>
+  </p:clrMapOvr>
 </p:sldLayout>
 </file>
 
 <file path=ppt/slideLayouts/slideLayout2.xml><?xml version="1.0" encoding="utf-8"?>
-<p:sldLayout xmlns:p="http://schemas.openxmlformats.org/presentationml/2006/main" type="obj" preserve="1">
+<p:sldLayout xmlns:a="http://schemas.openxmlformats.org/drawingml/2006/main" xmlns:r="http://schemas.openxmlformats.org/officeDocument/2006/relationships" xmlns:p="http://schemas.openxmlformats.org/presentationml/2006/main" type="obj" preserve="1">
   <p:cSld name="Title and Content">
     <p:spTree>
       <p:nvGrpSpPr>
@@ -1597,47 +1552,51 @@
         <p:nvPr/>
       </p:nvGrpSpPr>
       <p:grpSpPr>
-        <a:xfrm xmlns:a="http://schemas.openxmlformats.org/drawingml/2006/main"/>
+        <a:xfrm>
+          <a:off x="0" y="0"/>
+          <a:ext cx="0" cy="0"/>
+          <a:chOff x="0" y="0"/>
+          <a:chExt cx="0" cy="0"/>
+        </a:xfrm>
       </p:grpSpPr>
       <p:sp>
         <p:nvSpPr>
           <p:cNvPr id="2" name="Title 1">
-            <a:extLst xmlns:a="http://schemas.openxmlformats.org/drawingml/2006/main">
+            <a:extLst>
               <a:ext uri="{FF2B5EF4-FFF2-40B4-BE49-F238E27FC236}">
                 <a16:creationId xmlns:a16="http://schemas.microsoft.com/office/drawing/2014/main" id="{49D58505-B11D-1416-6D6F-42532E02D9F3}"/>
               </a:ext>
             </a:extLst>
           </p:cNvPr>
           <p:cNvSpPr>
-            <a:spLocks xmlns:a="http://schemas.openxmlformats.org/drawingml/2006/main" noGrp="1"/>
-          </p:cNvSpPr>
-          <p:nvPr>
-            <p:ph type="title" idx="0"/>
+            <a:spLocks noGrp="1"/>
+          </p:cNvSpPr>
+          <p:nvPr>
+            <p:ph type="title"/>
           </p:nvPr>
         </p:nvSpPr>
         <p:spPr/>
         <p:txBody>
-          <a:bodyPr xmlns:a="http://schemas.openxmlformats.org/drawingml/2006/main"/>
-          <a:lstStyle xmlns:a="http://schemas.openxmlformats.org/drawingml/2006/main"/>
-          <a:p xmlns:a="http://schemas.openxmlformats.org/drawingml/2006/main">
+          <a:bodyPr/>
+          <a:lstStyle/>
+          <a:p>
             <a:r>
               <a:t>Click to edit Master title style</a:t>
             </a:r>
-            <a:endParaRPr/>
           </a:p>
         </p:txBody>
       </p:sp>
       <p:sp>
         <p:nvSpPr>
           <p:cNvPr id="3" name="Content Placeholder 2">
-            <a:extLst xmlns:a="http://schemas.openxmlformats.org/drawingml/2006/main">
+            <a:extLst>
               <a:ext uri="{FF2B5EF4-FFF2-40B4-BE49-F238E27FC236}">
                 <a16:creationId xmlns:a16="http://schemas.microsoft.com/office/drawing/2014/main" id="{C8E57602-7C8E-F65F-3DCB-CA7DA659D752}"/>
               </a:ext>
             </a:extLst>
           </p:cNvPr>
           <p:cNvSpPr>
-            <a:spLocks xmlns:a="http://schemas.openxmlformats.org/drawingml/2006/main" noGrp="1"/>
+            <a:spLocks noGrp="1"/>
           </p:cNvSpPr>
           <p:nvPr>
             <p:ph idx="1"/>
@@ -1645,9 +1604,9 @@
         </p:nvSpPr>
         <p:spPr/>
         <p:txBody>
-          <a:bodyPr xmlns:a="http://schemas.openxmlformats.org/drawingml/2006/main"/>
-          <a:lstStyle xmlns:a="http://schemas.openxmlformats.org/drawingml/2006/main"/>
-          <a:p xmlns:a="http://schemas.openxmlformats.org/drawingml/2006/main">
+          <a:bodyPr/>
+          <a:lstStyle/>
+          <a:p>
             <a:pPr lvl="0">
               <a:buNone/>
             </a:pPr>
@@ -1655,7 +1614,7 @@
               <a:t>Click to edit Master text styles</a:t>
             </a:r>
           </a:p>
-          <a:p xmlns:a="http://schemas.openxmlformats.org/drawingml/2006/main">
+          <a:p>
             <a:pPr lvl="1">
               <a:buNone/>
             </a:pPr>
@@ -1663,7 +1622,7 @@
               <a:t>Second level</a:t>
             </a:r>
           </a:p>
-          <a:p xmlns:a="http://schemas.openxmlformats.org/drawingml/2006/main">
+          <a:p>
             <a:pPr lvl="2">
               <a:buNone/>
             </a:pPr>
@@ -1671,7 +1630,7 @@
               <a:t>Third level</a:t>
             </a:r>
           </a:p>
-          <a:p xmlns:a="http://schemas.openxmlformats.org/drawingml/2006/main">
+          <a:p>
             <a:pPr lvl="3">
               <a:buNone/>
             </a:pPr>
@@ -1679,28 +1638,27 @@
               <a:t>Fourth level</a:t>
             </a:r>
           </a:p>
-          <a:p xmlns:a="http://schemas.openxmlformats.org/drawingml/2006/main">
+          <a:p>
             <a:pPr lvl="4">
               <a:buNone/>
             </a:pPr>
             <a:r>
               <a:t>Fifth level</a:t>
             </a:r>
-            <a:endParaRPr/>
           </a:p>
         </p:txBody>
       </p:sp>
       <p:sp>
         <p:nvSpPr>
           <p:cNvPr id="4" name="Date Placeholder 3">
-            <a:extLst xmlns:a="http://schemas.openxmlformats.org/drawingml/2006/main">
+            <a:extLst>
               <a:ext uri="{FF2B5EF4-FFF2-40B4-BE49-F238E27FC236}">
                 <a16:creationId xmlns:a16="http://schemas.microsoft.com/office/drawing/2014/main" id="{B8E13BDD-A3BD-F0FA-C970-7CE1AFD2115B}"/>
               </a:ext>
             </a:extLst>
           </p:cNvPr>
           <p:cNvSpPr>
-            <a:spLocks xmlns:a="http://schemas.openxmlformats.org/drawingml/2006/main" noGrp="1"/>
+            <a:spLocks noGrp="1"/>
           </p:cNvSpPr>
           <p:nvPr>
             <p:ph type="dt" idx="10"/>
@@ -1708,11 +1666,11 @@
         </p:nvSpPr>
         <p:spPr/>
         <p:txBody>
-          <a:bodyPr xmlns:a="http://schemas.openxmlformats.org/drawingml/2006/main"/>
-          <a:lstStyle xmlns:a="http://schemas.openxmlformats.org/drawingml/2006/main"/>
-          <a:p xmlns:a="http://schemas.openxmlformats.org/drawingml/2006/main">
+          <a:bodyPr/>
+          <a:lstStyle/>
+          <a:p>
             <a:fld id="{EDB99004-FBBF-4BCC-9BC3-88F554ADE514}" type="datetimeFigureOut">
-              <a:t>09/10/2026</a:t>
+              <a:t>06-Oct-26</a:t>
             </a:fld>
             <a:endParaRPr/>
           </a:p>
@@ -1721,14 +1679,14 @@
       <p:sp>
         <p:nvSpPr>
           <p:cNvPr id="5" name="Footer Placeholder 4">
-            <a:extLst xmlns:a="http://schemas.openxmlformats.org/drawingml/2006/main">
+            <a:extLst>
               <a:ext uri="{FF2B5EF4-FFF2-40B4-BE49-F238E27FC236}">
                 <a16:creationId xmlns:a16="http://schemas.microsoft.com/office/drawing/2014/main" id="{839A8432-C7E6-45F5-17B8-825C34C7B69E}"/>
               </a:ext>
             </a:extLst>
           </p:cNvPr>
           <p:cNvSpPr>
-            <a:spLocks xmlns:a="http://schemas.openxmlformats.org/drawingml/2006/main" noGrp="1"/>
+            <a:spLocks noGrp="1"/>
           </p:cNvSpPr>
           <p:nvPr>
             <p:ph type="ftr" idx="11"/>
@@ -1736,9 +1694,9 @@
         </p:nvSpPr>
         <p:spPr/>
         <p:txBody>
-          <a:bodyPr xmlns:a="http://schemas.openxmlformats.org/drawingml/2006/main"/>
-          <a:lstStyle xmlns:a="http://schemas.openxmlformats.org/drawingml/2006/main"/>
-          <a:p xmlns:a="http://schemas.openxmlformats.org/drawingml/2006/main">
+          <a:bodyPr/>
+          <a:lstStyle/>
+          <a:p>
             <a:endParaRPr/>
           </a:p>
         </p:txBody>
@@ -1746,14 +1704,14 @@
       <p:sp>
         <p:nvSpPr>
           <p:cNvPr id="6" name="Slide Number Placeholder 5">
-            <a:extLst xmlns:a="http://schemas.openxmlformats.org/drawingml/2006/main">
+            <a:extLst>
               <a:ext uri="{FF2B5EF4-FFF2-40B4-BE49-F238E27FC236}">
                 <a16:creationId xmlns:a16="http://schemas.microsoft.com/office/drawing/2014/main" id="{432DBF15-3DC3-0F8C-B5EC-8D7DEA727DBD}"/>
               </a:ext>
             </a:extLst>
           </p:cNvPr>
           <p:cNvSpPr>
-            <a:spLocks xmlns:a="http://schemas.openxmlformats.org/drawingml/2006/main" noGrp="1"/>
+            <a:spLocks noGrp="1"/>
           </p:cNvSpPr>
           <p:nvPr>
             <p:ph type="sldNum" idx="12"/>
@@ -1761,9 +1719,9 @@
         </p:nvSpPr>
         <p:spPr/>
         <p:txBody>
-          <a:bodyPr xmlns:a="http://schemas.openxmlformats.org/drawingml/2006/main"/>
-          <a:lstStyle xmlns:a="http://schemas.openxmlformats.org/drawingml/2006/main"/>
-          <a:p xmlns:a="http://schemas.openxmlformats.org/drawingml/2006/main">
+          <a:bodyPr/>
+          <a:lstStyle/>
+          <a:p>
             <a:fld id="{3721C89F-AE7A-4C3B-889F-FA429D0A7F97}" type="slidenum">
               <a:t>‹#›</a:t>
             </a:fld>
@@ -1773,11 +1731,14 @@
       </p:sp>
     </p:spTree>
   </p:cSld>
+  <p:clrMapOvr>
+    <a:masterClrMapping/>
+  </p:clrMapOvr>
 </p:sldLayout>
 </file>
 
 <file path=ppt/slideLayouts/slideLayout3.xml><?xml version="1.0" encoding="utf-8"?>
-<p:sldLayout xmlns:p="http://schemas.openxmlformats.org/presentationml/2006/main" type="secHead" preserve="1">
+<p:sldLayout xmlns:a="http://schemas.openxmlformats.org/drawingml/2006/main" xmlns:r="http://schemas.openxmlformats.org/officeDocument/2006/relationships" xmlns:p="http://schemas.openxmlformats.org/presentationml/2006/main" type="secHead" preserve="1">
   <p:cSld name="Section Header">
     <p:spTree>
       <p:nvGrpSpPr>
@@ -1786,71 +1747,75 @@
         <p:nvPr/>
       </p:nvGrpSpPr>
       <p:grpSpPr>
-        <a:xfrm xmlns:a="http://schemas.openxmlformats.org/drawingml/2006/main"/>
+        <a:xfrm>
+          <a:off x="0" y="0"/>
+          <a:ext cx="0" cy="0"/>
+          <a:chOff x="0" y="0"/>
+          <a:chExt cx="0" cy="0"/>
+        </a:xfrm>
       </p:grpSpPr>
       <p:sp>
         <p:nvSpPr>
           <p:cNvPr id="2" name="Title 1">
-            <a:extLst xmlns:a="http://schemas.openxmlformats.org/drawingml/2006/main">
+            <a:extLst>
               <a:ext uri="{FF2B5EF4-FFF2-40B4-BE49-F238E27FC236}">
                 <a16:creationId xmlns:a16="http://schemas.microsoft.com/office/drawing/2014/main" id="{85A48EAB-F365-E770-1C52-96B2FFEDBA19}"/>
               </a:ext>
             </a:extLst>
           </p:cNvPr>
           <p:cNvSpPr>
-            <a:spLocks xmlns:a="http://schemas.openxmlformats.org/drawingml/2006/main" noGrp="1"/>
-          </p:cNvSpPr>
-          <p:nvPr>
-            <p:ph type="title" idx="0"/>
+            <a:spLocks noGrp="1"/>
+          </p:cNvSpPr>
+          <p:nvPr>
+            <p:ph type="title"/>
           </p:nvPr>
         </p:nvSpPr>
         <p:spPr>
-          <a:xfrm xmlns:a="http://schemas.openxmlformats.org/drawingml/2006/main">
+          <a:xfrm>
             <a:off x="831850" y="1709738"/>
             <a:ext cx="10515600" cy="2852737"/>
           </a:xfrm>
         </p:spPr>
         <p:txBody>
-          <a:bodyPr xmlns:a="http://schemas.openxmlformats.org/drawingml/2006/main" anchor="b"/>
-          <a:lstStyle xmlns:a="http://schemas.openxmlformats.org/drawingml/2006/main">
+          <a:bodyPr anchor="b"/>
+          <a:lstStyle>
             <a:lvl1pPr>
               <a:buNone/>
               <a:defRPr sz="6000"/>
             </a:lvl1pPr>
           </a:lstStyle>
-          <a:p xmlns:a="http://schemas.openxmlformats.org/drawingml/2006/main">
+          <a:p>
             <a:r>
               <a:t>Click to edit Master title style</a:t>
             </a:r>
-            <a:endParaRPr/>
           </a:p>
         </p:txBody>
       </p:sp>
       <p:sp>
         <p:nvSpPr>
           <p:cNvPr id="3" name="Text Placeholder 2">
-            <a:extLst xmlns:a="http://schemas.openxmlformats.org/drawingml/2006/main">
+            <a:extLst>
               <a:ext uri="{FF2B5EF4-FFF2-40B4-BE49-F238E27FC236}">
                 <a16:creationId xmlns:a16="http://schemas.microsoft.com/office/drawing/2014/main" id="{F95EF05D-0555-A1C8-D595-C855A03CE56D}"/>
               </a:ext>
             </a:extLst>
           </p:cNvPr>
           <p:cNvSpPr>
-            <a:spLocks xmlns:a="http://schemas.openxmlformats.org/drawingml/2006/main" noGrp="1"/>
+            <a:spLocks noGrp="1"/>
           </p:cNvSpPr>
           <p:nvPr>
             <p:ph type="body" idx="1"/>
           </p:nvPr>
         </p:nvSpPr>
         <p:spPr>
-          <a:xfrm xmlns:a="http://schemas.openxmlformats.org/drawingml/2006/main">
+          <a:xfrm>
             <a:off x="831850" y="4589463"/>
             <a:ext cx="10515600" cy="1500187"/>
           </a:xfrm>
         </p:spPr>
         <p:txBody>
-          <a:bodyPr xmlns:a="http://schemas.openxmlformats.org/drawingml/2006/main"/>
-          <a:lstStyle xmlns:a="http://schemas.openxmlformats.org/drawingml/2006/main">
+          <a:bodyPr/>
+          <a:lstStyle>
             <a:lvl1pPr marL="0" indent="0">
               <a:buNone/>
               <a:defRPr sz="2400">
@@ -1942,7 +1907,7 @@
               </a:defRPr>
             </a:lvl9pPr>
           </a:lstStyle>
-          <a:p xmlns:a="http://schemas.openxmlformats.org/drawingml/2006/main">
+          <a:p>
             <a:pPr lvl="0">
               <a:buNone/>
             </a:pPr>
@@ -1955,14 +1920,14 @@
       <p:sp>
         <p:nvSpPr>
           <p:cNvPr id="4" name="Date Placeholder 3">
-            <a:extLst xmlns:a="http://schemas.openxmlformats.org/drawingml/2006/main">
+            <a:extLst>
               <a:ext uri="{FF2B5EF4-FFF2-40B4-BE49-F238E27FC236}">
                 <a16:creationId xmlns:a16="http://schemas.microsoft.com/office/drawing/2014/main" id="{2EC5151F-7E9E-AD94-792E-FA61FDA2DA6E}"/>
               </a:ext>
             </a:extLst>
           </p:cNvPr>
           <p:cNvSpPr>
-            <a:spLocks xmlns:a="http://schemas.openxmlformats.org/drawingml/2006/main" noGrp="1"/>
+            <a:spLocks noGrp="1"/>
           </p:cNvSpPr>
           <p:nvPr>
             <p:ph type="dt" idx="10"/>
@@ -1970,11 +1935,11 @@
         </p:nvSpPr>
         <p:spPr/>
         <p:txBody>
-          <a:bodyPr xmlns:a="http://schemas.openxmlformats.org/drawingml/2006/main"/>
-          <a:lstStyle xmlns:a="http://schemas.openxmlformats.org/drawingml/2006/main"/>
-          <a:p xmlns:a="http://schemas.openxmlformats.org/drawingml/2006/main">
+          <a:bodyPr/>
+          <a:lstStyle/>
+          <a:p>
             <a:fld id="{EDB99004-FBBF-4BCC-9BC3-88F554ADE514}" type="datetimeFigureOut">
-              <a:t>09/10/2026</a:t>
+              <a:t>06-Oct-26</a:t>
             </a:fld>
             <a:endParaRPr/>
           </a:p>
@@ -1983,14 +1948,14 @@
       <p:sp>
         <p:nvSpPr>
           <p:cNvPr id="5" name="Footer Placeholder 4">
-            <a:extLst xmlns:a="http://schemas.openxmlformats.org/drawingml/2006/main">
+            <a:extLst>
               <a:ext uri="{FF2B5EF4-FFF2-40B4-BE49-F238E27FC236}">
                 <a16:creationId xmlns:a16="http://schemas.microsoft.com/office/drawing/2014/main" id="{55AE9C9E-7194-E1C7-7588-B038C3405E62}"/>
               </a:ext>
             </a:extLst>
           </p:cNvPr>
           <p:cNvSpPr>
-            <a:spLocks xmlns:a="http://schemas.openxmlformats.org/drawingml/2006/main" noGrp="1"/>
+            <a:spLocks noGrp="1"/>
           </p:cNvSpPr>
           <p:nvPr>
             <p:ph type="ftr" idx="11"/>
@@ -1998,9 +1963,9 @@
         </p:nvSpPr>
         <p:spPr/>
         <p:txBody>
-          <a:bodyPr xmlns:a="http://schemas.openxmlformats.org/drawingml/2006/main"/>
-          <a:lstStyle xmlns:a="http://schemas.openxmlformats.org/drawingml/2006/main"/>
-          <a:p xmlns:a="http://schemas.openxmlformats.org/drawingml/2006/main">
+          <a:bodyPr/>
+          <a:lstStyle/>
+          <a:p>
             <a:endParaRPr/>
           </a:p>
         </p:txBody>
@@ -2008,14 +1973,14 @@
       <p:sp>
         <p:nvSpPr>
           <p:cNvPr id="6" name="Slide Number Placeholder 5">
-            <a:extLst xmlns:a="http://schemas.openxmlformats.org/drawingml/2006/main">
+            <a:extLst>
               <a:ext uri="{FF2B5EF4-FFF2-40B4-BE49-F238E27FC236}">
                 <a16:creationId xmlns:a16="http://schemas.microsoft.com/office/drawing/2014/main" id="{E468C605-454F-8B7B-3D33-D05911EDD86A}"/>
               </a:ext>
             </a:extLst>
           </p:cNvPr>
           <p:cNvSpPr>
-            <a:spLocks xmlns:a="http://schemas.openxmlformats.org/drawingml/2006/main" noGrp="1"/>
+            <a:spLocks noGrp="1"/>
           </p:cNvSpPr>
           <p:nvPr>
             <p:ph type="sldNum" idx="12"/>
@@ -2023,9 +1988,9 @@
         </p:nvSpPr>
         <p:spPr/>
         <p:txBody>
-          <a:bodyPr xmlns:a="http://schemas.openxmlformats.org/drawingml/2006/main"/>
-          <a:lstStyle xmlns:a="http://schemas.openxmlformats.org/drawingml/2006/main"/>
-          <a:p xmlns:a="http://schemas.openxmlformats.org/drawingml/2006/main">
+          <a:bodyPr/>
+          <a:lstStyle/>
+          <a:p>
             <a:fld id="{3721C89F-AE7A-4C3B-889F-FA429D0A7F97}" type="slidenum">
               <a:t>‹#›</a:t>
             </a:fld>
@@ -2035,11 +2000,14 @@
       </p:sp>
     </p:spTree>
   </p:cSld>
+  <p:clrMapOvr>
+    <a:masterClrMapping/>
+  </p:clrMapOvr>
 </p:sldLayout>
 </file>
 
 <file path=ppt/slideLayouts/slideLayout4.xml><?xml version="1.0" encoding="utf-8"?>
-<p:sldLayout xmlns:p="http://schemas.openxmlformats.org/presentationml/2006/main" type="twoObj" preserve="1">
+<p:sldLayout xmlns:a="http://schemas.openxmlformats.org/drawingml/2006/main" xmlns:r="http://schemas.openxmlformats.org/officeDocument/2006/relationships" xmlns:p="http://schemas.openxmlformats.org/presentationml/2006/main" type="twoObj" preserve="1">
   <p:cSld name="Two Content">
     <p:spTree>
       <p:nvGrpSpPr>
@@ -2048,62 +2016,66 @@
         <p:nvPr/>
       </p:nvGrpSpPr>
       <p:grpSpPr>
-        <a:xfrm xmlns:a="http://schemas.openxmlformats.org/drawingml/2006/main"/>
+        <a:xfrm>
+          <a:off x="0" y="0"/>
+          <a:ext cx="0" cy="0"/>
+          <a:chOff x="0" y="0"/>
+          <a:chExt cx="0" cy="0"/>
+        </a:xfrm>
       </p:grpSpPr>
       <p:sp>
         <p:nvSpPr>
           <p:cNvPr id="2" name="Title 1">
-            <a:extLst xmlns:a="http://schemas.openxmlformats.org/drawingml/2006/main">
+            <a:extLst>
               <a:ext uri="{FF2B5EF4-FFF2-40B4-BE49-F238E27FC236}">
                 <a16:creationId xmlns:a16="http://schemas.microsoft.com/office/drawing/2014/main" id="{7A305F7B-A0AC-1293-82D4-9C86467F10C8}"/>
               </a:ext>
             </a:extLst>
           </p:cNvPr>
           <p:cNvSpPr>
-            <a:spLocks xmlns:a="http://schemas.openxmlformats.org/drawingml/2006/main" noGrp="1"/>
-          </p:cNvSpPr>
-          <p:nvPr>
-            <p:ph type="title" idx="0"/>
+            <a:spLocks noGrp="1"/>
+          </p:cNvSpPr>
+          <p:nvPr>
+            <p:ph type="title"/>
           </p:nvPr>
         </p:nvSpPr>
         <p:spPr/>
         <p:txBody>
-          <a:bodyPr xmlns:a="http://schemas.openxmlformats.org/drawingml/2006/main"/>
-          <a:lstStyle xmlns:a="http://schemas.openxmlformats.org/drawingml/2006/main"/>
-          <a:p xmlns:a="http://schemas.openxmlformats.org/drawingml/2006/main">
+          <a:bodyPr/>
+          <a:lstStyle/>
+          <a:p>
             <a:r>
               <a:t>Click to edit Master title style</a:t>
             </a:r>
-            <a:endParaRPr/>
           </a:p>
         </p:txBody>
       </p:sp>
       <p:sp>
         <p:nvSpPr>
           <p:cNvPr id="3" name="Content Placeholder 2">
-            <a:extLst xmlns:a="http://schemas.openxmlformats.org/drawingml/2006/main">
+            <a:extLst>
               <a:ext uri="{FF2B5EF4-FFF2-40B4-BE49-F238E27FC236}">
                 <a16:creationId xmlns:a16="http://schemas.microsoft.com/office/drawing/2014/main" id="{BE3EC535-A3DE-99E7-ABC8-9CC4CE6E3DCE}"/>
               </a:ext>
             </a:extLst>
           </p:cNvPr>
           <p:cNvSpPr>
-            <a:spLocks xmlns:a="http://schemas.openxmlformats.org/drawingml/2006/main" noGrp="1"/>
+            <a:spLocks noGrp="1"/>
           </p:cNvSpPr>
           <p:nvPr>
             <p:ph idx="1"/>
           </p:nvPr>
         </p:nvSpPr>
         <p:spPr>
-          <a:xfrm xmlns:a="http://schemas.openxmlformats.org/drawingml/2006/main">
+          <a:xfrm>
             <a:off x="838200" y="1825625"/>
             <a:ext cx="5181600" cy="4351338"/>
           </a:xfrm>
         </p:spPr>
         <p:txBody>
-          <a:bodyPr xmlns:a="http://schemas.openxmlformats.org/drawingml/2006/main"/>
-          <a:lstStyle xmlns:a="http://schemas.openxmlformats.org/drawingml/2006/main"/>
-          <a:p xmlns:a="http://schemas.openxmlformats.org/drawingml/2006/main">
+          <a:bodyPr/>
+          <a:lstStyle/>
+          <a:p>
             <a:pPr lvl="0">
               <a:buNone/>
             </a:pPr>
@@ -2111,7 +2083,7 @@
               <a:t>Click to edit Master text styles</a:t>
             </a:r>
           </a:p>
-          <a:p xmlns:a="http://schemas.openxmlformats.org/drawingml/2006/main">
+          <a:p>
             <a:pPr lvl="1">
               <a:buNone/>
             </a:pPr>
@@ -2119,7 +2091,7 @@
               <a:t>Second level</a:t>
             </a:r>
           </a:p>
-          <a:p xmlns:a="http://schemas.openxmlformats.org/drawingml/2006/main">
+          <a:p>
             <a:pPr lvl="2">
               <a:buNone/>
             </a:pPr>
@@ -2127,7 +2099,7 @@
               <a:t>Third level</a:t>
             </a:r>
           </a:p>
-          <a:p xmlns:a="http://schemas.openxmlformats.org/drawingml/2006/main">
+          <a:p>
             <a:pPr lvl="3">
               <a:buNone/>
             </a:pPr>
@@ -2135,43 +2107,42 @@
               <a:t>Fourth level</a:t>
             </a:r>
           </a:p>
-          <a:p xmlns:a="http://schemas.openxmlformats.org/drawingml/2006/main">
+          <a:p>
             <a:pPr lvl="4">
               <a:buNone/>
             </a:pPr>
             <a:r>
               <a:t>Fifth level</a:t>
             </a:r>
-            <a:endParaRPr/>
           </a:p>
         </p:txBody>
       </p:sp>
       <p:sp>
         <p:nvSpPr>
           <p:cNvPr id="4" name="Content Placeholder 3">
-            <a:extLst xmlns:a="http://schemas.openxmlformats.org/drawingml/2006/main">
+            <a:extLst>
               <a:ext uri="{FF2B5EF4-FFF2-40B4-BE49-F238E27FC236}">
                 <a16:creationId xmlns:a16="http://schemas.microsoft.com/office/drawing/2014/main" id="{D2EDD5AB-35E0-87E1-275F-04606C697E97}"/>
               </a:ext>
             </a:extLst>
           </p:cNvPr>
           <p:cNvSpPr>
-            <a:spLocks xmlns:a="http://schemas.openxmlformats.org/drawingml/2006/main" noGrp="1"/>
+            <a:spLocks noGrp="1"/>
           </p:cNvSpPr>
           <p:nvPr>
             <p:ph idx="2"/>
           </p:nvPr>
         </p:nvSpPr>
         <p:spPr>
-          <a:xfrm xmlns:a="http://schemas.openxmlformats.org/drawingml/2006/main">
+          <a:xfrm>
             <a:off x="6172200" y="1825625"/>
             <a:ext cx="5181600" cy="4351338"/>
           </a:xfrm>
         </p:spPr>
         <p:txBody>
-          <a:bodyPr xmlns:a="http://schemas.openxmlformats.org/drawingml/2006/main"/>
-          <a:lstStyle xmlns:a="http://schemas.openxmlformats.org/drawingml/2006/main"/>
-          <a:p xmlns:a="http://schemas.openxmlformats.org/drawingml/2006/main">
+          <a:bodyPr/>
+          <a:lstStyle/>
+          <a:p>
             <a:pPr lvl="0">
               <a:buNone/>
             </a:pPr>
@@ -2179,7 +2150,7 @@
               <a:t>Click to edit Master text styles</a:t>
             </a:r>
           </a:p>
-          <a:p xmlns:a="http://schemas.openxmlformats.org/drawingml/2006/main">
+          <a:p>
             <a:pPr lvl="1">
               <a:buNone/>
             </a:pPr>
@@ -2187,7 +2158,7 @@
               <a:t>Second level</a:t>
             </a:r>
           </a:p>
-          <a:p xmlns:a="http://schemas.openxmlformats.org/drawingml/2006/main">
+          <a:p>
             <a:pPr lvl="2">
               <a:buNone/>
             </a:pPr>
@@ -2195,7 +2166,7 @@
               <a:t>Third level</a:t>
             </a:r>
           </a:p>
-          <a:p xmlns:a="http://schemas.openxmlformats.org/drawingml/2006/main">
+          <a:p>
             <a:pPr lvl="3">
               <a:buNone/>
             </a:pPr>
@@ -2203,28 +2174,27 @@
               <a:t>Fourth level</a:t>
             </a:r>
           </a:p>
-          <a:p xmlns:a="http://schemas.openxmlformats.org/drawingml/2006/main">
+          <a:p>
             <a:pPr lvl="4">
               <a:buNone/>
             </a:pPr>
             <a:r>
               <a:t>Fifth level</a:t>
             </a:r>
-            <a:endParaRPr/>
           </a:p>
         </p:txBody>
       </p:sp>
       <p:sp>
         <p:nvSpPr>
           <p:cNvPr id="5" name="Date Placeholder 4">
-            <a:extLst xmlns:a="http://schemas.openxmlformats.org/drawingml/2006/main">
+            <a:extLst>
               <a:ext uri="{FF2B5EF4-FFF2-40B4-BE49-F238E27FC236}">
                 <a16:creationId xmlns:a16="http://schemas.microsoft.com/office/drawing/2014/main" id="{EB510989-7939-77EB-0752-100DC7AFE1E7}"/>
               </a:ext>
             </a:extLst>
           </p:cNvPr>
           <p:cNvSpPr>
-            <a:spLocks xmlns:a="http://schemas.openxmlformats.org/drawingml/2006/main" noGrp="1"/>
+            <a:spLocks noGrp="1"/>
           </p:cNvSpPr>
           <p:nvPr>
             <p:ph type="dt" idx="10"/>
@@ -2232,11 +2202,11 @@
         </p:nvSpPr>
         <p:spPr/>
         <p:txBody>
-          <a:bodyPr xmlns:a="http://schemas.openxmlformats.org/drawingml/2006/main"/>
-          <a:lstStyle xmlns:a="http://schemas.openxmlformats.org/drawingml/2006/main"/>
-          <a:p xmlns:a="http://schemas.openxmlformats.org/drawingml/2006/main">
+          <a:bodyPr/>
+          <a:lstStyle/>
+          <a:p>
             <a:fld id="{EDB99004-FBBF-4BCC-9BC3-88F554ADE514}" type="datetimeFigureOut">
-              <a:t>09/10/2026</a:t>
+              <a:t>06-Oct-26</a:t>
             </a:fld>
             <a:endParaRPr/>
           </a:p>
@@ -2245,14 +2215,14 @@
       <p:sp>
         <p:nvSpPr>
           <p:cNvPr id="6" name="Footer Placeholder 5">
-            <a:extLst xmlns:a="http://schemas.openxmlformats.org/drawingml/2006/main">
+            <a:extLst>
               <a:ext uri="{FF2B5EF4-FFF2-40B4-BE49-F238E27FC236}">
                 <a16:creationId xmlns:a16="http://schemas.microsoft.com/office/drawing/2014/main" id="{E7AA337F-EF84-36B2-1842-7E5CFCFDF360}"/>
               </a:ext>
             </a:extLst>
           </p:cNvPr>
           <p:cNvSpPr>
-            <a:spLocks xmlns:a="http://schemas.openxmlformats.org/drawingml/2006/main" noGrp="1"/>
+            <a:spLocks noGrp="1"/>
           </p:cNvSpPr>
           <p:nvPr>
             <p:ph type="ftr" idx="11"/>
@@ -2260,9 +2230,9 @@
         </p:nvSpPr>
         <p:spPr/>
         <p:txBody>
-          <a:bodyPr xmlns:a="http://schemas.openxmlformats.org/drawingml/2006/main"/>
-          <a:lstStyle xmlns:a="http://schemas.openxmlformats.org/drawingml/2006/main"/>
-          <a:p xmlns:a="http://schemas.openxmlformats.org/drawingml/2006/main">
+          <a:bodyPr/>
+          <a:lstStyle/>
+          <a:p>
             <a:endParaRPr/>
           </a:p>
         </p:txBody>
@@ -2270,14 +2240,14 @@
       <p:sp>
         <p:nvSpPr>
           <p:cNvPr id="7" name="Slide Number Placeholder 6">
-            <a:extLst xmlns:a="http://schemas.openxmlformats.org/drawingml/2006/main">
+            <a:extLst>
               <a:ext uri="{FF2B5EF4-FFF2-40B4-BE49-F238E27FC236}">
                 <a16:creationId xmlns:a16="http://schemas.microsoft.com/office/drawing/2014/main" id="{2F313D7F-1250-5155-CC8F-1D7F74BF58BE}"/>
               </a:ext>
             </a:extLst>
           </p:cNvPr>
           <p:cNvSpPr>
-            <a:spLocks xmlns:a="http://schemas.openxmlformats.org/drawingml/2006/main" noGrp="1"/>
+            <a:spLocks noGrp="1"/>
           </p:cNvSpPr>
           <p:nvPr>
             <p:ph type="sldNum" idx="12"/>
@@ -2285,9 +2255,9 @@
         </p:nvSpPr>
         <p:spPr/>
         <p:txBody>
-          <a:bodyPr xmlns:a="http://schemas.openxmlformats.org/drawingml/2006/main"/>
-          <a:lstStyle xmlns:a="http://schemas.openxmlformats.org/drawingml/2006/main"/>
-          <a:p xmlns:a="http://schemas.openxmlformats.org/drawingml/2006/main">
+          <a:bodyPr/>
+          <a:lstStyle/>
+          <a:p>
             <a:fld id="{3721C89F-AE7A-4C3B-889F-FA429D0A7F97}" type="slidenum">
               <a:t>‹#›</a:t>
             </a:fld>
@@ -2297,11 +2267,14 @@
       </p:sp>
     </p:spTree>
   </p:cSld>
+  <p:clrMapOvr>
+    <a:masterClrMapping/>
+  </p:clrMapOvr>
 </p:sldLayout>
 </file>
 
 <file path=ppt/slideLayouts/slideLayout5.xml><?xml version="1.0" encoding="utf-8"?>
-<p:sldLayout xmlns:p="http://schemas.openxmlformats.org/presentationml/2006/main" type="twoTxTwoObj" preserve="1">
+<p:sldLayout xmlns:a="http://schemas.openxmlformats.org/drawingml/2006/main" xmlns:r="http://schemas.openxmlformats.org/officeDocument/2006/relationships" xmlns:p="http://schemas.openxmlformats.org/presentationml/2006/main" type="twoTxTwoObj" preserve="1">
   <p:cSld name="Comparison">
     <p:spTree>
       <p:nvGrpSpPr>
@@ -2310,66 +2283,70 @@
         <p:nvPr/>
       </p:nvGrpSpPr>
       <p:grpSpPr>
-        <a:xfrm xmlns:a="http://schemas.openxmlformats.org/drawingml/2006/main"/>
+        <a:xfrm>
+          <a:off x="0" y="0"/>
+          <a:ext cx="0" cy="0"/>
+          <a:chOff x="0" y="0"/>
+          <a:chExt cx="0" cy="0"/>
+        </a:xfrm>
       </p:grpSpPr>
       <p:sp>
         <p:nvSpPr>
           <p:cNvPr id="2" name="Title 1">
-            <a:extLst xmlns:a="http://schemas.openxmlformats.org/drawingml/2006/main">
+            <a:extLst>
               <a:ext uri="{FF2B5EF4-FFF2-40B4-BE49-F238E27FC236}">
                 <a16:creationId xmlns:a16="http://schemas.microsoft.com/office/drawing/2014/main" id="{50BF6333-8C0F-A01D-5F86-7F6CB2076CCD}"/>
               </a:ext>
             </a:extLst>
           </p:cNvPr>
           <p:cNvSpPr>
-            <a:spLocks xmlns:a="http://schemas.openxmlformats.org/drawingml/2006/main" noGrp="1"/>
-          </p:cNvSpPr>
-          <p:nvPr>
-            <p:ph type="title" idx="0"/>
+            <a:spLocks noGrp="1"/>
+          </p:cNvSpPr>
+          <p:nvPr>
+            <p:ph type="title"/>
           </p:nvPr>
         </p:nvSpPr>
         <p:spPr>
-          <a:xfrm xmlns:a="http://schemas.openxmlformats.org/drawingml/2006/main">
+          <a:xfrm>
             <a:off x="839788" y="365125"/>
             <a:ext cx="10515600" cy="1325563"/>
           </a:xfrm>
         </p:spPr>
         <p:txBody>
-          <a:bodyPr xmlns:a="http://schemas.openxmlformats.org/drawingml/2006/main"/>
-          <a:lstStyle xmlns:a="http://schemas.openxmlformats.org/drawingml/2006/main"/>
-          <a:p xmlns:a="http://schemas.openxmlformats.org/drawingml/2006/main">
+          <a:bodyPr/>
+          <a:lstStyle/>
+          <a:p>
             <a:r>
               <a:t>Click to edit Master title style</a:t>
             </a:r>
-            <a:endParaRPr/>
           </a:p>
         </p:txBody>
       </p:sp>
       <p:sp>
         <p:nvSpPr>
           <p:cNvPr id="3" name="Text Placeholder 2">
-            <a:extLst xmlns:a="http://schemas.openxmlformats.org/drawingml/2006/main">
+            <a:extLst>
               <a:ext uri="{FF2B5EF4-FFF2-40B4-BE49-F238E27FC236}">
                 <a16:creationId xmlns:a16="http://schemas.microsoft.com/office/drawing/2014/main" id="{38B0F6EB-5092-BB38-AE7A-D8A53CBE1282}"/>
               </a:ext>
             </a:extLst>
           </p:cNvPr>
           <p:cNvSpPr>
-            <a:spLocks xmlns:a="http://schemas.openxmlformats.org/drawingml/2006/main" noGrp="1"/>
+            <a:spLocks noGrp="1"/>
           </p:cNvSpPr>
           <p:nvPr>
             <p:ph type="body" idx="1"/>
           </p:nvPr>
         </p:nvSpPr>
         <p:spPr>
-          <a:xfrm xmlns:a="http://schemas.openxmlformats.org/drawingml/2006/main">
+          <a:xfrm>
             <a:off x="839788" y="1681163"/>
             <a:ext cx="5157787" cy="823912"/>
           </a:xfrm>
         </p:spPr>
         <p:txBody>
-          <a:bodyPr xmlns:a="http://schemas.openxmlformats.org/drawingml/2006/main" anchor="b"/>
-          <a:lstStyle xmlns:a="http://schemas.openxmlformats.org/drawingml/2006/main">
+          <a:bodyPr anchor="b"/>
+          <a:lstStyle>
             <a:lvl1pPr marL="0" indent="0">
               <a:buNone/>
               <a:defRPr sz="2400" b="1"/>
@@ -2407,7 +2384,7 @@
               <a:defRPr sz="1600" b="1"/>
             </a:lvl9pPr>
           </a:lstStyle>
-          <a:p xmlns:a="http://schemas.openxmlformats.org/drawingml/2006/main">
+          <a:p>
             <a:pPr lvl="0">
               <a:buNone/>
             </a:pPr>
@@ -2420,29 +2397,29 @@
       <p:sp>
         <p:nvSpPr>
           <p:cNvPr id="4" name="Content Placeholder 3">
-            <a:extLst xmlns:a="http://schemas.openxmlformats.org/drawingml/2006/main">
+            <a:extLst>
               <a:ext uri="{FF2B5EF4-FFF2-40B4-BE49-F238E27FC236}">
                 <a16:creationId xmlns:a16="http://schemas.microsoft.com/office/drawing/2014/main" id="{A62B800C-4EB4-5C42-1D78-6D44443DC87B}"/>
               </a:ext>
             </a:extLst>
           </p:cNvPr>
           <p:cNvSpPr>
-            <a:spLocks xmlns:a="http://schemas.openxmlformats.org/drawingml/2006/main" noGrp="1"/>
+            <a:spLocks noGrp="1"/>
           </p:cNvSpPr>
           <p:nvPr>
             <p:ph idx="2"/>
           </p:nvPr>
         </p:nvSpPr>
         <p:spPr>
-          <a:xfrm xmlns:a="http://schemas.openxmlformats.org/drawingml/2006/main">
+          <a:xfrm>
             <a:off x="839788" y="2505075"/>
             <a:ext cx="5157787" cy="3684588"/>
           </a:xfrm>
         </p:spPr>
         <p:txBody>
-          <a:bodyPr xmlns:a="http://schemas.openxmlformats.org/drawingml/2006/main"/>
-          <a:lstStyle xmlns:a="http://schemas.openxmlformats.org/drawingml/2006/main"/>
-          <a:p xmlns:a="http://schemas.openxmlformats.org/drawingml/2006/main">
+          <a:bodyPr/>
+          <a:lstStyle/>
+          <a:p>
             <a:pPr lvl="0">
               <a:buNone/>
             </a:pPr>
@@ -2450,7 +2427,7 @@
               <a:t>Click to edit Master text styles</a:t>
             </a:r>
           </a:p>
-          <a:p xmlns:a="http://schemas.openxmlformats.org/drawingml/2006/main">
+          <a:p>
             <a:pPr lvl="1">
               <a:buNone/>
             </a:pPr>
@@ -2458,7 +2435,7 @@
               <a:t>Second level</a:t>
             </a:r>
           </a:p>
-          <a:p xmlns:a="http://schemas.openxmlformats.org/drawingml/2006/main">
+          <a:p>
             <a:pPr lvl="2">
               <a:buNone/>
             </a:pPr>
@@ -2466,7 +2443,7 @@
               <a:t>Third level</a:t>
             </a:r>
           </a:p>
-          <a:p xmlns:a="http://schemas.openxmlformats.org/drawingml/2006/main">
+          <a:p>
             <a:pPr lvl="3">
               <a:buNone/>
             </a:pPr>
@@ -2474,42 +2451,41 @@
               <a:t>Fourth level</a:t>
             </a:r>
           </a:p>
-          <a:p xmlns:a="http://schemas.openxmlformats.org/drawingml/2006/main">
+          <a:p>
             <a:pPr lvl="4">
               <a:buNone/>
             </a:pPr>
             <a:r>
               <a:t>Fifth level</a:t>
             </a:r>
-            <a:endParaRPr/>
           </a:p>
         </p:txBody>
       </p:sp>
       <p:sp>
         <p:nvSpPr>
           <p:cNvPr id="5" name="Text Placeholder 4">
-            <a:extLst xmlns:a="http://schemas.openxmlformats.org/drawingml/2006/main">
+            <a:extLst>
               <a:ext uri="{FF2B5EF4-FFF2-40B4-BE49-F238E27FC236}">
                 <a16:creationId xmlns:a16="http://schemas.microsoft.com/office/drawing/2014/main" id="{80E5F6E3-A638-F3AA-A0D8-8243AE1143A5}"/>
               </a:ext>
             </a:extLst>
           </p:cNvPr>
           <p:cNvSpPr>
-            <a:spLocks xmlns:a="http://schemas.openxmlformats.org/drawingml/2006/main" noGrp="1"/>
+            <a:spLocks noGrp="1"/>
           </p:cNvSpPr>
           <p:nvPr>
             <p:ph type="body" idx="3"/>
           </p:nvPr>
         </p:nvSpPr>
         <p:spPr>
-          <a:xfrm xmlns:a="http://schemas.openxmlformats.org/drawingml/2006/main">
+          <a:xfrm>
             <a:off x="6172200" y="1681163"/>
             <a:ext cx="5183188" cy="823912"/>
           </a:xfrm>
         </p:spPr>
         <p:txBody>
-          <a:bodyPr xmlns:a="http://schemas.openxmlformats.org/drawingml/2006/main" anchor="b"/>
-          <a:lstStyle xmlns:a="http://schemas.openxmlformats.org/drawingml/2006/main">
+          <a:bodyPr anchor="b"/>
+          <a:lstStyle>
             <a:lvl1pPr marL="0" indent="0">
               <a:buNone/>
               <a:defRPr sz="2400" b="1"/>
@@ -2547,7 +2523,7 @@
               <a:defRPr sz="1600" b="1"/>
             </a:lvl9pPr>
           </a:lstStyle>
-          <a:p xmlns:a="http://schemas.openxmlformats.org/drawingml/2006/main">
+          <a:p>
             <a:pPr lvl="0">
               <a:buNone/>
             </a:pPr>
@@ -2560,29 +2536,29 @@
       <p:sp>
         <p:nvSpPr>
           <p:cNvPr id="6" name="Content Placeholder 5">
-            <a:extLst xmlns:a="http://schemas.openxmlformats.org/drawingml/2006/main">
+            <a:extLst>
               <a:ext uri="{FF2B5EF4-FFF2-40B4-BE49-F238E27FC236}">
                 <a16:creationId xmlns:a16="http://schemas.microsoft.com/office/drawing/2014/main" id="{32606B9C-947E-6E0E-3FB7-6409CA1AA08B}"/>
               </a:ext>
             </a:extLst>
           </p:cNvPr>
           <p:cNvSpPr>
-            <a:spLocks xmlns:a="http://schemas.openxmlformats.org/drawingml/2006/main" noGrp="1"/>
+            <a:spLocks noGrp="1"/>
           </p:cNvSpPr>
           <p:nvPr>
             <p:ph idx="4"/>
           </p:nvPr>
         </p:nvSpPr>
         <p:spPr>
-          <a:xfrm xmlns:a="http://schemas.openxmlformats.org/drawingml/2006/main">
+          <a:xfrm>
             <a:off x="6172200" y="2505075"/>
             <a:ext cx="5183188" cy="3684588"/>
           </a:xfrm>
         </p:spPr>
         <p:txBody>
-          <a:bodyPr xmlns:a="http://schemas.openxmlformats.org/drawingml/2006/main"/>
-          <a:lstStyle xmlns:a="http://schemas.openxmlformats.org/drawingml/2006/main"/>
-          <a:p xmlns:a="http://schemas.openxmlformats.org/drawingml/2006/main">
+          <a:bodyPr/>
+          <a:lstStyle/>
+          <a:p>
             <a:pPr lvl="0">
               <a:buNone/>
             </a:pPr>
@@ -2590,7 +2566,7 @@
               <a:t>Click to edit Master text styles</a:t>
             </a:r>
           </a:p>
-          <a:p xmlns:a="http://schemas.openxmlformats.org/drawingml/2006/main">
+          <a:p>
             <a:pPr lvl="1">
               <a:buNone/>
             </a:pPr>
@@ -2598,7 +2574,7 @@
               <a:t>Second level</a:t>
             </a:r>
           </a:p>
-          <a:p xmlns:a="http://schemas.openxmlformats.org/drawingml/2006/main">
+          <a:p>
             <a:pPr lvl="2">
               <a:buNone/>
             </a:pPr>
@@ -2606,7 +2582,7 @@
               <a:t>Third level</a:t>
             </a:r>
           </a:p>
-          <a:p xmlns:a="http://schemas.openxmlformats.org/drawingml/2006/main">
+          <a:p>
             <a:pPr lvl="3">
               <a:buNone/>
             </a:pPr>
@@ -2614,28 +2590,27 @@
               <a:t>Fourth level</a:t>
             </a:r>
           </a:p>
-          <a:p xmlns:a="http://schemas.openxmlformats.org/drawingml/2006/main">
+          <a:p>
             <a:pPr lvl="4">
               <a:buNone/>
             </a:pPr>
             <a:r>
               <a:t>Fifth level</a:t>
             </a:r>
-            <a:endParaRPr/>
           </a:p>
         </p:txBody>
       </p:sp>
       <p:sp>
         <p:nvSpPr>
           <p:cNvPr id="7" name="Date Placeholder 6">
-            <a:extLst xmlns:a="http://schemas.openxmlformats.org/drawingml/2006/main">
+            <a:extLst>
               <a:ext uri="{FF2B5EF4-FFF2-40B4-BE49-F238E27FC236}">
                 <a16:creationId xmlns:a16="http://schemas.microsoft.com/office/drawing/2014/main" id="{B749EA02-9727-20CE-6F2F-AEE777190319}"/>
               </a:ext>
             </a:extLst>
           </p:cNvPr>
           <p:cNvSpPr>
-            <a:spLocks xmlns:a="http://schemas.openxmlformats.org/drawingml/2006/main" noGrp="1"/>
+            <a:spLocks noGrp="1"/>
           </p:cNvSpPr>
           <p:nvPr>
             <p:ph type="dt" idx="10"/>
@@ -2643,11 +2618,11 @@
         </p:nvSpPr>
         <p:spPr/>
         <p:txBody>
-          <a:bodyPr xmlns:a="http://schemas.openxmlformats.org/drawingml/2006/main"/>
-          <a:lstStyle xmlns:a="http://schemas.openxmlformats.org/drawingml/2006/main"/>
-          <a:p xmlns:a="http://schemas.openxmlformats.org/drawingml/2006/main">
+          <a:bodyPr/>
+          <a:lstStyle/>
+          <a:p>
             <a:fld id="{EDB99004-FBBF-4BCC-9BC3-88F554ADE514}" type="datetimeFigureOut">
-              <a:t>09/10/2026</a:t>
+              <a:t>06-Oct-26</a:t>
             </a:fld>
             <a:endParaRPr/>
           </a:p>
@@ -2656,14 +2631,14 @@
       <p:sp>
         <p:nvSpPr>
           <p:cNvPr id="8" name="Footer Placeholder 7">
-            <a:extLst xmlns:a="http://schemas.openxmlformats.org/drawingml/2006/main">
+            <a:extLst>
               <a:ext uri="{FF2B5EF4-FFF2-40B4-BE49-F238E27FC236}">
                 <a16:creationId xmlns:a16="http://schemas.microsoft.com/office/drawing/2014/main" id="{40455506-EB11-CC08-A287-4C40A1068BE4}"/>
               </a:ext>
             </a:extLst>
           </p:cNvPr>
           <p:cNvSpPr>
-            <a:spLocks xmlns:a="http://schemas.openxmlformats.org/drawingml/2006/main" noGrp="1"/>
+            <a:spLocks noGrp="1"/>
           </p:cNvSpPr>
           <p:nvPr>
             <p:ph type="ftr" idx="11"/>
@@ -2671,9 +2646,9 @@
         </p:nvSpPr>
         <p:spPr/>
         <p:txBody>
-          <a:bodyPr xmlns:a="http://schemas.openxmlformats.org/drawingml/2006/main"/>
-          <a:lstStyle xmlns:a="http://schemas.openxmlformats.org/drawingml/2006/main"/>
-          <a:p xmlns:a="http://schemas.openxmlformats.org/drawingml/2006/main">
+          <a:bodyPr/>
+          <a:lstStyle/>
+          <a:p>
             <a:endParaRPr/>
           </a:p>
         </p:txBody>
@@ -2681,14 +2656,14 @@
       <p:sp>
         <p:nvSpPr>
           <p:cNvPr id="9" name="Slide Number Placeholder 8">
-            <a:extLst xmlns:a="http://schemas.openxmlformats.org/drawingml/2006/main">
+            <a:extLst>
               <a:ext uri="{FF2B5EF4-FFF2-40B4-BE49-F238E27FC236}">
                 <a16:creationId xmlns:a16="http://schemas.microsoft.com/office/drawing/2014/main" id="{9729B98D-1ABA-F8A4-E267-33AA94C81478}"/>
               </a:ext>
             </a:extLst>
           </p:cNvPr>
           <p:cNvSpPr>
-            <a:spLocks xmlns:a="http://schemas.openxmlformats.org/drawingml/2006/main" noGrp="1"/>
+            <a:spLocks noGrp="1"/>
           </p:cNvSpPr>
           <p:nvPr>
             <p:ph type="sldNum" idx="12"/>
@@ -2696,9 +2671,9 @@
         </p:nvSpPr>
         <p:spPr/>
         <p:txBody>
-          <a:bodyPr xmlns:a="http://schemas.openxmlformats.org/drawingml/2006/main"/>
-          <a:lstStyle xmlns:a="http://schemas.openxmlformats.org/drawingml/2006/main"/>
-          <a:p xmlns:a="http://schemas.openxmlformats.org/drawingml/2006/main">
+          <a:bodyPr/>
+          <a:lstStyle/>
+          <a:p>
             <a:fld id="{3721C89F-AE7A-4C3B-889F-FA429D0A7F97}" type="slidenum">
               <a:t>‹#›</a:t>
             </a:fld>
@@ -2708,11 +2683,14 @@
       </p:sp>
     </p:spTree>
   </p:cSld>
+  <p:clrMapOvr>
+    <a:masterClrMapping/>
+  </p:clrMapOvr>
 </p:sldLayout>
 </file>
 
 <file path=ppt/slideLayouts/slideLayout6.xml><?xml version="1.0" encoding="utf-8"?>
-<p:sldLayout xmlns:p="http://schemas.openxmlformats.org/presentationml/2006/main" type="titleOnly" preserve="1">
+<p:sldLayout xmlns:a="http://schemas.openxmlformats.org/drawingml/2006/main" xmlns:r="http://schemas.openxmlformats.org/officeDocument/2006/relationships" xmlns:p="http://schemas.openxmlformats.org/presentationml/2006/main" type="titleOnly" preserve="1">
   <p:cSld name="Title Only">
     <p:spTree>
       <p:nvGrpSpPr>
@@ -2721,47 +2699,51 @@
         <p:nvPr/>
       </p:nvGrpSpPr>
       <p:grpSpPr>
-        <a:xfrm xmlns:a="http://schemas.openxmlformats.org/drawingml/2006/main"/>
+        <a:xfrm>
+          <a:off x="0" y="0"/>
+          <a:ext cx="0" cy="0"/>
+          <a:chOff x="0" y="0"/>
+          <a:chExt cx="0" cy="0"/>
+        </a:xfrm>
       </p:grpSpPr>
       <p:sp>
         <p:nvSpPr>
           <p:cNvPr id="2" name="Title 1">
-            <a:extLst xmlns:a="http://schemas.openxmlformats.org/drawingml/2006/main">
+            <a:extLst>
               <a:ext uri="{FF2B5EF4-FFF2-40B4-BE49-F238E27FC236}">
                 <a16:creationId xmlns:a16="http://schemas.microsoft.com/office/drawing/2014/main" id="{9DC44A6F-AB0F-F2C2-8460-CD823A4D0309}"/>
               </a:ext>
             </a:extLst>
           </p:cNvPr>
           <p:cNvSpPr>
-            <a:spLocks xmlns:a="http://schemas.openxmlformats.org/drawingml/2006/main" noGrp="1"/>
-          </p:cNvSpPr>
-          <p:nvPr>
-            <p:ph type="title" idx="0"/>
+            <a:spLocks noGrp="1"/>
+          </p:cNvSpPr>
+          <p:nvPr>
+            <p:ph type="title"/>
           </p:nvPr>
         </p:nvSpPr>
         <p:spPr/>
         <p:txBody>
-          <a:bodyPr xmlns:a="http://schemas.openxmlformats.org/drawingml/2006/main"/>
-          <a:lstStyle xmlns:a="http://schemas.openxmlformats.org/drawingml/2006/main"/>
-          <a:p xmlns:a="http://schemas.openxmlformats.org/drawingml/2006/main">
+          <a:bodyPr/>
+          <a:lstStyle/>
+          <a:p>
             <a:r>
               <a:t>Click to edit Master title style</a:t>
             </a:r>
-            <a:endParaRPr/>
           </a:p>
         </p:txBody>
       </p:sp>
       <p:sp>
         <p:nvSpPr>
           <p:cNvPr id="3" name="Date Placeholder 2">
-            <a:extLst xmlns:a="http://schemas.openxmlformats.org/drawingml/2006/main">
+            <a:extLst>
               <a:ext uri="{FF2B5EF4-FFF2-40B4-BE49-F238E27FC236}">
                 <a16:creationId xmlns:a16="http://schemas.microsoft.com/office/drawing/2014/main" id="{AABB32F1-CA42-21EF-BB3D-FD9E4BF810F5}"/>
               </a:ext>
             </a:extLst>
           </p:cNvPr>
           <p:cNvSpPr>
-            <a:spLocks xmlns:a="http://schemas.openxmlformats.org/drawingml/2006/main" noGrp="1"/>
+            <a:spLocks noGrp="1"/>
           </p:cNvSpPr>
           <p:nvPr>
             <p:ph type="dt" idx="10"/>
@@ -2769,11 +2751,11 @@
         </p:nvSpPr>
         <p:spPr/>
         <p:txBody>
-          <a:bodyPr xmlns:a="http://schemas.openxmlformats.org/drawingml/2006/main"/>
-          <a:lstStyle xmlns:a="http://schemas.openxmlformats.org/drawingml/2006/main"/>
-          <a:p xmlns:a="http://schemas.openxmlformats.org/drawingml/2006/main">
+          <a:bodyPr/>
+          <a:lstStyle/>
+          <a:p>
             <a:fld id="{EDB99004-FBBF-4BCC-9BC3-88F554ADE514}" type="datetimeFigureOut">
-              <a:t>09/10/2026</a:t>
+              <a:t>06-Oct-26</a:t>
             </a:fld>
             <a:endParaRPr/>
           </a:p>
@@ -2782,14 +2764,14 @@
       <p:sp>
         <p:nvSpPr>
           <p:cNvPr id="4" name="Footer Placeholder 3">
-            <a:extLst xmlns:a="http://schemas.openxmlformats.org/drawingml/2006/main">
+            <a:extLst>
               <a:ext uri="{FF2B5EF4-FFF2-40B4-BE49-F238E27FC236}">
                 <a16:creationId xmlns:a16="http://schemas.microsoft.com/office/drawing/2014/main" id="{58D18139-25BA-A607-F49E-FAC8B9FF80F4}"/>
               </a:ext>
             </a:extLst>
           </p:cNvPr>
           <p:cNvSpPr>
-            <a:spLocks xmlns:a="http://schemas.openxmlformats.org/drawingml/2006/main" noGrp="1"/>
+            <a:spLocks noGrp="1"/>
           </p:cNvSpPr>
           <p:nvPr>
             <p:ph type="ftr" idx="11"/>
@@ -2797,9 +2779,9 @@
         </p:nvSpPr>
         <p:spPr/>
         <p:txBody>
-          <a:bodyPr xmlns:a="http://schemas.openxmlformats.org/drawingml/2006/main"/>
-          <a:lstStyle xmlns:a="http://schemas.openxmlformats.org/drawingml/2006/main"/>
-          <a:p xmlns:a="http://schemas.openxmlformats.org/drawingml/2006/main">
+          <a:bodyPr/>
+          <a:lstStyle/>
+          <a:p>
             <a:endParaRPr/>
           </a:p>
         </p:txBody>
@@ -2807,14 +2789,14 @@
       <p:sp>
         <p:nvSpPr>
           <p:cNvPr id="5" name="Slide Number Placeholder 4">
-            <a:extLst xmlns:a="http://schemas.openxmlformats.org/drawingml/2006/main">
+            <a:extLst>
               <a:ext uri="{FF2B5EF4-FFF2-40B4-BE49-F238E27FC236}">
                 <a16:creationId xmlns:a16="http://schemas.microsoft.com/office/drawing/2014/main" id="{AB1A14D5-22B8-8B31-2F15-3327A9172AE8}"/>
               </a:ext>
             </a:extLst>
           </p:cNvPr>
           <p:cNvSpPr>
-            <a:spLocks xmlns:a="http://schemas.openxmlformats.org/drawingml/2006/main" noGrp="1"/>
+            <a:spLocks noGrp="1"/>
           </p:cNvSpPr>
           <p:nvPr>
             <p:ph type="sldNum" idx="12"/>
@@ -2822,9 +2804,9 @@
         </p:nvSpPr>
         <p:spPr/>
         <p:txBody>
-          <a:bodyPr xmlns:a="http://schemas.openxmlformats.org/drawingml/2006/main"/>
-          <a:lstStyle xmlns:a="http://schemas.openxmlformats.org/drawingml/2006/main"/>
-          <a:p xmlns:a="http://schemas.openxmlformats.org/drawingml/2006/main">
+          <a:bodyPr/>
+          <a:lstStyle/>
+          <a:p>
             <a:fld id="{3721C89F-AE7A-4C3B-889F-FA429D0A7F97}" type="slidenum">
               <a:t>‹#›</a:t>
             </a:fld>
@@ -2834,11 +2816,14 @@
       </p:sp>
     </p:spTree>
   </p:cSld>
+  <p:clrMapOvr>
+    <a:masterClrMapping/>
+  </p:clrMapOvr>
 </p:sldLayout>
 </file>
 
 <file path=ppt/slideLayouts/slideLayout7.xml><?xml version="1.0" encoding="utf-8"?>
-<p:sldLayout xmlns:p="http://schemas.openxmlformats.org/presentationml/2006/main" type="blank" preserve="1">
+<p:sldLayout xmlns:a="http://schemas.openxmlformats.org/drawingml/2006/main" xmlns:r="http://schemas.openxmlformats.org/officeDocument/2006/relationships" xmlns:p="http://schemas.openxmlformats.org/presentationml/2006/main" type="blank" preserve="1">
   <p:cSld name="Blank">
     <p:spTree>
       <p:nvGrpSpPr>
@@ -2847,19 +2832,24 @@
         <p:nvPr/>
       </p:nvGrpSpPr>
       <p:grpSpPr>
-        <a:xfrm xmlns:a="http://schemas.openxmlformats.org/drawingml/2006/main"/>
+        <a:xfrm>
+          <a:off x="0" y="0"/>
+          <a:ext cx="0" cy="0"/>
+          <a:chOff x="0" y="0"/>
+          <a:chExt cx="0" cy="0"/>
+        </a:xfrm>
       </p:grpSpPr>
       <p:sp>
         <p:nvSpPr>
           <p:cNvPr id="2" name="Date Placeholder 1">
-            <a:extLst xmlns:a="http://schemas.openxmlformats.org/drawingml/2006/main">
+            <a:extLst>
               <a:ext uri="{FF2B5EF4-FFF2-40B4-BE49-F238E27FC236}">
                 <a16:creationId xmlns:a16="http://schemas.microsoft.com/office/drawing/2014/main" id="{EF651FDA-FADC-718F-3679-DD1D82038C7D}"/>
               </a:ext>
             </a:extLst>
           </p:cNvPr>
           <p:cNvSpPr>
-            <a:spLocks xmlns:a="http://schemas.openxmlformats.org/drawingml/2006/main" noGrp="1"/>
+            <a:spLocks noGrp="1"/>
           </p:cNvSpPr>
           <p:nvPr>
             <p:ph type="dt" idx="10"/>
@@ -2867,11 +2857,11 @@
         </p:nvSpPr>
         <p:spPr/>
         <p:txBody>
-          <a:bodyPr xmlns:a="http://schemas.openxmlformats.org/drawingml/2006/main"/>
-          <a:lstStyle xmlns:a="http://schemas.openxmlformats.org/drawingml/2006/main"/>
-          <a:p xmlns:a="http://schemas.openxmlformats.org/drawingml/2006/main">
+          <a:bodyPr/>
+          <a:lstStyle/>
+          <a:p>
             <a:fld id="{EDB99004-FBBF-4BCC-9BC3-88F554ADE514}" type="datetimeFigureOut">
-              <a:t>09/10/2026</a:t>
+              <a:t>06-Oct-26</a:t>
             </a:fld>
             <a:endParaRPr/>
           </a:p>
@@ -2880,14 +2870,14 @@
       <p:sp>
         <p:nvSpPr>
           <p:cNvPr id="3" name="Footer Placeholder 2">
-            <a:extLst xmlns:a="http://schemas.openxmlformats.org/drawingml/2006/main">
+            <a:extLst>
               <a:ext uri="{FF2B5EF4-FFF2-40B4-BE49-F238E27FC236}">
                 <a16:creationId xmlns:a16="http://schemas.microsoft.com/office/drawing/2014/main" id="{9B6CFA23-F762-DAC7-F055-34BBBEEA1BED}"/>
               </a:ext>
             </a:extLst>
           </p:cNvPr>
           <p:cNvSpPr>
-            <a:spLocks xmlns:a="http://schemas.openxmlformats.org/drawingml/2006/main" noGrp="1"/>
+            <a:spLocks noGrp="1"/>
           </p:cNvSpPr>
           <p:nvPr>
             <p:ph type="ftr" idx="11"/>
@@ -2895,9 +2885,9 @@
         </p:nvSpPr>
         <p:spPr/>
         <p:txBody>
-          <a:bodyPr xmlns:a="http://schemas.openxmlformats.org/drawingml/2006/main"/>
-          <a:lstStyle xmlns:a="http://schemas.openxmlformats.org/drawingml/2006/main"/>
-          <a:p xmlns:a="http://schemas.openxmlformats.org/drawingml/2006/main">
+          <a:bodyPr/>
+          <a:lstStyle/>
+          <a:p>
             <a:endParaRPr/>
           </a:p>
         </p:txBody>
@@ -2905,14 +2895,14 @@
       <p:sp>
         <p:nvSpPr>
           <p:cNvPr id="4" name="Slide Number Placeholder 3">
-            <a:extLst xmlns:a="http://schemas.openxmlformats.org/drawingml/2006/main">
+            <a:extLst>
               <a:ext uri="{FF2B5EF4-FFF2-40B4-BE49-F238E27FC236}">
                 <a16:creationId xmlns:a16="http://schemas.microsoft.com/office/drawing/2014/main" id="{0EE4845E-D252-E586-D35F-F6971F010B7E}"/>
               </a:ext>
             </a:extLst>
           </p:cNvPr>
           <p:cNvSpPr>
-            <a:spLocks xmlns:a="http://schemas.openxmlformats.org/drawingml/2006/main" noGrp="1"/>
+            <a:spLocks noGrp="1"/>
           </p:cNvSpPr>
           <p:nvPr>
             <p:ph type="sldNum" idx="12"/>
@@ -2920,9 +2910,9 @@
         </p:nvSpPr>
         <p:spPr/>
         <p:txBody>
-          <a:bodyPr xmlns:a="http://schemas.openxmlformats.org/drawingml/2006/main"/>
-          <a:lstStyle xmlns:a="http://schemas.openxmlformats.org/drawingml/2006/main"/>
-          <a:p xmlns:a="http://schemas.openxmlformats.org/drawingml/2006/main">
+          <a:bodyPr/>
+          <a:lstStyle/>
+          <a:p>
             <a:fld id="{3721C89F-AE7A-4C3B-889F-FA429D0A7F97}" type="slidenum">
               <a:t>‹#›</a:t>
             </a:fld>
@@ -2932,11 +2922,14 @@
       </p:sp>
     </p:spTree>
   </p:cSld>
+  <p:clrMapOvr>
+    <a:masterClrMapping/>
+  </p:clrMapOvr>
 </p:sldLayout>
 </file>
 
 <file path=ppt/slideLayouts/slideLayout8.xml><?xml version="1.0" encoding="utf-8"?>
-<p:sldLayout xmlns:p="http://schemas.openxmlformats.org/presentationml/2006/main" type="objTx" preserve="1">
+<p:sldLayout xmlns:a="http://schemas.openxmlformats.org/drawingml/2006/main" xmlns:r="http://schemas.openxmlformats.org/officeDocument/2006/relationships" xmlns:p="http://schemas.openxmlformats.org/presentationml/2006/main" type="objTx" preserve="1">
   <p:cSld name="Content with Caption">
     <p:spTree>
       <p:nvGrpSpPr>
@@ -2945,71 +2938,75 @@
         <p:nvPr/>
       </p:nvGrpSpPr>
       <p:grpSpPr>
-        <a:xfrm xmlns:a="http://schemas.openxmlformats.org/drawingml/2006/main"/>
+        <a:xfrm>
+          <a:off x="0" y="0"/>
+          <a:ext cx="0" cy="0"/>
+          <a:chOff x="0" y="0"/>
+          <a:chExt cx="0" cy="0"/>
+        </a:xfrm>
       </p:grpSpPr>
       <p:sp>
         <p:nvSpPr>
           <p:cNvPr id="2" name="Title 1">
-            <a:extLst xmlns:a="http://schemas.openxmlformats.org/drawingml/2006/main">
+            <a:extLst>
               <a:ext uri="{FF2B5EF4-FFF2-40B4-BE49-F238E27FC236}">
                 <a16:creationId xmlns:a16="http://schemas.microsoft.com/office/drawing/2014/main" id="{3F3CC88C-4219-7229-D578-F248CEBE55E1}"/>
               </a:ext>
             </a:extLst>
           </p:cNvPr>
           <p:cNvSpPr>
-            <a:spLocks xmlns:a="http://schemas.openxmlformats.org/drawingml/2006/main" noGrp="1"/>
-          </p:cNvSpPr>
-          <p:nvPr>
-            <p:ph type="title" idx="0"/>
+            <a:spLocks noGrp="1"/>
+          </p:cNvSpPr>
+          <p:nvPr>
+            <p:ph type="title"/>
           </p:nvPr>
         </p:nvSpPr>
         <p:spPr>
-          <a:xfrm xmlns:a="http://schemas.openxmlformats.org/drawingml/2006/main">
+          <a:xfrm>
             <a:off x="839788" y="457200"/>
             <a:ext cx="3932237" cy="1600200"/>
           </a:xfrm>
         </p:spPr>
         <p:txBody>
-          <a:bodyPr xmlns:a="http://schemas.openxmlformats.org/drawingml/2006/main" anchor="b"/>
-          <a:lstStyle xmlns:a="http://schemas.openxmlformats.org/drawingml/2006/main">
+          <a:bodyPr anchor="b"/>
+          <a:lstStyle>
             <a:lvl1pPr>
               <a:buNone/>
               <a:defRPr sz="3200"/>
             </a:lvl1pPr>
           </a:lstStyle>
-          <a:p xmlns:a="http://schemas.openxmlformats.org/drawingml/2006/main">
+          <a:p>
             <a:r>
               <a:t>Click to edit Master title style</a:t>
             </a:r>
-            <a:endParaRPr/>
           </a:p>
         </p:txBody>
       </p:sp>
       <p:sp>
         <p:nvSpPr>
           <p:cNvPr id="3" name="Content Placeholder 2">
-            <a:extLst xmlns:a="http://schemas.openxmlformats.org/drawingml/2006/main">
+            <a:extLst>
               <a:ext uri="{FF2B5EF4-FFF2-40B4-BE49-F238E27FC236}">
                 <a16:creationId xmlns:a16="http://schemas.microsoft.com/office/drawing/2014/main" id="{778FCADE-8154-624B-6907-062ADFA184E2}"/>
               </a:ext>
             </a:extLst>
           </p:cNvPr>
           <p:cNvSpPr>
-            <a:spLocks xmlns:a="http://schemas.openxmlformats.org/drawingml/2006/main" noGrp="1"/>
+            <a:spLocks noGrp="1"/>
           </p:cNvSpPr>
           <p:nvPr>
             <p:ph idx="1"/>
           </p:nvPr>
         </p:nvSpPr>
         <p:spPr>
-          <a:xfrm xmlns:a="http://schemas.openxmlformats.org/drawingml/2006/main">
+          <a:xfrm>
             <a:off x="5183188" y="987425"/>
             <a:ext cx="6172200" cy="4873625"/>
           </a:xfrm>
         </p:spPr>
         <p:txBody>
-          <a:bodyPr xmlns:a="http://schemas.openxmlformats.org/drawingml/2006/main"/>
-          <a:lstStyle xmlns:a="http://schemas.openxmlformats.org/drawingml/2006/main">
+          <a:bodyPr/>
+          <a:lstStyle>
             <a:lvl1pPr>
               <a:buNone/>
               <a:defRPr sz="3200"/>
@@ -3047,7 +3044,7 @@
               <a:defRPr sz="2000"/>
             </a:lvl9pPr>
           </a:lstStyle>
-          <a:p xmlns:a="http://schemas.openxmlformats.org/drawingml/2006/main">
+          <a:p>
             <a:pPr lvl="0">
               <a:buNone/>
             </a:pPr>
@@ -3055,7 +3052,7 @@
               <a:t>Click to edit Master text styles</a:t>
             </a:r>
           </a:p>
-          <a:p xmlns:a="http://schemas.openxmlformats.org/drawingml/2006/main">
+          <a:p>
             <a:pPr lvl="1">
               <a:buNone/>
             </a:pPr>
@@ -3063,7 +3060,7 @@
               <a:t>Second level</a:t>
             </a:r>
           </a:p>
-          <a:p xmlns:a="http://schemas.openxmlformats.org/drawingml/2006/main">
+          <a:p>
             <a:pPr lvl="2">
               <a:buNone/>
             </a:pPr>
@@ -3071,7 +3068,7 @@
               <a:t>Third level</a:t>
             </a:r>
           </a:p>
-          <a:p xmlns:a="http://schemas.openxmlformats.org/drawingml/2006/main">
+          <a:p>
             <a:pPr lvl="3">
               <a:buNone/>
             </a:pPr>
@@ -3079,42 +3076,41 @@
               <a:t>Fourth level</a:t>
             </a:r>
           </a:p>
-          <a:p xmlns:a="http://schemas.openxmlformats.org/drawingml/2006/main">
+          <a:p>
             <a:pPr lvl="4">
               <a:buNone/>
             </a:pPr>
             <a:r>
               <a:t>Fifth level</a:t>
             </a:r>
-            <a:endParaRPr/>
           </a:p>
         </p:txBody>
       </p:sp>
       <p:sp>
         <p:nvSpPr>
           <p:cNvPr id="4" name="Text Placeholder 3">
-            <a:extLst xmlns:a="http://schemas.openxmlformats.org/drawingml/2006/main">
+            <a:extLst>
               <a:ext uri="{FF2B5EF4-FFF2-40B4-BE49-F238E27FC236}">
                 <a16:creationId xmlns:a16="http://schemas.microsoft.com/office/drawing/2014/main" id="{DF788E2C-3D70-2723-B03E-3E54F428E714}"/>
               </a:ext>
             </a:extLst>
           </p:cNvPr>
           <p:cNvSpPr>
-            <a:spLocks xmlns:a="http://schemas.openxmlformats.org/drawingml/2006/main" noGrp="1"/>
+            <a:spLocks noGrp="1"/>
           </p:cNvSpPr>
           <p:nvPr>
             <p:ph type="body" idx="2"/>
           </p:nvPr>
         </p:nvSpPr>
         <p:spPr>
-          <a:xfrm xmlns:a="http://schemas.openxmlformats.org/drawingml/2006/main">
+          <a:xfrm>
             <a:off x="839788" y="2057400"/>
             <a:ext cx="3932237" cy="3811588"/>
           </a:xfrm>
         </p:spPr>
         <p:txBody>
-          <a:bodyPr xmlns:a="http://schemas.openxmlformats.org/drawingml/2006/main"/>
-          <a:lstStyle xmlns:a="http://schemas.openxmlformats.org/drawingml/2006/main">
+          <a:bodyPr/>
+          <a:lstStyle>
             <a:lvl1pPr marL="0" indent="0">
               <a:buNone/>
               <a:defRPr sz="1600"/>
@@ -3152,7 +3148,7 @@
               <a:defRPr sz="1000"/>
             </a:lvl9pPr>
           </a:lstStyle>
-          <a:p xmlns:a="http://schemas.openxmlformats.org/drawingml/2006/main">
+          <a:p>
             <a:pPr lvl="0">
               <a:buNone/>
             </a:pPr>
@@ -3165,14 +3161,14 @@
       <p:sp>
         <p:nvSpPr>
           <p:cNvPr id="5" name="Date Placeholder 4">
-            <a:extLst xmlns:a="http://schemas.openxmlformats.org/drawingml/2006/main">
+            <a:extLst>
               <a:ext uri="{FF2B5EF4-FFF2-40B4-BE49-F238E27FC236}">
                 <a16:creationId xmlns:a16="http://schemas.microsoft.com/office/drawing/2014/main" id="{CDF4CF5D-DB9F-46BD-AA7E-99259ABBDFB6}"/>
               </a:ext>
             </a:extLst>
           </p:cNvPr>
           <p:cNvSpPr>
-            <a:spLocks xmlns:a="http://schemas.openxmlformats.org/drawingml/2006/main" noGrp="1"/>
+            <a:spLocks noGrp="1"/>
           </p:cNvSpPr>
           <p:nvPr>
             <p:ph type="dt" idx="10"/>
@@ -3180,11 +3176,11 @@
         </p:nvSpPr>
         <p:spPr/>
         <p:txBody>
-          <a:bodyPr xmlns:a="http://schemas.openxmlformats.org/drawingml/2006/main"/>
-          <a:lstStyle xmlns:a="http://schemas.openxmlformats.org/drawingml/2006/main"/>
-          <a:p xmlns:a="http://schemas.openxmlformats.org/drawingml/2006/main">
+          <a:bodyPr/>
+          <a:lstStyle/>
+          <a:p>
             <a:fld id="{EDB99004-FBBF-4BCC-9BC3-88F554ADE514}" type="datetimeFigureOut">
-              <a:t>09/10/2026</a:t>
+              <a:t>06-Oct-26</a:t>
             </a:fld>
             <a:endParaRPr/>
           </a:p>
@@ -3193,14 +3189,14 @@
       <p:sp>
         <p:nvSpPr>
           <p:cNvPr id="6" name="Footer Placeholder 5">
-            <a:extLst xmlns:a="http://schemas.openxmlformats.org/drawingml/2006/main">
+            <a:extLst>
               <a:ext uri="{FF2B5EF4-FFF2-40B4-BE49-F238E27FC236}">
                 <a16:creationId xmlns:a16="http://schemas.microsoft.com/office/drawing/2014/main" id="{BDD966BC-122D-0C34-66A6-82641A0F33C0}"/>
               </a:ext>
             </a:extLst>
           </p:cNvPr>
           <p:cNvSpPr>
-            <a:spLocks xmlns:a="http://schemas.openxmlformats.org/drawingml/2006/main" noGrp="1"/>
+            <a:spLocks noGrp="1"/>
           </p:cNvSpPr>
           <p:nvPr>
             <p:ph type="ftr" idx="11"/>
@@ -3208,9 +3204,9 @@
         </p:nvSpPr>
         <p:spPr/>
         <p:txBody>
-          <a:bodyPr xmlns:a="http://schemas.openxmlformats.org/drawingml/2006/main"/>
-          <a:lstStyle xmlns:a="http://schemas.openxmlformats.org/drawingml/2006/main"/>
-          <a:p xmlns:a="http://schemas.openxmlformats.org/drawingml/2006/main">
+          <a:bodyPr/>
+          <a:lstStyle/>
+          <a:p>
             <a:endParaRPr/>
           </a:p>
         </p:txBody>
@@ -3218,14 +3214,14 @@
       <p:sp>
         <p:nvSpPr>
           <p:cNvPr id="7" name="Slide Number Placeholder 6">
-            <a:extLst xmlns:a="http://schemas.openxmlformats.org/drawingml/2006/main">
+            <a:extLst>
               <a:ext uri="{FF2B5EF4-FFF2-40B4-BE49-F238E27FC236}">
                 <a16:creationId xmlns:a16="http://schemas.microsoft.com/office/drawing/2014/main" id="{E30D53ED-CC38-27CB-CE75-0363724E29C7}"/>
               </a:ext>
             </a:extLst>
           </p:cNvPr>
           <p:cNvSpPr>
-            <a:spLocks xmlns:a="http://schemas.openxmlformats.org/drawingml/2006/main" noGrp="1"/>
+            <a:spLocks noGrp="1"/>
           </p:cNvSpPr>
           <p:nvPr>
             <p:ph type="sldNum" idx="12"/>
@@ -3233,9 +3229,9 @@
         </p:nvSpPr>
         <p:spPr/>
         <p:txBody>
-          <a:bodyPr xmlns:a="http://schemas.openxmlformats.org/drawingml/2006/main"/>
-          <a:lstStyle xmlns:a="http://schemas.openxmlformats.org/drawingml/2006/main"/>
-          <a:p xmlns:a="http://schemas.openxmlformats.org/drawingml/2006/main">
+          <a:bodyPr/>
+          <a:lstStyle/>
+          <a:p>
             <a:fld id="{3721C89F-AE7A-4C3B-889F-FA429D0A7F97}" type="slidenum">
               <a:t>‹#›</a:t>
             </a:fld>
@@ -3245,11 +3241,14 @@
       </p:sp>
     </p:spTree>
   </p:cSld>
+  <p:clrMapOvr>
+    <a:masterClrMapping/>
+  </p:clrMapOvr>
 </p:sldLayout>
 </file>
 
 <file path=ppt/slideLayouts/slideLayout9.xml><?xml version="1.0" encoding="utf-8"?>
-<p:sldLayout xmlns:p="http://schemas.openxmlformats.org/presentationml/2006/main" type="picTx" preserve="1">
+<p:sldLayout xmlns:a="http://schemas.openxmlformats.org/drawingml/2006/main" xmlns:r="http://schemas.openxmlformats.org/officeDocument/2006/relationships" xmlns:p="http://schemas.openxmlformats.org/presentationml/2006/main" type="picTx" preserve="1">
   <p:cSld name="Picture with Caption">
     <p:spTree>
       <p:nvGrpSpPr>
@@ -3258,71 +3257,75 @@
         <p:nvPr/>
       </p:nvGrpSpPr>
       <p:grpSpPr>
-        <a:xfrm xmlns:a="http://schemas.openxmlformats.org/drawingml/2006/main"/>
+        <a:xfrm>
+          <a:off x="0" y="0"/>
+          <a:ext cx="0" cy="0"/>
+          <a:chOff x="0" y="0"/>
+          <a:chExt cx="0" cy="0"/>
+        </a:xfrm>
       </p:grpSpPr>
       <p:sp>
         <p:nvSpPr>
           <p:cNvPr id="2" name="Title 1">
-            <a:extLst xmlns:a="http://schemas.openxmlformats.org/drawingml/2006/main">
+            <a:extLst>
               <a:ext uri="{FF2B5EF4-FFF2-40B4-BE49-F238E27FC236}">
                 <a16:creationId xmlns:a16="http://schemas.microsoft.com/office/drawing/2014/main" id="{ED3D30A6-B84A-5729-409B-EECAD253844D}"/>
               </a:ext>
             </a:extLst>
           </p:cNvPr>
           <p:cNvSpPr>
-            <a:spLocks xmlns:a="http://schemas.openxmlformats.org/drawingml/2006/main" noGrp="1"/>
-          </p:cNvSpPr>
-          <p:nvPr>
-            <p:ph type="title" idx="0"/>
+            <a:spLocks noGrp="1"/>
+          </p:cNvSpPr>
+          <p:nvPr>
+            <p:ph type="title"/>
           </p:nvPr>
         </p:nvSpPr>
         <p:spPr>
-          <a:xfrm xmlns:a="http://schemas.openxmlformats.org/drawingml/2006/main">
+          <a:xfrm>
             <a:off x="839788" y="457200"/>
             <a:ext cx="3932237" cy="1600200"/>
           </a:xfrm>
         </p:spPr>
         <p:txBody>
-          <a:bodyPr xmlns:a="http://schemas.openxmlformats.org/drawingml/2006/main" anchor="b"/>
-          <a:lstStyle xmlns:a="http://schemas.openxmlformats.org/drawingml/2006/main">
+          <a:bodyPr anchor="b"/>
+          <a:lstStyle>
             <a:lvl1pPr>
               <a:buNone/>
               <a:defRPr sz="3200"/>
             </a:lvl1pPr>
           </a:lstStyle>
-          <a:p xmlns:a="http://schemas.openxmlformats.org/drawingml/2006/main">
+          <a:p>
             <a:r>
               <a:t>Click to edit Master title style</a:t>
             </a:r>
-            <a:endParaRPr/>
           </a:p>
         </p:txBody>
       </p:sp>
       <p:sp>
         <p:nvSpPr>
           <p:cNvPr id="3" name="Picture Placeholder 2">
-            <a:extLst xmlns:a="http://schemas.openxmlformats.org/drawingml/2006/main">
+            <a:extLst>
               <a:ext uri="{FF2B5EF4-FFF2-40B4-BE49-F238E27FC236}">
                 <a16:creationId xmlns:a16="http://schemas.microsoft.com/office/drawing/2014/main" id="{D18942B2-A346-D722-B157-F50399986B7A}"/>
               </a:ext>
             </a:extLst>
           </p:cNvPr>
           <p:cNvSpPr>
-            <a:spLocks xmlns:a="http://schemas.openxmlformats.org/drawingml/2006/main" noGrp="1"/>
+            <a:spLocks noGrp="1"/>
           </p:cNvSpPr>
           <p:nvPr>
             <p:ph type="pic" idx="1"/>
           </p:nvPr>
         </p:nvSpPr>
         <p:spPr>
-          <a:xfrm xmlns:a="http://schemas.openxmlformats.org/drawingml/2006/main">
+          <a:xfrm>
             <a:off x="5183188" y="987425"/>
             <a:ext cx="6172200" cy="4873625"/>
           </a:xfrm>
         </p:spPr>
         <p:txBody>
-          <a:bodyPr xmlns:a="http://schemas.openxmlformats.org/drawingml/2006/main"/>
-          <a:lstStyle xmlns:a="http://schemas.openxmlformats.org/drawingml/2006/main">
+          <a:bodyPr/>
+          <a:lstStyle>
             <a:lvl1pPr marL="0" indent="0">
               <a:buNone/>
               <a:defRPr sz="3200"/>
@@ -3360,7 +3363,7 @@
               <a:defRPr sz="2000"/>
             </a:lvl9pPr>
           </a:lstStyle>
-          <a:p xmlns:a="http://schemas.openxmlformats.org/drawingml/2006/main">
+          <a:p>
             <a:endParaRPr/>
           </a:p>
         </p:txBody>
@@ -3368,28 +3371,28 @@
       <p:sp>
         <p:nvSpPr>
           <p:cNvPr id="4" name="Text Placeholder 3">
-            <a:extLst xmlns:a="http://schemas.openxmlformats.org/drawingml/2006/main">
+            <a:extLst>
               <a:ext uri="{FF2B5EF4-FFF2-40B4-BE49-F238E27FC236}">
                 <a16:creationId xmlns:a16="http://schemas.microsoft.com/office/drawing/2014/main" id="{B4D48F45-61CA-44E0-DBAE-9D36F6365D33}"/>
               </a:ext>
             </a:extLst>
           </p:cNvPr>
           <p:cNvSpPr>
-            <a:spLocks xmlns:a="http://schemas.openxmlformats.org/drawingml/2006/main" noGrp="1"/>
+            <a:spLocks noGrp="1"/>
           </p:cNvSpPr>
           <p:nvPr>
             <p:ph type="body" idx="2"/>
           </p:nvPr>
         </p:nvSpPr>
         <p:spPr>
-          <a:xfrm xmlns:a="http://schemas.openxmlformats.org/drawingml/2006/main">
+          <a:xfrm>
             <a:off x="839788" y="2057400"/>
             <a:ext cx="3932237" cy="3811588"/>
           </a:xfrm>
         </p:spPr>
         <p:txBody>
-          <a:bodyPr xmlns:a="http://schemas.openxmlformats.org/drawingml/2006/main"/>
-          <a:lstStyle xmlns:a="http://schemas.openxmlformats.org/drawingml/2006/main">
+          <a:bodyPr/>
+          <a:lstStyle>
             <a:lvl1pPr marL="0" indent="0">
               <a:buNone/>
               <a:defRPr sz="1600"/>
@@ -3427,7 +3430,7 @@
               <a:defRPr sz="1000"/>
             </a:lvl9pPr>
           </a:lstStyle>
-          <a:p xmlns:a="http://schemas.openxmlformats.org/drawingml/2006/main">
+          <a:p>
             <a:pPr lvl="0">
               <a:buNone/>
             </a:pPr>
@@ -3440,14 +3443,14 @@
       <p:sp>
         <p:nvSpPr>
           <p:cNvPr id="5" name="Date Placeholder 4">
-            <a:extLst xmlns:a="http://schemas.openxmlformats.org/drawingml/2006/main">
+            <a:extLst>
               <a:ext uri="{FF2B5EF4-FFF2-40B4-BE49-F238E27FC236}">
                 <a16:creationId xmlns:a16="http://schemas.microsoft.com/office/drawing/2014/main" id="{F87F642F-E08C-B0D6-DCF9-FC1121C3A7D2}"/>
               </a:ext>
             </a:extLst>
           </p:cNvPr>
           <p:cNvSpPr>
-            <a:spLocks xmlns:a="http://schemas.openxmlformats.org/drawingml/2006/main" noGrp="1"/>
+            <a:spLocks noGrp="1"/>
           </p:cNvSpPr>
           <p:nvPr>
             <p:ph type="dt" idx="10"/>
@@ -3455,11 +3458,11 @@
         </p:nvSpPr>
         <p:spPr/>
         <p:txBody>
-          <a:bodyPr xmlns:a="http://schemas.openxmlformats.org/drawingml/2006/main"/>
-          <a:lstStyle xmlns:a="http://schemas.openxmlformats.org/drawingml/2006/main"/>
-          <a:p xmlns:a="http://schemas.openxmlformats.org/drawingml/2006/main">
+          <a:bodyPr/>
+          <a:lstStyle/>
+          <a:p>
             <a:fld id="{EDB99004-FBBF-4BCC-9BC3-88F554ADE514}" type="datetimeFigureOut">
-              <a:t>09/10/2026</a:t>
+              <a:t>06-Oct-26</a:t>
             </a:fld>
             <a:endParaRPr/>
           </a:p>
@@ -3468,14 +3471,14 @@
       <p:sp>
         <p:nvSpPr>
           <p:cNvPr id="6" name="Footer Placeholder 5">
-            <a:extLst xmlns:a="http://schemas.openxmlformats.org/drawingml/2006/main">
+            <a:extLst>
               <a:ext uri="{FF2B5EF4-FFF2-40B4-BE49-F238E27FC236}">
                 <a16:creationId xmlns:a16="http://schemas.microsoft.com/office/drawing/2014/main" id="{615CD439-5831-B89F-A032-126BDC3BCCD4}"/>
               </a:ext>
             </a:extLst>
           </p:cNvPr>
           <p:cNvSpPr>
-            <a:spLocks xmlns:a="http://schemas.openxmlformats.org/drawingml/2006/main" noGrp="1"/>
+            <a:spLocks noGrp="1"/>
           </p:cNvSpPr>
           <p:nvPr>
             <p:ph type="ftr" idx="11"/>
@@ -3483,9 +3486,9 @@
         </p:nvSpPr>
         <p:spPr/>
         <p:txBody>
-          <a:bodyPr xmlns:a="http://schemas.openxmlformats.org/drawingml/2006/main"/>
-          <a:lstStyle xmlns:a="http://schemas.openxmlformats.org/drawingml/2006/main"/>
-          <a:p xmlns:a="http://schemas.openxmlformats.org/drawingml/2006/main">
+          <a:bodyPr/>
+          <a:lstStyle/>
+          <a:p>
             <a:endParaRPr/>
           </a:p>
         </p:txBody>
@@ -3493,14 +3496,14 @@
       <p:sp>
         <p:nvSpPr>
           <p:cNvPr id="7" name="Slide Number Placeholder 6">
-            <a:extLst xmlns:a="http://schemas.openxmlformats.org/drawingml/2006/main">
+            <a:extLst>
               <a:ext uri="{FF2B5EF4-FFF2-40B4-BE49-F238E27FC236}">
                 <a16:creationId xmlns:a16="http://schemas.microsoft.com/office/drawing/2014/main" id="{ACF8F52A-1268-BF36-C904-53855E60D1CE}"/>
               </a:ext>
             </a:extLst>
           </p:cNvPr>
           <p:cNvSpPr>
-            <a:spLocks xmlns:a="http://schemas.openxmlformats.org/drawingml/2006/main" noGrp="1"/>
+            <a:spLocks noGrp="1"/>
           </p:cNvSpPr>
           <p:nvPr>
             <p:ph type="sldNum" idx="12"/>
@@ -3508,9 +3511,9 @@
         </p:nvSpPr>
         <p:spPr/>
         <p:txBody>
-          <a:bodyPr xmlns:a="http://schemas.openxmlformats.org/drawingml/2006/main"/>
-          <a:lstStyle xmlns:a="http://schemas.openxmlformats.org/drawingml/2006/main"/>
-          <a:p xmlns:a="http://schemas.openxmlformats.org/drawingml/2006/main">
+          <a:bodyPr/>
+          <a:lstStyle/>
+          <a:p>
             <a:fld id="{3721C89F-AE7A-4C3B-889F-FA429D0A7F97}" type="slidenum">
               <a:t>‹#›</a:t>
             </a:fld>
@@ -3520,15 +3523,18 @@
       </p:sp>
     </p:spTree>
   </p:cSld>
+  <p:clrMapOvr>
+    <a:masterClrMapping/>
+  </p:clrMapOvr>
 </p:sldLayout>
 </file>
 
 <file path=ppt/slideMasters/slideMaster1.xml><?xml version="1.0" encoding="utf-8"?>
-<p:sldMaster xmlns:p="http://schemas.openxmlformats.org/presentationml/2006/main">
+<p:sldMaster xmlns:a="http://schemas.openxmlformats.org/drawingml/2006/main" xmlns:r="http://schemas.openxmlformats.org/officeDocument/2006/relationships" xmlns:p="http://schemas.openxmlformats.org/presentationml/2006/main">
   <p:cSld>
     <p:bg>
       <p:bgRef idx="1001">
-        <a:schemeClr xmlns:a="http://schemas.openxmlformats.org/drawingml/2006/main" val="bg1"/>
+        <a:schemeClr val="bg1"/>
       </p:bgRef>
     </p:bg>
     <p:spTree>
@@ -3538,77 +3544,81 @@
         <p:nvPr/>
       </p:nvGrpSpPr>
       <p:grpSpPr>
-        <a:xfrm xmlns:a="http://schemas.openxmlformats.org/drawingml/2006/main"/>
+        <a:xfrm>
+          <a:off x="0" y="0"/>
+          <a:ext cx="0" cy="0"/>
+          <a:chOff x="0" y="0"/>
+          <a:chExt cx="0" cy="0"/>
+        </a:xfrm>
       </p:grpSpPr>
       <p:sp>
         <p:nvSpPr>
           <p:cNvPr id="2" name="Title Placeholder 1">
-            <a:extLst xmlns:a="http://schemas.openxmlformats.org/drawingml/2006/main">
+            <a:extLst>
               <a:ext uri="{FF2B5EF4-FFF2-40B4-BE49-F238E27FC236}">
                 <a16:creationId xmlns:a16="http://schemas.microsoft.com/office/drawing/2014/main" id="{07F3D97B-511D-E64B-9F91-7097B8212017}"/>
               </a:ext>
             </a:extLst>
           </p:cNvPr>
           <p:cNvSpPr>
-            <a:spLocks xmlns:a="http://schemas.openxmlformats.org/drawingml/2006/main" noGrp="1"/>
-          </p:cNvSpPr>
-          <p:nvPr>
-            <p:ph type="title" idx="0"/>
+            <a:spLocks noGrp="1"/>
+          </p:cNvSpPr>
+          <p:nvPr>
+            <p:ph type="title"/>
           </p:nvPr>
         </p:nvSpPr>
         <p:spPr>
-          <a:xfrm xmlns:a="http://schemas.openxmlformats.org/drawingml/2006/main">
+          <a:xfrm>
             <a:off x="838200" y="365125"/>
             <a:ext cx="10515600" cy="1325563"/>
           </a:xfrm>
-          <a:prstGeom xmlns:a="http://schemas.openxmlformats.org/drawingml/2006/main" prst="rect">
+          <a:prstGeom prst="rect">
             <a:avLst/>
           </a:prstGeom>
         </p:spPr>
         <p:txBody>
-          <a:bodyPr xmlns:a="http://schemas.openxmlformats.org/drawingml/2006/main" vert="horz" lIns="91440" tIns="45720" rIns="91440" bIns="45720" anchor="ctr">
+          <a:bodyPr vert="horz" lIns="91440" tIns="45720" rIns="91440" bIns="45720" anchor="ctr">
             <a:normAutofit/>
           </a:bodyPr>
-          <a:lstStyle xmlns:a="http://schemas.openxmlformats.org/drawingml/2006/main"/>
-          <a:p xmlns:a="http://schemas.openxmlformats.org/drawingml/2006/main">
+          <a:lstStyle/>
+          <a:p>
             <a:r>
               <a:t>Click to edit Master title style</a:t>
             </a:r>
-            <a:endParaRPr/>
           </a:p>
         </p:txBody>
       </p:sp>
       <p:sp>
         <p:nvSpPr>
           <p:cNvPr id="3" name="Text Placeholder 2">
-            <a:extLst xmlns:a="http://schemas.openxmlformats.org/drawingml/2006/main">
+            <a:extLst>
               <a:ext uri="{FF2B5EF4-FFF2-40B4-BE49-F238E27FC236}">
                 <a16:creationId xmlns:a16="http://schemas.microsoft.com/office/drawing/2014/main" id="{7D5744D8-7A9E-E0ED-82DF-9733866DDA60}"/>
               </a:ext>
             </a:extLst>
           </p:cNvPr>
           <p:cNvSpPr>
-            <a:spLocks xmlns:a="http://schemas.openxmlformats.org/drawingml/2006/main" noGrp="1"/>
+            <a:spLocks noGrp="1"/>
           </p:cNvSpPr>
           <p:nvPr>
             <p:ph type="body" idx="1"/>
           </p:nvPr>
         </p:nvSpPr>
         <p:spPr>
-          <a:xfrm xmlns:a="http://schemas.openxmlformats.org/drawingml/2006/main">
+          <a:xfrm>
             <a:off x="838200" y="1825625"/>
             <a:ext cx="10515600" cy="4351338"/>
           </a:xfrm>
-          <a:prstGeom xmlns:a="http://schemas.openxmlformats.org/drawingml/2006/main" prst="rect">
+          <a:prstGeom prst="rect">
             <a:avLst/>
           </a:prstGeom>
         </p:spPr>
         <p:txBody>
-          <a:bodyPr xmlns:a="http://schemas.openxmlformats.org/drawingml/2006/main" vert="horz" lIns="91440" tIns="45720" rIns="91440" bIns="45720">
+          <a:bodyPr vert="horz" lIns="91440" tIns="45720" rIns="91440" bIns="45720">
             <a:normAutofit/>
           </a:bodyPr>
-          <a:lstStyle xmlns:a="http://schemas.openxmlformats.org/drawingml/2006/main"/>
-          <a:p xmlns:a="http://schemas.openxmlformats.org/drawingml/2006/main">
+          <a:lstStyle/>
+          <a:p>
             <a:pPr lvl="0">
               <a:buNone/>
             </a:pPr>
@@ -3616,7 +3626,7 @@
               <a:t>Click to edit Master text styles</a:t>
             </a:r>
           </a:p>
-          <a:p xmlns:a="http://schemas.openxmlformats.org/drawingml/2006/main">
+          <a:p>
             <a:pPr lvl="1">
               <a:buNone/>
             </a:pPr>
@@ -3624,7 +3634,7 @@
               <a:t>Second level</a:t>
             </a:r>
           </a:p>
-          <a:p xmlns:a="http://schemas.openxmlformats.org/drawingml/2006/main">
+          <a:p>
             <a:pPr lvl="2">
               <a:buNone/>
             </a:pPr>
@@ -3632,7 +3642,7 @@
               <a:t>Third level</a:t>
             </a:r>
           </a:p>
-          <a:p xmlns:a="http://schemas.openxmlformats.org/drawingml/2006/main">
+          <a:p>
             <a:pPr lvl="3">
               <a:buNone/>
             </a:pPr>
@@ -3640,45 +3650,44 @@
               <a:t>Fourth level</a:t>
             </a:r>
           </a:p>
-          <a:p xmlns:a="http://schemas.openxmlformats.org/drawingml/2006/main">
+          <a:p>
             <a:pPr lvl="4">
               <a:buNone/>
             </a:pPr>
             <a:r>
               <a:t>Fifth level</a:t>
             </a:r>
-            <a:endParaRPr/>
           </a:p>
         </p:txBody>
       </p:sp>
       <p:sp>
         <p:nvSpPr>
           <p:cNvPr id="4" name="Date Placeholder 3">
-            <a:extLst xmlns:a="http://schemas.openxmlformats.org/drawingml/2006/main">
+            <a:extLst>
               <a:ext uri="{FF2B5EF4-FFF2-40B4-BE49-F238E27FC236}">
                 <a16:creationId xmlns:a16="http://schemas.microsoft.com/office/drawing/2014/main" id="{EDF6EFA3-0111-31E5-4E51-7B8F9DEA332C}"/>
               </a:ext>
             </a:extLst>
           </p:cNvPr>
           <p:cNvSpPr>
-            <a:spLocks xmlns:a="http://schemas.openxmlformats.org/drawingml/2006/main" noGrp="1"/>
+            <a:spLocks noGrp="1"/>
           </p:cNvSpPr>
           <p:nvPr>
             <p:ph type="dt" idx="2"/>
           </p:nvPr>
         </p:nvSpPr>
         <p:spPr>
-          <a:xfrm xmlns:a="http://schemas.openxmlformats.org/drawingml/2006/main">
+          <a:xfrm>
             <a:off x="838200" y="6356350"/>
             <a:ext cx="2743200" cy="365125"/>
           </a:xfrm>
-          <a:prstGeom xmlns:a="http://schemas.openxmlformats.org/drawingml/2006/main" prst="rect">
+          <a:prstGeom prst="rect">
             <a:avLst/>
           </a:prstGeom>
         </p:spPr>
         <p:txBody>
-          <a:bodyPr xmlns:a="http://schemas.openxmlformats.org/drawingml/2006/main" vert="horz" lIns="91440" tIns="45720" rIns="91440" bIns="45720" anchor="ctr"/>
-          <a:lstStyle xmlns:a="http://schemas.openxmlformats.org/drawingml/2006/main">
+          <a:bodyPr vert="horz" lIns="91440" tIns="45720" rIns="91440" bIns="45720" anchor="ctr"/>
+          <a:lstStyle>
             <a:lvl1pPr algn="l">
               <a:buNone/>
               <a:defRPr sz="1200">
@@ -3690,9 +3699,9 @@
               </a:defRPr>
             </a:lvl1pPr>
           </a:lstStyle>
-          <a:p xmlns:a="http://schemas.openxmlformats.org/drawingml/2006/main">
+          <a:p>
             <a:fld id="{EDB99004-FBBF-4BCC-9BC3-88F554ADE514}" type="datetimeFigureOut">
-              <a:t>09/10/2026</a:t>
+              <a:t>06-Oct-26</a:t>
             </a:fld>
             <a:endParaRPr/>
           </a:p>
@@ -3701,31 +3710,31 @@
       <p:sp>
         <p:nvSpPr>
           <p:cNvPr id="5" name="Footer Placeholder 4">
-            <a:extLst xmlns:a="http://schemas.openxmlformats.org/drawingml/2006/main">
+            <a:extLst>
               <a:ext uri="{FF2B5EF4-FFF2-40B4-BE49-F238E27FC236}">
                 <a16:creationId xmlns:a16="http://schemas.microsoft.com/office/drawing/2014/main" id="{C3804E89-7CB4-43E2-759A-8B18BC095A8F}"/>
               </a:ext>
             </a:extLst>
           </p:cNvPr>
           <p:cNvSpPr>
-            <a:spLocks xmlns:a="http://schemas.openxmlformats.org/drawingml/2006/main" noGrp="1"/>
+            <a:spLocks noGrp="1"/>
           </p:cNvSpPr>
           <p:nvPr>
             <p:ph type="ftr" idx="3"/>
           </p:nvPr>
         </p:nvSpPr>
         <p:spPr>
-          <a:xfrm xmlns:a="http://schemas.openxmlformats.org/drawingml/2006/main">
+          <a:xfrm>
             <a:off x="4038600" y="6356350"/>
             <a:ext cx="4114800" cy="365125"/>
           </a:xfrm>
-          <a:prstGeom xmlns:a="http://schemas.openxmlformats.org/drawingml/2006/main" prst="rect">
+          <a:prstGeom prst="rect">
             <a:avLst/>
           </a:prstGeom>
         </p:spPr>
         <p:txBody>
-          <a:bodyPr xmlns:a="http://schemas.openxmlformats.org/drawingml/2006/main" vert="horz" lIns="91440" tIns="45720" rIns="91440" bIns="45720" anchor="ctr"/>
-          <a:lstStyle xmlns:a="http://schemas.openxmlformats.org/drawingml/2006/main">
+          <a:bodyPr vert="horz" lIns="91440" tIns="45720" rIns="91440" bIns="45720" anchor="ctr"/>
+          <a:lstStyle>
             <a:lvl1pPr algn="ctr">
               <a:buNone/>
               <a:defRPr sz="1200">
@@ -3737,7 +3746,7 @@
               </a:defRPr>
             </a:lvl1pPr>
           </a:lstStyle>
-          <a:p xmlns:a="http://schemas.openxmlformats.org/drawingml/2006/main">
+          <a:p>
             <a:endParaRPr/>
           </a:p>
         </p:txBody>
@@ -3745,31 +3754,31 @@
       <p:sp>
         <p:nvSpPr>
           <p:cNvPr id="6" name="Slide Number Placeholder 5">
-            <a:extLst xmlns:a="http://schemas.openxmlformats.org/drawingml/2006/main">
+            <a:extLst>
               <a:ext uri="{FF2B5EF4-FFF2-40B4-BE49-F238E27FC236}">
                 <a16:creationId xmlns:a16="http://schemas.microsoft.com/office/drawing/2014/main" id="{013A3C9D-A059-CF8F-49C2-BF85966941AF}"/>
               </a:ext>
             </a:extLst>
           </p:cNvPr>
           <p:cNvSpPr>
-            <a:spLocks xmlns:a="http://schemas.openxmlformats.org/drawingml/2006/main" noGrp="1"/>
+            <a:spLocks noGrp="1"/>
           </p:cNvSpPr>
           <p:nvPr>
             <p:ph type="sldNum" idx="4"/>
           </p:nvPr>
         </p:nvSpPr>
         <p:spPr>
-          <a:xfrm xmlns:a="http://schemas.openxmlformats.org/drawingml/2006/main">
+          <a:xfrm>
             <a:off x="8610600" y="6356350"/>
             <a:ext cx="2743200" cy="365125"/>
           </a:xfrm>
-          <a:prstGeom xmlns:a="http://schemas.openxmlformats.org/drawingml/2006/main" prst="rect">
+          <a:prstGeom prst="rect">
             <a:avLst/>
           </a:prstGeom>
         </p:spPr>
         <p:txBody>
-          <a:bodyPr xmlns:a="http://schemas.openxmlformats.org/drawingml/2006/main" vert="horz" lIns="91440" tIns="45720" rIns="91440" bIns="45720" anchor="ctr"/>
-          <a:lstStyle xmlns:a="http://schemas.openxmlformats.org/drawingml/2006/main">
+          <a:bodyPr vert="horz" lIns="91440" tIns="45720" rIns="91440" bIns="45720" anchor="ctr"/>
+          <a:lstStyle>
             <a:lvl1pPr algn="r">
               <a:buNone/>
               <a:defRPr sz="1200">
@@ -3781,7 +3790,7 @@
               </a:defRPr>
             </a:lvl1pPr>
           </a:lstStyle>
-          <a:p xmlns:a="http://schemas.openxmlformats.org/drawingml/2006/main">
+          <a:p>
             <a:fld id="{3721C89F-AE7A-4C3B-889F-FA429D0A7F97}" type="slidenum">
               <a:t>‹#›</a:t>
             </a:fld>
@@ -3793,21 +3802,21 @@
   </p:cSld>
   <p:clrMap bg1="lt1" tx1="dk1" bg2="lt2" tx2="dk2" accent1="accent1" accent2="accent2" accent3="accent3" accent4="accent4" accent5="accent5" accent6="accent6" hlink="hlink" folHlink="folHlink"/>
   <p:sldLayoutIdLst>
-    <p:sldLayoutId xmlns:r="http://schemas.openxmlformats.org/officeDocument/2006/relationships" id="2147483649" r:id="R94318caae4524dc6"/>
-    <p:sldLayoutId xmlns:r="http://schemas.openxmlformats.org/officeDocument/2006/relationships" id="2147483650" r:id="Rd6ab5ebfd52d4c40"/>
-    <p:sldLayoutId xmlns:r="http://schemas.openxmlformats.org/officeDocument/2006/relationships" id="2147483651" r:id="Rdf55f85a7bf14e3d"/>
-    <p:sldLayoutId xmlns:r="http://schemas.openxmlformats.org/officeDocument/2006/relationships" id="2147483652" r:id="R116a1cd762a24177"/>
-    <p:sldLayoutId xmlns:r="http://schemas.openxmlformats.org/officeDocument/2006/relationships" id="2147483653" r:id="R06ec7d58e5f549d7"/>
-    <p:sldLayoutId xmlns:r="http://schemas.openxmlformats.org/officeDocument/2006/relationships" id="2147483654" r:id="R6f4a592c24504706"/>
-    <p:sldLayoutId xmlns:r="http://schemas.openxmlformats.org/officeDocument/2006/relationships" id="2147483655" r:id="Ra01e0512a80c488e"/>
-    <p:sldLayoutId xmlns:r="http://schemas.openxmlformats.org/officeDocument/2006/relationships" id="2147483656" r:id="R4a0910e8e39c434c"/>
-    <p:sldLayoutId xmlns:r="http://schemas.openxmlformats.org/officeDocument/2006/relationships" id="2147483657" r:id="R6babc51d3c0b4b77"/>
-    <p:sldLayoutId xmlns:r="http://schemas.openxmlformats.org/officeDocument/2006/relationships" id="2147483658" r:id="R5a41cc968ea84ea8"/>
-    <p:sldLayoutId xmlns:r="http://schemas.openxmlformats.org/officeDocument/2006/relationships" id="2147483659" r:id="Rc1e13492962d4b61"/>
+    <p:sldLayoutId id="2147483649" r:id="rId1"/>
+    <p:sldLayoutId id="2147483650" r:id="rId2"/>
+    <p:sldLayoutId id="2147483651" r:id="rId3"/>
+    <p:sldLayoutId id="2147483652" r:id="rId4"/>
+    <p:sldLayoutId id="2147483653" r:id="rId5"/>
+    <p:sldLayoutId id="2147483654" r:id="rId6"/>
+    <p:sldLayoutId id="2147483655" r:id="rId7"/>
+    <p:sldLayoutId id="2147483656" r:id="rId8"/>
+    <p:sldLayoutId id="2147483657" r:id="rId9"/>
+    <p:sldLayoutId id="2147483658" r:id="rId10"/>
+    <p:sldLayoutId id="2147483659" r:id="rId11"/>
   </p:sldLayoutIdLst>
   <p:txStyles>
     <p:titleStyle>
-      <a:lvl1pPr xmlns:a="http://schemas.openxmlformats.org/drawingml/2006/main" algn="l" defTabSz="914400">
+      <a:lvl1pPr algn="l" defTabSz="914400">
         <a:lnSpc>
           <a:spcPct val="90000"/>
         </a:lnSpc>
@@ -3826,7 +3835,7 @@
       </a:lvl1pPr>
     </p:titleStyle>
     <p:bodyStyle>
-      <a:lvl1pPr xmlns:a="http://schemas.openxmlformats.org/drawingml/2006/main" marL="228600" indent="-228600" algn="l" defTabSz="914400">
+      <a:lvl1pPr marL="228600" indent="-228600" algn="l" defTabSz="914400">
         <a:lnSpc>
           <a:spcPct val="90000"/>
         </a:lnSpc>
@@ -3844,7 +3853,7 @@
           <a:cs typeface="+mn-lt"/>
         </a:defRPr>
       </a:lvl1pPr>
-      <a:lvl2pPr xmlns:a="http://schemas.openxmlformats.org/drawingml/2006/main" marL="685800" indent="-228600" algn="l" defTabSz="914400">
+      <a:lvl2pPr marL="685800" indent="-228600" algn="l" defTabSz="914400">
         <a:lnSpc>
           <a:spcPct val="90000"/>
         </a:lnSpc>
@@ -3862,7 +3871,7 @@
           <a:cs typeface="+mn-lt"/>
         </a:defRPr>
       </a:lvl2pPr>
-      <a:lvl3pPr xmlns:a="http://schemas.openxmlformats.org/drawingml/2006/main" marL="1143000" indent="-228600" algn="l" defTabSz="914400">
+      <a:lvl3pPr marL="1143000" indent="-228600" algn="l" defTabSz="914400">
         <a:lnSpc>
           <a:spcPct val="90000"/>
         </a:lnSpc>
@@ -3880,7 +3889,7 @@
           <a:cs typeface="+mn-lt"/>
         </a:defRPr>
       </a:lvl3pPr>
-      <a:lvl4pPr xmlns:a="http://schemas.openxmlformats.org/drawingml/2006/main" marL="1600200" indent="-228600" algn="l" defTabSz="914400">
+      <a:lvl4pPr marL="1600200" indent="-228600" algn="l" defTabSz="914400">
         <a:lnSpc>
           <a:spcPct val="90000"/>
         </a:lnSpc>
@@ -3898,7 +3907,7 @@
           <a:cs typeface="+mn-lt"/>
         </a:defRPr>
       </a:lvl4pPr>
-      <a:lvl5pPr xmlns:a="http://schemas.openxmlformats.org/drawingml/2006/main" marL="2057400" indent="-228600" algn="l" defTabSz="914400">
+      <a:lvl5pPr marL="2057400" indent="-228600" algn="l" defTabSz="914400">
         <a:lnSpc>
           <a:spcPct val="90000"/>
         </a:lnSpc>
@@ -3916,7 +3925,7 @@
           <a:cs typeface="+mn-lt"/>
         </a:defRPr>
       </a:lvl5pPr>
-      <a:lvl6pPr xmlns:a="http://schemas.openxmlformats.org/drawingml/2006/main" marL="2514600" indent="-228600" algn="l" defTabSz="914400">
+      <a:lvl6pPr marL="2514600" indent="-228600" algn="l" defTabSz="914400">
         <a:lnSpc>
           <a:spcPct val="90000"/>
         </a:lnSpc>
@@ -3934,7 +3943,7 @@
           <a:cs typeface="+mn-lt"/>
         </a:defRPr>
       </a:lvl6pPr>
-      <a:lvl7pPr xmlns:a="http://schemas.openxmlformats.org/drawingml/2006/main" marL="2971800" indent="-228600" algn="l" defTabSz="914400">
+      <a:lvl7pPr marL="2971800" indent="-228600" algn="l" defTabSz="914400">
         <a:lnSpc>
           <a:spcPct val="90000"/>
         </a:lnSpc>
@@ -3952,7 +3961,7 @@
           <a:cs typeface="+mn-lt"/>
         </a:defRPr>
       </a:lvl7pPr>
-      <a:lvl8pPr xmlns:a="http://schemas.openxmlformats.org/drawingml/2006/main" marL="3429000" indent="-228600" algn="l" defTabSz="914400">
+      <a:lvl8pPr marL="3429000" indent="-228600" algn="l" defTabSz="914400">
         <a:lnSpc>
           <a:spcPct val="90000"/>
         </a:lnSpc>
@@ -3970,7 +3979,7 @@
           <a:cs typeface="+mn-lt"/>
         </a:defRPr>
       </a:lvl8pPr>
-      <a:lvl9pPr xmlns:a="http://schemas.openxmlformats.org/drawingml/2006/main" marL="3886200" indent="-228600" algn="l" defTabSz="914400">
+      <a:lvl9pPr marL="3886200" indent="-228600" algn="l" defTabSz="914400">
         <a:lnSpc>
           <a:spcPct val="90000"/>
         </a:lnSpc>
@@ -3990,7 +3999,7 @@
       </a:lvl9pPr>
     </p:bodyStyle>
     <p:otherStyle>
-      <a:lvl1pPr xmlns:a="http://schemas.openxmlformats.org/drawingml/2006/main" marL="0" algn="l" defTabSz="914400">
+      <a:lvl1pPr marL="0" algn="l" defTabSz="914400">
         <a:buNone/>
         <a:defRPr sz="1800" kern="1200">
           <a:solidFill>
@@ -4001,7 +4010,7 @@
           <a:cs typeface="+mn-lt"/>
         </a:defRPr>
       </a:lvl1pPr>
-      <a:lvl2pPr xmlns:a="http://schemas.openxmlformats.org/drawingml/2006/main" marL="457200" algn="l" defTabSz="914400">
+      <a:lvl2pPr marL="457200" algn="l" defTabSz="914400">
         <a:buNone/>
         <a:defRPr sz="1800" kern="1200">
           <a:solidFill>
@@ -4012,7 +4021,7 @@
           <a:cs typeface="+mn-lt"/>
         </a:defRPr>
       </a:lvl2pPr>
-      <a:lvl3pPr xmlns:a="http://schemas.openxmlformats.org/drawingml/2006/main" marL="914400" algn="l" defTabSz="914400">
+      <a:lvl3pPr marL="914400" algn="l" defTabSz="914400">
         <a:buNone/>
         <a:defRPr sz="1800" kern="1200">
           <a:solidFill>
@@ -4023,7 +4032,7 @@
           <a:cs typeface="+mn-lt"/>
         </a:defRPr>
       </a:lvl3pPr>
-      <a:lvl4pPr xmlns:a="http://schemas.openxmlformats.org/drawingml/2006/main" marL="1371600" algn="l" defTabSz="914400">
+      <a:lvl4pPr marL="1371600" algn="l" defTabSz="914400">
         <a:buNone/>
         <a:defRPr sz="1800" kern="1200">
           <a:solidFill>
@@ -4034,7 +4043,7 @@
           <a:cs typeface="+mn-lt"/>
         </a:defRPr>
       </a:lvl4pPr>
-      <a:lvl5pPr xmlns:a="http://schemas.openxmlformats.org/drawingml/2006/main" marL="1828800" algn="l" defTabSz="914400">
+      <a:lvl5pPr marL="1828800" algn="l" defTabSz="914400">
         <a:buNone/>
         <a:defRPr sz="1800" kern="1200">
           <a:solidFill>
@@ -4045,7 +4054,7 @@
           <a:cs typeface="+mn-lt"/>
         </a:defRPr>
       </a:lvl5pPr>
-      <a:lvl6pPr xmlns:a="http://schemas.openxmlformats.org/drawingml/2006/main" marL="2286000" algn="l" defTabSz="914400">
+      <a:lvl6pPr marL="2286000" algn="l" defTabSz="914400">
         <a:buNone/>
         <a:defRPr sz="1800" kern="1200">
           <a:solidFill>
@@ -4056,7 +4065,7 @@
           <a:cs typeface="+mn-lt"/>
         </a:defRPr>
       </a:lvl6pPr>
-      <a:lvl7pPr xmlns:a="http://schemas.openxmlformats.org/drawingml/2006/main" marL="2743200" algn="l" defTabSz="914400">
+      <a:lvl7pPr marL="2743200" algn="l" defTabSz="914400">
         <a:buNone/>
         <a:defRPr sz="1800" kern="1200">
           <a:solidFill>
@@ -4067,7 +4076,7 @@
           <a:cs typeface="+mn-lt"/>
         </a:defRPr>
       </a:lvl7pPr>
-      <a:lvl8pPr xmlns:a="http://schemas.openxmlformats.org/drawingml/2006/main" marL="3200400" algn="l" defTabSz="914400">
+      <a:lvl8pPr marL="3200400" algn="l" defTabSz="914400">
         <a:buNone/>
         <a:defRPr sz="1800" kern="1200">
           <a:solidFill>
@@ -4078,7 +4087,7 @@
           <a:cs typeface="+mn-lt"/>
         </a:defRPr>
       </a:lvl8pPr>
-      <a:lvl9pPr xmlns:a="http://schemas.openxmlformats.org/drawingml/2006/main" marL="3657600" algn="l" defTabSz="914400">
+      <a:lvl9pPr marL="3657600" algn="l" defTabSz="914400">
         <a:buNone/>
         <a:defRPr sz="1800" kern="1200">
           <a:solidFill>
@@ -4094,299 +4103,15 @@
 </p:sldMaster>
 </file>
 
-<file path=ppt/slideMasters/theme/theme2.xml><?xml version="1.0" encoding="utf-8"?>
-<a:theme xmlns:a="http://schemas.openxmlformats.org/drawingml/2006/main" name="Office Theme">
-  <a:themeElements>
-    <a:clrScheme name="Red Violet">
-      <a:dk1>
-        <a:sysClr val="windowText" lastClr="000000"/>
-      </a:dk1>
-      <a:lt1>
-        <a:sysClr val="window" lastClr="FFFFFF"/>
-      </a:lt1>
-      <a:dk2>
-        <a:srgbClr val="454551"/>
-      </a:dk2>
-      <a:lt2>
-        <a:srgbClr val="D8D9DC"/>
-      </a:lt2>
-      <a:accent1>
-        <a:srgbClr val="E32D91"/>
-      </a:accent1>
-      <a:accent2>
-        <a:srgbClr val="C830CC"/>
-      </a:accent2>
-      <a:accent3>
-        <a:srgbClr val="4EA6DC"/>
-      </a:accent3>
-      <a:accent4>
-        <a:srgbClr val="4775E7"/>
-      </a:accent4>
-      <a:accent5>
-        <a:srgbClr val="8971E1"/>
-      </a:accent5>
-      <a:accent6>
-        <a:srgbClr val="D54773"/>
-      </a:accent6>
-      <a:hlink>
-        <a:srgbClr val="6B9F25"/>
-      </a:hlink>
-      <a:folHlink>
-        <a:srgbClr val="8C8C8C"/>
-      </a:folHlink>
-    </a:clrScheme>
-    <a:fontScheme name="Office">
-      <a:majorFont>
-        <a:latin typeface="Calibri Light"/>
-        <a:ea typeface=""/>
-        <a:cs typeface=""/>
-        <a:font script="Jpan" typeface="游ゴシック Light"/>
-        <a:font script="Hang" typeface="맑은 고딕"/>
-        <a:font script="Hans" typeface="等线 Light"/>
-        <a:font script="Hant" typeface="新細明體"/>
-        <a:font script="Arab" typeface="Times New Roman"/>
-        <a:font script="Hebr" typeface="Times New Roman"/>
-        <a:font script="Thai" typeface="Angsana New"/>
-        <a:font script="Ethi" typeface="Nyala"/>
-        <a:font script="Beng" typeface="Vrinda"/>
-        <a:font script="Gujr" typeface="Shruti"/>
-        <a:font script="Khmr" typeface="MoolBoran"/>
-        <a:font script="Knda" typeface="Tunga"/>
-        <a:font script="Guru" typeface="Raavi"/>
-        <a:font script="Cans" typeface="Euphemia"/>
-        <a:font script="Cher" typeface="Plantagenet Cherokee"/>
-        <a:font script="Yiii" typeface="Microsoft Yi Baiti"/>
-        <a:font script="Tibt" typeface="Microsoft Himalaya"/>
-        <a:font script="Thaa" typeface="MV Boli"/>
-        <a:font script="Deva" typeface="Mangal"/>
-        <a:font script="Telu" typeface="Gautami"/>
-        <a:font script="Taml" typeface="Latha"/>
-        <a:font script="Syrc" typeface="Estrangelo Edessa"/>
-        <a:font script="Orya" typeface="Kalinga"/>
-        <a:font script="Mlym" typeface="Kartika"/>
-        <a:font script="Laoo" typeface="DokChampa"/>
-        <a:font script="Sinh" typeface="Iskoola Pota"/>
-        <a:font script="Mong" typeface="Mongolian Baiti"/>
-        <a:font script="Viet" typeface="Times New Roman"/>
-        <a:font script="Uigh" typeface="Microsoft Uighur"/>
-        <a:font script="Geor" typeface="Sylfaen"/>
-        <a:font script="Armn" typeface="Arial"/>
-        <a:font script="Bugi" typeface="Leelawadee UI"/>
-        <a:font script="Bopo" typeface="Microsoft JhengHei"/>
-        <a:font script="Java" typeface="Javanese Text"/>
-        <a:font script="Lisu" typeface="Segoe UI"/>
-        <a:font script="Mymr" typeface="Myanmar Text"/>
-        <a:font script="Nkoo" typeface="Ebrima"/>
-        <a:font script="Olck" typeface="Nirmala UI"/>
-        <a:font script="Osma" typeface="Ebrima"/>
-        <a:font script="Phag" typeface="Phagspa"/>
-        <a:font script="Syrn" typeface="Estrangelo Edessa"/>
-        <a:font script="Syrj" typeface="Estrangelo Edessa"/>
-        <a:font script="Syre" typeface="Estrangelo Edessa"/>
-        <a:font script="Sora" typeface="Nirmala UI"/>
-        <a:font script="Tale" typeface="Microsoft Tai Le"/>
-        <a:font script="Talu" typeface="Microsoft New Tai Lue"/>
-        <a:font script="Tfng" typeface="Ebrima"/>
-      </a:majorFont>
-      <a:minorFont>
-        <a:latin typeface="Calibri"/>
-        <a:ea typeface=""/>
-        <a:cs typeface=""/>
-        <a:font script="Jpan" typeface="游ゴシック"/>
-        <a:font script="Hang" typeface="맑은 고딕"/>
-        <a:font script="Hans" typeface="等线"/>
-        <a:font script="Hant" typeface="新細明體"/>
-        <a:font script="Arab" typeface="Arial"/>
-        <a:font script="Hebr" typeface="Arial"/>
-        <a:font script="Thai" typeface="Cordia New"/>
-        <a:font script="Ethi" typeface="Nyala"/>
-        <a:font script="Beng" typeface="Vrinda"/>
-        <a:font script="Gujr" typeface="Shruti"/>
-        <a:font script="Khmr" typeface="DaunPenh"/>
-        <a:font script="Knda" typeface="Tunga"/>
-        <a:font script="Guru" typeface="Raavi"/>
-        <a:font script="Cans" typeface="Euphemia"/>
-        <a:font script="Cher" typeface="Plantagenet Cherokee"/>
-        <a:font script="Yiii" typeface="Microsoft Yi Baiti"/>
-        <a:font script="Tibt" typeface="Microsoft Himalaya"/>
-        <a:font script="Thaa" typeface="MV Boli"/>
-        <a:font script="Deva" typeface="Mangal"/>
-        <a:font script="Telu" typeface="Gautami"/>
-        <a:font script="Taml" typeface="Latha"/>
-        <a:font script="Syrc" typeface="Estrangelo Edessa"/>
-        <a:font script="Orya" typeface="Kalinga"/>
-        <a:font script="Mlym" typeface="Kartika"/>
-        <a:font script="Laoo" typeface="DokChampa"/>
-        <a:font script="Sinh" typeface="Iskoola Pota"/>
-        <a:font script="Mong" typeface="Mongolian Baiti"/>
-        <a:font script="Viet" typeface="Arial"/>
-        <a:font script="Uigh" typeface="Microsoft Uighur"/>
-        <a:font script="Geor" typeface="Sylfaen"/>
-        <a:font script="Armn" typeface="Arial"/>
-        <a:font script="Bugi" typeface="Leelawadee UI"/>
-        <a:font script="Bopo" typeface="Microsoft JhengHei"/>
-        <a:font script="Java" typeface="Javanese Text"/>
-        <a:font script="Lisu" typeface="Segoe UI"/>
-        <a:font script="Mymr" typeface="Myanmar Text"/>
-        <a:font script="Nkoo" typeface="Ebrima"/>
-        <a:font script="Olck" typeface="Nirmala UI"/>
-        <a:font script="Osma" typeface="Ebrima"/>
-        <a:font script="Phag" typeface="Phagspa"/>
-        <a:font script="Syrn" typeface="Estrangelo Edessa"/>
-        <a:font script="Syrj" typeface="Estrangelo Edessa"/>
-        <a:font script="Syre" typeface="Estrangelo Edessa"/>
-        <a:font script="Sora" typeface="Nirmala UI"/>
-        <a:font script="Tale" typeface="Microsoft Tai Le"/>
-        <a:font script="Talu" typeface="Microsoft New Tai Lue"/>
-        <a:font script="Tfng" typeface="Ebrima"/>
-      </a:minorFont>
-    </a:fontScheme>
-    <a:fmtScheme name="Red Violet">
-      <a:fillStyleLst>
-        <a:solidFill>
-          <a:schemeClr val="phClr"/>
-        </a:solidFill>
-        <a:gradFill rotWithShape="1">
-          <a:gsLst>
-            <a:gs pos="0">
-              <a:schemeClr val="phClr">
-                <a:tint val="67000"/>
-                <a:lumMod val="110000"/>
-                <a:satMod val="105000"/>
-              </a:schemeClr>
-            </a:gs>
-            <a:gs pos="50000">
-              <a:schemeClr val="phClr">
-                <a:tint val="73000"/>
-                <a:lumMod val="105000"/>
-                <a:satMod val="103000"/>
-              </a:schemeClr>
-            </a:gs>
-            <a:gs pos="100000">
-              <a:schemeClr val="phClr">
-                <a:tint val="81000"/>
-                <a:lumMod val="105000"/>
-                <a:satMod val="109000"/>
-              </a:schemeClr>
-            </a:gs>
-          </a:gsLst>
-          <a:lin ang="5400000" scaled="0"/>
-        </a:gradFill>
-        <a:gradFill rotWithShape="1">
-          <a:gsLst>
-            <a:gs pos="0">
-              <a:schemeClr val="phClr">
-                <a:tint val="94000"/>
-                <a:lumMod val="102000"/>
-                <a:satMod val="103000"/>
-              </a:schemeClr>
-            </a:gs>
-            <a:gs pos="50000">
-              <a:schemeClr val="phClr">
-                <a:shade val="100000"/>
-                <a:lumMod val="100000"/>
-                <a:satMod val="110000"/>
-              </a:schemeClr>
-            </a:gs>
-            <a:gs pos="100000">
-              <a:schemeClr val="phClr">
-                <a:shade val="78000"/>
-                <a:lumMod val="99000"/>
-                <a:satMod val="120000"/>
-              </a:schemeClr>
-            </a:gs>
-          </a:gsLst>
-          <a:lin ang="5400000" scaled="0"/>
-        </a:gradFill>
-      </a:fillStyleLst>
-      <a:lnStyleLst>
-        <a:ln w="6350">
-          <a:solidFill>
-            <a:schemeClr val="phClr"/>
-          </a:solidFill>
-          <a:prstDash val="solid"/>
-        </a:ln>
-        <a:ln w="12700">
-          <a:solidFill>
-            <a:schemeClr val="phClr"/>
-          </a:solidFill>
-          <a:prstDash val="solid"/>
-        </a:ln>
-        <a:ln w="19050">
-          <a:solidFill>
-            <a:schemeClr val="phClr"/>
-          </a:solidFill>
-          <a:prstDash val="solid"/>
-        </a:ln>
-      </a:lnStyleLst>
-      <a:effectStyleLst>
-        <a:effectStyle>
-          <a:effectLst/>
-        </a:effectStyle>
-        <a:effectStyle>
-          <a:effectLst/>
-        </a:effectStyle>
-        <a:effectStyle>
-          <a:effectLst>
-            <a:outerShdw blurRad="57150" dist="19050" dir="5400000" algn="ctr" rotWithShape="0">
-              <a:srgbClr val="000000">
-                <a:alpha val="63000"/>
-              </a:srgbClr>
-            </a:outerShdw>
-          </a:effectLst>
-        </a:effectStyle>
-      </a:effectStyleLst>
-      <a:bgFillStyleLst>
-        <a:solidFill>
-          <a:schemeClr val="phClr"/>
-        </a:solidFill>
-        <a:solidFill>
-          <a:schemeClr val="phClr">
-            <a:tint val="95000"/>
-            <a:satMod val="170000"/>
-          </a:schemeClr>
-        </a:solidFill>
-        <a:gradFill rotWithShape="1">
-          <a:gsLst>
-            <a:gs pos="0">
-              <a:schemeClr val="phClr">
-                <a:tint val="93000"/>
-                <a:shade val="98000"/>
-                <a:lumMod val="102000"/>
-                <a:satMod val="150000"/>
-              </a:schemeClr>
-            </a:gs>
-            <a:gs pos="50000">
-              <a:schemeClr val="phClr">
-                <a:tint val="98000"/>
-                <a:shade val="90000"/>
-                <a:lumMod val="103000"/>
-                <a:satMod val="130000"/>
-              </a:schemeClr>
-            </a:gs>
-            <a:gs pos="100000">
-              <a:schemeClr val="phClr">
-                <a:shade val="63000"/>
-                <a:satMod val="120000"/>
-              </a:schemeClr>
-            </a:gs>
-          </a:gsLst>
-          <a:lin ang="5400000" scaled="0"/>
-        </a:gradFill>
-      </a:bgFillStyleLst>
-    </a:fmtScheme>
-  </a:themeElements>
-</a:theme>
-</file>
-
 <file path=ppt/slides/slide1.xml><?xml version="1.0" encoding="utf-8"?>
-<p:sld xmlns:p="http://schemas.openxmlformats.org/presentationml/2006/main">
+<p:sld xmlns:a="http://schemas.openxmlformats.org/drawingml/2006/main" xmlns:r="http://schemas.openxmlformats.org/officeDocument/2006/relationships" xmlns:p="http://schemas.openxmlformats.org/presentationml/2006/main">
   <p:cSld>
     <p:bg>
       <p:bgPr>
-        <a:solidFill xmlns:a="http://schemas.openxmlformats.org/drawingml/2006/main">
+        <a:solidFill>
           <a:schemeClr val="bg1"/>
         </a:solidFill>
+        <a:effectLst/>
       </p:bgPr>
     </p:bg>
     <p:spTree>
@@ -4396,54 +4121,59 @@
         <p:nvPr/>
       </p:nvGrpSpPr>
       <p:grpSpPr>
-        <a:xfrm xmlns:a="http://schemas.openxmlformats.org/drawingml/2006/main"/>
+        <a:xfrm>
+          <a:off x="0" y="0"/>
+          <a:ext cx="0" cy="0"/>
+          <a:chOff x="0" y="0"/>
+          <a:chExt cx="0" cy="0"/>
+        </a:xfrm>
       </p:grpSpPr>
       <p:sp useBgFill="1">
         <p:nvSpPr>
           <p:cNvPr id="8" name="Rectangle 7">
-            <a:extLst xmlns:a="http://schemas.openxmlformats.org/drawingml/2006/main">
+            <a:extLst>
               <a:ext uri="{FF2B5EF4-FFF2-40B4-BE49-F238E27FC236}">
                 <a16:creationId xmlns:a16="http://schemas.microsoft.com/office/drawing/2014/main" id="{4522B21E-B2B9-4C72-9A71-C87EFD137480}"/>
               </a:ext>
             </a:extLst>
           </p:cNvPr>
           <p:cNvSpPr>
-            <a:spLocks xmlns:a="http://schemas.openxmlformats.org/drawingml/2006/main" noGrp="1"/>
+            <a:spLocks noGrp="1"/>
           </p:cNvSpPr>
           <p:nvPr/>
         </p:nvSpPr>
         <p:spPr>
-          <a:xfrm xmlns:a="http://schemas.openxmlformats.org/drawingml/2006/main">
+          <a:xfrm>
             <a:off x="0" y="0"/>
             <a:ext cx="12191999" cy="6857365"/>
           </a:xfrm>
-          <a:prstGeom xmlns:a="http://schemas.openxmlformats.org/drawingml/2006/main" prst="rect">
+          <a:prstGeom prst="rect">
             <a:avLst/>
           </a:prstGeom>
-          <a:ln xmlns:a="http://schemas.openxmlformats.org/drawingml/2006/main">
+          <a:ln>
             <a:noFill/>
           </a:ln>
         </p:spPr>
         <p:style>
-          <a:lnRef xmlns:a="http://schemas.openxmlformats.org/drawingml/2006/main" idx="2">
+          <a:lnRef idx="2">
             <a:schemeClr val="accent1">
               <a:shade val="50000"/>
             </a:schemeClr>
           </a:lnRef>
-          <a:fillRef xmlns:a="http://schemas.openxmlformats.org/drawingml/2006/main" idx="1">
+          <a:fillRef idx="1">
             <a:schemeClr val="accent1"/>
           </a:fillRef>
-          <a:effectRef xmlns:a="http://schemas.openxmlformats.org/drawingml/2006/main" idx="0">
+          <a:effectRef idx="0">
             <a:schemeClr val="accent1"/>
           </a:effectRef>
-          <a:fontRef xmlns:a="http://schemas.openxmlformats.org/drawingml/2006/main" idx="minor">
+          <a:fontRef idx="minor">
             <a:schemeClr val="lt1"/>
           </a:fontRef>
         </p:style>
         <p:txBody>
-          <a:bodyPr xmlns:a="http://schemas.openxmlformats.org/drawingml/2006/main" anchor="ctr"/>
-          <a:lstStyle xmlns:a="http://schemas.openxmlformats.org/drawingml/2006/main"/>
-          <a:p xmlns:a="http://schemas.openxmlformats.org/drawingml/2006/main">
+          <a:bodyPr anchor="ctr"/>
+          <a:lstStyle/>
+          <a:p>
             <a:pPr algn="ctr">
               <a:buNone/>
             </a:pPr>
@@ -4454,52 +4184,52 @@
       <p:sp>
         <p:nvSpPr>
           <p:cNvPr id="10" name="Rectangle 9">
-            <a:extLst xmlns:a="http://schemas.openxmlformats.org/drawingml/2006/main">
+            <a:extLst>
               <a:ext uri="{FF2B5EF4-FFF2-40B4-BE49-F238E27FC236}">
                 <a16:creationId xmlns:a16="http://schemas.microsoft.com/office/drawing/2014/main" id="{5EB7D2A2-F448-44D4-938C-DC84CBCB3B1E}"/>
               </a:ext>
             </a:extLst>
           </p:cNvPr>
           <p:cNvSpPr>
-            <a:spLocks xmlns:a="http://schemas.openxmlformats.org/drawingml/2006/main" noGrp="1"/>
+            <a:spLocks noGrp="1"/>
           </p:cNvSpPr>
           <p:nvPr/>
         </p:nvSpPr>
         <p:spPr>
-          <a:xfrm xmlns:a="http://schemas.openxmlformats.org/drawingml/2006/main">
+          <a:xfrm>
             <a:off x="0" y="2"/>
             <a:ext cx="12192000" cy="4412583"/>
           </a:xfrm>
-          <a:prstGeom xmlns:a="http://schemas.openxmlformats.org/drawingml/2006/main" prst="rect">
+          <a:prstGeom prst="rect">
             <a:avLst/>
           </a:prstGeom>
-          <a:solidFill xmlns:a="http://schemas.openxmlformats.org/drawingml/2006/main">
+          <a:solidFill>
             <a:schemeClr val="accent4"/>
           </a:solidFill>
-          <a:ln xmlns:a="http://schemas.openxmlformats.org/drawingml/2006/main">
+          <a:ln>
             <a:noFill/>
           </a:ln>
         </p:spPr>
         <p:style>
-          <a:lnRef xmlns:a="http://schemas.openxmlformats.org/drawingml/2006/main" idx="2">
+          <a:lnRef idx="2">
             <a:schemeClr val="accent1">
               <a:shade val="50000"/>
             </a:schemeClr>
           </a:lnRef>
-          <a:fillRef xmlns:a="http://schemas.openxmlformats.org/drawingml/2006/main" idx="1">
+          <a:fillRef idx="1">
             <a:schemeClr val="accent1"/>
           </a:fillRef>
-          <a:effectRef xmlns:a="http://schemas.openxmlformats.org/drawingml/2006/main" idx="0">
+          <a:effectRef idx="0">
             <a:schemeClr val="accent1"/>
           </a:effectRef>
-          <a:fontRef xmlns:a="http://schemas.openxmlformats.org/drawingml/2006/main" idx="minor">
+          <a:fontRef idx="minor">
             <a:schemeClr val="lt1"/>
           </a:fontRef>
         </p:style>
         <p:txBody>
-          <a:bodyPr xmlns:a="http://schemas.openxmlformats.org/drawingml/2006/main" anchor="ctr"/>
-          <a:lstStyle xmlns:a="http://schemas.openxmlformats.org/drawingml/2006/main"/>
-          <a:p xmlns:a="http://schemas.openxmlformats.org/drawingml/2006/main">
+          <a:bodyPr anchor="ctr"/>
+          <a:lstStyle/>
+          <a:p>
             <a:pPr algn="ctr">
               <a:buNone/>
             </a:pPr>
@@ -4510,32 +4240,32 @@
       <p:sp>
         <p:nvSpPr>
           <p:cNvPr id="12" name="Rectangle 11">
-            <a:extLst xmlns:a="http://schemas.openxmlformats.org/drawingml/2006/main">
+            <a:extLst>
               <a:ext uri="{FF2B5EF4-FFF2-40B4-BE49-F238E27FC236}">
                 <a16:creationId xmlns:a16="http://schemas.microsoft.com/office/drawing/2014/main" id="{871AEA07-1E14-44B4-8E55-64EF049CD66F}"/>
               </a:ext>
             </a:extLst>
           </p:cNvPr>
           <p:cNvSpPr>
-            <a:spLocks xmlns:a="http://schemas.openxmlformats.org/drawingml/2006/main" noGrp="1"/>
+            <a:spLocks noGrp="1"/>
           </p:cNvSpPr>
           <p:nvPr/>
         </p:nvSpPr>
         <p:spPr>
-          <a:xfrm xmlns:a="http://schemas.openxmlformats.org/drawingml/2006/main">
+          <a:xfrm>
             <a:off x="596464" y="551962"/>
             <a:ext cx="10999072" cy="4618549"/>
           </a:xfrm>
-          <a:prstGeom xmlns:a="http://schemas.openxmlformats.org/drawingml/2006/main" prst="rect">
+          <a:prstGeom prst="rect">
             <a:avLst/>
           </a:prstGeom>
-          <a:solidFill xmlns:a="http://schemas.openxmlformats.org/drawingml/2006/main">
+          <a:solidFill>
             <a:schemeClr val="bg1"/>
           </a:solidFill>
-          <a:ln xmlns:a="http://schemas.openxmlformats.org/drawingml/2006/main">
+          <a:ln>
             <a:noFill/>
           </a:ln>
-          <a:effectLst xmlns:a="http://schemas.openxmlformats.org/drawingml/2006/main">
+          <a:effectLst>
             <a:outerShdw blurRad="139700" dist="127000" dir="5400000" algn="t" rotWithShape="0">
               <a:prstClr val="black">
                 <a:alpha val="15000"/>
@@ -4544,25 +4274,25 @@
           </a:effectLst>
         </p:spPr>
         <p:style>
-          <a:lnRef xmlns:a="http://schemas.openxmlformats.org/drawingml/2006/main" idx="2">
+          <a:lnRef idx="2">
             <a:schemeClr val="accent1">
               <a:shade val="50000"/>
             </a:schemeClr>
           </a:lnRef>
-          <a:fillRef xmlns:a="http://schemas.openxmlformats.org/drawingml/2006/main" idx="1">
+          <a:fillRef idx="1">
             <a:schemeClr val="accent1"/>
           </a:fillRef>
-          <a:effectRef xmlns:a="http://schemas.openxmlformats.org/drawingml/2006/main" idx="0">
+          <a:effectRef idx="0">
             <a:schemeClr val="accent1"/>
           </a:effectRef>
-          <a:fontRef xmlns:a="http://schemas.openxmlformats.org/drawingml/2006/main" idx="minor">
+          <a:fontRef idx="minor">
             <a:schemeClr val="lt1"/>
           </a:fontRef>
         </p:style>
         <p:txBody>
-          <a:bodyPr xmlns:a="http://schemas.openxmlformats.org/drawingml/2006/main" anchor="ctr"/>
-          <a:lstStyle xmlns:a="http://schemas.openxmlformats.org/drawingml/2006/main"/>
-          <a:p xmlns:a="http://schemas.openxmlformats.org/drawingml/2006/main">
+          <a:bodyPr anchor="ctr"/>
+          <a:lstStyle/>
+          <a:p>
             <a:pPr algn="ctr">
               <a:buNone/>
             </a:pPr>
@@ -4573,31 +4303,31 @@
       <p:sp>
         <p:nvSpPr>
           <p:cNvPr id="2" name="Title 1">
-            <a:extLst xmlns:a="http://schemas.openxmlformats.org/drawingml/2006/main">
+            <a:extLst>
               <a:ext uri="{FF2B5EF4-FFF2-40B4-BE49-F238E27FC236}">
                 <a16:creationId xmlns:a16="http://schemas.microsoft.com/office/drawing/2014/main" id="{36571B63-82A4-FC3D-9860-20F38F123861}"/>
               </a:ext>
             </a:extLst>
           </p:cNvPr>
           <p:cNvSpPr>
-            <a:spLocks xmlns:a="http://schemas.openxmlformats.org/drawingml/2006/main" noGrp="1"/>
-          </p:cNvSpPr>
-          <p:nvPr>
-            <p:ph type="ctrTitle" idx="0"/>
+            <a:spLocks noGrp="1"/>
+          </p:cNvSpPr>
+          <p:nvPr>
+            <p:ph type="ctrTitle"/>
           </p:nvPr>
         </p:nvSpPr>
         <p:spPr>
-          <a:xfrm xmlns:a="http://schemas.openxmlformats.org/drawingml/2006/main">
+          <a:xfrm>
             <a:off x="1524000" y="1293338"/>
             <a:ext cx="9144000" cy="3274592"/>
           </a:xfrm>
         </p:spPr>
         <p:txBody>
-          <a:bodyPr xmlns:a="http://schemas.openxmlformats.org/drawingml/2006/main" anchor="ctr">
-            <a:normAutofit fontScale="100000"/>
+          <a:bodyPr anchor="ctr">
+            <a:normAutofit/>
           </a:bodyPr>
-          <a:lstStyle xmlns:a="http://schemas.openxmlformats.org/drawingml/2006/main"/>
-          <a:p xmlns:a="http://schemas.openxmlformats.org/drawingml/2006/main">
+          <a:lstStyle/>
+          <a:p>
             <a:pPr>
               <a:defRPr sz="3825">
                 <a:solidFill>
@@ -4632,31 +4362,31 @@
       <p:sp>
         <p:nvSpPr>
           <p:cNvPr id="3" name="Subtitle 2">
-            <a:extLst xmlns:a="http://schemas.openxmlformats.org/drawingml/2006/main">
+            <a:extLst>
               <a:ext uri="{FF2B5EF4-FFF2-40B4-BE49-F238E27FC236}">
                 <a16:creationId xmlns:a16="http://schemas.microsoft.com/office/drawing/2014/main" id="{4101352E-A170-144A-523B-B61C8AE33873}"/>
               </a:ext>
             </a:extLst>
           </p:cNvPr>
           <p:cNvSpPr>
-            <a:spLocks xmlns:a="http://schemas.openxmlformats.org/drawingml/2006/main" noGrp="1"/>
+            <a:spLocks noGrp="1"/>
           </p:cNvSpPr>
           <p:nvPr>
             <p:ph type="subTitle" idx="1"/>
           </p:nvPr>
         </p:nvSpPr>
         <p:spPr>
-          <a:xfrm xmlns:a="http://schemas.openxmlformats.org/drawingml/2006/main">
+          <a:xfrm>
             <a:off x="1524000" y="5514052"/>
             <a:ext cx="9144000" cy="651910"/>
           </a:xfrm>
         </p:spPr>
         <p:txBody>
-          <a:bodyPr xmlns:a="http://schemas.openxmlformats.org/drawingml/2006/main" anchor="ctr">
+          <a:bodyPr anchor="ctr">
             <a:normAutofit/>
           </a:bodyPr>
-          <a:lstStyle xmlns:a="http://schemas.openxmlformats.org/drawingml/2006/main"/>
-          <a:p xmlns:a="http://schemas.openxmlformats.org/drawingml/2006/main">
+          <a:lstStyle/>
+          <a:p>
             <a:endParaRPr/>
           </a:p>
         </p:txBody>
@@ -4664,45 +4394,52 @@
       <p:sp>
         <p:nvSpPr>
           <p:cNvPr id="14" name="Straight Connector 13">
-            <a:extLst xmlns:a="http://schemas.openxmlformats.org/drawingml/2006/main">
+            <a:extLst>
               <a:ext uri="{FF2B5EF4-FFF2-40B4-BE49-F238E27FC236}">
                 <a16:creationId xmlns:a16="http://schemas.microsoft.com/office/drawing/2014/main" id="{A1AC1523-E1AC-4F39-9B08-B5CD71D4B0FD}"/>
               </a:ext>
             </a:extLst>
           </p:cNvPr>
           <p:cNvSpPr>
-            <a:spLocks xmlns:a="http://schemas.openxmlformats.org/drawingml/2006/main" noGrp="1"/>
+            <a:spLocks noGrp="1"/>
           </p:cNvSpPr>
           <p:nvPr/>
         </p:nvSpPr>
         <p:spPr>
-          <a:xfrm xmlns:a="http://schemas.openxmlformats.org/drawingml/2006/main" flipH="1">
+          <a:xfrm flipH="1">
             <a:off x="596464" y="6354708"/>
             <a:ext cx="11000232" cy="0"/>
           </a:xfrm>
-          <a:prstGeom xmlns:a="http://schemas.openxmlformats.org/drawingml/2006/main" prst="line">
+          <a:prstGeom prst="line">
             <a:avLst/>
           </a:prstGeom>
-          <a:ln xmlns:a="http://schemas.openxmlformats.org/drawingml/2006/main" w="101600">
+          <a:ln w="101600">
             <a:solidFill>
               <a:schemeClr val="accent4"/>
             </a:solidFill>
           </a:ln>
         </p:spPr>
         <p:style>
-          <a:lnRef xmlns:a="http://schemas.openxmlformats.org/drawingml/2006/main" idx="1">
+          <a:lnRef idx="1">
             <a:schemeClr val="accent1"/>
           </a:lnRef>
-          <a:fillRef xmlns:a="http://schemas.openxmlformats.org/drawingml/2006/main" idx="0">
+          <a:fillRef idx="0">
             <a:schemeClr val="accent1"/>
           </a:fillRef>
-          <a:effectRef xmlns:a="http://schemas.openxmlformats.org/drawingml/2006/main" idx="0">
+          <a:effectRef idx="0">
             <a:schemeClr val="accent1"/>
           </a:effectRef>
-          <a:fontRef xmlns:a="http://schemas.openxmlformats.org/drawingml/2006/main" idx="minor">
+          <a:fontRef idx="minor">
             <a:schemeClr val="tx1"/>
           </a:fontRef>
         </p:style>
+        <p:txBody>
+          <a:bodyPr/>
+          <a:lstStyle/>
+          <a:p>
+            <a:endParaRPr lang="en-GB"/>
+          </a:p>
+        </p:txBody>
       </p:sp>
     </p:spTree>
     <p:extLst>
@@ -4711,11 +4448,14 @@
       </p:ext>
     </p:extLst>
   </p:cSld>
+  <p:clrMapOvr>
+    <a:masterClrMapping/>
+  </p:clrMapOvr>
 </p:sld>
 </file>
 
 <file path=ppt/slides/slide2.xml><?xml version="1.0" encoding="utf-8"?>
-<p:sld xmlns:p="http://schemas.openxmlformats.org/presentationml/2006/main">
+<p:sld xmlns:a="http://schemas.openxmlformats.org/drawingml/2006/main" xmlns:r="http://schemas.openxmlformats.org/officeDocument/2006/relationships" xmlns:p="http://schemas.openxmlformats.org/presentationml/2006/main">
   <p:cSld>
     <p:spTree>
       <p:nvGrpSpPr>
@@ -4724,41 +4464,46 @@
         <p:nvPr/>
       </p:nvGrpSpPr>
       <p:grpSpPr>
-        <a:xfrm xmlns:a="http://schemas.openxmlformats.org/drawingml/2006/main"/>
+        <a:xfrm>
+          <a:off x="0" y="0"/>
+          <a:ext cx="0" cy="0"/>
+          <a:chOff x="0" y="0"/>
+          <a:chExt cx="0" cy="0"/>
+        </a:xfrm>
       </p:grpSpPr>
       <p:sp>
         <p:nvSpPr>
-          <p:cNvPr id="5" name="">
-            <a:extLst xmlns:a="http://schemas.openxmlformats.org/drawingml/2006/main">
+          <p:cNvPr id="5" name="Rectangle 4">
+            <a:extLst>
               <a:ext uri="{FF2B5EF4-FFF2-40B4-BE49-F238E27FC236}">
                 <a16:creationId xmlns:a16="http://schemas.microsoft.com/office/drawing/2014/main" id="{9965D0BB-4883-4422-904A-4451A294C247}"/>
               </a:ext>
             </a:extLst>
           </p:cNvPr>
           <p:cNvSpPr>
-            <a:spLocks xmlns:a="http://schemas.openxmlformats.org/drawingml/2006/main" noGrp="1"/>
+            <a:spLocks noGrp="1"/>
           </p:cNvSpPr>
           <p:nvPr/>
         </p:nvSpPr>
         <p:spPr>
-          <a:xfrm xmlns:a="http://schemas.openxmlformats.org/drawingml/2006/main">
+          <a:xfrm>
             <a:off x="742950" y="476250"/>
             <a:ext cx="10382250" cy="857250"/>
           </a:xfrm>
-          <a:prstGeom xmlns:a="http://schemas.openxmlformats.org/drawingml/2006/main" prst="rect">
+          <a:prstGeom prst="rect">
             <a:avLst/>
           </a:prstGeom>
-          <a:noFill xmlns:a="http://schemas.openxmlformats.org/drawingml/2006/main"/>
-          <a:ln xmlns:a="http://schemas.openxmlformats.org/drawingml/2006/main" w="0">
+          <a:noFill/>
+          <a:ln w="0">
             <a:noFill/>
           </a:ln>
         </p:spPr>
         <p:txBody>
-          <a:bodyPr xmlns:a="http://schemas.openxmlformats.org/drawingml/2006/main">
-            <a:normAutofit fontScale="100000"/>
+          <a:bodyPr>
+            <a:normAutofit/>
           </a:bodyPr>
-          <a:lstStyle xmlns:a="http://schemas.openxmlformats.org/drawingml/2006/main"/>
-          <a:p xmlns:a="http://schemas.openxmlformats.org/drawingml/2006/main">
+          <a:lstStyle/>
+          <a:p>
             <a:pPr>
               <a:defRPr sz="3225" b="0">
                 <a:solidFill>
@@ -4785,37 +4530,37 @@
       </p:sp>
       <p:sp>
         <p:nvSpPr>
-          <p:cNvPr id="2" name="">
-            <a:extLst xmlns:a="http://schemas.openxmlformats.org/drawingml/2006/main">
+          <p:cNvPr id="2" name="Rectangle 1">
+            <a:extLst>
               <a:ext uri="{FF2B5EF4-FFF2-40B4-BE49-F238E27FC236}">
                 <a16:creationId xmlns:a16="http://schemas.microsoft.com/office/drawing/2014/main" id="{83D25E44-7303-44A0-AFEA-68DFD805B6F0}"/>
               </a:ext>
             </a:extLst>
           </p:cNvPr>
           <p:cNvSpPr>
-            <a:spLocks xmlns:a="http://schemas.openxmlformats.org/drawingml/2006/main" noGrp="1"/>
+            <a:spLocks noGrp="1"/>
           </p:cNvSpPr>
           <p:nvPr/>
         </p:nvSpPr>
         <p:spPr>
-          <a:xfrm xmlns:a="http://schemas.openxmlformats.org/drawingml/2006/main">
+          <a:xfrm>
             <a:off x="857250" y="1381125"/>
             <a:ext cx="5429250" cy="714375"/>
           </a:xfrm>
-          <a:prstGeom xmlns:a="http://schemas.openxmlformats.org/drawingml/2006/main" prst="rect">
+          <a:prstGeom prst="rect">
             <a:avLst/>
           </a:prstGeom>
-          <a:noFill xmlns:a="http://schemas.openxmlformats.org/drawingml/2006/main"/>
-          <a:ln xmlns:a="http://schemas.openxmlformats.org/drawingml/2006/main" w="0">
+          <a:noFill/>
+          <a:ln w="0">
             <a:noFill/>
           </a:ln>
         </p:spPr>
         <p:txBody>
-          <a:bodyPr xmlns:a="http://schemas.openxmlformats.org/drawingml/2006/main">
-            <a:normAutofit fontScale="100000"/>
+          <a:bodyPr>
+            <a:normAutofit/>
           </a:bodyPr>
-          <a:lstStyle xmlns:a="http://schemas.openxmlformats.org/drawingml/2006/main"/>
-          <a:p xmlns:a="http://schemas.openxmlformats.org/drawingml/2006/main">
+          <a:lstStyle/>
+          <a:p>
             <a:pPr>
               <a:defRPr sz="1950" b="0">
                 <a:solidFill>
@@ -4842,37 +4587,37 @@
       </p:sp>
       <p:sp>
         <p:nvSpPr>
-          <p:cNvPr id="3" name="">
-            <a:extLst xmlns:a="http://schemas.openxmlformats.org/drawingml/2006/main">
+          <p:cNvPr id="3" name="Rectangle 2">
+            <a:extLst>
               <a:ext uri="{FF2B5EF4-FFF2-40B4-BE49-F238E27FC236}">
                 <a16:creationId xmlns:a16="http://schemas.microsoft.com/office/drawing/2014/main" id="{24996827-C49D-4606-8BAC-FDCCADD1EA68}"/>
               </a:ext>
             </a:extLst>
           </p:cNvPr>
           <p:cNvSpPr>
-            <a:spLocks xmlns:a="http://schemas.openxmlformats.org/drawingml/2006/main" noGrp="1"/>
+            <a:spLocks noGrp="1"/>
           </p:cNvSpPr>
           <p:nvPr/>
         </p:nvSpPr>
         <p:spPr>
-          <a:xfrm xmlns:a="http://schemas.openxmlformats.org/drawingml/2006/main">
+          <a:xfrm>
             <a:off x="857250" y="2333625"/>
             <a:ext cx="5429250" cy="3143250"/>
           </a:xfrm>
-          <a:prstGeom xmlns:a="http://schemas.openxmlformats.org/drawingml/2006/main" prst="rect">
+          <a:prstGeom prst="rect">
             <a:avLst/>
           </a:prstGeom>
-          <a:noFill xmlns:a="http://schemas.openxmlformats.org/drawingml/2006/main"/>
-          <a:ln xmlns:a="http://schemas.openxmlformats.org/drawingml/2006/main" w="0">
+          <a:noFill/>
+          <a:ln w="0">
             <a:noFill/>
           </a:ln>
         </p:spPr>
         <p:txBody>
-          <a:bodyPr xmlns:a="http://schemas.openxmlformats.org/drawingml/2006/main">
-            <a:normAutofit fontScale="100000"/>
+          <a:bodyPr>
+            <a:normAutofit/>
           </a:bodyPr>
-          <a:lstStyle xmlns:a="http://schemas.openxmlformats.org/drawingml/2006/main"/>
-          <a:p xmlns:a="http://schemas.openxmlformats.org/drawingml/2006/main">
+          <a:lstStyle/>
+          <a:p>
             <a:pPr>
               <a:defRPr sz="1950" b="0">
                 <a:solidFill>
@@ -4895,12 +4640,17 @@
               <a:t>Αρχίζει με =, ακολουθεί το όνομα και τα ορίσματα σε παρένθεση.</a:t>
             </a:r>
           </a:p>
-          <a:p xmlns:a="http://schemas.openxmlformats.org/drawingml/2006/main">
-            <a:r>
-              <a:t/>
-            </a:r>
-          </a:p>
-          <a:p xmlns:a="http://schemas.openxmlformats.org/drawingml/2006/main">
+          <a:p>
+            <a:endParaRPr sz="1950" b="0">
+              <a:solidFill>
+                <a:srgbClr val="151515"/>
+              </a:solidFill>
+              <a:latin typeface="Arial"/>
+              <a:ea typeface="Arial"/>
+              <a:cs typeface="Arial"/>
+            </a:endParaRPr>
+          </a:p>
+          <a:p>
             <a:pPr>
               <a:defRPr sz="1950" b="0">
                 <a:solidFill>
@@ -4927,22 +4677,22 @@
       </p:sp>
       <p:pic>
         <p:nvPicPr>
-          <p:cNvPr id="8" name=""/>
+          <p:cNvPr id="8" name="Picture 7"/>
           <p:cNvPicPr>
-            <a:picLocks xmlns:a="http://schemas.openxmlformats.org/drawingml/2006/main" noChangeAspect="1"/>
+            <a:picLocks noChangeAspect="1"/>
           </p:cNvPicPr>
           <p:nvPr/>
         </p:nvPicPr>
         <p:blipFill>
-          <a:blip xmlns:r="http://schemas.openxmlformats.org/officeDocument/2006/relationships" xmlns:a="http://schemas.openxmlformats.org/drawingml/2006/main" r:embed="Rea56bd834e394c30"/>
-          <a:stretch xmlns:a="http://schemas.openxmlformats.org/drawingml/2006/main"/>
+          <a:blip r:embed="rId3"/>
+          <a:stretch/>
         </p:blipFill>
         <p:spPr>
-          <a:xfrm xmlns:a="http://schemas.openxmlformats.org/drawingml/2006/main">
+          <a:xfrm>
             <a:off x="7031601" y="1571625"/>
             <a:ext cx="3653298" cy="3905250"/>
           </a:xfrm>
-          <a:prstGeom xmlns:a="http://schemas.openxmlformats.org/drawingml/2006/main" prst="rect">
+          <a:prstGeom prst="rect">
             <a:avLst/>
           </a:prstGeom>
         </p:spPr>
@@ -4954,11 +4704,14 @@
       </p:ext>
     </p:extLst>
   </p:cSld>
+  <p:clrMapOvr>
+    <a:masterClrMapping/>
+  </p:clrMapOvr>
 </p:sld>
 </file>
 
 <file path=ppt/slides/slide3.xml><?xml version="1.0" encoding="utf-8"?>
-<p:sld xmlns:p="http://schemas.openxmlformats.org/presentationml/2006/main">
+<p:sld xmlns:a="http://schemas.openxmlformats.org/drawingml/2006/main" xmlns:r="http://schemas.openxmlformats.org/officeDocument/2006/relationships" xmlns:p="http://schemas.openxmlformats.org/presentationml/2006/main">
   <p:cSld>
     <p:spTree>
       <p:nvGrpSpPr>
@@ -4967,41 +4720,46 @@
         <p:nvPr/>
       </p:nvGrpSpPr>
       <p:grpSpPr>
-        <a:xfrm xmlns:a="http://schemas.openxmlformats.org/drawingml/2006/main"/>
+        <a:xfrm>
+          <a:off x="0" y="0"/>
+          <a:ext cx="0" cy="0"/>
+          <a:chOff x="0" y="0"/>
+          <a:chExt cx="0" cy="0"/>
+        </a:xfrm>
       </p:grpSpPr>
       <p:sp>
         <p:nvSpPr>
-          <p:cNvPr id="4" name="">
-            <a:extLst xmlns:a="http://schemas.openxmlformats.org/drawingml/2006/main">
+          <p:cNvPr id="4" name="Rectangle 3">
+            <a:extLst>
               <a:ext uri="{FF2B5EF4-FFF2-40B4-BE49-F238E27FC236}">
                 <a16:creationId xmlns:a16="http://schemas.microsoft.com/office/drawing/2014/main" id="{CB849D6E-A604-481C-924F-76C530322B0E}"/>
               </a:ext>
             </a:extLst>
           </p:cNvPr>
           <p:cNvSpPr>
-            <a:spLocks xmlns:a="http://schemas.openxmlformats.org/drawingml/2006/main" noGrp="1"/>
+            <a:spLocks noGrp="1"/>
           </p:cNvSpPr>
           <p:nvPr/>
         </p:nvSpPr>
         <p:spPr>
-          <a:xfrm xmlns:a="http://schemas.openxmlformats.org/drawingml/2006/main">
+          <a:xfrm>
             <a:off x="742950" y="476250"/>
             <a:ext cx="10382250" cy="857250"/>
           </a:xfrm>
-          <a:prstGeom xmlns:a="http://schemas.openxmlformats.org/drawingml/2006/main" prst="rect">
+          <a:prstGeom prst="rect">
             <a:avLst/>
           </a:prstGeom>
-          <a:noFill xmlns:a="http://schemas.openxmlformats.org/drawingml/2006/main"/>
-          <a:ln xmlns:a="http://schemas.openxmlformats.org/drawingml/2006/main" w="0">
+          <a:noFill/>
+          <a:ln w="0">
             <a:noFill/>
           </a:ln>
         </p:spPr>
         <p:txBody>
-          <a:bodyPr xmlns:a="http://schemas.openxmlformats.org/drawingml/2006/main">
-            <a:normAutofit fontScale="100000"/>
+          <a:bodyPr>
+            <a:normAutofit/>
           </a:bodyPr>
-          <a:lstStyle xmlns:a="http://schemas.openxmlformats.org/drawingml/2006/main"/>
-          <a:p xmlns:a="http://schemas.openxmlformats.org/drawingml/2006/main">
+          <a:lstStyle/>
+          <a:p>
             <a:pPr>
               <a:defRPr sz="3225" b="0">
                 <a:solidFill>
@@ -5028,37 +4786,37 @@
       </p:sp>
       <p:sp>
         <p:nvSpPr>
-          <p:cNvPr id="2" name="">
-            <a:extLst xmlns:a="http://schemas.openxmlformats.org/drawingml/2006/main">
+          <p:cNvPr id="2" name="Rectangle 1">
+            <a:extLst>
               <a:ext uri="{FF2B5EF4-FFF2-40B4-BE49-F238E27FC236}">
                 <a16:creationId xmlns:a16="http://schemas.microsoft.com/office/drawing/2014/main" id="{306B42F3-B610-4689-A278-F00049F4378F}"/>
               </a:ext>
             </a:extLst>
           </p:cNvPr>
           <p:cNvSpPr>
-            <a:spLocks xmlns:a="http://schemas.openxmlformats.org/drawingml/2006/main" noGrp="1"/>
+            <a:spLocks noGrp="1"/>
           </p:cNvSpPr>
           <p:nvPr/>
         </p:nvSpPr>
         <p:spPr>
-          <a:xfrm xmlns:a="http://schemas.openxmlformats.org/drawingml/2006/main">
+          <a:xfrm>
             <a:off x="857250" y="1571625"/>
             <a:ext cx="5429250" cy="3714750"/>
           </a:xfrm>
-          <a:prstGeom xmlns:a="http://schemas.openxmlformats.org/drawingml/2006/main" prst="rect">
+          <a:prstGeom prst="rect">
             <a:avLst/>
           </a:prstGeom>
-          <a:noFill xmlns:a="http://schemas.openxmlformats.org/drawingml/2006/main"/>
-          <a:ln xmlns:a="http://schemas.openxmlformats.org/drawingml/2006/main" w="0">
+          <a:noFill/>
+          <a:ln w="0">
             <a:noFill/>
           </a:ln>
         </p:spPr>
         <p:txBody>
-          <a:bodyPr xmlns:a="http://schemas.openxmlformats.org/drawingml/2006/main">
-            <a:normAutofit fontScale="100000"/>
+          <a:bodyPr>
+            <a:normAutofit/>
           </a:bodyPr>
-          <a:lstStyle xmlns:a="http://schemas.openxmlformats.org/drawingml/2006/main"/>
-          <a:p xmlns:a="http://schemas.openxmlformats.org/drawingml/2006/main">
+          <a:lstStyle/>
+          <a:p>
             <a:pPr>
               <a:defRPr sz="1950" b="0">
                 <a:solidFill>
@@ -5081,7 +4839,7 @@
               <a:t>SUM: υπολογίζει το άθροισμα.</a:t>
             </a:r>
           </a:p>
-          <a:p xmlns:a="http://schemas.openxmlformats.org/drawingml/2006/main">
+          <a:p>
             <a:pPr>
               <a:defRPr sz="1950" b="0">
                 <a:solidFill>
@@ -5104,12 +4862,17 @@
               <a:t>=SUM(B3:B22)</a:t>
             </a:r>
           </a:p>
-          <a:p xmlns:a="http://schemas.openxmlformats.org/drawingml/2006/main">
-            <a:r>
-              <a:t/>
-            </a:r>
-          </a:p>
-          <a:p xmlns:a="http://schemas.openxmlformats.org/drawingml/2006/main">
+          <a:p>
+            <a:endParaRPr sz="1950" b="0">
+              <a:solidFill>
+                <a:srgbClr val="151515"/>
+              </a:solidFill>
+              <a:latin typeface="Arial"/>
+              <a:ea typeface="Arial"/>
+              <a:cs typeface="Arial"/>
+            </a:endParaRPr>
+          </a:p>
+          <a:p>
             <a:pPr>
               <a:defRPr sz="1950" b="0">
                 <a:solidFill>
@@ -5132,7 +4895,7 @@
               <a:t>AVERAGE: υπολογίζει τον μέσο όρο.</a:t>
             </a:r>
           </a:p>
-          <a:p xmlns:a="http://schemas.openxmlformats.org/drawingml/2006/main">
+          <a:p>
             <a:pPr>
               <a:defRPr sz="1950" b="0">
                 <a:solidFill>
@@ -5159,22 +4922,22 @@
       </p:sp>
       <p:pic>
         <p:nvPicPr>
-          <p:cNvPr id="6" name=""/>
+          <p:cNvPr id="6" name="Picture 5"/>
           <p:cNvPicPr>
-            <a:picLocks xmlns:a="http://schemas.openxmlformats.org/drawingml/2006/main" noChangeAspect="1"/>
+            <a:picLocks noChangeAspect="1"/>
           </p:cNvPicPr>
           <p:nvPr/>
         </p:nvPicPr>
         <p:blipFill>
-          <a:blip xmlns:r="http://schemas.openxmlformats.org/officeDocument/2006/relationships" xmlns:a="http://schemas.openxmlformats.org/drawingml/2006/main" r:embed="R38d33dfe4b87443f"/>
-          <a:stretch xmlns:a="http://schemas.openxmlformats.org/drawingml/2006/main"/>
+          <a:blip r:embed="rId3"/>
+          <a:stretch/>
         </p:blipFill>
         <p:spPr>
-          <a:xfrm xmlns:a="http://schemas.openxmlformats.org/drawingml/2006/main">
+          <a:xfrm>
             <a:off x="6762750" y="2512219"/>
             <a:ext cx="4191000" cy="2024062"/>
           </a:xfrm>
-          <a:prstGeom xmlns:a="http://schemas.openxmlformats.org/drawingml/2006/main" prst="rect">
+          <a:prstGeom prst="rect">
             <a:avLst/>
           </a:prstGeom>
         </p:spPr>
@@ -5186,11 +4949,14 @@
       </p:ext>
     </p:extLst>
   </p:cSld>
+  <p:clrMapOvr>
+    <a:masterClrMapping/>
+  </p:clrMapOvr>
 </p:sld>
 </file>
 
 <file path=ppt/slides/slide4.xml><?xml version="1.0" encoding="utf-8"?>
-<p:sld xmlns:p="http://schemas.openxmlformats.org/presentationml/2006/main">
+<p:sld xmlns:a="http://schemas.openxmlformats.org/drawingml/2006/main" xmlns:r="http://schemas.openxmlformats.org/officeDocument/2006/relationships" xmlns:p="http://schemas.openxmlformats.org/presentationml/2006/main">
   <p:cSld>
     <p:spTree>
       <p:nvGrpSpPr>
@@ -5199,41 +4965,46 @@
         <p:nvPr/>
       </p:nvGrpSpPr>
       <p:grpSpPr>
-        <a:xfrm xmlns:a="http://schemas.openxmlformats.org/drawingml/2006/main"/>
+        <a:xfrm>
+          <a:off x="0" y="0"/>
+          <a:ext cx="0" cy="0"/>
+          <a:chOff x="0" y="0"/>
+          <a:chExt cx="0" cy="0"/>
+        </a:xfrm>
       </p:grpSpPr>
       <p:sp>
         <p:nvSpPr>
-          <p:cNvPr id="4" name="">
-            <a:extLst xmlns:a="http://schemas.openxmlformats.org/drawingml/2006/main">
+          <p:cNvPr id="4" name="Rectangle 3">
+            <a:extLst>
               <a:ext uri="{FF2B5EF4-FFF2-40B4-BE49-F238E27FC236}">
                 <a16:creationId xmlns:a16="http://schemas.microsoft.com/office/drawing/2014/main" id="{D0EB1352-3966-4AA9-BBBE-CE7A2176D263}"/>
               </a:ext>
             </a:extLst>
           </p:cNvPr>
           <p:cNvSpPr>
-            <a:spLocks xmlns:a="http://schemas.openxmlformats.org/drawingml/2006/main" noGrp="1"/>
+            <a:spLocks noGrp="1"/>
           </p:cNvSpPr>
           <p:nvPr/>
         </p:nvSpPr>
         <p:spPr>
-          <a:xfrm xmlns:a="http://schemas.openxmlformats.org/drawingml/2006/main">
+          <a:xfrm>
             <a:off x="742950" y="476250"/>
             <a:ext cx="10382250" cy="857250"/>
           </a:xfrm>
-          <a:prstGeom xmlns:a="http://schemas.openxmlformats.org/drawingml/2006/main" prst="rect">
+          <a:prstGeom prst="rect">
             <a:avLst/>
           </a:prstGeom>
-          <a:noFill xmlns:a="http://schemas.openxmlformats.org/drawingml/2006/main"/>
-          <a:ln xmlns:a="http://schemas.openxmlformats.org/drawingml/2006/main" w="0">
+          <a:noFill/>
+          <a:ln w="0">
             <a:noFill/>
           </a:ln>
         </p:spPr>
         <p:txBody>
-          <a:bodyPr xmlns:a="http://schemas.openxmlformats.org/drawingml/2006/main">
-            <a:normAutofit fontScale="100000"/>
+          <a:bodyPr>
+            <a:normAutofit/>
           </a:bodyPr>
-          <a:lstStyle xmlns:a="http://schemas.openxmlformats.org/drawingml/2006/main"/>
-          <a:p xmlns:a="http://schemas.openxmlformats.org/drawingml/2006/main">
+          <a:lstStyle/>
+          <a:p>
             <a:pPr>
               <a:defRPr sz="3225" b="0">
                 <a:solidFill>
@@ -5260,37 +5031,37 @@
       </p:sp>
       <p:sp>
         <p:nvSpPr>
-          <p:cNvPr id="2" name="">
-            <a:extLst xmlns:a="http://schemas.openxmlformats.org/drawingml/2006/main">
+          <p:cNvPr id="2" name="Rectangle 1">
+            <a:extLst>
               <a:ext uri="{FF2B5EF4-FFF2-40B4-BE49-F238E27FC236}">
                 <a16:creationId xmlns:a16="http://schemas.microsoft.com/office/drawing/2014/main" id="{EA1E5A4C-DD7C-4793-81B1-FA9E6125D862}"/>
               </a:ext>
             </a:extLst>
           </p:cNvPr>
           <p:cNvSpPr>
-            <a:spLocks xmlns:a="http://schemas.openxmlformats.org/drawingml/2006/main" noGrp="1"/>
+            <a:spLocks noGrp="1"/>
           </p:cNvSpPr>
           <p:nvPr/>
         </p:nvSpPr>
         <p:spPr>
-          <a:xfrm xmlns:a="http://schemas.openxmlformats.org/drawingml/2006/main">
+          <a:xfrm>
             <a:off x="857250" y="1571625"/>
             <a:ext cx="5429250" cy="3714750"/>
           </a:xfrm>
-          <a:prstGeom xmlns:a="http://schemas.openxmlformats.org/drawingml/2006/main" prst="rect">
+          <a:prstGeom prst="rect">
             <a:avLst/>
           </a:prstGeom>
-          <a:noFill xmlns:a="http://schemas.openxmlformats.org/drawingml/2006/main"/>
-          <a:ln xmlns:a="http://schemas.openxmlformats.org/drawingml/2006/main" w="0">
+          <a:noFill/>
+          <a:ln w="0">
             <a:noFill/>
           </a:ln>
         </p:spPr>
         <p:txBody>
-          <a:bodyPr xmlns:a="http://schemas.openxmlformats.org/drawingml/2006/main">
-            <a:normAutofit fontScale="100000"/>
+          <a:bodyPr>
+            <a:normAutofit/>
           </a:bodyPr>
-          <a:lstStyle xmlns:a="http://schemas.openxmlformats.org/drawingml/2006/main"/>
-          <a:p xmlns:a="http://schemas.openxmlformats.org/drawingml/2006/main">
+          <a:lstStyle/>
+          <a:p>
             <a:pPr>
               <a:defRPr sz="1950" b="0">
                 <a:solidFill>
@@ -5313,7 +5084,7 @@
               <a:t>MAX: επιστρέφει τη μεγαλύτερη τιμή.</a:t>
             </a:r>
           </a:p>
-          <a:p xmlns:a="http://schemas.openxmlformats.org/drawingml/2006/main">
+          <a:p>
             <a:pPr>
               <a:defRPr sz="1950" b="0">
                 <a:solidFill>
@@ -5336,12 +5107,17 @@
               <a:t>=MAX(B3:B22)</a:t>
             </a:r>
           </a:p>
-          <a:p xmlns:a="http://schemas.openxmlformats.org/drawingml/2006/main">
-            <a:r>
-              <a:t/>
-            </a:r>
-          </a:p>
-          <a:p xmlns:a="http://schemas.openxmlformats.org/drawingml/2006/main">
+          <a:p>
+            <a:endParaRPr sz="1950" b="0">
+              <a:solidFill>
+                <a:srgbClr val="151515"/>
+              </a:solidFill>
+              <a:latin typeface="Arial"/>
+              <a:ea typeface="Arial"/>
+              <a:cs typeface="Arial"/>
+            </a:endParaRPr>
+          </a:p>
+          <a:p>
             <a:pPr>
               <a:defRPr sz="1950" b="0">
                 <a:solidFill>
@@ -5364,7 +5140,7 @@
               <a:t>MIN: επιστρέφει τη μικρότερη τιμή.</a:t>
             </a:r>
           </a:p>
-          <a:p xmlns:a="http://schemas.openxmlformats.org/drawingml/2006/main">
+          <a:p>
             <a:pPr>
               <a:defRPr sz="1950" b="0">
                 <a:solidFill>
@@ -5391,37 +5167,37 @@
       </p:sp>
       <p:sp>
         <p:nvSpPr>
-          <p:cNvPr id="3" name="">
-            <a:extLst xmlns:a="http://schemas.openxmlformats.org/drawingml/2006/main">
+          <p:cNvPr id="3" name="Rectangle 2">
+            <a:extLst>
               <a:ext uri="{FF2B5EF4-FFF2-40B4-BE49-F238E27FC236}">
                 <a16:creationId xmlns:a16="http://schemas.microsoft.com/office/drawing/2014/main" id="{E519FEEB-79F6-446D-A180-DAABBBB53C12}"/>
               </a:ext>
             </a:extLst>
           </p:cNvPr>
           <p:cNvSpPr>
-            <a:spLocks xmlns:a="http://schemas.openxmlformats.org/drawingml/2006/main" noGrp="1"/>
+            <a:spLocks noGrp="1"/>
           </p:cNvSpPr>
           <p:nvPr/>
         </p:nvSpPr>
         <p:spPr>
-          <a:xfrm xmlns:a="http://schemas.openxmlformats.org/drawingml/2006/main">
+          <a:xfrm>
             <a:off x="6667500" y="2095500"/>
             <a:ext cx="4095750" cy="2190750"/>
           </a:xfrm>
-          <a:prstGeom xmlns:a="http://schemas.openxmlformats.org/drawingml/2006/main" prst="rect">
+          <a:prstGeom prst="rect">
             <a:avLst/>
           </a:prstGeom>
-          <a:noFill xmlns:a="http://schemas.openxmlformats.org/drawingml/2006/main"/>
-          <a:ln xmlns:a="http://schemas.openxmlformats.org/drawingml/2006/main" w="0">
+          <a:noFill/>
+          <a:ln w="0">
             <a:noFill/>
           </a:ln>
         </p:spPr>
         <p:txBody>
-          <a:bodyPr xmlns:a="http://schemas.openxmlformats.org/drawingml/2006/main">
-            <a:normAutofit fontScale="100000"/>
+          <a:bodyPr>
+            <a:normAutofit/>
           </a:bodyPr>
-          <a:lstStyle xmlns:a="http://schemas.openxmlformats.org/drawingml/2006/main"/>
-          <a:p xmlns:a="http://schemas.openxmlformats.org/drawingml/2006/main">
+          <a:lstStyle/>
+          <a:p>
             <a:pPr>
               <a:defRPr sz="2250" b="1">
                 <a:solidFill>
@@ -5444,12 +5220,17 @@
               <a:t>MAX = μεγαλύτερο</a:t>
             </a:r>
           </a:p>
-          <a:p xmlns:a="http://schemas.openxmlformats.org/drawingml/2006/main">
-            <a:r>
-              <a:t/>
-            </a:r>
-          </a:p>
-          <a:p xmlns:a="http://schemas.openxmlformats.org/drawingml/2006/main">
+          <a:p>
+            <a:endParaRPr sz="2250" b="1">
+              <a:solidFill>
+                <a:srgbClr val="D84B00"/>
+              </a:solidFill>
+              <a:latin typeface="Arial"/>
+              <a:ea typeface="Arial"/>
+              <a:cs typeface="Arial"/>
+            </a:endParaRPr>
+          </a:p>
+          <a:p>
             <a:pPr>
               <a:defRPr sz="2250" b="1">
                 <a:solidFill>
@@ -5481,11 +5262,14 @@
       </p:ext>
     </p:extLst>
   </p:cSld>
+  <p:clrMapOvr>
+    <a:masterClrMapping/>
+  </p:clrMapOvr>
 </p:sld>
 </file>
 
 <file path=ppt/slides/slide5.xml><?xml version="1.0" encoding="utf-8"?>
-<p:sld xmlns:p="http://schemas.openxmlformats.org/presentationml/2006/main">
+<p:sld xmlns:a="http://schemas.openxmlformats.org/drawingml/2006/main" xmlns:r="http://schemas.openxmlformats.org/officeDocument/2006/relationships" xmlns:p="http://schemas.openxmlformats.org/presentationml/2006/main">
   <p:cSld>
     <p:spTree>
       <p:nvGrpSpPr>
@@ -5494,41 +5278,46 @@
         <p:nvPr/>
       </p:nvGrpSpPr>
       <p:grpSpPr>
-        <a:xfrm xmlns:a="http://schemas.openxmlformats.org/drawingml/2006/main"/>
+        <a:xfrm>
+          <a:off x="0" y="0"/>
+          <a:ext cx="0" cy="0"/>
+          <a:chOff x="0" y="0"/>
+          <a:chExt cx="0" cy="0"/>
+        </a:xfrm>
       </p:grpSpPr>
       <p:sp>
         <p:nvSpPr>
-          <p:cNvPr id="5" name="">
-            <a:extLst xmlns:a="http://schemas.openxmlformats.org/drawingml/2006/main">
+          <p:cNvPr id="5" name="Rectangle 4">
+            <a:extLst>
               <a:ext uri="{FF2B5EF4-FFF2-40B4-BE49-F238E27FC236}">
                 <a16:creationId xmlns:a16="http://schemas.microsoft.com/office/drawing/2014/main" id="{BB3182B1-113F-4B37-A66F-C86A530AA2A0}"/>
               </a:ext>
             </a:extLst>
           </p:cNvPr>
           <p:cNvSpPr>
-            <a:spLocks xmlns:a="http://schemas.openxmlformats.org/drawingml/2006/main" noGrp="1"/>
+            <a:spLocks noGrp="1"/>
           </p:cNvSpPr>
           <p:nvPr/>
         </p:nvSpPr>
         <p:spPr>
-          <a:xfrm xmlns:a="http://schemas.openxmlformats.org/drawingml/2006/main">
+          <a:xfrm>
             <a:off x="742950" y="476250"/>
             <a:ext cx="10382250" cy="857250"/>
           </a:xfrm>
-          <a:prstGeom xmlns:a="http://schemas.openxmlformats.org/drawingml/2006/main" prst="rect">
+          <a:prstGeom prst="rect">
             <a:avLst/>
           </a:prstGeom>
-          <a:noFill xmlns:a="http://schemas.openxmlformats.org/drawingml/2006/main"/>
-          <a:ln xmlns:a="http://schemas.openxmlformats.org/drawingml/2006/main" w="0">
+          <a:noFill/>
+          <a:ln w="0">
             <a:noFill/>
           </a:ln>
         </p:spPr>
         <p:txBody>
-          <a:bodyPr xmlns:a="http://schemas.openxmlformats.org/drawingml/2006/main">
-            <a:normAutofit fontScale="100000"/>
+          <a:bodyPr>
+            <a:normAutofit/>
           </a:bodyPr>
-          <a:lstStyle xmlns:a="http://schemas.openxmlformats.org/drawingml/2006/main"/>
-          <a:p xmlns:a="http://schemas.openxmlformats.org/drawingml/2006/main">
+          <a:lstStyle/>
+          <a:p>
             <a:pPr>
               <a:defRPr sz="3225" b="0">
                 <a:solidFill>
@@ -5555,37 +5344,37 @@
       </p:sp>
       <p:sp>
         <p:nvSpPr>
-          <p:cNvPr id="2" name="">
-            <a:extLst xmlns:a="http://schemas.openxmlformats.org/drawingml/2006/main">
+          <p:cNvPr id="2" name="Rectangle 1">
+            <a:extLst>
               <a:ext uri="{FF2B5EF4-FFF2-40B4-BE49-F238E27FC236}">
                 <a16:creationId xmlns:a16="http://schemas.microsoft.com/office/drawing/2014/main" id="{3FFCA40C-3A4D-4835-BA45-BC0C72BBA00C}"/>
               </a:ext>
             </a:extLst>
           </p:cNvPr>
           <p:cNvSpPr>
-            <a:spLocks xmlns:a="http://schemas.openxmlformats.org/drawingml/2006/main" noGrp="1"/>
+            <a:spLocks noGrp="1"/>
           </p:cNvSpPr>
           <p:nvPr/>
         </p:nvSpPr>
         <p:spPr>
-          <a:xfrm xmlns:a="http://schemas.openxmlformats.org/drawingml/2006/main">
+          <a:xfrm>
             <a:off x="857250" y="1381125"/>
             <a:ext cx="5429250" cy="714375"/>
           </a:xfrm>
-          <a:prstGeom xmlns:a="http://schemas.openxmlformats.org/drawingml/2006/main" prst="rect">
+          <a:prstGeom prst="rect">
             <a:avLst/>
           </a:prstGeom>
-          <a:noFill xmlns:a="http://schemas.openxmlformats.org/drawingml/2006/main"/>
-          <a:ln xmlns:a="http://schemas.openxmlformats.org/drawingml/2006/main" w="0">
+          <a:noFill/>
+          <a:ln w="0">
             <a:noFill/>
           </a:ln>
         </p:spPr>
         <p:txBody>
-          <a:bodyPr xmlns:a="http://schemas.openxmlformats.org/drawingml/2006/main">
-            <a:normAutofit fontScale="100000"/>
+          <a:bodyPr>
+            <a:normAutofit/>
           </a:bodyPr>
-          <a:lstStyle xmlns:a="http://schemas.openxmlformats.org/drawingml/2006/main"/>
-          <a:p xmlns:a="http://schemas.openxmlformats.org/drawingml/2006/main">
+          <a:lstStyle/>
+          <a:p>
             <a:pPr>
               <a:defRPr sz="1950" b="0">
                 <a:solidFill>
@@ -5612,37 +5401,37 @@
       </p:sp>
       <p:sp>
         <p:nvSpPr>
-          <p:cNvPr id="3" name="">
-            <a:extLst xmlns:a="http://schemas.openxmlformats.org/drawingml/2006/main">
+          <p:cNvPr id="3" name="Rectangle 2">
+            <a:extLst>
               <a:ext uri="{FF2B5EF4-FFF2-40B4-BE49-F238E27FC236}">
                 <a16:creationId xmlns:a16="http://schemas.microsoft.com/office/drawing/2014/main" id="{0FD8DC59-79A8-42F4-AA7E-860D887215F1}"/>
               </a:ext>
             </a:extLst>
           </p:cNvPr>
           <p:cNvSpPr>
-            <a:spLocks xmlns:a="http://schemas.openxmlformats.org/drawingml/2006/main" noGrp="1"/>
+            <a:spLocks noGrp="1"/>
           </p:cNvSpPr>
           <p:nvPr/>
         </p:nvSpPr>
         <p:spPr>
-          <a:xfrm xmlns:a="http://schemas.openxmlformats.org/drawingml/2006/main">
+          <a:xfrm>
             <a:off x="857250" y="2333625"/>
             <a:ext cx="5429250" cy="3143250"/>
           </a:xfrm>
-          <a:prstGeom xmlns:a="http://schemas.openxmlformats.org/drawingml/2006/main" prst="rect">
+          <a:prstGeom prst="rect">
             <a:avLst/>
           </a:prstGeom>
-          <a:noFill xmlns:a="http://schemas.openxmlformats.org/drawingml/2006/main"/>
-          <a:ln xmlns:a="http://schemas.openxmlformats.org/drawingml/2006/main" w="0">
+          <a:noFill/>
+          <a:ln w="0">
             <a:noFill/>
           </a:ln>
         </p:spPr>
         <p:txBody>
-          <a:bodyPr xmlns:a="http://schemas.openxmlformats.org/drawingml/2006/main">
-            <a:normAutofit fontScale="100000"/>
+          <a:bodyPr>
+            <a:normAutofit/>
           </a:bodyPr>
-          <a:lstStyle xmlns:a="http://schemas.openxmlformats.org/drawingml/2006/main"/>
-          <a:p xmlns:a="http://schemas.openxmlformats.org/drawingml/2006/main">
+          <a:lstStyle/>
+          <a:p>
             <a:pPr>
               <a:defRPr sz="1950" b="0">
                 <a:solidFill>
@@ -5654,7 +5443,7 @@
               </a:defRPr>
             </a:pPr>
             <a:r>
-              <a:rPr sz="1950" b="0">
+              <a:rPr sz="1950" b="0" dirty="0" err="1">
                 <a:solidFill>
                   <a:srgbClr val="151515"/>
                 </a:solidFill>
@@ -5662,10 +5451,21 @@
                 <a:ea typeface="Arial"/>
                 <a:cs typeface="Arial"/>
               </a:rPr>
-              <a:t>Σύνταξη:</a:t>
-            </a:r>
-          </a:p>
-          <a:p xmlns:a="http://schemas.openxmlformats.org/drawingml/2006/main">
+              <a:t>Σύντ</a:t>
+            </a:r>
+            <a:r>
+              <a:rPr sz="1950" b="0" dirty="0">
+                <a:solidFill>
+                  <a:srgbClr val="151515"/>
+                </a:solidFill>
+                <a:latin typeface="Arial"/>
+                <a:ea typeface="Arial"/>
+                <a:cs typeface="Arial"/>
+              </a:rPr>
+              <a:t>αξη:</a:t>
+            </a:r>
+          </a:p>
+          <a:p>
             <a:pPr>
               <a:defRPr sz="1950" b="0">
                 <a:solidFill>
@@ -5677,7 +5477,7 @@
               </a:defRPr>
             </a:pPr>
             <a:r>
-              <a:rPr sz="1950" b="0">
+              <a:rPr sz="1950" b="0" dirty="0">
                 <a:solidFill>
                   <a:srgbClr val="151515"/>
                 </a:solidFill>
@@ -5685,15 +5485,75 @@
                 <a:ea typeface="Arial"/>
                 <a:cs typeface="Arial"/>
               </a:rPr>
-              <a:t>=ROUND(αριθμός; δεκαδικά)</a:t>
-            </a:r>
-          </a:p>
-          <a:p xmlns:a="http://schemas.openxmlformats.org/drawingml/2006/main">
-            <a:r>
-              <a:t/>
-            </a:r>
-          </a:p>
-          <a:p xmlns:a="http://schemas.openxmlformats.org/drawingml/2006/main">
+              <a:t>=ROUND(α</a:t>
+            </a:r>
+            <a:r>
+              <a:rPr sz="1950" b="0" dirty="0" err="1">
+                <a:solidFill>
+                  <a:srgbClr val="151515"/>
+                </a:solidFill>
+                <a:latin typeface="Arial"/>
+                <a:ea typeface="Arial"/>
+                <a:cs typeface="Arial"/>
+              </a:rPr>
+              <a:t>ριθμός</a:t>
+            </a:r>
+            <a:r>
+              <a:rPr lang="en-US" sz="1950" b="0" dirty="0">
+                <a:solidFill>
+                  <a:srgbClr val="151515"/>
+                </a:solidFill>
+                <a:latin typeface="Arial"/>
+                <a:ea typeface="Arial"/>
+                <a:cs typeface="Arial"/>
+              </a:rPr>
+              <a:t>,</a:t>
+            </a:r>
+            <a:r>
+              <a:rPr sz="1950" b="0" dirty="0">
+                <a:solidFill>
+                  <a:srgbClr val="151515"/>
+                </a:solidFill>
+                <a:latin typeface="Arial"/>
+                <a:ea typeface="Arial"/>
+                <a:cs typeface="Arial"/>
+              </a:rPr>
+              <a:t> </a:t>
+            </a:r>
+            <a:r>
+              <a:rPr sz="1950" b="0" dirty="0" err="1">
+                <a:solidFill>
+                  <a:srgbClr val="151515"/>
+                </a:solidFill>
+                <a:latin typeface="Arial"/>
+                <a:ea typeface="Arial"/>
+                <a:cs typeface="Arial"/>
+              </a:rPr>
+              <a:t>δεκ</a:t>
+            </a:r>
+            <a:r>
+              <a:rPr sz="1950" b="0" dirty="0">
+                <a:solidFill>
+                  <a:srgbClr val="151515"/>
+                </a:solidFill>
+                <a:latin typeface="Arial"/>
+                <a:ea typeface="Arial"/>
+                <a:cs typeface="Arial"/>
+              </a:rPr>
+              <a:t>αδικά)</a:t>
+            </a:r>
+          </a:p>
+          <a:p>
+            <a:endParaRPr sz="1950" b="0" dirty="0">
+              <a:solidFill>
+                <a:srgbClr val="151515"/>
+              </a:solidFill>
+              <a:latin typeface="Arial"/>
+              <a:ea typeface="Arial"/>
+              <a:cs typeface="Arial"/>
+            </a:endParaRPr>
+          </a:p>
+          <a:p>
             <a:pPr>
               <a:defRPr sz="1950" b="0">
                 <a:solidFill>
@@ -5705,7 +5565,7 @@
               </a:defRPr>
             </a:pPr>
             <a:r>
-              <a:rPr sz="1950" b="0">
+              <a:rPr sz="1950" b="0" dirty="0" err="1">
                 <a:solidFill>
                   <a:srgbClr val="151515"/>
                 </a:solidFill>
@@ -5713,10 +5573,43 @@
                 <a:ea typeface="Arial"/>
                 <a:cs typeface="Arial"/>
               </a:rPr>
-              <a:t>Χωρίς δεκαδικά ψηφία:</a:t>
-            </a:r>
-          </a:p>
-          <a:p xmlns:a="http://schemas.openxmlformats.org/drawingml/2006/main">
+              <a:t>Χωρίς</a:t>
+            </a:r>
+            <a:r>
+              <a:rPr sz="1950" b="0" dirty="0">
+                <a:solidFill>
+                  <a:srgbClr val="151515"/>
+                </a:solidFill>
+                <a:latin typeface="Arial"/>
+                <a:ea typeface="Arial"/>
+                <a:cs typeface="Arial"/>
+              </a:rPr>
+              <a:t> </a:t>
+            </a:r>
+            <a:r>
+              <a:rPr sz="1950" b="0" dirty="0" err="1">
+                <a:solidFill>
+                  <a:srgbClr val="151515"/>
+                </a:solidFill>
+                <a:latin typeface="Arial"/>
+                <a:ea typeface="Arial"/>
+                <a:cs typeface="Arial"/>
+              </a:rPr>
+              <a:t>δεκ</a:t>
+            </a:r>
+            <a:r>
+              <a:rPr sz="1950" b="0" dirty="0">
+                <a:solidFill>
+                  <a:srgbClr val="151515"/>
+                </a:solidFill>
+                <a:latin typeface="Arial"/>
+                <a:ea typeface="Arial"/>
+                <a:cs typeface="Arial"/>
+              </a:rPr>
+              <a:t>αδικά ψηφία:</a:t>
+            </a:r>
+          </a:p>
+          <a:p>
             <a:pPr>
               <a:defRPr sz="1950" b="0">
                 <a:solidFill>
@@ -5728,7 +5621,7 @@
               </a:defRPr>
             </a:pPr>
             <a:r>
-              <a:rPr sz="1950" b="0">
+              <a:rPr sz="1950" b="0" dirty="0">
                 <a:solidFill>
                   <a:srgbClr val="151515"/>
                 </a:solidFill>
@@ -5736,44 +5629,66 @@
                 <a:ea typeface="Arial"/>
                 <a:cs typeface="Arial"/>
               </a:rPr>
-              <a:t>=ROUND(B27;0)</a:t>
-            </a:r>
-          </a:p>
-        </p:txBody>
-      </p:sp>
-      <p:sp>
-        <p:nvSpPr>
-          <p:cNvPr id="4" name="">
-            <a:extLst xmlns:a="http://schemas.openxmlformats.org/drawingml/2006/main">
+              <a:t>=ROUND(B27</a:t>
+            </a:r>
+            <a:r>
+              <a:rPr lang="en-US" sz="1950" b="0" dirty="0">
+                <a:solidFill>
+                  <a:srgbClr val="151515"/>
+                </a:solidFill>
+                <a:latin typeface="Arial"/>
+                <a:ea typeface="Arial"/>
+                <a:cs typeface="Arial"/>
+              </a:rPr>
+              <a:t>,</a:t>
+            </a:r>
+            <a:r>
+              <a:rPr sz="1950" b="0" dirty="0">
+                <a:solidFill>
+                  <a:srgbClr val="151515"/>
+                </a:solidFill>
+                <a:latin typeface="Arial"/>
+                <a:ea typeface="Arial"/>
+                <a:cs typeface="Arial"/>
+              </a:rPr>
+              <a:t>0)</a:t>
+            </a:r>
+          </a:p>
+        </p:txBody>
+      </p:sp>
+      <p:sp>
+        <p:nvSpPr>
+          <p:cNvPr id="4" name="Rectangle 3">
+            <a:extLst>
               <a:ext uri="{FF2B5EF4-FFF2-40B4-BE49-F238E27FC236}">
                 <a16:creationId xmlns:a16="http://schemas.microsoft.com/office/drawing/2014/main" id="{7AD36C20-1344-48AE-AC3A-F40D5F764620}"/>
               </a:ext>
             </a:extLst>
           </p:cNvPr>
           <p:cNvSpPr>
-            <a:spLocks xmlns:a="http://schemas.openxmlformats.org/drawingml/2006/main" noGrp="1"/>
+            <a:spLocks noGrp="1"/>
           </p:cNvSpPr>
           <p:nvPr/>
         </p:nvSpPr>
         <p:spPr>
-          <a:xfrm xmlns:a="http://schemas.openxmlformats.org/drawingml/2006/main">
+          <a:xfrm>
             <a:off x="6667500" y="2095500"/>
             <a:ext cx="4095750" cy="2190750"/>
           </a:xfrm>
-          <a:prstGeom xmlns:a="http://schemas.openxmlformats.org/drawingml/2006/main" prst="rect">
+          <a:prstGeom prst="rect">
             <a:avLst/>
           </a:prstGeom>
-          <a:noFill xmlns:a="http://schemas.openxmlformats.org/drawingml/2006/main"/>
-          <a:ln xmlns:a="http://schemas.openxmlformats.org/drawingml/2006/main" w="0">
+          <a:noFill/>
+          <a:ln w="0">
             <a:noFill/>
           </a:ln>
         </p:spPr>
         <p:txBody>
-          <a:bodyPr xmlns:a="http://schemas.openxmlformats.org/drawingml/2006/main">
-            <a:normAutofit fontScale="100000"/>
+          <a:bodyPr>
+            <a:normAutofit/>
           </a:bodyPr>
-          <a:lstStyle xmlns:a="http://schemas.openxmlformats.org/drawingml/2006/main"/>
-          <a:p xmlns:a="http://schemas.openxmlformats.org/drawingml/2006/main">
+          <a:lstStyle/>
+          <a:p>
             <a:pPr>
               <a:defRPr sz="2250" b="1">
                 <a:solidFill>
@@ -5805,11 +5720,14 @@
       </p:ext>
     </p:extLst>
   </p:cSld>
+  <p:clrMapOvr>
+    <a:masterClrMapping/>
+  </p:clrMapOvr>
 </p:sld>
 </file>
 
 <file path=ppt/slides/slide6.xml><?xml version="1.0" encoding="utf-8"?>
-<p:sld xmlns:p="http://schemas.openxmlformats.org/presentationml/2006/main">
+<p:sld xmlns:a="http://schemas.openxmlformats.org/drawingml/2006/main" xmlns:r="http://schemas.openxmlformats.org/officeDocument/2006/relationships" xmlns:p="http://schemas.openxmlformats.org/presentationml/2006/main">
   <p:cSld>
     <p:spTree>
       <p:nvGrpSpPr>
@@ -5818,41 +5736,46 @@
         <p:nvPr/>
       </p:nvGrpSpPr>
       <p:grpSpPr>
-        <a:xfrm xmlns:a="http://schemas.openxmlformats.org/drawingml/2006/main"/>
+        <a:xfrm>
+          <a:off x="0" y="0"/>
+          <a:ext cx="0" cy="0"/>
+          <a:chOff x="0" y="0"/>
+          <a:chExt cx="0" cy="0"/>
+        </a:xfrm>
       </p:grpSpPr>
       <p:sp>
         <p:nvSpPr>
-          <p:cNvPr id="4" name="">
-            <a:extLst xmlns:a="http://schemas.openxmlformats.org/drawingml/2006/main">
+          <p:cNvPr id="4" name="Rectangle 3">
+            <a:extLst>
               <a:ext uri="{FF2B5EF4-FFF2-40B4-BE49-F238E27FC236}">
                 <a16:creationId xmlns:a16="http://schemas.microsoft.com/office/drawing/2014/main" id="{A1296595-E404-4E3C-905F-D75073D58290}"/>
               </a:ext>
             </a:extLst>
           </p:cNvPr>
           <p:cNvSpPr>
-            <a:spLocks xmlns:a="http://schemas.openxmlformats.org/drawingml/2006/main" noGrp="1"/>
+            <a:spLocks noGrp="1"/>
           </p:cNvSpPr>
           <p:nvPr/>
         </p:nvSpPr>
         <p:spPr>
-          <a:xfrm xmlns:a="http://schemas.openxmlformats.org/drawingml/2006/main">
+          <a:xfrm>
             <a:off x="742950" y="476250"/>
             <a:ext cx="10382250" cy="857250"/>
           </a:xfrm>
-          <a:prstGeom xmlns:a="http://schemas.openxmlformats.org/drawingml/2006/main" prst="rect">
+          <a:prstGeom prst="rect">
             <a:avLst/>
           </a:prstGeom>
-          <a:noFill xmlns:a="http://schemas.openxmlformats.org/drawingml/2006/main"/>
-          <a:ln xmlns:a="http://schemas.openxmlformats.org/drawingml/2006/main" w="0">
+          <a:noFill/>
+          <a:ln w="0">
             <a:noFill/>
           </a:ln>
         </p:spPr>
         <p:txBody>
-          <a:bodyPr xmlns:a="http://schemas.openxmlformats.org/drawingml/2006/main">
-            <a:normAutofit fontScale="100000"/>
+          <a:bodyPr>
+            <a:normAutofit/>
           </a:bodyPr>
-          <a:lstStyle xmlns:a="http://schemas.openxmlformats.org/drawingml/2006/main"/>
-          <a:p xmlns:a="http://schemas.openxmlformats.org/drawingml/2006/main">
+          <a:lstStyle/>
+          <a:p>
             <a:pPr>
               <a:defRPr sz="3225" b="0">
                 <a:solidFill>
@@ -5879,37 +5802,37 @@
       </p:sp>
       <p:sp>
         <p:nvSpPr>
-          <p:cNvPr id="2" name="">
-            <a:extLst xmlns:a="http://schemas.openxmlformats.org/drawingml/2006/main">
+          <p:cNvPr id="2" name="Rectangle 1">
+            <a:extLst>
               <a:ext uri="{FF2B5EF4-FFF2-40B4-BE49-F238E27FC236}">
                 <a16:creationId xmlns:a16="http://schemas.microsoft.com/office/drawing/2014/main" id="{067A685E-D5A8-4E2E-8FC1-FB68055434E7}"/>
               </a:ext>
             </a:extLst>
           </p:cNvPr>
           <p:cNvSpPr>
-            <a:spLocks xmlns:a="http://schemas.openxmlformats.org/drawingml/2006/main" noGrp="1"/>
+            <a:spLocks noGrp="1"/>
           </p:cNvSpPr>
           <p:nvPr/>
         </p:nvSpPr>
         <p:spPr>
-          <a:xfrm xmlns:a="http://schemas.openxmlformats.org/drawingml/2006/main">
+          <a:xfrm>
             <a:off x="857250" y="1571625"/>
             <a:ext cx="5429250" cy="3714750"/>
           </a:xfrm>
-          <a:prstGeom xmlns:a="http://schemas.openxmlformats.org/drawingml/2006/main" prst="rect">
+          <a:prstGeom prst="rect">
             <a:avLst/>
           </a:prstGeom>
-          <a:noFill xmlns:a="http://schemas.openxmlformats.org/drawingml/2006/main"/>
-          <a:ln xmlns:a="http://schemas.openxmlformats.org/drawingml/2006/main" w="0">
+          <a:noFill/>
+          <a:ln w="0">
             <a:noFill/>
           </a:ln>
         </p:spPr>
         <p:txBody>
-          <a:bodyPr xmlns:a="http://schemas.openxmlformats.org/drawingml/2006/main">
-            <a:normAutofit fontScale="100000"/>
+          <a:bodyPr>
+            <a:normAutofit/>
           </a:bodyPr>
-          <a:lstStyle xmlns:a="http://schemas.openxmlformats.org/drawingml/2006/main"/>
-          <a:p xmlns:a="http://schemas.openxmlformats.org/drawingml/2006/main">
+          <a:lstStyle/>
+          <a:p>
             <a:pPr>
               <a:defRPr sz="1950" b="0">
                 <a:solidFill>
@@ -5932,7 +5855,7 @@
               <a:t>1. Δημιουργούμε σωστά τη συνάρτηση στο πρώτο κελί.</a:t>
             </a:r>
           </a:p>
-          <a:p xmlns:a="http://schemas.openxmlformats.org/drawingml/2006/main">
+          <a:p>
             <a:pPr>
               <a:defRPr sz="1950" b="0">
                 <a:solidFill>
@@ -5955,7 +5878,7 @@
               <a:t>2. Αντιγράφουμε το κελί.</a:t>
             </a:r>
           </a:p>
-          <a:p xmlns:a="http://schemas.openxmlformats.org/drawingml/2006/main">
+          <a:p>
             <a:pPr>
               <a:defRPr sz="1950" b="0">
                 <a:solidFill>
@@ -5978,7 +5901,7 @@
               <a:t>3. Επικολλούμε στην υπόλοιπη περιοχή.</a:t>
             </a:r>
           </a:p>
-          <a:p xmlns:a="http://schemas.openxmlformats.org/drawingml/2006/main">
+          <a:p>
             <a:pPr>
               <a:defRPr sz="1950" b="0">
                 <a:solidFill>
@@ -6005,22 +5928,22 @@
       </p:sp>
       <p:pic>
         <p:nvPicPr>
-          <p:cNvPr id="6" name=""/>
+          <p:cNvPr id="6" name="Picture 5"/>
           <p:cNvPicPr>
-            <a:picLocks xmlns:a="http://schemas.openxmlformats.org/drawingml/2006/main" noChangeAspect="1"/>
+            <a:picLocks noChangeAspect="1"/>
           </p:cNvPicPr>
           <p:nvPr/>
         </p:nvPicPr>
         <p:blipFill>
-          <a:blip xmlns:r="http://schemas.openxmlformats.org/officeDocument/2006/relationships" xmlns:a="http://schemas.openxmlformats.org/drawingml/2006/main" r:embed="Rd1291adcaf9e4e2b"/>
-          <a:stretch xmlns:a="http://schemas.openxmlformats.org/drawingml/2006/main"/>
+          <a:blip r:embed="rId3"/>
+          <a:stretch/>
         </p:blipFill>
         <p:spPr>
-          <a:xfrm xmlns:a="http://schemas.openxmlformats.org/drawingml/2006/main">
+          <a:xfrm>
             <a:off x="6762750" y="2740103"/>
             <a:ext cx="4191000" cy="1568294"/>
           </a:xfrm>
-          <a:prstGeom xmlns:a="http://schemas.openxmlformats.org/drawingml/2006/main" prst="rect">
+          <a:prstGeom prst="rect">
             <a:avLst/>
           </a:prstGeom>
         </p:spPr>
@@ -6032,15 +5955,18 @@
       </p:ext>
     </p:extLst>
   </p:cSld>
+  <p:clrMapOvr>
+    <a:masterClrMapping/>
+  </p:clrMapOvr>
 </p:sld>
 </file>
 
 <file path=ppt/slides/slide7.xml><?xml version="1.0" encoding="utf-8"?>
-<p:sld xmlns:p="http://schemas.openxmlformats.org/presentationml/2006/main">
+<p:sld xmlns:a="http://schemas.openxmlformats.org/drawingml/2006/main" xmlns:r="http://schemas.openxmlformats.org/officeDocument/2006/relationships" xmlns:p="http://schemas.openxmlformats.org/presentationml/2006/main">
   <p:cSld>
     <p:bg>
       <p:bgRef idx="1001">
-        <a:schemeClr xmlns:a="http://schemas.openxmlformats.org/drawingml/2006/main" val="bg1"/>
+        <a:schemeClr val="bg1"/>
       </p:bgRef>
     </p:bg>
     <p:spTree>
@@ -6050,41 +5976,46 @@
         <p:nvPr/>
       </p:nvGrpSpPr>
       <p:grpSpPr>
-        <a:xfrm xmlns:a="http://schemas.openxmlformats.org/drawingml/2006/main"/>
+        <a:xfrm>
+          <a:off x="0" y="0"/>
+          <a:ext cx="0" cy="0"/>
+          <a:chOff x="0" y="0"/>
+          <a:chExt cx="0" cy="0"/>
+        </a:xfrm>
       </p:grpSpPr>
       <p:sp>
         <p:nvSpPr>
-          <p:cNvPr id="5" name="">
-            <a:extLst xmlns:a="http://schemas.openxmlformats.org/drawingml/2006/main">
+          <p:cNvPr id="5" name="Rectangle 4">
+            <a:extLst>
               <a:ext uri="{FF2B5EF4-FFF2-40B4-BE49-F238E27FC236}">
                 <a16:creationId xmlns:a16="http://schemas.microsoft.com/office/drawing/2014/main" id="{2206BBAC-B20C-409D-8350-9D493B672E19}"/>
               </a:ext>
             </a:extLst>
           </p:cNvPr>
           <p:cNvSpPr>
-            <a:spLocks xmlns:a="http://schemas.openxmlformats.org/drawingml/2006/main" noGrp="1"/>
+            <a:spLocks noGrp="1"/>
           </p:cNvSpPr>
           <p:nvPr/>
         </p:nvSpPr>
         <p:spPr>
-          <a:xfrm xmlns:a="http://schemas.openxmlformats.org/drawingml/2006/main">
+          <a:xfrm>
             <a:off x="742950" y="476250"/>
             <a:ext cx="4953000" cy="857250"/>
           </a:xfrm>
-          <a:prstGeom xmlns:a="http://schemas.openxmlformats.org/drawingml/2006/main" prst="rect">
+          <a:prstGeom prst="rect">
             <a:avLst/>
           </a:prstGeom>
-          <a:noFill xmlns:a="http://schemas.openxmlformats.org/drawingml/2006/main"/>
-          <a:ln xmlns:a="http://schemas.openxmlformats.org/drawingml/2006/main" w="0">
+          <a:noFill/>
+          <a:ln w="0">
             <a:noFill/>
           </a:ln>
         </p:spPr>
         <p:txBody>
-          <a:bodyPr xmlns:a="http://schemas.openxmlformats.org/drawingml/2006/main">
+          <a:bodyPr>
             <a:normAutofit fontScale="92043"/>
           </a:bodyPr>
-          <a:lstStyle xmlns:a="http://schemas.openxmlformats.org/drawingml/2006/main"/>
-          <a:p xmlns:a="http://schemas.openxmlformats.org/drawingml/2006/main">
+          <a:lstStyle/>
+          <a:p>
             <a:pPr>
               <a:defRPr sz="3225" b="0">
                 <a:solidFill>
@@ -6111,37 +6042,37 @@
       </p:sp>
       <p:sp>
         <p:nvSpPr>
-          <p:cNvPr id="2" name="">
-            <a:extLst xmlns:a="http://schemas.openxmlformats.org/drawingml/2006/main">
+          <p:cNvPr id="2" name="Rectangle 1">
+            <a:extLst>
               <a:ext uri="{FF2B5EF4-FFF2-40B4-BE49-F238E27FC236}">
                 <a16:creationId xmlns:a16="http://schemas.microsoft.com/office/drawing/2014/main" id="{F6A5915B-68FF-4FFB-8E08-8FA2DD9767E7}"/>
               </a:ext>
             </a:extLst>
           </p:cNvPr>
           <p:cNvSpPr>
-            <a:spLocks xmlns:a="http://schemas.openxmlformats.org/drawingml/2006/main" noGrp="1"/>
+            <a:spLocks noGrp="1"/>
           </p:cNvSpPr>
           <p:nvPr/>
         </p:nvSpPr>
         <p:spPr>
-          <a:xfrm xmlns:a="http://schemas.openxmlformats.org/drawingml/2006/main">
+          <a:xfrm>
             <a:off x="5905500" y="1190625"/>
             <a:ext cx="6191250" cy="523875"/>
           </a:xfrm>
-          <a:prstGeom xmlns:a="http://schemas.openxmlformats.org/drawingml/2006/main" prst="rect">
+          <a:prstGeom prst="rect">
             <a:avLst/>
           </a:prstGeom>
-          <a:noFill xmlns:a="http://schemas.openxmlformats.org/drawingml/2006/main"/>
-          <a:ln xmlns:a="http://schemas.openxmlformats.org/drawingml/2006/main" w="0">
+          <a:noFill/>
+          <a:ln w="0">
             <a:noFill/>
           </a:ln>
         </p:spPr>
         <p:txBody>
-          <a:bodyPr xmlns:a="http://schemas.openxmlformats.org/drawingml/2006/main">
-            <a:normAutofit fontScale="100000"/>
+          <a:bodyPr>
+            <a:normAutofit/>
           </a:bodyPr>
-          <a:lstStyle xmlns:a="http://schemas.openxmlformats.org/drawingml/2006/main"/>
-          <a:p xmlns:a="http://schemas.openxmlformats.org/drawingml/2006/main">
+          <a:lstStyle/>
+          <a:p>
             <a:pPr>
               <a:defRPr sz="2250" b="1">
                 <a:solidFill>
@@ -6168,37 +6099,37 @@
       </p:sp>
       <p:sp>
         <p:nvSpPr>
-          <p:cNvPr id="3" name="">
-            <a:extLst xmlns:a="http://schemas.openxmlformats.org/drawingml/2006/main">
+          <p:cNvPr id="3" name="Rectangle 2">
+            <a:extLst>
               <a:ext uri="{FF2B5EF4-FFF2-40B4-BE49-F238E27FC236}">
                 <a16:creationId xmlns:a16="http://schemas.microsoft.com/office/drawing/2014/main" id="{6F3CECA6-9B3E-461F-AD97-D2DEE23EF959}"/>
               </a:ext>
             </a:extLst>
           </p:cNvPr>
           <p:cNvSpPr>
-            <a:spLocks xmlns:a="http://schemas.openxmlformats.org/drawingml/2006/main" noGrp="1"/>
+            <a:spLocks noGrp="1"/>
           </p:cNvSpPr>
           <p:nvPr/>
         </p:nvSpPr>
         <p:spPr>
-          <a:xfrm xmlns:a="http://schemas.openxmlformats.org/drawingml/2006/main">
+          <a:xfrm>
             <a:off x="5905500" y="2095500"/>
             <a:ext cx="6191250" cy="1809750"/>
           </a:xfrm>
-          <a:prstGeom xmlns:a="http://schemas.openxmlformats.org/drawingml/2006/main" prst="rect">
+          <a:prstGeom prst="rect">
             <a:avLst/>
           </a:prstGeom>
-          <a:noFill xmlns:a="http://schemas.openxmlformats.org/drawingml/2006/main"/>
-          <a:ln xmlns:a="http://schemas.openxmlformats.org/drawingml/2006/main" w="0">
+          <a:noFill/>
+          <a:ln w="0">
             <a:noFill/>
           </a:ln>
         </p:spPr>
         <p:txBody>
-          <a:bodyPr xmlns:a="http://schemas.openxmlformats.org/drawingml/2006/main">
-            <a:normAutofit fontScale="100000"/>
+          <a:bodyPr>
+            <a:normAutofit/>
           </a:bodyPr>
-          <a:lstStyle xmlns:a="http://schemas.openxmlformats.org/drawingml/2006/main"/>
-          <a:p xmlns:a="http://schemas.openxmlformats.org/drawingml/2006/main">
+          <a:lstStyle/>
+          <a:p>
             <a:pPr>
               <a:defRPr sz="2175" b="0">
                 <a:solidFill>
@@ -6221,7 +6152,7 @@
               <a:t>Σελίδα 39</a:t>
             </a:r>
           </a:p>
-          <a:p xmlns:a="http://schemas.openxmlformats.org/drawingml/2006/main">
+          <a:p>
             <a:pPr>
               <a:defRPr sz="2175" b="0">
                 <a:solidFill>
@@ -6244,12 +6175,17 @@
               <a:t>Ασκήσεις 1–8</a:t>
             </a:r>
           </a:p>
-          <a:p xmlns:a="http://schemas.openxmlformats.org/drawingml/2006/main">
-            <a:r>
-              <a:t/>
-            </a:r>
-          </a:p>
-          <a:p xmlns:a="http://schemas.openxmlformats.org/drawingml/2006/main">
+          <a:p>
+            <a:endParaRPr sz="2175" b="0">
+              <a:solidFill>
+                <a:srgbClr val="151515"/>
+              </a:solidFill>
+              <a:latin typeface="Arial"/>
+              <a:ea typeface="Arial"/>
+              <a:cs typeface="Arial"/>
+            </a:endParaRPr>
+          </a:p>
+          <a:p>
             <a:pPr>
               <a:defRPr sz="2175" b="0">
                 <a:solidFill>
@@ -6276,37 +6212,37 @@
       </p:sp>
       <p:sp>
         <p:nvSpPr>
-          <p:cNvPr id="4" name="">
-            <a:extLst xmlns:a="http://schemas.openxmlformats.org/drawingml/2006/main">
+          <p:cNvPr id="4" name="Rectangle 3">
+            <a:extLst>
               <a:ext uri="{FF2B5EF4-FFF2-40B4-BE49-F238E27FC236}">
                 <a16:creationId xmlns:a16="http://schemas.microsoft.com/office/drawing/2014/main" id="{567F5841-B571-4158-B48F-2DC2701F8B4F}"/>
               </a:ext>
             </a:extLst>
           </p:cNvPr>
           <p:cNvSpPr>
-            <a:spLocks xmlns:a="http://schemas.openxmlformats.org/drawingml/2006/main" noGrp="1"/>
+            <a:spLocks noGrp="1"/>
           </p:cNvSpPr>
           <p:nvPr/>
         </p:nvSpPr>
         <p:spPr>
-          <a:xfrm xmlns:a="http://schemas.openxmlformats.org/drawingml/2006/main">
+          <a:xfrm>
             <a:off x="5905500" y="5000625"/>
             <a:ext cx="6096000" cy="857250"/>
           </a:xfrm>
-          <a:prstGeom xmlns:a="http://schemas.openxmlformats.org/drawingml/2006/main" prst="rect">
+          <a:prstGeom prst="rect">
             <a:avLst/>
           </a:prstGeom>
-          <a:noFill xmlns:a="http://schemas.openxmlformats.org/drawingml/2006/main"/>
-          <a:ln xmlns:a="http://schemas.openxmlformats.org/drawingml/2006/main" w="0">
+          <a:noFill/>
+          <a:ln w="0">
             <a:noFill/>
           </a:ln>
         </p:spPr>
         <p:txBody>
-          <a:bodyPr xmlns:a="http://schemas.openxmlformats.org/drawingml/2006/main">
-            <a:normAutofit fontScale="100000"/>
+          <a:bodyPr>
+            <a:normAutofit/>
           </a:bodyPr>
-          <a:lstStyle xmlns:a="http://schemas.openxmlformats.org/drawingml/2006/main"/>
-          <a:p xmlns:a="http://schemas.openxmlformats.org/drawingml/2006/main">
+          <a:lstStyle/>
+          <a:p>
             <a:pPr>
               <a:defRPr sz="1725" b="0">
                 <a:solidFill>
@@ -6339,13 +6275,13 @@
     </p:extLst>
   </p:cSld>
   <p:clrMapOvr>
-    <a:overrideClrMapping xmlns:a="http://schemas.openxmlformats.org/drawingml/2006/main" bg1="lt1" tx1="dk1" bg2="lt2" tx2="dk2" accent1="accent1" accent2="accent2" accent3="accent3" accent4="accent4" accent5="accent5" accent6="accent6" hlink="hlink" folHlink="folHlink"/>
+    <a:overrideClrMapping bg1="lt1" tx1="dk1" bg2="lt2" tx2="dk2" accent1="accent1" accent2="accent2" accent3="accent3" accent4="accent4" accent5="accent5" accent6="accent6" hlink="hlink" folHlink="folHlink"/>
   </p:clrMapOvr>
 </p:sld>
 </file>
 
 <file path=ppt/slides/slide8.xml><?xml version="1.0" encoding="utf-8"?>
-<p:sld xmlns:p="http://schemas.openxmlformats.org/presentationml/2006/main">
+<p:sld xmlns:a="http://schemas.openxmlformats.org/drawingml/2006/main" xmlns:r="http://schemas.openxmlformats.org/officeDocument/2006/relationships" xmlns:p="http://schemas.openxmlformats.org/presentationml/2006/main">
   <p:cSld>
     <p:spTree>
       <p:nvGrpSpPr>
@@ -6354,41 +6290,46 @@
         <p:nvPr/>
       </p:nvGrpSpPr>
       <p:grpSpPr>
-        <a:xfrm xmlns:a="http://schemas.openxmlformats.org/drawingml/2006/main"/>
+        <a:xfrm>
+          <a:off x="0" y="0"/>
+          <a:ext cx="0" cy="0"/>
+          <a:chOff x="0" y="0"/>
+          <a:chExt cx="0" cy="0"/>
+        </a:xfrm>
       </p:grpSpPr>
       <p:sp>
         <p:nvSpPr>
-          <p:cNvPr id="5" name="">
-            <a:extLst xmlns:a="http://schemas.openxmlformats.org/drawingml/2006/main">
+          <p:cNvPr id="5" name="Rectangle 4">
+            <a:extLst>
               <a:ext uri="{FF2B5EF4-FFF2-40B4-BE49-F238E27FC236}">
                 <a16:creationId xmlns:a16="http://schemas.microsoft.com/office/drawing/2014/main" id="{49C3F469-5F88-45E7-AD4D-1CA3F73F4D39}"/>
               </a:ext>
             </a:extLst>
           </p:cNvPr>
           <p:cNvSpPr>
-            <a:spLocks xmlns:a="http://schemas.openxmlformats.org/drawingml/2006/main" noGrp="1"/>
+            <a:spLocks noGrp="1"/>
           </p:cNvSpPr>
           <p:nvPr/>
         </p:nvSpPr>
         <p:spPr>
-          <a:xfrm xmlns:a="http://schemas.openxmlformats.org/drawingml/2006/main">
+          <a:xfrm>
             <a:off x="742950" y="476250"/>
             <a:ext cx="3905250" cy="857250"/>
           </a:xfrm>
-          <a:prstGeom xmlns:a="http://schemas.openxmlformats.org/drawingml/2006/main" prst="rect">
+          <a:prstGeom prst="rect">
             <a:avLst/>
           </a:prstGeom>
-          <a:noFill xmlns:a="http://schemas.openxmlformats.org/drawingml/2006/main"/>
-          <a:ln xmlns:a="http://schemas.openxmlformats.org/drawingml/2006/main" w="0">
+          <a:noFill/>
+          <a:ln w="0">
             <a:noFill/>
           </a:ln>
         </p:spPr>
         <p:txBody>
-          <a:bodyPr xmlns:a="http://schemas.openxmlformats.org/drawingml/2006/main">
+          <a:bodyPr>
             <a:normAutofit fontScale="77907"/>
           </a:bodyPr>
-          <a:lstStyle xmlns:a="http://schemas.openxmlformats.org/drawingml/2006/main"/>
-          <a:p xmlns:a="http://schemas.openxmlformats.org/drawingml/2006/main">
+          <a:lstStyle/>
+          <a:p>
             <a:pPr>
               <a:defRPr sz="3225" b="0">
                 <a:solidFill>
@@ -6415,37 +6356,37 @@
       </p:sp>
       <p:sp>
         <p:nvSpPr>
-          <p:cNvPr id="2" name="">
-            <a:extLst xmlns:a="http://schemas.openxmlformats.org/drawingml/2006/main">
+          <p:cNvPr id="2" name="Rectangle 1">
+            <a:extLst>
               <a:ext uri="{FF2B5EF4-FFF2-40B4-BE49-F238E27FC236}">
                 <a16:creationId xmlns:a16="http://schemas.microsoft.com/office/drawing/2014/main" id="{8853D3B4-D75D-43C5-B589-0FBFB148A951}"/>
               </a:ext>
             </a:extLst>
           </p:cNvPr>
           <p:cNvSpPr>
-            <a:spLocks xmlns:a="http://schemas.openxmlformats.org/drawingml/2006/main" noGrp="1"/>
+            <a:spLocks noGrp="1"/>
           </p:cNvSpPr>
           <p:nvPr/>
         </p:nvSpPr>
         <p:spPr>
-          <a:xfrm xmlns:a="http://schemas.openxmlformats.org/drawingml/2006/main">
+          <a:xfrm>
             <a:off x="4762500" y="1857375"/>
             <a:ext cx="6191250" cy="523875"/>
           </a:xfrm>
-          <a:prstGeom xmlns:a="http://schemas.openxmlformats.org/drawingml/2006/main" prst="rect">
+          <a:prstGeom prst="rect">
             <a:avLst/>
           </a:prstGeom>
-          <a:noFill xmlns:a="http://schemas.openxmlformats.org/drawingml/2006/main"/>
-          <a:ln xmlns:a="http://schemas.openxmlformats.org/drawingml/2006/main" w="0">
+          <a:noFill/>
+          <a:ln w="0">
             <a:noFill/>
           </a:ln>
         </p:spPr>
         <p:txBody>
-          <a:bodyPr xmlns:a="http://schemas.openxmlformats.org/drawingml/2006/main">
-            <a:normAutofit fontScale="100000"/>
+          <a:bodyPr>
+            <a:normAutofit/>
           </a:bodyPr>
-          <a:lstStyle xmlns:a="http://schemas.openxmlformats.org/drawingml/2006/main"/>
-          <a:p xmlns:a="http://schemas.openxmlformats.org/drawingml/2006/main">
+          <a:lstStyle/>
+          <a:p>
             <a:pPr>
               <a:defRPr sz="2250" b="1">
                 <a:solidFill>
@@ -6472,37 +6413,37 @@
       </p:sp>
       <p:sp>
         <p:nvSpPr>
-          <p:cNvPr id="3" name="">
-            <a:extLst xmlns:a="http://schemas.openxmlformats.org/drawingml/2006/main">
+          <p:cNvPr id="3" name="Rectangle 2">
+            <a:extLst>
               <a:ext uri="{FF2B5EF4-FFF2-40B4-BE49-F238E27FC236}">
                 <a16:creationId xmlns:a16="http://schemas.microsoft.com/office/drawing/2014/main" id="{C97B66AE-C260-42AA-8C4E-C375C9DB143D}"/>
               </a:ext>
             </a:extLst>
           </p:cNvPr>
           <p:cNvSpPr>
-            <a:spLocks xmlns:a="http://schemas.openxmlformats.org/drawingml/2006/main" noGrp="1"/>
+            <a:spLocks noGrp="1"/>
           </p:cNvSpPr>
           <p:nvPr/>
         </p:nvSpPr>
         <p:spPr>
-          <a:xfrm xmlns:a="http://schemas.openxmlformats.org/drawingml/2006/main">
+          <a:xfrm>
             <a:off x="4762500" y="2857500"/>
             <a:ext cx="6191250" cy="1809750"/>
           </a:xfrm>
-          <a:prstGeom xmlns:a="http://schemas.openxmlformats.org/drawingml/2006/main" prst="rect">
+          <a:prstGeom prst="rect">
             <a:avLst/>
           </a:prstGeom>
-          <a:noFill xmlns:a="http://schemas.openxmlformats.org/drawingml/2006/main"/>
-          <a:ln xmlns:a="http://schemas.openxmlformats.org/drawingml/2006/main" w="0">
+          <a:noFill/>
+          <a:ln w="0">
             <a:noFill/>
           </a:ln>
         </p:spPr>
         <p:txBody>
-          <a:bodyPr xmlns:a="http://schemas.openxmlformats.org/drawingml/2006/main">
-            <a:normAutofit fontScale="100000"/>
+          <a:bodyPr>
+            <a:normAutofit/>
           </a:bodyPr>
-          <a:lstStyle xmlns:a="http://schemas.openxmlformats.org/drawingml/2006/main"/>
-          <a:p xmlns:a="http://schemas.openxmlformats.org/drawingml/2006/main">
+          <a:lstStyle/>
+          <a:p>
             <a:pPr>
               <a:defRPr sz="2175" b="0">
                 <a:solidFill>
@@ -6525,7 +6466,7 @@
               <a:t>Σελίδες 39–40</a:t>
             </a:r>
           </a:p>
-          <a:p xmlns:a="http://schemas.openxmlformats.org/drawingml/2006/main">
+          <a:p>
             <a:pPr>
               <a:defRPr sz="2175" b="0">
                 <a:solidFill>
@@ -6548,12 +6489,17 @@
               <a:t>Ασκήσεις 9–15</a:t>
             </a:r>
           </a:p>
-          <a:p xmlns:a="http://schemas.openxmlformats.org/drawingml/2006/main">
-            <a:r>
-              <a:t/>
-            </a:r>
-          </a:p>
-          <a:p xmlns:a="http://schemas.openxmlformats.org/drawingml/2006/main">
+          <a:p>
+            <a:endParaRPr sz="2175" b="0">
+              <a:solidFill>
+                <a:srgbClr val="151515"/>
+              </a:solidFill>
+              <a:latin typeface="Arial"/>
+              <a:ea typeface="Arial"/>
+              <a:cs typeface="Arial"/>
+            </a:endParaRPr>
+          </a:p>
+          <a:p>
             <a:pPr>
               <a:defRPr sz="2175" b="0">
                 <a:solidFill>
@@ -6580,37 +6526,37 @@
       </p:sp>
       <p:sp>
         <p:nvSpPr>
-          <p:cNvPr id="4" name="">
-            <a:extLst xmlns:a="http://schemas.openxmlformats.org/drawingml/2006/main">
+          <p:cNvPr id="4" name="Rectangle 3">
+            <a:extLst>
               <a:ext uri="{FF2B5EF4-FFF2-40B4-BE49-F238E27FC236}">
                 <a16:creationId xmlns:a16="http://schemas.microsoft.com/office/drawing/2014/main" id="{1894EFFC-A133-4543-9A33-351C0D229357}"/>
               </a:ext>
             </a:extLst>
           </p:cNvPr>
           <p:cNvSpPr>
-            <a:spLocks xmlns:a="http://schemas.openxmlformats.org/drawingml/2006/main" noGrp="1"/>
+            <a:spLocks noGrp="1"/>
           </p:cNvSpPr>
           <p:nvPr/>
         </p:nvSpPr>
         <p:spPr>
-          <a:xfrm xmlns:a="http://schemas.openxmlformats.org/drawingml/2006/main">
+          <a:xfrm>
             <a:off x="4762500" y="5000625"/>
             <a:ext cx="6096000" cy="857250"/>
           </a:xfrm>
-          <a:prstGeom xmlns:a="http://schemas.openxmlformats.org/drawingml/2006/main" prst="rect">
+          <a:prstGeom prst="rect">
             <a:avLst/>
           </a:prstGeom>
-          <a:noFill xmlns:a="http://schemas.openxmlformats.org/drawingml/2006/main"/>
-          <a:ln xmlns:a="http://schemas.openxmlformats.org/drawingml/2006/main" w="0">
+          <a:noFill/>
+          <a:ln w="0">
             <a:noFill/>
           </a:ln>
         </p:spPr>
         <p:txBody>
-          <a:bodyPr xmlns:a="http://schemas.openxmlformats.org/drawingml/2006/main">
-            <a:normAutofit fontScale="100000"/>
+          <a:bodyPr>
+            <a:normAutofit/>
           </a:bodyPr>
-          <a:lstStyle xmlns:a="http://schemas.openxmlformats.org/drawingml/2006/main"/>
-          <a:p xmlns:a="http://schemas.openxmlformats.org/drawingml/2006/main">
+          <a:lstStyle/>
+          <a:p>
             <a:pPr>
               <a:defRPr sz="1725" b="0">
                 <a:solidFill>
@@ -6642,6 +6588,9 @@
       </p:ext>
     </p:extLst>
   </p:cSld>
+  <p:clrMapOvr>
+    <a:masterClrMapping/>
+  </p:clrMapOvr>
 </p:sld>
 </file>
 
@@ -6927,5 +6876,294 @@
       </a:bgFillStyleLst>
     </a:fmtScheme>
   </a:themeElements>
+  <a:objectDefaults/>
+  <a:extraClrSchemeLst/>
+</a:theme>
+</file>
+
+<file path=ppt/theme/theme2.xml><?xml version="1.0" encoding="utf-8"?>
+<a:theme xmlns:a="http://schemas.openxmlformats.org/drawingml/2006/main" name="Office Theme">
+  <a:themeElements>
+    <a:clrScheme name="Red Violet">
+      <a:dk1>
+        <a:sysClr val="windowText" lastClr="000000"/>
+      </a:dk1>
+      <a:lt1>
+        <a:sysClr val="window" lastClr="FFFFFF"/>
+      </a:lt1>
+      <a:dk2>
+        <a:srgbClr val="454551"/>
+      </a:dk2>
+      <a:lt2>
+        <a:srgbClr val="D8D9DC"/>
+      </a:lt2>
+      <a:accent1>
+        <a:srgbClr val="E32D91"/>
+      </a:accent1>
+      <a:accent2>
+        <a:srgbClr val="C830CC"/>
+      </a:accent2>
+      <a:accent3>
+        <a:srgbClr val="4EA6DC"/>
+      </a:accent3>
+      <a:accent4>
+        <a:srgbClr val="4775E7"/>
+      </a:accent4>
+      <a:accent5>
+        <a:srgbClr val="8971E1"/>
+      </a:accent5>
+      <a:accent6>
+        <a:srgbClr val="D54773"/>
+      </a:accent6>
+      <a:hlink>
+        <a:srgbClr val="6B9F25"/>
+      </a:hlink>
+      <a:folHlink>
+        <a:srgbClr val="8C8C8C"/>
+      </a:folHlink>
+    </a:clrScheme>
+    <a:fontScheme name="Office">
+      <a:majorFont>
+        <a:latin typeface="Calibri Light"/>
+        <a:ea typeface=""/>
+        <a:cs typeface=""/>
+        <a:font script="Jpan" typeface="游ゴシック Light"/>
+        <a:font script="Hang" typeface="맑은 고딕"/>
+        <a:font script="Hans" typeface="等线 Light"/>
+        <a:font script="Hant" typeface="新細明體"/>
+        <a:font script="Arab" typeface="Times New Roman"/>
+        <a:font script="Hebr" typeface="Times New Roman"/>
+        <a:font script="Thai" typeface="Angsana New"/>
+        <a:font script="Ethi" typeface="Nyala"/>
+        <a:font script="Beng" typeface="Vrinda"/>
+        <a:font script="Gujr" typeface="Shruti"/>
+        <a:font script="Khmr" typeface="MoolBoran"/>
+        <a:font script="Knda" typeface="Tunga"/>
+        <a:font script="Guru" typeface="Raavi"/>
+        <a:font script="Cans" typeface="Euphemia"/>
+        <a:font script="Cher" typeface="Plantagenet Cherokee"/>
+        <a:font script="Yiii" typeface="Microsoft Yi Baiti"/>
+        <a:font script="Tibt" typeface="Microsoft Himalaya"/>
+        <a:font script="Thaa" typeface="MV Boli"/>
+        <a:font script="Deva" typeface="Mangal"/>
+        <a:font script="Telu" typeface="Gautami"/>
+        <a:font script="Taml" typeface="Latha"/>
+        <a:font script="Syrc" typeface="Estrangelo Edessa"/>
+        <a:font script="Orya" typeface="Kalinga"/>
+        <a:font script="Mlym" typeface="Kartika"/>
+        <a:font script="Laoo" typeface="DokChampa"/>
+        <a:font script="Sinh" typeface="Iskoola Pota"/>
+        <a:font script="Mong" typeface="Mongolian Baiti"/>
+        <a:font script="Viet" typeface="Times New Roman"/>
+        <a:font script="Uigh" typeface="Microsoft Uighur"/>
+        <a:font script="Geor" typeface="Sylfaen"/>
+        <a:font script="Armn" typeface="Arial"/>
+        <a:font script="Bugi" typeface="Leelawadee UI"/>
+        <a:font script="Bopo" typeface="Microsoft JhengHei"/>
+        <a:font script="Java" typeface="Javanese Text"/>
+        <a:font script="Lisu" typeface="Segoe UI"/>
+        <a:font script="Mymr" typeface="Myanmar Text"/>
+        <a:font script="Nkoo" typeface="Ebrima"/>
+        <a:font script="Olck" typeface="Nirmala UI"/>
+        <a:font script="Osma" typeface="Ebrima"/>
+        <a:font script="Phag" typeface="Phagspa"/>
+        <a:font script="Syrn" typeface="Estrangelo Edessa"/>
+        <a:font script="Syrj" typeface="Estrangelo Edessa"/>
+        <a:font script="Syre" typeface="Estrangelo Edessa"/>
+        <a:font script="Sora" typeface="Nirmala UI"/>
+        <a:font script="Tale" typeface="Microsoft Tai Le"/>
+        <a:font script="Talu" typeface="Microsoft New Tai Lue"/>
+        <a:font script="Tfng" typeface="Ebrima"/>
+      </a:majorFont>
+      <a:minorFont>
+        <a:latin typeface="Calibri"/>
+        <a:ea typeface=""/>
+        <a:cs typeface=""/>
+        <a:font script="Jpan" typeface="游ゴシック"/>
+        <a:font script="Hang" typeface="맑은 고딕"/>
+        <a:font script="Hans" typeface="等线"/>
+        <a:font script="Hant" typeface="新細明體"/>
+        <a:font script="Arab" typeface="Arial"/>
+        <a:font script="Hebr" typeface="Arial"/>
+        <a:font script="Thai" typeface="Cordia New"/>
+        <a:font script="Ethi" typeface="Nyala"/>
+        <a:font script="Beng" typeface="Vrinda"/>
+        <a:font script="Gujr" typeface="Shruti"/>
+        <a:font script="Khmr" typeface="DaunPenh"/>
+        <a:font script="Knda" typeface="Tunga"/>
+        <a:font script="Guru" typeface="Raavi"/>
+        <a:font script="Cans" typeface="Euphemia"/>
+        <a:font script="Cher" typeface="Plantagenet Cherokee"/>
+        <a:font script="Yiii" typeface="Microsoft Yi Baiti"/>
+        <a:font script="Tibt" typeface="Microsoft Himalaya"/>
+        <a:font script="Thaa" typeface="MV Boli"/>
+        <a:font script="Deva" typeface="Mangal"/>
+        <a:font script="Telu" typeface="Gautami"/>
+        <a:font script="Taml" typeface="Latha"/>
+        <a:font script="Syrc" typeface="Estrangelo Edessa"/>
+        <a:font script="Orya" typeface="Kalinga"/>
+        <a:font script="Mlym" typeface="Kartika"/>
+        <a:font script="Laoo" typeface="DokChampa"/>
+        <a:font script="Sinh" typeface="Iskoola Pota"/>
+        <a:font script="Mong" typeface="Mongolian Baiti"/>
+        <a:font script="Viet" typeface="Arial"/>
+        <a:font script="Uigh" typeface="Microsoft Uighur"/>
+        <a:font script="Geor" typeface="Sylfaen"/>
+        <a:font script="Armn" typeface="Arial"/>
+        <a:font script="Bugi" typeface="Leelawadee UI"/>
+        <a:font script="Bopo" typeface="Microsoft JhengHei"/>
+        <a:font script="Java" typeface="Javanese Text"/>
+        <a:font script="Lisu" typeface="Segoe UI"/>
+        <a:font script="Mymr" typeface="Myanmar Text"/>
+        <a:font script="Nkoo" typeface="Ebrima"/>
+        <a:font script="Olck" typeface="Nirmala UI"/>
+        <a:font script="Osma" typeface="Ebrima"/>
+        <a:font script="Phag" typeface="Phagspa"/>
+        <a:font script="Syrn" typeface="Estrangelo Edessa"/>
+        <a:font script="Syrj" typeface="Estrangelo Edessa"/>
+        <a:font script="Syre" typeface="Estrangelo Edessa"/>
+        <a:font script="Sora" typeface="Nirmala UI"/>
+        <a:font script="Tale" typeface="Microsoft Tai Le"/>
+        <a:font script="Talu" typeface="Microsoft New Tai Lue"/>
+        <a:font script="Tfng" typeface="Ebrima"/>
+      </a:minorFont>
+    </a:fontScheme>
+    <a:fmtScheme name="Red Violet">
+      <a:fillStyleLst>
+        <a:solidFill>
+          <a:schemeClr val="phClr"/>
+        </a:solidFill>
+        <a:gradFill rotWithShape="1">
+          <a:gsLst>
+            <a:gs pos="0">
+              <a:schemeClr val="phClr">
+                <a:tint val="67000"/>
+                <a:lumMod val="110000"/>
+                <a:satMod val="105000"/>
+              </a:schemeClr>
+            </a:gs>
+            <a:gs pos="50000">
+              <a:schemeClr val="phClr">
+                <a:tint val="73000"/>
+                <a:lumMod val="105000"/>
+                <a:satMod val="103000"/>
+              </a:schemeClr>
+            </a:gs>
+            <a:gs pos="100000">
+              <a:schemeClr val="phClr">
+                <a:tint val="81000"/>
+                <a:lumMod val="105000"/>
+                <a:satMod val="109000"/>
+              </a:schemeClr>
+            </a:gs>
+          </a:gsLst>
+          <a:lin ang="5400000" scaled="0"/>
+        </a:gradFill>
+        <a:gradFill rotWithShape="1">
+          <a:gsLst>
+            <a:gs pos="0">
+              <a:schemeClr val="phClr">
+                <a:tint val="94000"/>
+                <a:lumMod val="102000"/>
+                <a:satMod val="103000"/>
+              </a:schemeClr>
+            </a:gs>
+            <a:gs pos="50000">
+              <a:schemeClr val="phClr">
+                <a:shade val="100000"/>
+                <a:lumMod val="100000"/>
+                <a:satMod val="110000"/>
+              </a:schemeClr>
+            </a:gs>
+            <a:gs pos="100000">
+              <a:schemeClr val="phClr">
+                <a:shade val="78000"/>
+                <a:lumMod val="99000"/>
+                <a:satMod val="120000"/>
+              </a:schemeClr>
+            </a:gs>
+          </a:gsLst>
+          <a:lin ang="5400000" scaled="0"/>
+        </a:gradFill>
+      </a:fillStyleLst>
+      <a:lnStyleLst>
+        <a:ln w="6350">
+          <a:solidFill>
+            <a:schemeClr val="phClr"/>
+          </a:solidFill>
+          <a:prstDash val="solid"/>
+        </a:ln>
+        <a:ln w="12700">
+          <a:solidFill>
+            <a:schemeClr val="phClr"/>
+          </a:solidFill>
+          <a:prstDash val="solid"/>
+        </a:ln>
+        <a:ln w="19050">
+          <a:solidFill>
+            <a:schemeClr val="phClr"/>
+          </a:solidFill>
+          <a:prstDash val="solid"/>
+        </a:ln>
+      </a:lnStyleLst>
+      <a:effectStyleLst>
+        <a:effectStyle>
+          <a:effectLst/>
+        </a:effectStyle>
+        <a:effectStyle>
+          <a:effectLst/>
+        </a:effectStyle>
+        <a:effectStyle>
+          <a:effectLst>
+            <a:outerShdw blurRad="57150" dist="19050" dir="5400000" algn="ctr" rotWithShape="0">
+              <a:srgbClr val="000000">
+                <a:alpha val="63000"/>
+              </a:srgbClr>
+            </a:outerShdw>
+          </a:effectLst>
+        </a:effectStyle>
+      </a:effectStyleLst>
+      <a:bgFillStyleLst>
+        <a:solidFill>
+          <a:schemeClr val="phClr"/>
+        </a:solidFill>
+        <a:solidFill>
+          <a:schemeClr val="phClr">
+            <a:tint val="95000"/>
+            <a:satMod val="170000"/>
+          </a:schemeClr>
+        </a:solidFill>
+        <a:gradFill rotWithShape="1">
+          <a:gsLst>
+            <a:gs pos="0">
+              <a:schemeClr val="phClr">
+                <a:tint val="93000"/>
+                <a:shade val="98000"/>
+                <a:lumMod val="102000"/>
+                <a:satMod val="150000"/>
+              </a:schemeClr>
+            </a:gs>
+            <a:gs pos="50000">
+              <a:schemeClr val="phClr">
+                <a:tint val="98000"/>
+                <a:shade val="90000"/>
+                <a:lumMod val="103000"/>
+                <a:satMod val="130000"/>
+              </a:schemeClr>
+            </a:gs>
+            <a:gs pos="100000">
+              <a:schemeClr val="phClr">
+                <a:shade val="63000"/>
+                <a:satMod val="120000"/>
+              </a:schemeClr>
+            </a:gs>
+          </a:gsLst>
+          <a:lin ang="5400000" scaled="0"/>
+        </a:gradFill>
+      </a:bgFillStyleLst>
+    </a:fmtScheme>
+  </a:themeElements>
+  <a:objectDefaults/>
+  <a:extraClrSchemeLst/>
 </a:theme>
 </file>
--- a/schools-presentations/B Gymnasiou/B41M9 - Εισαγωγή στις Συναρτήσεις.pptx
+++ b/schools-presentations/B Gymnasiou/B41M9 - Εισαγωγή στις Συναρτήσεις.pptx
@@ -5,7 +5,7 @@
     <p:sldMasterId id="2147483648" r:id="rId1"/>
   </p:sldMasterIdLst>
   <p:notesMasterIdLst>
-    <p:notesMasterId r:id="rId10"/>
+    <p:notesMasterId r:id="rId8"/>
   </p:notesMasterIdLst>
   <p:sldIdLst>
     <p:sldId id="256" r:id="rId2"/>
@@ -14,8 +14,6 @@
     <p:sldId id="259" r:id="rId5"/>
     <p:sldId id="260" r:id="rId6"/>
     <p:sldId id="261" r:id="rId7"/>
-    <p:sldId id="262" r:id="rId8"/>
-    <p:sldId id="263" r:id="rId9"/>
   </p:sldIdLst>
   <p:sldSz cx="12192000" cy="6858000"/>
   <p:notesSz cx="6858000" cy="9144000"/>
@@ -126,11 +124,26 @@
 <pc:chgInfo xmlns:a="http://schemas.openxmlformats.org/drawingml/2006/main" xmlns:r="http://schemas.openxmlformats.org/officeDocument/2006/relationships" xmlns:ac="http://schemas.microsoft.com/office/drawing/2013/main/command" xmlns:pc="http://schemas.microsoft.com/office/powerpoint/2013/main/command">
   <pc:docChgLst>
     <pc:chgData name="Άριστος Αρέστη" userId="813aa191-2d4c-464f-9d05-0a7e494d859f" providerId="ADAL" clId="{49C7B61D-1ACF-4AFF-A04E-A3B433E32474}"/>
-    <pc:docChg chg="modSld">
-      <pc:chgData name="Άριστος Αρέστη" userId="813aa191-2d4c-464f-9d05-0a7e494d859f" providerId="ADAL" clId="{49C7B61D-1ACF-4AFF-A04E-A3B433E32474}" dt="2026-10-06T18:18:16.964" v="3" actId="6549"/>
+    <pc:docChg chg="custSel delSld modSld">
+      <pc:chgData name="Άριστος Αρέστη" userId="813aa191-2d4c-464f-9d05-0a7e494d859f" providerId="ADAL" clId="{49C7B61D-1ACF-4AFF-A04E-A3B433E32474}" dt="2026-10-11T12:38:58.951" v="39" actId="47"/>
       <pc:docMkLst>
         <pc:docMk/>
       </pc:docMkLst>
+      <pc:sldChg chg="modSp mod">
+        <pc:chgData name="Άριστος Αρέστη" userId="813aa191-2d4c-464f-9d05-0a7e494d859f" providerId="ADAL" clId="{49C7B61D-1ACF-4AFF-A04E-A3B433E32474}" dt="2026-10-11T12:38:17.145" v="37" actId="20577"/>
+        <pc:sldMkLst>
+          <pc:docMk/>
+          <pc:sldMk cId="2133937481" sldId="258"/>
+        </pc:sldMkLst>
+        <pc:spChg chg="mod">
+          <ac:chgData name="Άριστος Αρέστη" userId="813aa191-2d4c-464f-9d05-0a7e494d859f" providerId="ADAL" clId="{49C7B61D-1ACF-4AFF-A04E-A3B433E32474}" dt="2026-10-11T12:38:17.145" v="37" actId="20577"/>
+          <ac:spMkLst>
+            <pc:docMk/>
+            <pc:sldMk cId="2133937481" sldId="258"/>
+            <ac:spMk id="2" creationId="{306B42F3-B610-4689-A278-F00049F4378F}"/>
+          </ac:spMkLst>
+        </pc:spChg>
+      </pc:sldChg>
       <pc:sldChg chg="modSp mod">
         <pc:chgData name="Άριστος Αρέστη" userId="813aa191-2d4c-464f-9d05-0a7e494d859f" providerId="ADAL" clId="{49C7B61D-1ACF-4AFF-A04E-A3B433E32474}" dt="2026-10-06T18:18:16.964" v="3" actId="6549"/>
         <pc:sldMkLst>
@@ -145,6 +158,20 @@
             <ac:spMk id="3" creationId="{0FD8DC59-79A8-42F4-AA7E-860D887215F1}"/>
           </ac:spMkLst>
         </pc:spChg>
+      </pc:sldChg>
+      <pc:sldChg chg="del">
+        <pc:chgData name="Άριστος Αρέστη" userId="813aa191-2d4c-464f-9d05-0a7e494d859f" providerId="ADAL" clId="{49C7B61D-1ACF-4AFF-A04E-A3B433E32474}" dt="2026-10-11T12:38:57.669" v="38" actId="47"/>
+        <pc:sldMkLst>
+          <pc:docMk/>
+          <pc:sldMk cId="3815878654" sldId="262"/>
+        </pc:sldMkLst>
+      </pc:sldChg>
+      <pc:sldChg chg="del">
+        <pc:chgData name="Άριστος Αρέστη" userId="813aa191-2d4c-464f-9d05-0a7e494d859f" providerId="ADAL" clId="{49C7B61D-1ACF-4AFF-A04E-A3B433E32474}" dt="2026-10-11T12:38:58.951" v="39" actId="47"/>
+        <pc:sldMkLst>
+          <pc:docMk/>
+          <pc:sldMk cId="608684808" sldId="263"/>
+        </pc:sldMkLst>
       </pc:sldChg>
     </pc:docChg>
   </pc:docChgLst>
@@ -780,156 +807,6 @@
 </p:notes>
 </file>
 
-<file path=ppt/notesSlides/notesSlide7.xml><?xml version="1.0" encoding="utf-8"?>
-<p:notes xmlns:a="http://schemas.openxmlformats.org/drawingml/2006/main" xmlns:r="http://schemas.openxmlformats.org/officeDocument/2006/relationships" xmlns:p="http://schemas.openxmlformats.org/presentationml/2006/main">
-  <p:cSld>
-    <p:spTree>
-      <p:nvGrpSpPr>
-        <p:cNvPr id="1" name=""/>
-        <p:cNvGrpSpPr/>
-        <p:nvPr/>
-      </p:nvGrpSpPr>
-      <p:grpSpPr>
-        <a:xfrm>
-          <a:off x="0" y="0"/>
-          <a:ext cx="0" cy="0"/>
-          <a:chOff x="0" y="0"/>
-          <a:chExt cx="0" cy="0"/>
-        </a:xfrm>
-      </p:grpSpPr>
-      <p:sp>
-        <p:nvSpPr>
-          <p:cNvPr id="2" name="Slide Image Placeholder 1"/>
-          <p:cNvSpPr>
-            <a:spLocks noGrp="1" noRot="1" noChangeAspect="1"/>
-          </p:cNvSpPr>
-          <p:nvPr>
-            <p:ph type="sldImg"/>
-          </p:nvPr>
-        </p:nvSpPr>
-        <p:spPr/>
-      </p:sp>
-      <p:sp>
-        <p:nvSpPr>
-          <p:cNvPr id="3" name="Notes Placeholder 2"/>
-          <p:cNvSpPr>
-            <a:spLocks noGrp="1"/>
-          </p:cNvSpPr>
-          <p:nvPr>
-            <p:ph type="body" idx="1"/>
-          </p:nvPr>
-        </p:nvSpPr>
-        <p:spPr/>
-        <p:txBody>
-          <a:bodyPr/>
-          <a:lstStyle/>
-          <a:p>
-            <a:endParaRPr/>
-          </a:p>
-        </p:txBody>
-      </p:sp>
-      <p:sp>
-        <p:nvSpPr>
-          <p:cNvPr id="4" name="Slide Number Placeholder 3"/>
-          <p:cNvSpPr>
-            <a:spLocks noGrp="1"/>
-          </p:cNvSpPr>
-          <p:nvPr>
-            <p:ph type="sldNum" idx="5"/>
-          </p:nvPr>
-        </p:nvSpPr>
-        <p:spPr/>
-        <p:txBody>
-          <a:bodyPr/>
-          <a:lstStyle/>
-          <a:p>
-            <a:endParaRPr/>
-          </a:p>
-        </p:txBody>
-      </p:sp>
-    </p:spTree>
-  </p:cSld>
-  <p:clrMapOvr>
-    <a:masterClrMapping/>
-  </p:clrMapOvr>
-</p:notes>
-</file>
-
-<file path=ppt/notesSlides/notesSlide8.xml><?xml version="1.0" encoding="utf-8"?>
-<p:notes xmlns:a="http://schemas.openxmlformats.org/drawingml/2006/main" xmlns:r="http://schemas.openxmlformats.org/officeDocument/2006/relationships" xmlns:p="http://schemas.openxmlformats.org/presentationml/2006/main">
-  <p:cSld>
-    <p:spTree>
-      <p:nvGrpSpPr>
-        <p:cNvPr id="1" name=""/>
-        <p:cNvGrpSpPr/>
-        <p:nvPr/>
-      </p:nvGrpSpPr>
-      <p:grpSpPr>
-        <a:xfrm>
-          <a:off x="0" y="0"/>
-          <a:ext cx="0" cy="0"/>
-          <a:chOff x="0" y="0"/>
-          <a:chExt cx="0" cy="0"/>
-        </a:xfrm>
-      </p:grpSpPr>
-      <p:sp>
-        <p:nvSpPr>
-          <p:cNvPr id="2" name="Slide Image Placeholder 1"/>
-          <p:cNvSpPr>
-            <a:spLocks noGrp="1" noRot="1" noChangeAspect="1"/>
-          </p:cNvSpPr>
-          <p:nvPr>
-            <p:ph type="sldImg"/>
-          </p:nvPr>
-        </p:nvSpPr>
-        <p:spPr/>
-      </p:sp>
-      <p:sp>
-        <p:nvSpPr>
-          <p:cNvPr id="3" name="Notes Placeholder 2"/>
-          <p:cNvSpPr>
-            <a:spLocks noGrp="1"/>
-          </p:cNvSpPr>
-          <p:nvPr>
-            <p:ph type="body" idx="1"/>
-          </p:nvPr>
-        </p:nvSpPr>
-        <p:spPr/>
-        <p:txBody>
-          <a:bodyPr/>
-          <a:lstStyle/>
-          <a:p>
-            <a:endParaRPr/>
-          </a:p>
-        </p:txBody>
-      </p:sp>
-      <p:sp>
-        <p:nvSpPr>
-          <p:cNvPr id="4" name="Slide Number Placeholder 3"/>
-          <p:cNvSpPr>
-            <a:spLocks noGrp="1"/>
-          </p:cNvSpPr>
-          <p:nvPr>
-            <p:ph type="sldNum" idx="5"/>
-          </p:nvPr>
-        </p:nvSpPr>
-        <p:spPr/>
-        <p:txBody>
-          <a:bodyPr/>
-          <a:lstStyle/>
-          <a:p>
-            <a:endParaRPr/>
-          </a:p>
-        </p:txBody>
-      </p:sp>
-    </p:spTree>
-  </p:cSld>
-  <p:clrMapOvr>
-    <a:masterClrMapping/>
-  </p:clrMapOvr>
-</p:notes>
-</file>
-
 <file path=ppt/slideLayouts/slideLayout1.xml><?xml version="1.0" encoding="utf-8"?>
 <p:sldLayout xmlns:a="http://schemas.openxmlformats.org/drawingml/2006/main" xmlns:r="http://schemas.openxmlformats.org/officeDocument/2006/relationships" xmlns:p="http://schemas.openxmlformats.org/presentationml/2006/main" type="title" preserve="1">
   <p:cSld name="Title Slide">
@@ -1075,7 +952,7 @@
           <a:lstStyle/>
           <a:p>
             <a:fld id="{EDB99004-FBBF-4BCC-9BC3-88F554ADE514}" type="datetimeFigureOut">
-              <a:t>06-Oct-26</a:t>
+              <a:t>11-Oct-26</a:t>
             </a:fld>
             <a:endParaRPr/>
           </a:p>
@@ -1270,7 +1147,7 @@
           <a:lstStyle/>
           <a:p>
             <a:fld id="{EDB99004-FBBF-4BCC-9BC3-88F554ADE514}" type="datetimeFigureOut">
-              <a:t>06-Oct-26</a:t>
+              <a:t>11-Oct-26</a:t>
             </a:fld>
             <a:endParaRPr/>
           </a:p>
@@ -1475,7 +1352,7 @@
           <a:lstStyle/>
           <a:p>
             <a:fld id="{EDB99004-FBBF-4BCC-9BC3-88F554ADE514}" type="datetimeFigureOut">
-              <a:t>06-Oct-26</a:t>
+              <a:t>11-Oct-26</a:t>
             </a:fld>
             <a:endParaRPr/>
           </a:p>
@@ -1670,7 +1547,7 @@
           <a:lstStyle/>
           <a:p>
             <a:fld id="{EDB99004-FBBF-4BCC-9BC3-88F554ADE514}" type="datetimeFigureOut">
-              <a:t>06-Oct-26</a:t>
+              <a:t>11-Oct-26</a:t>
             </a:fld>
             <a:endParaRPr/>
           </a:p>
@@ -1939,7 +1816,7 @@
           <a:lstStyle/>
           <a:p>
             <a:fld id="{EDB99004-FBBF-4BCC-9BC3-88F554ADE514}" type="datetimeFigureOut">
-              <a:t>06-Oct-26</a:t>
+              <a:t>11-Oct-26</a:t>
             </a:fld>
             <a:endParaRPr/>
           </a:p>
@@ -2206,7 +2083,7 @@
           <a:lstStyle/>
           <a:p>
             <a:fld id="{EDB99004-FBBF-4BCC-9BC3-88F554ADE514}" type="datetimeFigureOut">
-              <a:t>06-Oct-26</a:t>
+              <a:t>11-Oct-26</a:t>
             </a:fld>
             <a:endParaRPr/>
           </a:p>
@@ -2622,7 +2499,7 @@
           <a:lstStyle/>
           <a:p>
             <a:fld id="{EDB99004-FBBF-4BCC-9BC3-88F554ADE514}" type="datetimeFigureOut">
-              <a:t>06-Oct-26</a:t>
+              <a:t>11-Oct-26</a:t>
             </a:fld>
             <a:endParaRPr/>
           </a:p>
@@ -2755,7 +2632,7 @@
           <a:lstStyle/>
           <a:p>
             <a:fld id="{EDB99004-FBBF-4BCC-9BC3-88F554ADE514}" type="datetimeFigureOut">
-              <a:t>06-Oct-26</a:t>
+              <a:t>11-Oct-26</a:t>
             </a:fld>
             <a:endParaRPr/>
           </a:p>
@@ -2861,7 +2738,7 @@
           <a:lstStyle/>
           <a:p>
             <a:fld id="{EDB99004-FBBF-4BCC-9BC3-88F554ADE514}" type="datetimeFigureOut">
-              <a:t>06-Oct-26</a:t>
+              <a:t>11-Oct-26</a:t>
             </a:fld>
             <a:endParaRPr/>
           </a:p>
@@ -3180,7 +3057,7 @@
           <a:lstStyle/>
           <a:p>
             <a:fld id="{EDB99004-FBBF-4BCC-9BC3-88F554ADE514}" type="datetimeFigureOut">
-              <a:t>06-Oct-26</a:t>
+              <a:t>11-Oct-26</a:t>
             </a:fld>
             <a:endParaRPr/>
           </a:p>
@@ -3462,7 +3339,7 @@
           <a:lstStyle/>
           <a:p>
             <a:fld id="{EDB99004-FBBF-4BCC-9BC3-88F554ADE514}" type="datetimeFigureOut">
-              <a:t>06-Oct-26</a:t>
+              <a:t>11-Oct-26</a:t>
             </a:fld>
             <a:endParaRPr/>
           </a:p>
@@ -3701,7 +3578,7 @@
           </a:lstStyle>
           <a:p>
             <a:fld id="{EDB99004-FBBF-4BCC-9BC3-88F554ADE514}" type="datetimeFigureOut">
-              <a:t>06-Oct-26</a:t>
+              <a:t>11-Oct-26</a:t>
             </a:fld>
             <a:endParaRPr/>
           </a:p>
@@ -4828,7 +4705,7 @@
               </a:defRPr>
             </a:pPr>
             <a:r>
-              <a:rPr sz="1950" b="0">
+              <a:rPr sz="1950" b="0" dirty="0">
                 <a:solidFill>
                   <a:srgbClr val="151515"/>
                 </a:solidFill>
@@ -4836,7 +4713,73 @@
                 <a:ea typeface="Arial"/>
                 <a:cs typeface="Arial"/>
               </a:rPr>
-              <a:t>SUM: υπολογίζει το άθροισμα.</a:t>
+              <a:t>SUM: υπ</a:t>
+            </a:r>
+            <a:r>
+              <a:rPr sz="1950" b="0" dirty="0" err="1">
+                <a:solidFill>
+                  <a:srgbClr val="151515"/>
+                </a:solidFill>
+                <a:latin typeface="Arial"/>
+                <a:ea typeface="Arial"/>
+                <a:cs typeface="Arial"/>
+              </a:rPr>
+              <a:t>ολογίζει</a:t>
+            </a:r>
+            <a:r>
+              <a:rPr sz="1950" b="0" dirty="0">
+                <a:solidFill>
+                  <a:srgbClr val="151515"/>
+                </a:solidFill>
+                <a:latin typeface="Arial"/>
+                <a:ea typeface="Arial"/>
+                <a:cs typeface="Arial"/>
+              </a:rPr>
+              <a:t> </a:t>
+            </a:r>
+            <a:r>
+              <a:rPr sz="1950" b="0" dirty="0" err="1">
+                <a:solidFill>
+                  <a:srgbClr val="151515"/>
+                </a:solidFill>
+                <a:latin typeface="Arial"/>
+                <a:ea typeface="Arial"/>
+                <a:cs typeface="Arial"/>
+              </a:rPr>
+              <a:t>το</a:t>
+            </a:r>
+            <a:r>
+              <a:rPr sz="1950" b="0" dirty="0">
+                <a:solidFill>
+                  <a:srgbClr val="151515"/>
+                </a:solidFill>
+                <a:latin typeface="Arial"/>
+                <a:ea typeface="Arial"/>
+                <a:cs typeface="Arial"/>
+              </a:rPr>
+              <a:t> </a:t>
+            </a:r>
+            <a:r>
+              <a:rPr sz="1950" b="0" dirty="0" err="1">
+                <a:solidFill>
+                  <a:srgbClr val="151515"/>
+                </a:solidFill>
+                <a:latin typeface="Arial"/>
+                <a:ea typeface="Arial"/>
+                <a:cs typeface="Arial"/>
+              </a:rPr>
+              <a:t>άθροισμ</a:t>
+            </a:r>
+            <a:r>
+              <a:rPr sz="1950" b="0" dirty="0">
+                <a:solidFill>
+                  <a:srgbClr val="151515"/>
+                </a:solidFill>
+                <a:latin typeface="Arial"/>
+                <a:ea typeface="Arial"/>
+                <a:cs typeface="Arial"/>
+              </a:rPr>
+              <a:t>α.</a:t>
             </a:r>
           </a:p>
           <a:p>
@@ -4851,7 +4794,7 @@
               </a:defRPr>
             </a:pPr>
             <a:r>
-              <a:rPr sz="1950" b="0">
+              <a:rPr sz="1950" b="0" dirty="0">
                 <a:solidFill>
                   <a:srgbClr val="151515"/>
                 </a:solidFill>
@@ -4861,9 +4804,7 @@
               </a:rPr>
               <a:t>=SUM(B3:B22)</a:t>
             </a:r>
-          </a:p>
-          <a:p>
-            <a:endParaRPr sz="1950" b="0">
+            <a:endParaRPr lang="en-US" sz="1950" b="0" dirty="0">
               <a:solidFill>
                 <a:srgbClr val="151515"/>
               </a:solidFill>
@@ -4884,7 +4825,7 @@
               </a:defRPr>
             </a:pPr>
             <a:r>
-              <a:rPr sz="1950" b="0">
+              <a:rPr lang="en-US" sz="1950" dirty="0">
                 <a:solidFill>
                   <a:srgbClr val="151515"/>
                 </a:solidFill>
@@ -4892,8 +4833,26 @@
                 <a:ea typeface="Arial"/>
                 <a:cs typeface="Arial"/>
               </a:rPr>
-              <a:t>AVERAGE: υπολογίζει τον μέσο όρο.</a:t>
-            </a:r>
+              <a:t>= B3 + B4 + B5 + … + B22</a:t>
+            </a:r>
+            <a:endParaRPr sz="1950" b="0" dirty="0">
+              <a:solidFill>
+                <a:srgbClr val="151515"/>
+              </a:solidFill>
+              <a:latin typeface="Arial"/>
+              <a:ea typeface="Arial"/>
+              <a:cs typeface="Arial"/>
+            </a:endParaRPr>
+          </a:p>
+          <a:p>
+            <a:endParaRPr sz="1950" b="0" dirty="0">
+              <a:solidFill>
+                <a:srgbClr val="151515"/>
+              </a:solidFill>
+              <a:latin typeface="Arial"/>
+              <a:ea typeface="Arial"/>
+              <a:cs typeface="Arial"/>
+            </a:endParaRPr>
           </a:p>
           <a:p>
             <a:pPr>
@@ -4907,7 +4866,118 @@
               </a:defRPr>
             </a:pPr>
             <a:r>
-              <a:rPr sz="1950" b="0">
+              <a:rPr sz="1950" b="0" dirty="0">
+                <a:solidFill>
+                  <a:srgbClr val="151515"/>
+                </a:solidFill>
+                <a:latin typeface="Arial"/>
+                <a:ea typeface="Arial"/>
+                <a:cs typeface="Arial"/>
+              </a:rPr>
+              <a:t>AVERAGE: υπ</a:t>
+            </a:r>
+            <a:r>
+              <a:rPr sz="1950" b="0" dirty="0" err="1">
+                <a:solidFill>
+                  <a:srgbClr val="151515"/>
+                </a:solidFill>
+                <a:latin typeface="Arial"/>
+                <a:ea typeface="Arial"/>
+                <a:cs typeface="Arial"/>
+              </a:rPr>
+              <a:t>ολογίζει</a:t>
+            </a:r>
+            <a:r>
+              <a:rPr sz="1950" b="0" dirty="0">
+                <a:solidFill>
+                  <a:srgbClr val="151515"/>
+                </a:solidFill>
+                <a:latin typeface="Arial"/>
+                <a:ea typeface="Arial"/>
+                <a:cs typeface="Arial"/>
+              </a:rPr>
+              <a:t> </a:t>
+            </a:r>
+            <a:r>
+              <a:rPr sz="1950" b="0" dirty="0" err="1">
+                <a:solidFill>
+                  <a:srgbClr val="151515"/>
+                </a:solidFill>
+                <a:latin typeface="Arial"/>
+                <a:ea typeface="Arial"/>
+                <a:cs typeface="Arial"/>
+              </a:rPr>
+              <a:t>τον</a:t>
+            </a:r>
+            <a:r>
+              <a:rPr sz="1950" b="0" dirty="0">
+                <a:solidFill>
+                  <a:srgbClr val="151515"/>
+                </a:solidFill>
+                <a:latin typeface="Arial"/>
+                <a:ea typeface="Arial"/>
+                <a:cs typeface="Arial"/>
+              </a:rPr>
+              <a:t> </a:t>
+            </a:r>
+            <a:r>
+              <a:rPr sz="1950" b="0" dirty="0" err="1">
+                <a:solidFill>
+                  <a:srgbClr val="151515"/>
+                </a:solidFill>
+                <a:latin typeface="Arial"/>
+                <a:ea typeface="Arial"/>
+                <a:cs typeface="Arial"/>
+              </a:rPr>
+              <a:t>μέσο</a:t>
+            </a:r>
+            <a:r>
+              <a:rPr sz="1950" b="0" dirty="0">
+                <a:solidFill>
+                  <a:srgbClr val="151515"/>
+                </a:solidFill>
+                <a:latin typeface="Arial"/>
+                <a:ea typeface="Arial"/>
+                <a:cs typeface="Arial"/>
+              </a:rPr>
+              <a:t> </a:t>
+            </a:r>
+            <a:r>
+              <a:rPr sz="1950" b="0" dirty="0" err="1">
+                <a:solidFill>
+                  <a:srgbClr val="151515"/>
+                </a:solidFill>
+                <a:latin typeface="Arial"/>
+                <a:ea typeface="Arial"/>
+                <a:cs typeface="Arial"/>
+              </a:rPr>
+              <a:t>όρο</a:t>
+            </a:r>
+            <a:r>
+              <a:rPr sz="1950" b="0" dirty="0">
+                <a:solidFill>
+                  <a:srgbClr val="151515"/>
+                </a:solidFill>
+                <a:latin typeface="Arial"/>
+                <a:ea typeface="Arial"/>
+                <a:cs typeface="Arial"/>
+              </a:rPr>
+              <a:t>.</a:t>
+            </a:r>
+          </a:p>
+          <a:p>
+            <a:pPr>
+              <a:defRPr sz="1950" b="0">
+                <a:solidFill>
+                  <a:srgbClr val="151515"/>
+                </a:solidFill>
+                <a:latin typeface="Arial"/>
+                <a:ea typeface="Arial"/>
+                <a:cs typeface="Arial"/>
+              </a:defRPr>
+            </a:pPr>
+            <a:r>
+              <a:rPr sz="1950" b="0" dirty="0">
                 <a:solidFill>
                   <a:srgbClr val="151515"/>
                 </a:solidFill>
@@ -5952,639 +6022,6 @@
     <p:extLst>
       <p:ext uri="{BB962C8B-B14F-4D97-AF65-F5344CB8AC3E}">
         <p14:creationId xmlns:p14="http://schemas.microsoft.com/office/powerpoint/2010/main" val="2654053172"/>
-      </p:ext>
-    </p:extLst>
-  </p:cSld>
-  <p:clrMapOvr>
-    <a:masterClrMapping/>
-  </p:clrMapOvr>
-</p:sld>
-</file>
-
-<file path=ppt/slides/slide7.xml><?xml version="1.0" encoding="utf-8"?>
-<p:sld xmlns:a="http://schemas.openxmlformats.org/drawingml/2006/main" xmlns:r="http://schemas.openxmlformats.org/officeDocument/2006/relationships" xmlns:p="http://schemas.openxmlformats.org/presentationml/2006/main">
-  <p:cSld>
-    <p:bg>
-      <p:bgRef idx="1001">
-        <a:schemeClr val="bg1"/>
-      </p:bgRef>
-    </p:bg>
-    <p:spTree>
-      <p:nvGrpSpPr>
-        <p:cNvPr id="1" name=""/>
-        <p:cNvGrpSpPr/>
-        <p:nvPr/>
-      </p:nvGrpSpPr>
-      <p:grpSpPr>
-        <a:xfrm>
-          <a:off x="0" y="0"/>
-          <a:ext cx="0" cy="0"/>
-          <a:chOff x="0" y="0"/>
-          <a:chExt cx="0" cy="0"/>
-        </a:xfrm>
-      </p:grpSpPr>
-      <p:sp>
-        <p:nvSpPr>
-          <p:cNvPr id="5" name="Rectangle 4">
-            <a:extLst>
-              <a:ext uri="{FF2B5EF4-FFF2-40B4-BE49-F238E27FC236}">
-                <a16:creationId xmlns:a16="http://schemas.microsoft.com/office/drawing/2014/main" id="{2206BBAC-B20C-409D-8350-9D493B672E19}"/>
-              </a:ext>
-            </a:extLst>
-          </p:cNvPr>
-          <p:cNvSpPr>
-            <a:spLocks noGrp="1"/>
-          </p:cNvSpPr>
-          <p:nvPr/>
-        </p:nvSpPr>
-        <p:spPr>
-          <a:xfrm>
-            <a:off x="742950" y="476250"/>
-            <a:ext cx="4953000" cy="857250"/>
-          </a:xfrm>
-          <a:prstGeom prst="rect">
-            <a:avLst/>
-          </a:prstGeom>
-          <a:noFill/>
-          <a:ln w="0">
-            <a:noFill/>
-          </a:ln>
-        </p:spPr>
-        <p:txBody>
-          <a:bodyPr>
-            <a:normAutofit fontScale="92043"/>
-          </a:bodyPr>
-          <a:lstStyle/>
-          <a:p>
-            <a:pPr>
-              <a:defRPr sz="3225" b="0">
-                <a:solidFill>
-                  <a:srgbClr val="6B1E72"/>
-                </a:solidFill>
-                <a:latin typeface="Calibri Light"/>
-                <a:ea typeface="Calibri Light"/>
-                <a:cs typeface="Calibri Light"/>
-              </a:defRPr>
-            </a:pPr>
-            <a:r>
-              <a:rPr sz="3225" b="0">
-                <a:solidFill>
-                  <a:srgbClr val="6B1E72"/>
-                </a:solidFill>
-                <a:latin typeface="Calibri Light"/>
-                <a:ea typeface="Calibri Light"/>
-                <a:cs typeface="Calibri Light"/>
-              </a:rPr>
-              <a:t>Δραστηριότητες Εμπέδωσης</a:t>
-            </a:r>
-          </a:p>
-        </p:txBody>
-      </p:sp>
-      <p:sp>
-        <p:nvSpPr>
-          <p:cNvPr id="2" name="Rectangle 1">
-            <a:extLst>
-              <a:ext uri="{FF2B5EF4-FFF2-40B4-BE49-F238E27FC236}">
-                <a16:creationId xmlns:a16="http://schemas.microsoft.com/office/drawing/2014/main" id="{F6A5915B-68FF-4FFB-8E08-8FA2DD9767E7}"/>
-              </a:ext>
-            </a:extLst>
-          </p:cNvPr>
-          <p:cNvSpPr>
-            <a:spLocks noGrp="1"/>
-          </p:cNvSpPr>
-          <p:nvPr/>
-        </p:nvSpPr>
-        <p:spPr>
-          <a:xfrm>
-            <a:off x="5905500" y="1190625"/>
-            <a:ext cx="6191250" cy="523875"/>
-          </a:xfrm>
-          <a:prstGeom prst="rect">
-            <a:avLst/>
-          </a:prstGeom>
-          <a:noFill/>
-          <a:ln w="0">
-            <a:noFill/>
-          </a:ln>
-        </p:spPr>
-        <p:txBody>
-          <a:bodyPr>
-            <a:normAutofit/>
-          </a:bodyPr>
-          <a:lstStyle/>
-          <a:p>
-            <a:pPr>
-              <a:defRPr sz="2250" b="1">
-                <a:solidFill>
-                  <a:srgbClr val="D84B00"/>
-                </a:solidFill>
-                <a:latin typeface="Arial"/>
-                <a:ea typeface="Arial"/>
-                <a:cs typeface="Arial"/>
-              </a:defRPr>
-            </a:pPr>
-            <a:r>
-              <a:rPr sz="2250" b="1">
-                <a:solidFill>
-                  <a:srgbClr val="D84B00"/>
-                </a:solidFill>
-                <a:latin typeface="Arial"/>
-                <a:ea typeface="Arial"/>
-                <a:cs typeface="Arial"/>
-              </a:rPr>
-              <a:t>Φύλλο Εργασίας Β.4.1.M9</a:t>
-            </a:r>
-          </a:p>
-        </p:txBody>
-      </p:sp>
-      <p:sp>
-        <p:nvSpPr>
-          <p:cNvPr id="3" name="Rectangle 2">
-            <a:extLst>
-              <a:ext uri="{FF2B5EF4-FFF2-40B4-BE49-F238E27FC236}">
-                <a16:creationId xmlns:a16="http://schemas.microsoft.com/office/drawing/2014/main" id="{6F3CECA6-9B3E-461F-AD97-D2DEE23EF959}"/>
-              </a:ext>
-            </a:extLst>
-          </p:cNvPr>
-          <p:cNvSpPr>
-            <a:spLocks noGrp="1"/>
-          </p:cNvSpPr>
-          <p:nvPr/>
-        </p:nvSpPr>
-        <p:spPr>
-          <a:xfrm>
-            <a:off x="5905500" y="2095500"/>
-            <a:ext cx="6191250" cy="1809750"/>
-          </a:xfrm>
-          <a:prstGeom prst="rect">
-            <a:avLst/>
-          </a:prstGeom>
-          <a:noFill/>
-          <a:ln w="0">
-            <a:noFill/>
-          </a:ln>
-        </p:spPr>
-        <p:txBody>
-          <a:bodyPr>
-            <a:normAutofit/>
-          </a:bodyPr>
-          <a:lstStyle/>
-          <a:p>
-            <a:pPr>
-              <a:defRPr sz="2175" b="0">
-                <a:solidFill>
-                  <a:srgbClr val="151515"/>
-                </a:solidFill>
-                <a:latin typeface="Arial"/>
-                <a:ea typeface="Arial"/>
-                <a:cs typeface="Arial"/>
-              </a:defRPr>
-            </a:pPr>
-            <a:r>
-              <a:rPr sz="2175" b="0">
-                <a:solidFill>
-                  <a:srgbClr val="151515"/>
-                </a:solidFill>
-                <a:latin typeface="Arial"/>
-                <a:ea typeface="Arial"/>
-                <a:cs typeface="Arial"/>
-              </a:rPr>
-              <a:t>Σελίδα 39</a:t>
-            </a:r>
-          </a:p>
-          <a:p>
-            <a:pPr>
-              <a:defRPr sz="2175" b="0">
-                <a:solidFill>
-                  <a:srgbClr val="151515"/>
-                </a:solidFill>
-                <a:latin typeface="Arial"/>
-                <a:ea typeface="Arial"/>
-                <a:cs typeface="Arial"/>
-              </a:defRPr>
-            </a:pPr>
-            <a:r>
-              <a:rPr sz="2175" b="0">
-                <a:solidFill>
-                  <a:srgbClr val="151515"/>
-                </a:solidFill>
-                <a:latin typeface="Arial"/>
-                <a:ea typeface="Arial"/>
-                <a:cs typeface="Arial"/>
-              </a:rPr>
-              <a:t>Ασκήσεις 1–8</a:t>
-            </a:r>
-          </a:p>
-          <a:p>
-            <a:endParaRPr sz="2175" b="0">
-              <a:solidFill>
-                <a:srgbClr val="151515"/>
-              </a:solidFill>
-              <a:latin typeface="Arial"/>
-              <a:ea typeface="Arial"/>
-              <a:cs typeface="Arial"/>
-            </a:endParaRPr>
-          </a:p>
-          <a:p>
-            <a:pPr>
-              <a:defRPr sz="2175" b="0">
-                <a:solidFill>
-                  <a:srgbClr val="151515"/>
-                </a:solidFill>
-                <a:latin typeface="Arial"/>
-                <a:ea typeface="Arial"/>
-                <a:cs typeface="Arial"/>
-              </a:defRPr>
-            </a:pPr>
-            <a:r>
-              <a:rPr sz="2175" b="0">
-                <a:solidFill>
-                  <a:srgbClr val="151515"/>
-                </a:solidFill>
-                <a:latin typeface="Arial"/>
-                <a:ea typeface="Arial"/>
-                <a:cs typeface="Arial"/>
-              </a:rPr>
-              <a:t>Αρχείο: Cyprus Tourists.xlsx</a:t>
-            </a:r>
-          </a:p>
-        </p:txBody>
-      </p:sp>
-      <p:sp>
-        <p:nvSpPr>
-          <p:cNvPr id="4" name="Rectangle 3">
-            <a:extLst>
-              <a:ext uri="{FF2B5EF4-FFF2-40B4-BE49-F238E27FC236}">
-                <a16:creationId xmlns:a16="http://schemas.microsoft.com/office/drawing/2014/main" id="{567F5841-B571-4158-B48F-2DC2701F8B4F}"/>
-              </a:ext>
-            </a:extLst>
-          </p:cNvPr>
-          <p:cNvSpPr>
-            <a:spLocks noGrp="1"/>
-          </p:cNvSpPr>
-          <p:nvPr/>
-        </p:nvSpPr>
-        <p:spPr>
-          <a:xfrm>
-            <a:off x="5905500" y="5000625"/>
-            <a:ext cx="6096000" cy="857250"/>
-          </a:xfrm>
-          <a:prstGeom prst="rect">
-            <a:avLst/>
-          </a:prstGeom>
-          <a:noFill/>
-          <a:ln w="0">
-            <a:noFill/>
-          </a:ln>
-        </p:spPr>
-        <p:txBody>
-          <a:bodyPr>
-            <a:normAutofit/>
-          </a:bodyPr>
-          <a:lstStyle/>
-          <a:p>
-            <a:pPr>
-              <a:defRPr sz="1725" b="0">
-                <a:solidFill>
-                  <a:srgbClr val="6B1E72"/>
-                </a:solidFill>
-                <a:latin typeface="Arial"/>
-                <a:ea typeface="Arial"/>
-                <a:cs typeface="Arial"/>
-              </a:defRPr>
-            </a:pPr>
-            <a:r>
-              <a:rPr sz="1725" b="0">
-                <a:solidFill>
-                  <a:srgbClr val="6B1E72"/>
-                </a:solidFill>
-                <a:latin typeface="Arial"/>
-                <a:ea typeface="Arial"/>
-                <a:cs typeface="Arial"/>
-              </a:rPr>
-              <a:t>SUM, MAX, MIN, AVERAGE και ROUND ανά μήνα.</a:t>
-            </a:r>
-          </a:p>
-        </p:txBody>
-      </p:sp>
-    </p:spTree>
-    <p:extLst>
-      <p:ext uri="{BB962C8B-B14F-4D97-AF65-F5344CB8AC3E}">
-        <p14:creationId xmlns:p14="http://schemas.microsoft.com/office/powerpoint/2010/main" val="3815878654"/>
-      </p:ext>
-    </p:extLst>
-  </p:cSld>
-  <p:clrMapOvr>
-    <a:overrideClrMapping bg1="lt1" tx1="dk1" bg2="lt2" tx2="dk2" accent1="accent1" accent2="accent2" accent3="accent3" accent4="accent4" accent5="accent5" accent6="accent6" hlink="hlink" folHlink="folHlink"/>
-  </p:clrMapOvr>
-</p:sld>
-</file>
-
-<file path=ppt/slides/slide8.xml><?xml version="1.0" encoding="utf-8"?>
-<p:sld xmlns:a="http://schemas.openxmlformats.org/drawingml/2006/main" xmlns:r="http://schemas.openxmlformats.org/officeDocument/2006/relationships" xmlns:p="http://schemas.openxmlformats.org/presentationml/2006/main">
-  <p:cSld>
-    <p:spTree>
-      <p:nvGrpSpPr>
-        <p:cNvPr id="1" name=""/>
-        <p:cNvGrpSpPr/>
-        <p:nvPr/>
-      </p:nvGrpSpPr>
-      <p:grpSpPr>
-        <a:xfrm>
-          <a:off x="0" y="0"/>
-          <a:ext cx="0" cy="0"/>
-          <a:chOff x="0" y="0"/>
-          <a:chExt cx="0" cy="0"/>
-        </a:xfrm>
-      </p:grpSpPr>
-      <p:sp>
-        <p:nvSpPr>
-          <p:cNvPr id="5" name="Rectangle 4">
-            <a:extLst>
-              <a:ext uri="{FF2B5EF4-FFF2-40B4-BE49-F238E27FC236}">
-                <a16:creationId xmlns:a16="http://schemas.microsoft.com/office/drawing/2014/main" id="{49C3F469-5F88-45E7-AD4D-1CA3F73F4D39}"/>
-              </a:ext>
-            </a:extLst>
-          </p:cNvPr>
-          <p:cNvSpPr>
-            <a:spLocks noGrp="1"/>
-          </p:cNvSpPr>
-          <p:nvPr/>
-        </p:nvSpPr>
-        <p:spPr>
-          <a:xfrm>
-            <a:off x="742950" y="476250"/>
-            <a:ext cx="3905250" cy="857250"/>
-          </a:xfrm>
-          <a:prstGeom prst="rect">
-            <a:avLst/>
-          </a:prstGeom>
-          <a:noFill/>
-          <a:ln w="0">
-            <a:noFill/>
-          </a:ln>
-        </p:spPr>
-        <p:txBody>
-          <a:bodyPr>
-            <a:normAutofit fontScale="77907"/>
-          </a:bodyPr>
-          <a:lstStyle/>
-          <a:p>
-            <a:pPr>
-              <a:defRPr sz="3225" b="0">
-                <a:solidFill>
-                  <a:srgbClr val="6B1E72"/>
-                </a:solidFill>
-                <a:latin typeface="Calibri Light"/>
-                <a:ea typeface="Calibri Light"/>
-                <a:cs typeface="Calibri Light"/>
-              </a:defRPr>
-            </a:pPr>
-            <a:r>
-              <a:rPr sz="3225" b="0">
-                <a:solidFill>
-                  <a:srgbClr val="6B1E72"/>
-                </a:solidFill>
-                <a:latin typeface="Calibri Light"/>
-                <a:ea typeface="Calibri Light"/>
-                <a:cs typeface="Calibri Light"/>
-              </a:rPr>
-              <a:t>Δραστηριότητες Αξιολόγησης</a:t>
-            </a:r>
-          </a:p>
-        </p:txBody>
-      </p:sp>
-      <p:sp>
-        <p:nvSpPr>
-          <p:cNvPr id="2" name="Rectangle 1">
-            <a:extLst>
-              <a:ext uri="{FF2B5EF4-FFF2-40B4-BE49-F238E27FC236}">
-                <a16:creationId xmlns:a16="http://schemas.microsoft.com/office/drawing/2014/main" id="{8853D3B4-D75D-43C5-B589-0FBFB148A951}"/>
-              </a:ext>
-            </a:extLst>
-          </p:cNvPr>
-          <p:cNvSpPr>
-            <a:spLocks noGrp="1"/>
-          </p:cNvSpPr>
-          <p:nvPr/>
-        </p:nvSpPr>
-        <p:spPr>
-          <a:xfrm>
-            <a:off x="4762500" y="1857375"/>
-            <a:ext cx="6191250" cy="523875"/>
-          </a:xfrm>
-          <a:prstGeom prst="rect">
-            <a:avLst/>
-          </a:prstGeom>
-          <a:noFill/>
-          <a:ln w="0">
-            <a:noFill/>
-          </a:ln>
-        </p:spPr>
-        <p:txBody>
-          <a:bodyPr>
-            <a:normAutofit/>
-          </a:bodyPr>
-          <a:lstStyle/>
-          <a:p>
-            <a:pPr>
-              <a:defRPr sz="2250" b="1">
-                <a:solidFill>
-                  <a:srgbClr val="D84B00"/>
-                </a:solidFill>
-                <a:latin typeface="Arial"/>
-                <a:ea typeface="Arial"/>
-                <a:cs typeface="Arial"/>
-              </a:defRPr>
-            </a:pPr>
-            <a:r>
-              <a:rPr sz="2250" b="1">
-                <a:solidFill>
-                  <a:srgbClr val="D84B00"/>
-                </a:solidFill>
-                <a:latin typeface="Arial"/>
-                <a:ea typeface="Arial"/>
-                <a:cs typeface="Arial"/>
-              </a:rPr>
-              <a:t>Φύλλο Εργασίας Β.4.1.M9</a:t>
-            </a:r>
-          </a:p>
-        </p:txBody>
-      </p:sp>
-      <p:sp>
-        <p:nvSpPr>
-          <p:cNvPr id="3" name="Rectangle 2">
-            <a:extLst>
-              <a:ext uri="{FF2B5EF4-FFF2-40B4-BE49-F238E27FC236}">
-                <a16:creationId xmlns:a16="http://schemas.microsoft.com/office/drawing/2014/main" id="{C97B66AE-C260-42AA-8C4E-C375C9DB143D}"/>
-              </a:ext>
-            </a:extLst>
-          </p:cNvPr>
-          <p:cNvSpPr>
-            <a:spLocks noGrp="1"/>
-          </p:cNvSpPr>
-          <p:nvPr/>
-        </p:nvSpPr>
-        <p:spPr>
-          <a:xfrm>
-            <a:off x="4762500" y="2857500"/>
-            <a:ext cx="6191250" cy="1809750"/>
-          </a:xfrm>
-          <a:prstGeom prst="rect">
-            <a:avLst/>
-          </a:prstGeom>
-          <a:noFill/>
-          <a:ln w="0">
-            <a:noFill/>
-          </a:ln>
-        </p:spPr>
-        <p:txBody>
-          <a:bodyPr>
-            <a:normAutofit/>
-          </a:bodyPr>
-          <a:lstStyle/>
-          <a:p>
-            <a:pPr>
-              <a:defRPr sz="2175" b="0">
-                <a:solidFill>
-                  <a:srgbClr val="151515"/>
-                </a:solidFill>
-                <a:latin typeface="Arial"/>
-                <a:ea typeface="Arial"/>
-                <a:cs typeface="Arial"/>
-              </a:defRPr>
-            </a:pPr>
-            <a:r>
-              <a:rPr sz="2175" b="0">
-                <a:solidFill>
-                  <a:srgbClr val="151515"/>
-                </a:solidFill>
-                <a:latin typeface="Arial"/>
-                <a:ea typeface="Arial"/>
-                <a:cs typeface="Arial"/>
-              </a:rPr>
-              <a:t>Σελίδες 39–40</a:t>
-            </a:r>
-          </a:p>
-          <a:p>
-            <a:pPr>
-              <a:defRPr sz="2175" b="0">
-                <a:solidFill>
-                  <a:srgbClr val="151515"/>
-                </a:solidFill>
-                <a:latin typeface="Arial"/>
-                <a:ea typeface="Arial"/>
-                <a:cs typeface="Arial"/>
-              </a:defRPr>
-            </a:pPr>
-            <a:r>
-              <a:rPr sz="2175" b="0">
-                <a:solidFill>
-                  <a:srgbClr val="151515"/>
-                </a:solidFill>
-                <a:latin typeface="Arial"/>
-                <a:ea typeface="Arial"/>
-                <a:cs typeface="Arial"/>
-              </a:rPr>
-              <a:t>Ασκήσεις 9–15</a:t>
-            </a:r>
-          </a:p>
-          <a:p>
-            <a:endParaRPr sz="2175" b="0">
-              <a:solidFill>
-                <a:srgbClr val="151515"/>
-              </a:solidFill>
-              <a:latin typeface="Arial"/>
-              <a:ea typeface="Arial"/>
-              <a:cs typeface="Arial"/>
-            </a:endParaRPr>
-          </a:p>
-          <a:p>
-            <a:pPr>
-              <a:defRPr sz="2175" b="0">
-                <a:solidFill>
-                  <a:srgbClr val="151515"/>
-                </a:solidFill>
-                <a:latin typeface="Arial"/>
-                <a:ea typeface="Arial"/>
-                <a:cs typeface="Arial"/>
-              </a:defRPr>
-            </a:pPr>
-            <a:r>
-              <a:rPr sz="2175" b="0">
-                <a:solidFill>
-                  <a:srgbClr val="151515"/>
-                </a:solidFill>
-                <a:latin typeface="Arial"/>
-                <a:ea typeface="Arial"/>
-                <a:cs typeface="Arial"/>
-              </a:rPr>
-              <a:t>Αρχείο: Cyprus Tourists.xlsx</a:t>
-            </a:r>
-          </a:p>
-        </p:txBody>
-      </p:sp>
-      <p:sp>
-        <p:nvSpPr>
-          <p:cNvPr id="4" name="Rectangle 3">
-            <a:extLst>
-              <a:ext uri="{FF2B5EF4-FFF2-40B4-BE49-F238E27FC236}">
-                <a16:creationId xmlns:a16="http://schemas.microsoft.com/office/drawing/2014/main" id="{1894EFFC-A133-4543-9A33-351C0D229357}"/>
-              </a:ext>
-            </a:extLst>
-          </p:cNvPr>
-          <p:cNvSpPr>
-            <a:spLocks noGrp="1"/>
-          </p:cNvSpPr>
-          <p:nvPr/>
-        </p:nvSpPr>
-        <p:spPr>
-          <a:xfrm>
-            <a:off x="4762500" y="5000625"/>
-            <a:ext cx="6096000" cy="857250"/>
-          </a:xfrm>
-          <a:prstGeom prst="rect">
-            <a:avLst/>
-          </a:prstGeom>
-          <a:noFill/>
-          <a:ln w="0">
-            <a:noFill/>
-          </a:ln>
-        </p:spPr>
-        <p:txBody>
-          <a:bodyPr>
-            <a:normAutofit/>
-          </a:bodyPr>
-          <a:lstStyle/>
-          <a:p>
-            <a:pPr>
-              <a:defRPr sz="1725" b="0">
-                <a:solidFill>
-                  <a:srgbClr val="6B1E72"/>
-                </a:solidFill>
-                <a:latin typeface="Arial"/>
-                <a:ea typeface="Arial"/>
-                <a:cs typeface="Arial"/>
-              </a:defRPr>
-            </a:pPr>
-            <a:r>
-              <a:rPr sz="1725" b="0">
-                <a:solidFill>
-                  <a:srgbClr val="6B1E72"/>
-                </a:solidFill>
-                <a:latin typeface="Arial"/>
-                <a:ea typeface="Arial"/>
-                <a:cs typeface="Arial"/>
-              </a:rPr>
-              <a:t>Υπολόγισε τα αντίστοιχα αποτελέσματα ανά χώρα.</a:t>
-            </a:r>
-          </a:p>
-        </p:txBody>
-      </p:sp>
-    </p:spTree>
-    <p:extLst>
-      <p:ext uri="{BB962C8B-B14F-4D97-AF65-F5344CB8AC3E}">
-        <p14:creationId xmlns:p14="http://schemas.microsoft.com/office/powerpoint/2010/main" val="608684808"/>
       </p:ext>
     </p:extLst>
   </p:cSld>

--- a/schools-presentations/B Gymnasiou/B41M9 - Εισαγωγή στις Συναρτήσεις.pptx
+++ b/schools-presentations/B Gymnasiou/B41M9 - Εισαγωγή στις Συναρτήσεις.pptx
@@ -5,15 +5,16 @@
     <p:sldMasterId id="2147483648" r:id="rId1"/>
   </p:sldMasterIdLst>
   <p:notesMasterIdLst>
-    <p:notesMasterId r:id="rId8"/>
+    <p:notesMasterId r:id="rId9"/>
   </p:notesMasterIdLst>
   <p:sldIdLst>
     <p:sldId id="256" r:id="rId2"/>
-    <p:sldId id="257" r:id="rId3"/>
-    <p:sldId id="258" r:id="rId4"/>
-    <p:sldId id="259" r:id="rId5"/>
-    <p:sldId id="260" r:id="rId6"/>
-    <p:sldId id="261" r:id="rId7"/>
+    <p:sldId id="262" r:id="rId3"/>
+    <p:sldId id="257" r:id="rId4"/>
+    <p:sldId id="258" r:id="rId5"/>
+    <p:sldId id="259" r:id="rId6"/>
+    <p:sldId id="260" r:id="rId7"/>
+    <p:sldId id="261" r:id="rId8"/>
   </p:sldIdLst>
   <p:sldSz cx="12192000" cy="6858000"/>
   <p:notesSz cx="6858000" cy="9144000"/>
@@ -124,8 +125,8 @@
 <pc:chgInfo xmlns:a="http://schemas.openxmlformats.org/drawingml/2006/main" xmlns:r="http://schemas.openxmlformats.org/officeDocument/2006/relationships" xmlns:ac="http://schemas.microsoft.com/office/drawing/2013/main/command" xmlns:pc="http://schemas.microsoft.com/office/powerpoint/2013/main/command">
   <pc:docChgLst>
     <pc:chgData name="Άριστος Αρέστη" userId="813aa191-2d4c-464f-9d05-0a7e494d859f" providerId="ADAL" clId="{49C7B61D-1ACF-4AFF-A04E-A3B433E32474}"/>
-    <pc:docChg chg="custSel delSld modSld">
-      <pc:chgData name="Άριστος Αρέστη" userId="813aa191-2d4c-464f-9d05-0a7e494d859f" providerId="ADAL" clId="{49C7B61D-1ACF-4AFF-A04E-A3B433E32474}" dt="2026-10-11T12:38:58.951" v="39" actId="47"/>
+    <pc:docChg chg="custSel addSld delSld modSld sldOrd">
+      <pc:chgData name="Άριστος Αρέστη" userId="813aa191-2d4c-464f-9d05-0a7e494d859f" providerId="ADAL" clId="{49C7B61D-1ACF-4AFF-A04E-A3B433E32474}" dt="2026-10-12T05:10:31.034" v="115" actId="20577"/>
       <pc:docMkLst>
         <pc:docMk/>
       </pc:docMkLst>
@@ -158,6 +159,37 @@
             <ac:spMk id="3" creationId="{0FD8DC59-79A8-42F4-AA7E-860D887215F1}"/>
           </ac:spMkLst>
         </pc:spChg>
+      </pc:sldChg>
+      <pc:sldChg chg="addSp delSp modSp new mod ord">
+        <pc:chgData name="Άριστος Αρέστη" userId="813aa191-2d4c-464f-9d05-0a7e494d859f" providerId="ADAL" clId="{49C7B61D-1ACF-4AFF-A04E-A3B433E32474}" dt="2026-10-12T05:10:31.034" v="115" actId="20577"/>
+        <pc:sldMkLst>
+          <pc:docMk/>
+          <pc:sldMk cId="1318251653" sldId="262"/>
+        </pc:sldMkLst>
+        <pc:spChg chg="mod">
+          <ac:chgData name="Άριστος Αρέστη" userId="813aa191-2d4c-464f-9d05-0a7e494d859f" providerId="ADAL" clId="{49C7B61D-1ACF-4AFF-A04E-A3B433E32474}" dt="2026-10-12T05:10:31.034" v="115" actId="20577"/>
+          <ac:spMkLst>
+            <pc:docMk/>
+            <pc:sldMk cId="1318251653" sldId="262"/>
+            <ac:spMk id="2" creationId="{1268658C-D1ED-ED5A-6CAA-F2FF849FC621}"/>
+          </ac:spMkLst>
+        </pc:spChg>
+        <pc:spChg chg="del">
+          <ac:chgData name="Άριστος Αρέστη" userId="813aa191-2d4c-464f-9d05-0a7e494d859f" providerId="ADAL" clId="{49C7B61D-1ACF-4AFF-A04E-A3B433E32474}" dt="2026-10-12T05:09:19.435" v="71" actId="22"/>
+          <ac:spMkLst>
+            <pc:docMk/>
+            <pc:sldMk cId="1318251653" sldId="262"/>
+            <ac:spMk id="3" creationId="{AD7CA519-B193-8423-7A24-1CA8483473EC}"/>
+          </ac:spMkLst>
+        </pc:spChg>
+        <pc:picChg chg="add mod ord">
+          <ac:chgData name="Άριστος Αρέστη" userId="813aa191-2d4c-464f-9d05-0a7e494d859f" providerId="ADAL" clId="{49C7B61D-1ACF-4AFF-A04E-A3B433E32474}" dt="2026-10-12T05:09:48.857" v="77" actId="14100"/>
+          <ac:picMkLst>
+            <pc:docMk/>
+            <pc:sldMk cId="1318251653" sldId="262"/>
+            <ac:picMk id="5" creationId="{A5472988-00D6-D29B-E032-FE6FB12D1D42}"/>
+          </ac:picMkLst>
+        </pc:picChg>
       </pc:sldChg>
       <pc:sldChg chg="del">
         <pc:chgData name="Άριστος Αρέστη" userId="813aa191-2d4c-464f-9d05-0a7e494d859f" providerId="ADAL" clId="{49C7B61D-1ACF-4AFF-A04E-A3B433E32474}" dt="2026-10-11T12:38:57.669" v="38" actId="47"/>
@@ -952,7 +984,7 @@
           <a:lstStyle/>
           <a:p>
             <a:fld id="{EDB99004-FBBF-4BCC-9BC3-88F554ADE514}" type="datetimeFigureOut">
-              <a:t>11-Oct-26</a:t>
+              <a:t>12-Oct-26</a:t>
             </a:fld>
             <a:endParaRPr/>
           </a:p>
@@ -1147,7 +1179,7 @@
           <a:lstStyle/>
           <a:p>
             <a:fld id="{EDB99004-FBBF-4BCC-9BC3-88F554ADE514}" type="datetimeFigureOut">
-              <a:t>11-Oct-26</a:t>
+              <a:t>12-Oct-26</a:t>
             </a:fld>
             <a:endParaRPr/>
           </a:p>
@@ -1352,7 +1384,7 @@
           <a:lstStyle/>
           <a:p>
             <a:fld id="{EDB99004-FBBF-4BCC-9BC3-88F554ADE514}" type="datetimeFigureOut">
-              <a:t>11-Oct-26</a:t>
+              <a:t>12-Oct-26</a:t>
             </a:fld>
             <a:endParaRPr/>
           </a:p>
@@ -1547,7 +1579,7 @@
           <a:lstStyle/>
           <a:p>
             <a:fld id="{EDB99004-FBBF-4BCC-9BC3-88F554ADE514}" type="datetimeFigureOut">
-              <a:t>11-Oct-26</a:t>
+              <a:t>12-Oct-26</a:t>
             </a:fld>
             <a:endParaRPr/>
           </a:p>
@@ -1816,7 +1848,7 @@
           <a:lstStyle/>
           <a:p>
             <a:fld id="{EDB99004-FBBF-4BCC-9BC3-88F554ADE514}" type="datetimeFigureOut">
-              <a:t>11-Oct-26</a:t>
+              <a:t>12-Oct-26</a:t>
             </a:fld>
             <a:endParaRPr/>
           </a:p>
@@ -2083,7 +2115,7 @@
           <a:lstStyle/>
           <a:p>
             <a:fld id="{EDB99004-FBBF-4BCC-9BC3-88F554ADE514}" type="datetimeFigureOut">
-              <a:t>11-Oct-26</a:t>
+              <a:t>12-Oct-26</a:t>
             </a:fld>
             <a:endParaRPr/>
           </a:p>
@@ -2499,7 +2531,7 @@
           <a:lstStyle/>
           <a:p>
             <a:fld id="{EDB99004-FBBF-4BCC-9BC3-88F554ADE514}" type="datetimeFigureOut">
-              <a:t>11-Oct-26</a:t>
+              <a:t>12-Oct-26</a:t>
             </a:fld>
             <a:endParaRPr/>
           </a:p>
@@ -2632,7 +2664,7 @@
           <a:lstStyle/>
           <a:p>
             <a:fld id="{EDB99004-FBBF-4BCC-9BC3-88F554ADE514}" type="datetimeFigureOut">
-              <a:t>11-Oct-26</a:t>
+              <a:t>12-Oct-26</a:t>
             </a:fld>
             <a:endParaRPr/>
           </a:p>
@@ -2738,7 +2770,7 @@
           <a:lstStyle/>
           <a:p>
             <a:fld id="{EDB99004-FBBF-4BCC-9BC3-88F554ADE514}" type="datetimeFigureOut">
-              <a:t>11-Oct-26</a:t>
+              <a:t>12-Oct-26</a:t>
             </a:fld>
             <a:endParaRPr/>
           </a:p>
@@ -3057,7 +3089,7 @@
           <a:lstStyle/>
           <a:p>
             <a:fld id="{EDB99004-FBBF-4BCC-9BC3-88F554ADE514}" type="datetimeFigureOut">
-              <a:t>11-Oct-26</a:t>
+              <a:t>12-Oct-26</a:t>
             </a:fld>
             <a:endParaRPr/>
           </a:p>
@@ -3339,7 +3371,7 @@
           <a:lstStyle/>
           <a:p>
             <a:fld id="{EDB99004-FBBF-4BCC-9BC3-88F554ADE514}" type="datetimeFigureOut">
-              <a:t>11-Oct-26</a:t>
+              <a:t>12-Oct-26</a:t>
             </a:fld>
             <a:endParaRPr/>
           </a:p>
@@ -3578,7 +3610,7 @@
           </a:lstStyle>
           <a:p>
             <a:fld id="{EDB99004-FBBF-4BCC-9BC3-88F554ADE514}" type="datetimeFigureOut">
-              <a:t>11-Oct-26</a:t>
+              <a:t>12-Oct-26</a:t>
             </a:fld>
             <a:endParaRPr/>
           </a:p>
@@ -4350,6 +4382,101 @@
       </p:grpSpPr>
       <p:sp>
         <p:nvSpPr>
+          <p:cNvPr id="2" name="Title 1">
+            <a:extLst>
+              <a:ext uri="{FF2B5EF4-FFF2-40B4-BE49-F238E27FC236}">
+                <a16:creationId xmlns:a16="http://schemas.microsoft.com/office/drawing/2014/main" id="{1268658C-D1ED-ED5A-6CAA-F2FF849FC621}"/>
+              </a:ext>
+            </a:extLst>
+          </p:cNvPr>
+          <p:cNvSpPr>
+            <a:spLocks noGrp="1"/>
+          </p:cNvSpPr>
+          <p:nvPr>
+            <p:ph type="title"/>
+          </p:nvPr>
+        </p:nvSpPr>
+        <p:spPr/>
+        <p:txBody>
+          <a:bodyPr/>
+          <a:lstStyle/>
+          <a:p>
+            <a:r>
+              <a:rPr lang="el-GR" dirty="0"/>
+              <a:t>Πως να βρω το άθροισμά των αριθμών</a:t>
+            </a:r>
+            <a:r>
+              <a:rPr lang="en-US" dirty="0"/>
+              <a:t>;</a:t>
+            </a:r>
+            <a:endParaRPr lang="en-GB" dirty="0"/>
+          </a:p>
+        </p:txBody>
+      </p:sp>
+      <p:pic>
+        <p:nvPicPr>
+          <p:cNvPr id="5" name="Content Placeholder 4">
+            <a:extLst>
+              <a:ext uri="{FF2B5EF4-FFF2-40B4-BE49-F238E27FC236}">
+                <a16:creationId xmlns:a16="http://schemas.microsoft.com/office/drawing/2014/main" id="{A5472988-00D6-D29B-E032-FE6FB12D1D42}"/>
+              </a:ext>
+            </a:extLst>
+          </p:cNvPr>
+          <p:cNvPicPr>
+            <a:picLocks noGrp="1" noChangeAspect="1"/>
+          </p:cNvPicPr>
+          <p:nvPr>
+            <p:ph idx="1"/>
+          </p:nvPr>
+        </p:nvPicPr>
+        <p:blipFill>
+          <a:blip r:embed="rId2"/>
+          <a:stretch>
+            <a:fillRect/>
+          </a:stretch>
+        </p:blipFill>
+        <p:spPr>
+          <a:xfrm>
+            <a:off x="3411940" y="2402006"/>
+            <a:ext cx="4010879" cy="4187461"/>
+          </a:xfrm>
+          <a:prstGeom prst="rect">
+            <a:avLst/>
+          </a:prstGeom>
+        </p:spPr>
+      </p:pic>
+    </p:spTree>
+    <p:extLst>
+      <p:ext uri="{BB962C8B-B14F-4D97-AF65-F5344CB8AC3E}">
+        <p14:creationId xmlns:p14="http://schemas.microsoft.com/office/powerpoint/2010/main" val="1318251653"/>
+      </p:ext>
+    </p:extLst>
+  </p:cSld>
+  <p:clrMapOvr>
+    <a:masterClrMapping/>
+  </p:clrMapOvr>
+</p:sld>
+</file>
+
+<file path=ppt/slides/slide3.xml><?xml version="1.0" encoding="utf-8"?>
+<p:sld xmlns:a="http://schemas.openxmlformats.org/drawingml/2006/main" xmlns:r="http://schemas.openxmlformats.org/officeDocument/2006/relationships" xmlns:p="http://schemas.openxmlformats.org/presentationml/2006/main">
+  <p:cSld>
+    <p:spTree>
+      <p:nvGrpSpPr>
+        <p:cNvPr id="1" name=""/>
+        <p:cNvGrpSpPr/>
+        <p:nvPr/>
+      </p:nvGrpSpPr>
+      <p:grpSpPr>
+        <a:xfrm>
+          <a:off x="0" y="0"/>
+          <a:ext cx="0" cy="0"/>
+          <a:chOff x="0" y="0"/>
+          <a:chExt cx="0" cy="0"/>
+        </a:xfrm>
+      </p:grpSpPr>
+      <p:sp>
+        <p:nvSpPr>
           <p:cNvPr id="5" name="Rectangle 4">
             <a:extLst>
               <a:ext uri="{FF2B5EF4-FFF2-40B4-BE49-F238E27FC236}">
@@ -4587,7 +4714,7 @@
 </p:sld>
 </file>
 
-<file path=ppt/slides/slide3.xml><?xml version="1.0" encoding="utf-8"?>
+<file path=ppt/slides/slide4.xml><?xml version="1.0" encoding="utf-8"?>
 <p:sld xmlns:a="http://schemas.openxmlformats.org/drawingml/2006/main" xmlns:r="http://schemas.openxmlformats.org/officeDocument/2006/relationships" xmlns:p="http://schemas.openxmlformats.org/presentationml/2006/main">
   <p:cSld>
     <p:spTree>
@@ -5025,319 +5152,6 @@
 </p:sld>
 </file>
 
-<file path=ppt/slides/slide4.xml><?xml version="1.0" encoding="utf-8"?>
-<p:sld xmlns:a="http://schemas.openxmlformats.org/drawingml/2006/main" xmlns:r="http://schemas.openxmlformats.org/officeDocument/2006/relationships" xmlns:p="http://schemas.openxmlformats.org/presentationml/2006/main">
-  <p:cSld>
-    <p:spTree>
-      <p:nvGrpSpPr>
-        <p:cNvPr id="1" name=""/>
-        <p:cNvGrpSpPr/>
-        <p:nvPr/>
-      </p:nvGrpSpPr>
-      <p:grpSpPr>
-        <a:xfrm>
-          <a:off x="0" y="0"/>
-          <a:ext cx="0" cy="0"/>
-          <a:chOff x="0" y="0"/>
-          <a:chExt cx="0" cy="0"/>
-        </a:xfrm>
-      </p:grpSpPr>
-      <p:sp>
-        <p:nvSpPr>
-          <p:cNvPr id="4" name="Rectangle 3">
-            <a:extLst>
-              <a:ext uri="{FF2B5EF4-FFF2-40B4-BE49-F238E27FC236}">
-                <a16:creationId xmlns:a16="http://schemas.microsoft.com/office/drawing/2014/main" id="{D0EB1352-3966-4AA9-BBBE-CE7A2176D263}"/>
-              </a:ext>
-            </a:extLst>
-          </p:cNvPr>
-          <p:cNvSpPr>
-            <a:spLocks noGrp="1"/>
-          </p:cNvSpPr>
-          <p:nvPr/>
-        </p:nvSpPr>
-        <p:spPr>
-          <a:xfrm>
-            <a:off x="742950" y="476250"/>
-            <a:ext cx="10382250" cy="857250"/>
-          </a:xfrm>
-          <a:prstGeom prst="rect">
-            <a:avLst/>
-          </a:prstGeom>
-          <a:noFill/>
-          <a:ln w="0">
-            <a:noFill/>
-          </a:ln>
-        </p:spPr>
-        <p:txBody>
-          <a:bodyPr>
-            <a:normAutofit/>
-          </a:bodyPr>
-          <a:lstStyle/>
-          <a:p>
-            <a:pPr>
-              <a:defRPr sz="3225" b="0">
-                <a:solidFill>
-                  <a:srgbClr val="6B1E72"/>
-                </a:solidFill>
-                <a:latin typeface="Calibri Light"/>
-                <a:ea typeface="Calibri Light"/>
-                <a:cs typeface="Calibri Light"/>
-              </a:defRPr>
-            </a:pPr>
-            <a:r>
-              <a:rPr sz="3225" b="0">
-                <a:solidFill>
-                  <a:srgbClr val="6B1E72"/>
-                </a:solidFill>
-                <a:latin typeface="Calibri Light"/>
-                <a:ea typeface="Calibri Light"/>
-                <a:cs typeface="Calibri Light"/>
-              </a:rPr>
-              <a:t>MAX και MIN</a:t>
-            </a:r>
-          </a:p>
-        </p:txBody>
-      </p:sp>
-      <p:sp>
-        <p:nvSpPr>
-          <p:cNvPr id="2" name="Rectangle 1">
-            <a:extLst>
-              <a:ext uri="{FF2B5EF4-FFF2-40B4-BE49-F238E27FC236}">
-                <a16:creationId xmlns:a16="http://schemas.microsoft.com/office/drawing/2014/main" id="{EA1E5A4C-DD7C-4793-81B1-FA9E6125D862}"/>
-              </a:ext>
-            </a:extLst>
-          </p:cNvPr>
-          <p:cNvSpPr>
-            <a:spLocks noGrp="1"/>
-          </p:cNvSpPr>
-          <p:nvPr/>
-        </p:nvSpPr>
-        <p:spPr>
-          <a:xfrm>
-            <a:off x="857250" y="1571625"/>
-            <a:ext cx="5429250" cy="3714750"/>
-          </a:xfrm>
-          <a:prstGeom prst="rect">
-            <a:avLst/>
-          </a:prstGeom>
-          <a:noFill/>
-          <a:ln w="0">
-            <a:noFill/>
-          </a:ln>
-        </p:spPr>
-        <p:txBody>
-          <a:bodyPr>
-            <a:normAutofit/>
-          </a:bodyPr>
-          <a:lstStyle/>
-          <a:p>
-            <a:pPr>
-              <a:defRPr sz="1950" b="0">
-                <a:solidFill>
-                  <a:srgbClr val="151515"/>
-                </a:solidFill>
-                <a:latin typeface="Arial"/>
-                <a:ea typeface="Arial"/>
-                <a:cs typeface="Arial"/>
-              </a:defRPr>
-            </a:pPr>
-            <a:r>
-              <a:rPr sz="1950" b="0">
-                <a:solidFill>
-                  <a:srgbClr val="151515"/>
-                </a:solidFill>
-                <a:latin typeface="Arial"/>
-                <a:ea typeface="Arial"/>
-                <a:cs typeface="Arial"/>
-              </a:rPr>
-              <a:t>MAX: επιστρέφει τη μεγαλύτερη τιμή.</a:t>
-            </a:r>
-          </a:p>
-          <a:p>
-            <a:pPr>
-              <a:defRPr sz="1950" b="0">
-                <a:solidFill>
-                  <a:srgbClr val="151515"/>
-                </a:solidFill>
-                <a:latin typeface="Arial"/>
-                <a:ea typeface="Arial"/>
-                <a:cs typeface="Arial"/>
-              </a:defRPr>
-            </a:pPr>
-            <a:r>
-              <a:rPr sz="1950" b="0">
-                <a:solidFill>
-                  <a:srgbClr val="151515"/>
-                </a:solidFill>
-                <a:latin typeface="Arial"/>
-                <a:ea typeface="Arial"/>
-                <a:cs typeface="Arial"/>
-              </a:rPr>
-              <a:t>=MAX(B3:B22)</a:t>
-            </a:r>
-          </a:p>
-          <a:p>
-            <a:endParaRPr sz="1950" b="0">
-              <a:solidFill>
-                <a:srgbClr val="151515"/>
-              </a:solidFill>
-              <a:latin typeface="Arial"/>
-              <a:ea typeface="Arial"/>
-              <a:cs typeface="Arial"/>
-            </a:endParaRPr>
-          </a:p>
-          <a:p>
-            <a:pPr>
-              <a:defRPr sz="1950" b="0">
-                <a:solidFill>
-                  <a:srgbClr val="151515"/>
-                </a:solidFill>
-                <a:latin typeface="Arial"/>
-                <a:ea typeface="Arial"/>
-                <a:cs typeface="Arial"/>
-              </a:defRPr>
-            </a:pPr>
-            <a:r>
-              <a:rPr sz="1950" b="0">
-                <a:solidFill>
-                  <a:srgbClr val="151515"/>
-                </a:solidFill>
-                <a:latin typeface="Arial"/>
-                <a:ea typeface="Arial"/>
-                <a:cs typeface="Arial"/>
-              </a:rPr>
-              <a:t>MIN: επιστρέφει τη μικρότερη τιμή.</a:t>
-            </a:r>
-          </a:p>
-          <a:p>
-            <a:pPr>
-              <a:defRPr sz="1950" b="0">
-                <a:solidFill>
-                  <a:srgbClr val="151515"/>
-                </a:solidFill>
-                <a:latin typeface="Arial"/>
-                <a:ea typeface="Arial"/>
-                <a:cs typeface="Arial"/>
-              </a:defRPr>
-            </a:pPr>
-            <a:r>
-              <a:rPr sz="1950" b="0">
-                <a:solidFill>
-                  <a:srgbClr val="151515"/>
-                </a:solidFill>
-                <a:latin typeface="Arial"/>
-                <a:ea typeface="Arial"/>
-                <a:cs typeface="Arial"/>
-              </a:rPr>
-              <a:t>=MIN(B3:B22)</a:t>
-            </a:r>
-          </a:p>
-        </p:txBody>
-      </p:sp>
-      <p:sp>
-        <p:nvSpPr>
-          <p:cNvPr id="3" name="Rectangle 2">
-            <a:extLst>
-              <a:ext uri="{FF2B5EF4-FFF2-40B4-BE49-F238E27FC236}">
-                <a16:creationId xmlns:a16="http://schemas.microsoft.com/office/drawing/2014/main" id="{E519FEEB-79F6-446D-A180-DAABBBB53C12}"/>
-              </a:ext>
-            </a:extLst>
-          </p:cNvPr>
-          <p:cNvSpPr>
-            <a:spLocks noGrp="1"/>
-          </p:cNvSpPr>
-          <p:nvPr/>
-        </p:nvSpPr>
-        <p:spPr>
-          <a:xfrm>
-            <a:off x="6667500" y="2095500"/>
-            <a:ext cx="4095750" cy="2190750"/>
-          </a:xfrm>
-          <a:prstGeom prst="rect">
-            <a:avLst/>
-          </a:prstGeom>
-          <a:noFill/>
-          <a:ln w="0">
-            <a:noFill/>
-          </a:ln>
-        </p:spPr>
-        <p:txBody>
-          <a:bodyPr>
-            <a:normAutofit/>
-          </a:bodyPr>
-          <a:lstStyle/>
-          <a:p>
-            <a:pPr>
-              <a:defRPr sz="2250" b="1">
-                <a:solidFill>
-                  <a:srgbClr val="D84B00"/>
-                </a:solidFill>
-                <a:latin typeface="Arial"/>
-                <a:ea typeface="Arial"/>
-                <a:cs typeface="Arial"/>
-              </a:defRPr>
-            </a:pPr>
-            <a:r>
-              <a:rPr sz="2250" b="1">
-                <a:solidFill>
-                  <a:srgbClr val="D84B00"/>
-                </a:solidFill>
-                <a:latin typeface="Arial"/>
-                <a:ea typeface="Arial"/>
-                <a:cs typeface="Arial"/>
-              </a:rPr>
-              <a:t>MAX = μεγαλύτερο</a:t>
-            </a:r>
-          </a:p>
-          <a:p>
-            <a:endParaRPr sz="2250" b="1">
-              <a:solidFill>
-                <a:srgbClr val="D84B00"/>
-              </a:solidFill>
-              <a:latin typeface="Arial"/>
-              <a:ea typeface="Arial"/>
-              <a:cs typeface="Arial"/>
-            </a:endParaRPr>
-          </a:p>
-          <a:p>
-            <a:pPr>
-              <a:defRPr sz="2250" b="1">
-                <a:solidFill>
-                  <a:srgbClr val="D84B00"/>
-                </a:solidFill>
-                <a:latin typeface="Arial"/>
-                <a:ea typeface="Arial"/>
-                <a:cs typeface="Arial"/>
-              </a:defRPr>
-            </a:pPr>
-            <a:r>
-              <a:rPr sz="2250" b="1">
-                <a:solidFill>
-                  <a:srgbClr val="D84B00"/>
-                </a:solidFill>
-                <a:latin typeface="Arial"/>
-                <a:ea typeface="Arial"/>
-                <a:cs typeface="Arial"/>
-              </a:rPr>
-              <a:t>MIN = μικρότερο</a:t>
-            </a:r>
-          </a:p>
-        </p:txBody>
-      </p:sp>
-    </p:spTree>
-    <p:extLst>
-      <p:ext uri="{BB962C8B-B14F-4D97-AF65-F5344CB8AC3E}">
-        <p14:creationId xmlns:p14="http://schemas.microsoft.com/office/powerpoint/2010/main" val="2484230000"/>
-      </p:ext>
-    </p:extLst>
-  </p:cSld>
-  <p:clrMapOvr>
-    <a:masterClrMapping/>
-  </p:clrMapOvr>
-</p:sld>
-</file>
-
 <file path=ppt/slides/slide5.xml><?xml version="1.0" encoding="utf-8"?>
 <p:sld xmlns:a="http://schemas.openxmlformats.org/drawingml/2006/main" xmlns:r="http://schemas.openxmlformats.org/officeDocument/2006/relationships" xmlns:p="http://schemas.openxmlformats.org/presentationml/2006/main">
   <p:cSld>
@@ -5357,10 +5171,10 @@
       </p:grpSpPr>
       <p:sp>
         <p:nvSpPr>
-          <p:cNvPr id="5" name="Rectangle 4">
-            <a:extLst>
-              <a:ext uri="{FF2B5EF4-FFF2-40B4-BE49-F238E27FC236}">
-                <a16:creationId xmlns:a16="http://schemas.microsoft.com/office/drawing/2014/main" id="{BB3182B1-113F-4B37-A66F-C86A530AA2A0}"/>
+          <p:cNvPr id="4" name="Rectangle 3">
+            <a:extLst>
+              <a:ext uri="{FF2B5EF4-FFF2-40B4-BE49-F238E27FC236}">
+                <a16:creationId xmlns:a16="http://schemas.microsoft.com/office/drawing/2014/main" id="{D0EB1352-3966-4AA9-BBBE-CE7A2176D263}"/>
               </a:ext>
             </a:extLst>
           </p:cNvPr>
@@ -5407,6 +5221,319 @@
                 <a:ea typeface="Calibri Light"/>
                 <a:cs typeface="Calibri Light"/>
               </a:rPr>
+              <a:t>MAX και MIN</a:t>
+            </a:r>
+          </a:p>
+        </p:txBody>
+      </p:sp>
+      <p:sp>
+        <p:nvSpPr>
+          <p:cNvPr id="2" name="Rectangle 1">
+            <a:extLst>
+              <a:ext uri="{FF2B5EF4-FFF2-40B4-BE49-F238E27FC236}">
+                <a16:creationId xmlns:a16="http://schemas.microsoft.com/office/drawing/2014/main" id="{EA1E5A4C-DD7C-4793-81B1-FA9E6125D862}"/>
+              </a:ext>
+            </a:extLst>
+          </p:cNvPr>
+          <p:cNvSpPr>
+            <a:spLocks noGrp="1"/>
+          </p:cNvSpPr>
+          <p:nvPr/>
+        </p:nvSpPr>
+        <p:spPr>
+          <a:xfrm>
+            <a:off x="857250" y="1571625"/>
+            <a:ext cx="5429250" cy="3714750"/>
+          </a:xfrm>
+          <a:prstGeom prst="rect">
+            <a:avLst/>
+          </a:prstGeom>
+          <a:noFill/>
+          <a:ln w="0">
+            <a:noFill/>
+          </a:ln>
+        </p:spPr>
+        <p:txBody>
+          <a:bodyPr>
+            <a:normAutofit/>
+          </a:bodyPr>
+          <a:lstStyle/>
+          <a:p>
+            <a:pPr>
+              <a:defRPr sz="1950" b="0">
+                <a:solidFill>
+                  <a:srgbClr val="151515"/>
+                </a:solidFill>
+                <a:latin typeface="Arial"/>
+                <a:ea typeface="Arial"/>
+                <a:cs typeface="Arial"/>
+              </a:defRPr>
+            </a:pPr>
+            <a:r>
+              <a:rPr sz="1950" b="0">
+                <a:solidFill>
+                  <a:srgbClr val="151515"/>
+                </a:solidFill>
+                <a:latin typeface="Arial"/>
+                <a:ea typeface="Arial"/>
+                <a:cs typeface="Arial"/>
+              </a:rPr>
+              <a:t>MAX: επιστρέφει τη μεγαλύτερη τιμή.</a:t>
+            </a:r>
+          </a:p>
+          <a:p>
+            <a:pPr>
+              <a:defRPr sz="1950" b="0">
+                <a:solidFill>
+                  <a:srgbClr val="151515"/>
+                </a:solidFill>
+                <a:latin typeface="Arial"/>
+                <a:ea typeface="Arial"/>
+                <a:cs typeface="Arial"/>
+              </a:defRPr>
+            </a:pPr>
+            <a:r>
+              <a:rPr sz="1950" b="0">
+                <a:solidFill>
+                  <a:srgbClr val="151515"/>
+                </a:solidFill>
+                <a:latin typeface="Arial"/>
+                <a:ea typeface="Arial"/>
+                <a:cs typeface="Arial"/>
+              </a:rPr>
+              <a:t>=MAX(B3:B22)</a:t>
+            </a:r>
+          </a:p>
+          <a:p>
+            <a:endParaRPr sz="1950" b="0">
+              <a:solidFill>
+                <a:srgbClr val="151515"/>
+              </a:solidFill>
+              <a:latin typeface="Arial"/>
+              <a:ea typeface="Arial"/>
+              <a:cs typeface="Arial"/>
+            </a:endParaRPr>
+          </a:p>
+          <a:p>
+            <a:pPr>
+              <a:defRPr sz="1950" b="0">
+                <a:solidFill>
+                  <a:srgbClr val="151515"/>
+                </a:solidFill>
+                <a:latin typeface="Arial"/>
+                <a:ea typeface="Arial"/>
+                <a:cs typeface="Arial"/>
+              </a:defRPr>
+            </a:pPr>
+            <a:r>
+              <a:rPr sz="1950" b="0">
+                <a:solidFill>
+                  <a:srgbClr val="151515"/>
+                </a:solidFill>
+                <a:latin typeface="Arial"/>
+                <a:ea typeface="Arial"/>
+                <a:cs typeface="Arial"/>
+              </a:rPr>
+              <a:t>MIN: επιστρέφει τη μικρότερη τιμή.</a:t>
+            </a:r>
+          </a:p>
+          <a:p>
+            <a:pPr>
+              <a:defRPr sz="1950" b="0">
+                <a:solidFill>
+                  <a:srgbClr val="151515"/>
+                </a:solidFill>
+                <a:latin typeface="Arial"/>
+                <a:ea typeface="Arial"/>
+                <a:cs typeface="Arial"/>
+              </a:defRPr>
+            </a:pPr>
+            <a:r>
+              <a:rPr sz="1950" b="0">
+                <a:solidFill>
+                  <a:srgbClr val="151515"/>
+                </a:solidFill>
+                <a:latin typeface="Arial"/>
+                <a:ea typeface="Arial"/>
+                <a:cs typeface="Arial"/>
+              </a:rPr>
+              <a:t>=MIN(B3:B22)</a:t>
+            </a:r>
+          </a:p>
+        </p:txBody>
+      </p:sp>
+      <p:sp>
+        <p:nvSpPr>
+          <p:cNvPr id="3" name="Rectangle 2">
+            <a:extLst>
+              <a:ext uri="{FF2B5EF4-FFF2-40B4-BE49-F238E27FC236}">
+                <a16:creationId xmlns:a16="http://schemas.microsoft.com/office/drawing/2014/main" id="{E519FEEB-79F6-446D-A180-DAABBBB53C12}"/>
+              </a:ext>
+            </a:extLst>
+          </p:cNvPr>
+          <p:cNvSpPr>
+            <a:spLocks noGrp="1"/>
+          </p:cNvSpPr>
+          <p:nvPr/>
+        </p:nvSpPr>
+        <p:spPr>
+          <a:xfrm>
+            <a:off x="6667500" y="2095500"/>
+            <a:ext cx="4095750" cy="2190750"/>
+          </a:xfrm>
+          <a:prstGeom prst="rect">
+            <a:avLst/>
+          </a:prstGeom>
+          <a:noFill/>
+          <a:ln w="0">
+            <a:noFill/>
+          </a:ln>
+        </p:spPr>
+        <p:txBody>
+          <a:bodyPr>
+            <a:normAutofit/>
+          </a:bodyPr>
+          <a:lstStyle/>
+          <a:p>
+            <a:pPr>
+              <a:defRPr sz="2250" b="1">
+                <a:solidFill>
+                  <a:srgbClr val="D84B00"/>
+                </a:solidFill>
+                <a:latin typeface="Arial"/>
+                <a:ea typeface="Arial"/>
+                <a:cs typeface="Arial"/>
+              </a:defRPr>
+            </a:pPr>
+            <a:r>
+              <a:rPr sz="2250" b="1">
+                <a:solidFill>
+                  <a:srgbClr val="D84B00"/>
+                </a:solidFill>
+                <a:latin typeface="Arial"/>
+                <a:ea typeface="Arial"/>
+                <a:cs typeface="Arial"/>
+              </a:rPr>
+              <a:t>MAX = μεγαλύτερο</a:t>
+            </a:r>
+          </a:p>
+          <a:p>
+            <a:endParaRPr sz="2250" b="1">
+              <a:solidFill>
+                <a:srgbClr val="D84B00"/>
+              </a:solidFill>
+              <a:latin typeface="Arial"/>
+              <a:ea typeface="Arial"/>
+              <a:cs typeface="Arial"/>
+            </a:endParaRPr>
+          </a:p>
+          <a:p>
+            <a:pPr>
+              <a:defRPr sz="2250" b="1">
+                <a:solidFill>
+                  <a:srgbClr val="D84B00"/>
+                </a:solidFill>
+                <a:latin typeface="Arial"/>
+                <a:ea typeface="Arial"/>
+                <a:cs typeface="Arial"/>
+              </a:defRPr>
+            </a:pPr>
+            <a:r>
+              <a:rPr sz="2250" b="1">
+                <a:solidFill>
+                  <a:srgbClr val="D84B00"/>
+                </a:solidFill>
+                <a:latin typeface="Arial"/>
+                <a:ea typeface="Arial"/>
+                <a:cs typeface="Arial"/>
+              </a:rPr>
+              <a:t>MIN = μικρότερο</a:t>
+            </a:r>
+          </a:p>
+        </p:txBody>
+      </p:sp>
+    </p:spTree>
+    <p:extLst>
+      <p:ext uri="{BB962C8B-B14F-4D97-AF65-F5344CB8AC3E}">
+        <p14:creationId xmlns:p14="http://schemas.microsoft.com/office/powerpoint/2010/main" val="2484230000"/>
+      </p:ext>
+    </p:extLst>
+  </p:cSld>
+  <p:clrMapOvr>
+    <a:masterClrMapping/>
+  </p:clrMapOvr>
+</p:sld>
+</file>
+
+<file path=ppt/slides/slide6.xml><?xml version="1.0" encoding="utf-8"?>
+<p:sld xmlns:a="http://schemas.openxmlformats.org/drawingml/2006/main" xmlns:r="http://schemas.openxmlformats.org/officeDocument/2006/relationships" xmlns:p="http://schemas.openxmlformats.org/presentationml/2006/main">
+  <p:cSld>
+    <p:spTree>
+      <p:nvGrpSpPr>
+        <p:cNvPr id="1" name=""/>
+        <p:cNvGrpSpPr/>
+        <p:nvPr/>
+      </p:nvGrpSpPr>
+      <p:grpSpPr>
+        <a:xfrm>
+          <a:off x="0" y="0"/>
+          <a:ext cx="0" cy="0"/>
+          <a:chOff x="0" y="0"/>
+          <a:chExt cx="0" cy="0"/>
+        </a:xfrm>
+      </p:grpSpPr>
+      <p:sp>
+        <p:nvSpPr>
+          <p:cNvPr id="5" name="Rectangle 4">
+            <a:extLst>
+              <a:ext uri="{FF2B5EF4-FFF2-40B4-BE49-F238E27FC236}">
+                <a16:creationId xmlns:a16="http://schemas.microsoft.com/office/drawing/2014/main" id="{BB3182B1-113F-4B37-A66F-C86A530AA2A0}"/>
+              </a:ext>
+            </a:extLst>
+          </p:cNvPr>
+          <p:cNvSpPr>
+            <a:spLocks noGrp="1"/>
+          </p:cNvSpPr>
+          <p:nvPr/>
+        </p:nvSpPr>
+        <p:spPr>
+          <a:xfrm>
+            <a:off x="742950" y="476250"/>
+            <a:ext cx="10382250" cy="857250"/>
+          </a:xfrm>
+          <a:prstGeom prst="rect">
+            <a:avLst/>
+          </a:prstGeom>
+          <a:noFill/>
+          <a:ln w="0">
+            <a:noFill/>
+          </a:ln>
+        </p:spPr>
+        <p:txBody>
+          <a:bodyPr>
+            <a:normAutofit/>
+          </a:bodyPr>
+          <a:lstStyle/>
+          <a:p>
+            <a:pPr>
+              <a:defRPr sz="3225" b="0">
+                <a:solidFill>
+                  <a:srgbClr val="6B1E72"/>
+                </a:solidFill>
+                <a:latin typeface="Calibri Light"/>
+                <a:ea typeface="Calibri Light"/>
+                <a:cs typeface="Calibri Light"/>
+              </a:defRPr>
+            </a:pPr>
+            <a:r>
+              <a:rPr sz="3225" b="0">
+                <a:solidFill>
+                  <a:srgbClr val="6B1E72"/>
+                </a:solidFill>
+                <a:latin typeface="Calibri Light"/>
+                <a:ea typeface="Calibri Light"/>
+                <a:cs typeface="Calibri Light"/>
+              </a:rPr>
               <a:t>ROUND</a:t>
             </a:r>
           </a:p>
@@ -5796,7 +5923,7 @@
 </p:sld>
 </file>
 
-<file path=ppt/slides/slide6.xml><?xml version="1.0" encoding="utf-8"?>
+<file path=ppt/slides/slide7.xml><?xml version="1.0" encoding="utf-8"?>
 <p:sld xmlns:a="http://schemas.openxmlformats.org/drawingml/2006/main" xmlns:r="http://schemas.openxmlformats.org/officeDocument/2006/relationships" xmlns:p="http://schemas.openxmlformats.org/presentationml/2006/main">
   <p:cSld>
     <p:spTree>
